--- a/presentation-LPMDE.pptx
+++ b/presentation-LPMDE.pptx
@@ -521,7 +521,13 @@
           <a:p>
             <a:r>
               <a:rPr lang="en-US" dirty="0"/>
-              <a:t>Bonjour à tous. Je vais vous présenter le travail réalisé dans le cadre du module Superviser et assurer le développement logiciel. On va parcourir ensemble comment j'ai structuré ce projet de A à Z, du processus qualité jusqu'au déploiement automatique en production.</a:t>
+              <a:t>Bonjour à tous. Je m'appelle Bryan JOUBERT, je vais vous présenter le travail réalisé dans le cadre du module Superviser et assurer le développement des applications logicielles.
+Sur ce projet, j'ai endossé le rôle de Lead Developer pour La Petite Maison de l'Épouvante — une entreprise spécialisée dans l'univers horrifique.
+La présentation couvre trois grandes dimensions :
+- Comment j'ai structuré le processus qualité, du choix des indicateurs à la mise en place du pipeline CI/CD
+- Comment le POC fonctionnel a été conçu et déployé, de l'architecture aux résultats mesurés
+- Comment j'ai audité la sécurité et proposé un plan de remédiation concret
+On parcourt tout ça ensemble, n'hésitez pas à m'interrompre si quelque chose mérite d'être précisé.</a:t>
             </a:r>
             <a:endParaRPr lang="en-US" dirty="0"/>
           </a:p>
@@ -609,7 +615,11 @@
           <a:p>
             <a:r>
               <a:rPr lang="en-US" dirty="0"/>
-              <a:t>Avant d'écrire une seule ligne de code, on formalise les besoins sous forme de User Stories. Les 4 US couvrent les fonctionnalités clés : profil agrégé, authentification SSO, catalogue produits et notifications asynchrones. Toutes sont implémentées et couvertes par des tests.</a:t>
+              <a:t>Avant d'écrire une seule ligne de code, les besoins sont formalisés sous forme de User Stories. C'est un prérequis — ça définit le périmètre fonctionnel et les critères d'acceptance.
+US-01 — Profil utilisateur agrégé : le BFF expose un endpoint GET /api/profile/{id} qui agrège les données de plusieurs services internes. Si un service est indisponible, l'API répond avec un statut 206 — Partial Content — plutôt que d'échouer complètement. Le cache de 60 secondes réduit la charge sur les services internes.
+US-02 — Authentification Keycloak : mise en place du protocole OAuth2/OIDC avec le flux Authorization Code. Le paramètre 'state' prévient les attaques CSRF. Les informations utilisateur sont transmises via des JWT claims vérifiés côté serveur.
+US-03 — Catalogue produits : endpoint public GET /api/products accessible sans authentification. C'est délibéré — la navigation sur le catalogue doit fonctionner sans connexion pour favoriser la conversion.
+US-04 — Notifications asynchrones : Symfony Messenger gère les notifications de manière asynchrone. En développement, le transport sync:// est transparent — pas de RabbitMQ à configurer. En production, il bascule sur AMQP sans aucune modification du code applicatif. C'est le concept d'infrastructure transparente.</a:t>
             </a:r>
             <a:endParaRPr lang="en-US" dirty="0"/>
           </a:p>
@@ -697,7 +707,17 @@
           <a:p>
             <a:r>
               <a:rPr lang="en-US" dirty="0"/>
-              <a:t>L'architecture repose sur le pattern BFF, Backend For Frontend. Le client n'a qu'un seul point d'entrée qui agrège les réponses de plusieurs services. Le cache de 60 secondes évite de surcharger les services internes à chaque requête et améliore les performances.</a:t>
+              <a:t>L'architecture repose sur le pattern BFF — Backend For Frontend. Je vais vous expliquer chaque couche de gauche à droite.
+ENTRÉE :
+- CLIENT (Navigateur) : le client n'a qu'un seul point d'entrée — il ne connaît pas la structure interne.
+- Keycloak : gestionnaire d'identité OAuth2/OIDC — tous les accès protégés passent par lui. L'application Symfony ne gère jamais directement les mots de passe.
+GATEWAY / BFF : le cerveau de l'architecture. La requête GET /api/profile/{id} interroge UserService et SubscriptionService, consolide les réponses et sert une réponse unifiée. Le cache filesystem de 60 secondes évite les appels répétés. Si un service est KO, il répond 206 Partial Content.
+SERVICES : services internes exposés sur /internal/* — non accessibles depuis l'extérieur, uniquement appelés par le BFF.
+APPLICATION : Symfony 6.4 avec Controllers pour les routes, Messenger pour les messages asynchrones, Security pour le contrôle d'accès.
+INFRASTRUCTURE :
+- PostgreSQL via Doctrine ORM pour la persistance des données
+- RabbitMQ pour les messages AMQP en production (sync:// en dev)
+- Monolog pour les logs JSON structurés et indexables</a:t>
             </a:r>
             <a:endParaRPr lang="en-US" dirty="0"/>
           </a:p>
@@ -785,7 +805,12 @@
           <a:p>
             <a:r>
               <a:rPr lang="en-US" dirty="0"/>
-              <a:t>Chaque technologie a été testée dans un bac à sable avant intégration. La difficulté principale : Apache mod_php ne transmet pas automatiquement les variables Docker à PHP. J'ai dû ajouter une directive SetEnv dans la configuration Apache pour contourner ce problème.</a:t>
+              <a:t>Chaque technologie clé a été expérimentée dans un bac à sable isolé avant toute intégration. L'objectif : valider les choix techniques et détecter les problèmes tôt, pas en production.
+BFF ApiAggregator ✅ Validé : la logique d'agrégation multi-services avec cache filesystem fonctionne. Le comportement dégradé est maîtrisé — retour 206 si un service est KO.
+Keycloak OAuth2 ✅ Validé : le SSO fonctionne en local. Le flux Authorization Code avec paramètre state anti-CSRF est opérationnel. Les claims JWT sont correctement vérifiés côté application.
+Symfony Messenger ✅ Validé : le point clé ici c'est le transport interchangeable. sync:// en dev, AMQP en prod — zéro modification du code applicatif entre les deux. C'est ce que j'appelle l'infrastructure transparente.
+GitHub Actions ✅ Validé : le self-hosted runner sous Windows exécute les 11 jobs. Le déploiement automatique vers staging et production fonctionne à chaque push sur la branche main.
+Docker / Apache ⚠️ Problème résolu : c'est la difficulté technique principale rencontrée. mod_php sous Apache ne transmet pas automatiquement les variables d'environnement Docker à PHP. La solution : ajouter une directive SetEnv explicite dans la configuration Apache pour chaque variable nécessaire.</a:t>
             </a:r>
             <a:endParaRPr lang="en-US" dirty="0"/>
           </a:p>
@@ -873,7 +898,12 @@
           <a:p>
             <a:r>
               <a:rPr lang="en-US" dirty="0"/>
-              <a:t>Les chiffres valident la qualité de la réalisation. 59 tests, zéro échec, 186 assertions. La couverture de classes dépasse 78%. Les tests k6 confirment des temps de réponse inférieurs à 200ms au 95e percentile. Trivy ne remonte aucune CVE critique sur l'image Docker.</a:t>
+              <a:t>Ces 4 chiffres constituent la preuve concrète de la qualité de la livraison. Ce ne sont pas des estimations — ils sont mesurés automatiquement dans le pipeline CI/CD.
+59 tests PHPUnit : suite complète couvrant toutes les User Stories avec 186 assertions individuelles. Zéro échec. Chaque fonctionnalité est vérifiée automatiquement à chaque build.
+78,95% couverture de classes : la couverture de classes est l'indicateur le plus pertinent car elle garantit que chaque composant est exercé par un test. 59,11% de lignes est l'indicateur affiché dans la slide ISO 25010 — les deux sont mesurés.
+35/35 checks k6 : les 35 scénarios de charge définis dans le script k6 passent tous avec succès. Le 95e percentile des temps de réponse est inférieur à 200ms et le taux d'erreur est de 0%.
+0 CVE Critical : Trivy scanne l'image Docker finale construite par le pipeline et ne remonte aucune vulnérabilité critique. C'est le résultat d'un choix d'image de base maintenue et des scans intégrés dès le build.
+La barre verte en bas rappelle que tout ça est produit par le pipeline complet — de l'installation jusqu'au déploiement en production.</a:t>
             </a:r>
             <a:endParaRPr lang="en-US" dirty="0"/>
           </a:p>
@@ -961,7 +991,12 @@
           <a:p>
             <a:r>
               <a:rPr lang="en-US" dirty="0"/>
-              <a:t>La disponibilité est garantie par plusieurs mécanismes complémentaires : le restart automatique Docker en cas de crash, le health check automatisé avec 12 tentatives dans le pipeline, la persistance via volume nommé, et les tests k6 qui valident les performances sous charge. La prochaine étape vers la vraie montée en charge horizontale : Kubernetes.</a:t>
+              <a:t>La disponibilité en production repose sur 4 mécanismes complémentaires — chacun couvre un scénario de défaillance différent.
+🔄 Restart automatique — --restart=unless-stopped : si le conteneur crashe pour n'importe quelle raison (erreur applicative, manque mémoire), Docker le redémarre automatiquement. L'application revient en ligne sans intervention humaine. La seule exception : si on l'arrête volontairement (unless-stopped).
+🏥 Health check /healthy : le pipeline effectue 12 tentatives espacées de 5 secondes pour vérifier que le conteneur est bien opérationnel avant de déclarer le déploiement réussi. Le endpoint /healthy vérifie deux choses : la connexion à la base de données ET la disponibilité de l'application Symfony.
+🗄️ Persistance des données — volume lpmde_pg_data : les données PostgreSQL sont stockées dans un volume Docker nommé qui survit aux redéploiements. Mettre à jour l'application n'efface pas les données — c'est fondamental en production.
+⚡ Performance validée k6 : les tests de charge confirment que l'application tient la charge simulée. 35 checks réussis avec un p95 sous 200ms. C'est une validation quantifiée, pas juste une impression.
+Roadmap scalabilité : ces mécanismes garantissent la disponibilité sur un seul serveur. La vraie haute disponibilité horizontale — multi-instances, load balancer, SLA 99,9% — nécessite Kubernetes, qui est dans la roadmap v2.</a:t>
             </a:r>
             <a:endParaRPr lang="en-US" dirty="0"/>
           </a:p>
@@ -1049,7 +1084,11 @@
           <a:p>
             <a:r>
               <a:rPr lang="en-US" dirty="0"/>
-              <a:t>Passons maintenant à l'analyse de sécurité. Un bon logiciel c'est aussi un logiciel sécurisé. Dans cette v1, j'ai identifié plusieurs points d'amélioration et proposé un plan d'action concret.</a:t>
+              <a:t>Passons maintenant à l'analyse de sécurité. Un bon logiciel, c'est aussi un logiciel sécurisé. Le pipeline vérifie qu'il n'y a pas de CVE dans les dépendances, mais ça ne suffit pas — il faut aussi auditer les choix de conception et de configuration.
+Dans cette partie, on va voir 3 choses :
+- L'audit OWASP Top 10 de la v1 avec les 7 vulnérabilités identifiées
+- Le plan de remédiation concret en 3 sprints pour les traiter progressivement
+- Les 3 mesures préventives prévues pour la v2 pour passer d'une posture réactive à proactive</a:t>
             </a:r>
             <a:endParaRPr lang="en-US" dirty="0"/>
           </a:p>
@@ -1137,7 +1176,14 @@
           <a:p>
             <a:r>
               <a:rPr lang="en-US" dirty="0"/>
-              <a:t>J'ai audité la v1 selon le référentiel OWASP Top 10. Résultat : 7 vulnérabilités identifiées dont 2 critiques. Le contrôle d'accès ouvert en développement et l'APP_SECRET potentiellement exposé sont les risques les plus sérieux à traiter en priorité.</a:t>
+              <a:t>J'ai audité la v1 selon le référentiel OWASP Top 10. Résultat : 7 vulnérabilités identifiées, classées par criticité.
+V-01 — CRITIQUE : access_control en [] en développement. La configuration Symfony désactive le contrôle d'accès en environnement de dev. C'est tolérable localement, mais dangereux si cet environnement est exposé ou si la config est copiée en production par erreur.
+V-02 — HAUTE : connexions PostgreSQL sans SSL/TLS. Les communications entre l'application et la base de données ne sont pas chiffrées. Sur un réseau interne cela peut sembler acceptable, mais c'est une non-conformité aux bonnes pratiques de sécurité.
+V-03 — CRITIQUE : APP_SECRET potentiellement exposé. Si le fichier .env est accessible publiquement ou versionné dans git, la clé secrète Symfony est compromise — ce qui permet de forger des tokens et des sessions.
+V-04 — HAUTE : absence de rate limiting sur /api/*. Aucune protection contre les attaques par force brute, la surcharge intentionnelle ou l'abus de l'API.
+V-05 — MOYENNE : headers CSP et HSTS absents. Sans Content Security Policy ni HTTP Strict Transport Security, le navigateur est plus exposé aux attaques XSS et aux connexions non sécurisées.
+V-06 — MOYENNE : logs sans anonymisation RGPD. Les logs Monolog peuvent contenir des adresses IP, emails ou autres données personnelles — non conforme au RGPD.
+V-07 — BASSE : image Docker php:8.2-apache volumineuse. Une image large augmente inutilement la surface d'attaque potentielle. Migration vers alpine ou distroless recommandée.</a:t>
             </a:r>
             <a:endParaRPr lang="en-US" dirty="0"/>
           </a:p>
@@ -1225,7 +1271,22 @@
           <a:p>
             <a:r>
               <a:rPr lang="en-US" dirty="0"/>
-              <a:t>Le plan de remédiation est organisé en 3 sprints progressifs. En sprint 1, on traite l'essentiel : fermer le contrôle d'accès, sécuriser les secrets via GitHub Secrets, migrer vers PostgreSQL. Les sprints 2 et 3 adressent les vulnérabilités de niveau haute et basse.</a:t>
+              <a:t>Le plan est organisé en 3 sprints progressifs selon la criticité — du plus urgent au préventif.
+Sprint 1 — Immédiat (vulnérabilités critiques) :
+• Activer access_control en production : supprimer ou conditionner le tableau vide [] dans la configuration Symfony Security. Action technique simple, impact immédiat.
+• Secrets via GitHub Secrets / Vault : l'APP_SECRET et tous les credentials ne doivent jamais être en clair dans le fichier .env du dépôt. GitHub Secrets est la solution rapide, Vault est la solution robuste pour la v2.
+• Activer SSL/TLS sur PostgreSQL : chiffrer les connexions entre l'application et la base de données pour protéger les données en transit.
+Impact attendu : les 2 vulnérabilités critiques sont résolues.
+Sprint 2 — 1 mois (vulnérabilités hautes) :
+• Rate limiting Symfony : utiliser le composant RateLimiter natif de Symfony sur tous les endpoints /api/* pour bloquer les abus.
+• Headers CSP / HSTS : configurer Apache ou Symfony pour ajouter systématiquement les headers de sécurité obligatoires à chaque réponse.
+• Anonymisation des logs RGPD : masquer les données personnelles dans Monolog via un processeur dédié.
+Impact attendu : les vulnérabilités de niveau HAUTE sont résolues.
+Sprint 3 — 3 mois (réduction de surface d'attaque) :
+• Image Docker alpine ou distroless : réduire l'image à l'essentiel pour minimiser les CVE potentielles.
+• WAF en frontal : pare-feu applicatif pour filtrer les requêtes malveillantes avant qu'elles atteignent l'application.
+• Audit RGPD complet : revue exhaustive de tous les traitements de données personnelles.
+Impact attendu : la surface d'attaque globale est significativement réduite.</a:t>
             </a:r>
             <a:endParaRPr lang="en-US" dirty="0"/>
           </a:p>
@@ -1313,7 +1374,13 @@
           <a:p>
             <a:r>
               <a:rPr lang="en-US" dirty="0"/>
-              <a:t>Pour la v2, la sécurité devient proactive. HashiCorp Vault pour la gestion des secrets avec rotation automatique, OWASP ZAP intégré dans le pipeline pour les tests dynamiques, et Dependabot pour la surveillance continue des dépendances. On ne réagit plus, on anticipe.</a:t>
+              <a:t>Pour la v2, la posture de sécurité devient proactive — on anticipe les risques au lieu de les subir.
+01 — Secrets Management avec HashiCorp Vault :
+Le problème actuel : les secrets sont dans des variables d'environnement. Vault centralise et chiffre tous les secrets dans un coffre-fort dédié. La rotation automatique des clés garantit qu'un secret potentiellement compromis est invalidé sans intervention humaine. L'audit trail enregistre chaque accès pour une traçabilité complète — utile en cas d'incident.
+02 — DAST Pipeline avec OWASP ZAP :
+Le SAST déjà en place analyse le code statique — il ne voit pas les vulnérabilités qui n'apparaissent qu'à l'exécution. OWASP ZAP s'intègre dans le job de staging et teste l'application en fonctionnement réel : injections, failles d'authentification, expositions de données. Les résultats au format SARIF sont publiés automatiquement dans GitHub Security pour suivi et traçabilité.
+03 — SCA avec Dependabot :
+Les dépendances déclarées dans composer.json vieillissent et accumulent des CVE. Dependabot surveille en continu toutes les dépendances et ouvre automatiquement des Pull Requests de mise à jour dès qu'une faille est connue. L'équipe n'a plus à surveiller manuellement les bulletins de sécurité — c'est automatisé.</a:t>
             </a:r>
             <a:endParaRPr lang="en-US" dirty="0"/>
           </a:p>
@@ -1401,7 +1468,22 @@
           <a:p>
             <a:r>
               <a:rPr lang="en-US" dirty="0"/>
-              <a:t>Pour conclure : on a livré une application fonctionnelle avec un pipeline de 11 jobs, une architecture BFF éprouvée, et une analyse de sécurité complète. Les métriques sont au vert et les perspectives v2 sont clairement définies. C'est une base solide pour la suite.</a:t>
+              <a:t>Pour conclure, voici le bilan de cette mission en 3 dimensions.
+✅ Livré :
+- Pipeline CI/CD 11 jobs : automatisation complète du build, test, scan de sécurité et déploiement. Chaque push sur main déclenche l'ensemble de la chaîne.
+- BFF + Keycloak + Messenger : les 3 composants techniques structurants sont opérationnels et couverts par des tests.
+- Déploiement auto self-hosted : staging et production se déploient automatiquement sans intervention manuelle.
+- 4 livrables documentaires : les supports de cette présentation constituent la documentation de la mission.
+📊 Mesuré :
+- 59 tests avec 79% de couverture : une base de tests solide pour maintenir la qualité dans le temps.
+- k6 valide p95 &lt; 200ms avec 0% d'erreur : les performances sont prouvées sous charge, pas juste estimées.
+- 0 CVE critique sur l'image de production : sécurité mesurée, pas supposée.
+- SonarCloud actif pour la surveillance continue de la maintenabilité.
+🚀 Perspectives v2 :
+- RabbitMQ AMQP en production : le code est déjà prêt, il reste à activer le transport AMQP en production.
+- WAF + DAST pipeline : les mesures préventives détaillées dans la diapositive précédente.
+- Kubernetes : orchestration multi-instances pour la vraie scalabilité horizontale et le SLA 99,9%.
+- Espace communautaire : la fonctionnalité métier prioritaire identifiée pour enrichir la plateforme en v2.</a:t>
             </a:r>
             <a:endParaRPr lang="en-US" dirty="0"/>
           </a:p>
@@ -1592,7 +1674,10 @@
           <a:p>
             <a:r>
               <a:rPr lang="en-US" dirty="0"/>
-              <a:t>Voilà, c'est la fin de cette présentation. Je suis disponible pour toutes vos questions. N'hésitez pas à demander une démonstration live — les environnements staging et production sont actifs sur ma machine en ce moment.</a:t>
+              <a:t>Voilà, c'est la fin de cette présentation.
+Pour récapituler en une phrase : on est partis d'un SI fragmenté, et on livre une plateforme avec un pipeline de 11 jobs, une architecture BFF sécurisée, 59 tests automatisés et une analyse de sécurité complète avec plan d'action.
+Je suis disponible pour toutes vos questions — que ce soit sur les choix techniques, l'organisation du pipeline, la sécurité ou les perspectives v2.
+N'hésitez pas à demander une démonstration live — les environnements staging sur le port 8089 et production sur le port 8088 sont actifs sur ma machine en ce moment.</a:t>
             </a:r>
             <a:endParaRPr lang="en-US" dirty="0"/>
           </a:p>
@@ -1680,7 +1765,10 @@
           <a:p>
             <a:r>
               <a:rPr lang="en-US" dirty="0"/>
-              <a:t>La Petite Maison de l'Epouvante est une société spécialisée dans le genre horrifique avec 10 ans d'existence. Le problème : leur SI est fragmenté et ils n'ont pas de vente en ligne. Ma mission en tant que Lead Dev : poser les bases d'une vraie plateforme numérique moderne.</a:t>
+              <a:t>Cette diapositive pose le contexte de la mission.
+🏚 L'entreprise : La Petite Maison de l'Épouvante a 10 ans d'existence dans le secteur horrifique. Leur système d'information est fragmenté — un CMS basique, pas de vente en ligne, pas de plateforme digitale cohérente. Le potentiel est là, mais les outils ne suivent pas.
+🎯 La mission : développer la v1 de leur future plateforme numérique. L'objectif n'est pas de tout livrer d'un coup, c'est de poser une base technique solide, testée et sécurisée, sur laquelle la v2 pourra s'appuyer.
+👨‍💻 Mon rôle de Lead Developer : je suis responsable de trois choses — définir le processus qualité pour que le code soit fiable, livrer un POC fonctionnel qui valide les choix techniques, et réaliser une analyse de sécurité complète avec un plan d'action. Ce n'est pas uniquement développer — c'est structurer la démarche de bout en bout.</a:t>
             </a:r>
             <a:endParaRPr lang="en-US" dirty="0"/>
           </a:p>
@@ -1768,7 +1856,12 @@
           <a:p>
             <a:r>
               <a:rPr lang="en-US" dirty="0"/>
-              <a:t>Commençons par le processus qualité. Comment garantit-on qu'on livre un produit fiable ? C'est la question centrale de cette première partie.</a:t>
+              <a:t>Commençons par le processus qualité. La question fondamentale de cette partie : comment garantit-on qu'on livre un produit fiable, et pas juste "ça marche sur ma machine" ?
+On va voir 4 choses concrètes :
+- Les indicateurs ISO 25010 qui permettent de mesurer objectivement la qualité
+- L'approche DevSecOps qui intègre la sécurité à chaque étape
+- Le pipeline de 11 jobs qui automatise tout ça
+- La cartographie de l'équipe nécessaire pour faire tourner ce type de projet</a:t>
             </a:r>
             <a:endParaRPr lang="en-US" dirty="0"/>
           </a:p>
@@ -1856,7 +1949,11 @@
           <a:p>
             <a:r>
               <a:rPr lang="en-US" dirty="0"/>
-              <a:t>J'ai sélectionné 4 indicateurs directement issus de la norme ISO 25010. Ce ne sont pas des métriques arbitraires — chacune est mesurée automatiquement dans le pipeline CI/CD. Si la couverture passe sous le seuil, le build échoue directement.</a:t>
+              <a:t>Les 4 indicateurs présentés ici sont directement issus de la norme ISO 25010, qui définit la qualité logicielle selon plusieurs dimensions. Ce ne sont pas des métriques décoratives — elles sont mesurées automatiquement à chaque build.
+Couverture de tests (Fiabilité) : 59,11% de lignes couvertes, mesurée par PHPUnit avec l'extension PCOV. C'est un seuil bloquant dans le pipeline — si la couverture baisse, le build échoue et le déploiement est stoppé.
+Vulnérabilités 0-day (Sécurité) : 0 CVE CRITICAL détectées par Trivy, qui scanne à la fois les dépendances et l'image Docker finale. Ce résultat est validé à chaque build, pas juste une fois.
+Temps de réponse p95 (Performance) : toutes les requêtes répondent en moins de 200ms au 95e percentile. Mesuré sous charge simulée par k6 — c'est un indicateur réaliste, pas un test à vide.
+Code smells / duplications (Maintenabilité) : SonarCloud analyse en continu le code poussé sur GitHub et remonte les duplications, les mauvaises pratiques et la dette technique. L'objectif est de garder un code maintenable dans le temps.</a:t>
             </a:r>
             <a:endParaRPr lang="en-US" dirty="0"/>
           </a:p>
@@ -1944,7 +2041,12 @@
           <a:p>
             <a:r>
               <a:rPr lang="en-US" dirty="0"/>
-              <a:t>Le principe DevSecOps, c'est intégrer la sécurité à chaque étape plutôt qu'à la fin. Plan, Code, Build, Test, Deploy — à chaque phase, des outils automatiques vérifient que rien ne dérape. On appelle ça le Shift Left Security.</a:t>
+              <a:t>Le principe du DevSecOps, c'est ce qu'on appelle le 'Shift Left Security' : intégrer les contrôles de sécurité le plus tôt possible dans le cycle de développement, plutôt que de tout auditer à la fin quand il est trop tard.
+Plan : dès cette phase, on formalise les besoins sous forme de Backlog et User Stories. Définir les critères d'acceptance dès le départ, c'est aussi une forme de prévention des erreurs.
+Code : à chaque push, un SAST — analyse statique du code source — et un npm audit vérifient qu'aucune vulnérabilité n'est introduite par le développeur.
+Build : Docker construit l'image et Trivy scanne immédiatement le système de fichiers pour détecter les CVE dans les dépendances installées. Si une faille est trouvée, le build s'arrête.
+Test : PHPUnit pour les tests unitaires et k6 pour les tests end-to-end de performance. La qualité fonctionnelle est vérifiée avant tout déploiement.
+Deploy : le déploiement est assuré par un runner self-hosted sur ma machine locale, qui gère les environnements staging et production de manière automatisée.</a:t>
             </a:r>
             <a:endParaRPr lang="en-US" dirty="0"/>
           </a:p>
@@ -2032,7 +2134,22 @@
           <a:p>
             <a:r>
               <a:rPr lang="en-US" dirty="0"/>
-              <a:t>Voici le pipeline complet avec ses 11 jobs. Les blocs rouges sont les scans de sécurité, les verts les tests fonctionnels. Important à noter : les 3 jobs en bas — build, staging, production — tournent sur mon propre ordinateur grâce au self-hosted runner.</a:t>
+              <a:t>Voici le pipeline complet de 11 jobs organisé en 6 étapes de gauche à droite. Chaque étape doit être complétée avant que la suivante puisse démarrer.
+① INSTALL : installation des dépendances — prérequis de tous les autres jobs.
+② SECURITY · TESTS — 4 jobs en parallèle :
+- sast / npm-audit : analyse statique du code et audit des dépendances JavaScript
+- trivy fs-audit : scan du système de fichiers pour les CVE dans les librairies installées
+- unit-test : exécution complète de la suite PHPUnit
+- e2e-test : tests de bout en bout
+③ QUALITY — 2 jobs en parallèle :
+- sonar : analyse SonarCloud de la qualité du code et de la dette technique
+- k6 smoke-test : test de performance léger pour valider les temps de réponse
+④ BUILD : construction de l'image Docker finale. S'exécute exclusivement sur le self-hosted runner.
+⑤ SCAN : Trivy scanne l'image Docker construite. Si une CVE critique est trouvée, le déploiement est bloqué.
+⑥ DEPLOY — 2 environnements en parallèle :
+- staging sur le port 8089 : environnement de recette
+- production sur le port 8088 : environnement de production
+Les étapes ④ ⑤ ⑥ s'exécutent uniquement sur le self-hosted runner car elles nécessitent l'accès à l'infrastructure locale.</a:t>
             </a:r>
             <a:endParaRPr lang="en-US" dirty="0"/>
           </a:p>
@@ -2120,7 +2237,13 @@
           <a:p>
             <a:r>
               <a:rPr lang="en-US" dirty="0"/>
-              <a:t>Pour mener ce type de projet, il faut une équipe pluridisciplinaire couvrant 4 profils. La formation CKA pour le DevOps est particulièrement pertinente car Kubernetes est la prochaine étape d'infrastructure. C'est une certification reconnue, 100% en ligne, délivrée par la Linux Foundation.</a:t>
+              <a:t>Pour mener ce type de projet, 4 profils complémentaires sont nécessaires.
+Lead Developer (×1) : responsable de l'architecture globale, de la mise en place du CI/CD, de la politique de sécurité et de l'approche DevSecOps. C'est le rôle que j'ai endossé sur ce POC. Il est le garant de la cohérence technique.
+Dev Backend (×2) : développeurs PHP/Symfony en charge des APIs, des services internes et des tests unitaires. 2 profils car c'est le cœur de l'application — le plus grand volume de code.
+Dev Frontend (×1) : développeur JavaScript avec Stimulus et Asset Mapper, en charge de l'interface utilisateur et de l'intégration côté navigateur.
+DevOps (×1) : ingénieur infrastructure, responsable de Docker, de la chaîne CI/CD GitHub Actions, et de la future migration vers Kubernetes.
+Formation proposée — CKA (Certified Kubernetes Administrator) :
+C'est la certification de référence pour l'administration Kubernetes, délivrée par la Linux Foundation. 3 mois de formation entièrement en ligne. Pourquoi cette formation ? Parce que Kubernetes est l'étape suivante pour passer à une vraie scalabilité horizontale — c'est directement dans la roadmap v2 du projet.</a:t>
             </a:r>
             <a:endParaRPr lang="en-US" dirty="0"/>
           </a:p>
@@ -2208,7 +2331,12 @@
           <a:p>
             <a:r>
               <a:rPr lang="en-US" dirty="0"/>
-              <a:t>Passons maintenant à la partie réalisation. Comment a-t-on concrètement traduit les besoins métier en code fonctionnel déployé ?</a:t>
+              <a:t>Passons maintenant à la partie réalisation. La question centrale de cette partie : comment a-t-on traduit les besoins métier en code fonctionnel, testé et déployé en production ?
+On va voir 4 choses :
+- Comment les besoins ont été formalisés avant d'écrire une seule ligne de code — le Backlog et les User Stories
+- L'architecture technique retenue et pourquoi — le pattern BFF
+- Les expérimentations en bac à sable avant intégration
+- Les résultats concrets et les mécanismes qui garantissent la disponibilité</a:t>
             </a:r>
             <a:endParaRPr lang="en-US" dirty="0"/>
           </a:p>
@@ -2630,9 +2758,9 @@
                 <a:solidFill>
                   <a:srgbClr val="F0F0F0"/>
                 </a:solidFill>
-                <a:latin typeface="Georgia" pitchFamily="34" charset="0"/>
-                <a:ea typeface="Georgia" pitchFamily="34" charset="-122"/>
-                <a:cs typeface="Georgia" pitchFamily="34" charset="-120"/>
+                <a:latin typeface="Palatino Linotype" pitchFamily="34" charset="0"/>
+                <a:ea typeface="Palatino Linotype" pitchFamily="34" charset="-122"/>
+                <a:cs typeface="Palatino Linotype" pitchFamily="34" charset="-120"/>
               </a:rPr>
               <a:t>La Petite Maison</a:t>
             </a:r>
@@ -2647,9 +2775,9 @@
                 <a:solidFill>
                   <a:srgbClr val="F0F0F0"/>
                 </a:solidFill>
-                <a:latin typeface="Georgia" pitchFamily="34" charset="0"/>
-                <a:ea typeface="Georgia" pitchFamily="34" charset="-122"/>
-                <a:cs typeface="Georgia" pitchFamily="34" charset="-120"/>
+                <a:latin typeface="Palatino Linotype" pitchFamily="34" charset="0"/>
+                <a:ea typeface="Palatino Linotype" pitchFamily="34" charset="-122"/>
+                <a:cs typeface="Palatino Linotype" pitchFamily="34" charset="-120"/>
               </a:rPr>
               <a:t>de l'Épouvante</a:t>
             </a:r>
@@ -3032,9 +3160,9 @@
                 <a:solidFill>
                   <a:srgbClr val="F0F0F0"/>
                 </a:solidFill>
-                <a:latin typeface="Georgia" pitchFamily="34" charset="0"/>
-                <a:ea typeface="Georgia" pitchFamily="34" charset="-122"/>
-                <a:cs typeface="Georgia" pitchFamily="34" charset="-120"/>
+                <a:latin typeface="Palatino Linotype" pitchFamily="34" charset="0"/>
+                <a:ea typeface="Palatino Linotype" pitchFamily="34" charset="-122"/>
+                <a:cs typeface="Palatino Linotype" pitchFamily="34" charset="-120"/>
               </a:rPr>
               <a:t>4 User Stories — Backlog v1</a:t>
             </a:r>
@@ -4080,9 +4208,9 @@
                 <a:solidFill>
                   <a:srgbClr val="F0F0F0"/>
                 </a:solidFill>
-                <a:latin typeface="Georgia" pitchFamily="34" charset="0"/>
-                <a:ea typeface="Georgia" pitchFamily="34" charset="-122"/>
-                <a:cs typeface="Georgia" pitchFamily="34" charset="-120"/>
+                <a:latin typeface="Palatino Linotype" pitchFamily="34" charset="0"/>
+                <a:ea typeface="Palatino Linotype" pitchFamily="34" charset="-122"/>
+                <a:cs typeface="Palatino Linotype" pitchFamily="34" charset="-120"/>
               </a:rPr>
               <a:t>API Gateway / BFF Pattern</a:t>
             </a:r>
@@ -4092,18 +4220,313 @@
       </p:sp>
       <p:sp>
         <p:nvSpPr>
-          <p:cNvPr id="9" name="Shape 7"/>
-          <p:cNvSpPr/>
-          <p:nvPr/>
-        </p:nvSpPr>
-        <p:spPr>
-          <a:xfrm>
-            <a:off x="5120640" y="1188720"/>
-            <a:ext cx="2011680" cy="548640"/>
+          <p:cNvPr id="9" name="Text 7"/>
+          <p:cNvSpPr/>
+          <p:nvPr/>
+        </p:nvSpPr>
+        <p:spPr>
+          <a:xfrm>
+            <a:off x="320040" y="1188720"/>
+            <a:ext cx="1828800" cy="274320"/>
+          </a:xfrm>
+          <a:prstGeom prst="rect">
+            <a:avLst/>
+          </a:prstGeom>
+          <a:noFill/>
+          <a:ln/>
+        </p:spPr>
+        <p:txBody>
+          <a:bodyPr wrap="square" rtlCol="0" anchor="ctr"/>
+          <a:lstStyle/>
+          <a:p>
+            <a:pPr algn="ctr" indent="0" marL="0">
+              <a:buNone/>
+            </a:pPr>
+            <a:r>
+              <a:rPr lang="en-US" sz="800" b="1" spc="100" kern="0" dirty="0">
+                <a:solidFill>
+                  <a:srgbClr val="E74C3C"/>
+                </a:solidFill>
+                <a:latin typeface="Calibri" pitchFamily="34" charset="0"/>
+                <a:ea typeface="Calibri" pitchFamily="34" charset="-122"/>
+                <a:cs typeface="Calibri" pitchFamily="34" charset="-120"/>
+              </a:rPr>
+              <a:t>ENTRÉE</a:t>
+            </a:r>
+            <a:endParaRPr lang="en-US" sz="800" dirty="0"/>
+          </a:p>
+        </p:txBody>
+      </p:sp>
+      <p:sp>
+        <p:nvSpPr>
+          <p:cNvPr id="10" name="Shape 8"/>
+          <p:cNvSpPr/>
+          <p:nvPr/>
+        </p:nvSpPr>
+        <p:spPr>
+          <a:xfrm>
+            <a:off x="731520" y="1463040"/>
+            <a:ext cx="1005840" cy="36576"/>
+          </a:xfrm>
+          <a:prstGeom prst="rect">
+            <a:avLst/>
+          </a:prstGeom>
+          <a:solidFill>
+            <a:srgbClr val="C0392B"/>
+          </a:solidFill>
+          <a:ln/>
+        </p:spPr>
+      </p:sp>
+      <p:sp>
+        <p:nvSpPr>
+          <p:cNvPr id="11" name="Text 9"/>
+          <p:cNvSpPr/>
+          <p:nvPr/>
+        </p:nvSpPr>
+        <p:spPr>
+          <a:xfrm>
+            <a:off x="2478024" y="1188720"/>
+            <a:ext cx="1828800" cy="274320"/>
+          </a:xfrm>
+          <a:prstGeom prst="rect">
+            <a:avLst/>
+          </a:prstGeom>
+          <a:noFill/>
+          <a:ln/>
+        </p:spPr>
+        <p:txBody>
+          <a:bodyPr wrap="square" rtlCol="0" anchor="ctr"/>
+          <a:lstStyle/>
+          <a:p>
+            <a:pPr algn="ctr" indent="0" marL="0">
+              <a:buNone/>
+            </a:pPr>
+            <a:r>
+              <a:rPr lang="en-US" sz="800" b="1" spc="100" kern="0" dirty="0">
+                <a:solidFill>
+                  <a:srgbClr val="E74C3C"/>
+                </a:solidFill>
+                <a:latin typeface="Calibri" pitchFamily="34" charset="0"/>
+                <a:ea typeface="Calibri" pitchFamily="34" charset="-122"/>
+                <a:cs typeface="Calibri" pitchFamily="34" charset="-120"/>
+              </a:rPr>
+              <a:t>GATEWAY / BFF</a:t>
+            </a:r>
+            <a:endParaRPr lang="en-US" sz="800" dirty="0"/>
+          </a:p>
+        </p:txBody>
+      </p:sp>
+      <p:sp>
+        <p:nvSpPr>
+          <p:cNvPr id="12" name="Shape 10"/>
+          <p:cNvSpPr/>
+          <p:nvPr/>
+        </p:nvSpPr>
+        <p:spPr>
+          <a:xfrm>
+            <a:off x="2889504" y="1463040"/>
+            <a:ext cx="1005840" cy="36576"/>
+          </a:xfrm>
+          <a:prstGeom prst="rect">
+            <a:avLst/>
+          </a:prstGeom>
+          <a:solidFill>
+            <a:srgbClr val="C0392B"/>
+          </a:solidFill>
+          <a:ln/>
+        </p:spPr>
+      </p:sp>
+      <p:sp>
+        <p:nvSpPr>
+          <p:cNvPr id="13" name="Text 11"/>
+          <p:cNvSpPr/>
+          <p:nvPr/>
+        </p:nvSpPr>
+        <p:spPr>
+          <a:xfrm>
+            <a:off x="4636008" y="1188720"/>
+            <a:ext cx="1828800" cy="274320"/>
+          </a:xfrm>
+          <a:prstGeom prst="rect">
+            <a:avLst/>
+          </a:prstGeom>
+          <a:noFill/>
+          <a:ln/>
+        </p:spPr>
+        <p:txBody>
+          <a:bodyPr wrap="square" rtlCol="0" anchor="ctr"/>
+          <a:lstStyle/>
+          <a:p>
+            <a:pPr algn="ctr" indent="0" marL="0">
+              <a:buNone/>
+            </a:pPr>
+            <a:r>
+              <a:rPr lang="en-US" sz="800" b="1" spc="100" kern="0" dirty="0">
+                <a:solidFill>
+                  <a:srgbClr val="E74C3C"/>
+                </a:solidFill>
+                <a:latin typeface="Calibri" pitchFamily="34" charset="0"/>
+                <a:ea typeface="Calibri" pitchFamily="34" charset="-122"/>
+                <a:cs typeface="Calibri" pitchFamily="34" charset="-120"/>
+              </a:rPr>
+              <a:t>SERVICES</a:t>
+            </a:r>
+            <a:endParaRPr lang="en-US" sz="800" dirty="0"/>
+          </a:p>
+        </p:txBody>
+      </p:sp>
+      <p:sp>
+        <p:nvSpPr>
+          <p:cNvPr id="14" name="Shape 12"/>
+          <p:cNvSpPr/>
+          <p:nvPr/>
+        </p:nvSpPr>
+        <p:spPr>
+          <a:xfrm>
+            <a:off x="5047488" y="1463040"/>
+            <a:ext cx="1005840" cy="36576"/>
+          </a:xfrm>
+          <a:prstGeom prst="rect">
+            <a:avLst/>
+          </a:prstGeom>
+          <a:solidFill>
+            <a:srgbClr val="C0392B"/>
+          </a:solidFill>
+          <a:ln/>
+        </p:spPr>
+      </p:sp>
+      <p:sp>
+        <p:nvSpPr>
+          <p:cNvPr id="15" name="Text 13"/>
+          <p:cNvSpPr/>
+          <p:nvPr/>
+        </p:nvSpPr>
+        <p:spPr>
+          <a:xfrm>
+            <a:off x="6793992" y="1188720"/>
+            <a:ext cx="1828800" cy="274320"/>
+          </a:xfrm>
+          <a:prstGeom prst="rect">
+            <a:avLst/>
+          </a:prstGeom>
+          <a:noFill/>
+          <a:ln/>
+        </p:spPr>
+        <p:txBody>
+          <a:bodyPr wrap="square" rtlCol="0" anchor="ctr"/>
+          <a:lstStyle/>
+          <a:p>
+            <a:pPr algn="ctr" indent="0" marL="0">
+              <a:buNone/>
+            </a:pPr>
+            <a:r>
+              <a:rPr lang="en-US" sz="800" b="1" spc="100" kern="0" dirty="0">
+                <a:solidFill>
+                  <a:srgbClr val="E74C3C"/>
+                </a:solidFill>
+                <a:latin typeface="Calibri" pitchFamily="34" charset="0"/>
+                <a:ea typeface="Calibri" pitchFamily="34" charset="-122"/>
+                <a:cs typeface="Calibri" pitchFamily="34" charset="-120"/>
+              </a:rPr>
+              <a:t>APPLICATION</a:t>
+            </a:r>
+            <a:endParaRPr lang="en-US" sz="800" dirty="0"/>
+          </a:p>
+        </p:txBody>
+      </p:sp>
+      <p:sp>
+        <p:nvSpPr>
+          <p:cNvPr id="16" name="Shape 14"/>
+          <p:cNvSpPr/>
+          <p:nvPr/>
+        </p:nvSpPr>
+        <p:spPr>
+          <a:xfrm>
+            <a:off x="7205472" y="1463040"/>
+            <a:ext cx="1005840" cy="36576"/>
+          </a:xfrm>
+          <a:prstGeom prst="rect">
+            <a:avLst/>
+          </a:prstGeom>
+          <a:solidFill>
+            <a:srgbClr val="C0392B"/>
+          </a:solidFill>
+          <a:ln/>
+        </p:spPr>
+      </p:sp>
+      <p:sp>
+        <p:nvSpPr>
+          <p:cNvPr id="17" name="Text 15"/>
+          <p:cNvSpPr/>
+          <p:nvPr/>
+        </p:nvSpPr>
+        <p:spPr>
+          <a:xfrm>
+            <a:off x="8951976" y="1188720"/>
+            <a:ext cx="2962656" cy="274320"/>
+          </a:xfrm>
+          <a:prstGeom prst="rect">
+            <a:avLst/>
+          </a:prstGeom>
+          <a:noFill/>
+          <a:ln/>
+        </p:spPr>
+        <p:txBody>
+          <a:bodyPr wrap="square" rtlCol="0" anchor="ctr"/>
+          <a:lstStyle/>
+          <a:p>
+            <a:pPr algn="ctr" indent="0" marL="0">
+              <a:buNone/>
+            </a:pPr>
+            <a:r>
+              <a:rPr lang="en-US" sz="800" b="1" spc="100" kern="0" dirty="0">
+                <a:solidFill>
+                  <a:srgbClr val="E74C3C"/>
+                </a:solidFill>
+                <a:latin typeface="Calibri" pitchFamily="34" charset="0"/>
+                <a:ea typeface="Calibri" pitchFamily="34" charset="-122"/>
+                <a:cs typeface="Calibri" pitchFamily="34" charset="-120"/>
+              </a:rPr>
+              <a:t>INFRASTRUCTURE</a:t>
+            </a:r>
+            <a:endParaRPr lang="en-US" sz="800" dirty="0"/>
+          </a:p>
+        </p:txBody>
+      </p:sp>
+      <p:sp>
+        <p:nvSpPr>
+          <p:cNvPr id="18" name="Shape 16"/>
+          <p:cNvSpPr/>
+          <p:nvPr/>
+        </p:nvSpPr>
+        <p:spPr>
+          <a:xfrm>
+            <a:off x="9930384" y="1463040"/>
+            <a:ext cx="1005840" cy="36576"/>
+          </a:xfrm>
+          <a:prstGeom prst="rect">
+            <a:avLst/>
+          </a:prstGeom>
+          <a:solidFill>
+            <a:srgbClr val="C0392B"/>
+          </a:solidFill>
+          <a:ln/>
+        </p:spPr>
+      </p:sp>
+      <p:sp>
+        <p:nvSpPr>
+          <p:cNvPr id="19" name="Shape 17"/>
+          <p:cNvSpPr/>
+          <p:nvPr/>
+        </p:nvSpPr>
+        <p:spPr>
+          <a:xfrm>
+            <a:off x="320040" y="2011680"/>
+            <a:ext cx="1828800" cy="731520"/>
           </a:xfrm>
           <a:prstGeom prst="rect">
             <a:avLst>
-              <a:gd name="adj" fmla="val 13333"/>
+              <a:gd name="adj" fmla="val 10000"/>
             </a:avLst>
           </a:prstGeom>
           <a:solidFill>
@@ -4119,14 +4542,14 @@
       </p:sp>
       <p:sp>
         <p:nvSpPr>
-          <p:cNvPr id="10" name="Text 8"/>
-          <p:cNvSpPr/>
-          <p:nvPr/>
-        </p:nvSpPr>
-        <p:spPr>
-          <a:xfrm>
-            <a:off x="5120640" y="1261872"/>
-            <a:ext cx="2011680" cy="411480"/>
+          <p:cNvPr id="20" name="Text 18"/>
+          <p:cNvSpPr/>
+          <p:nvPr/>
+        </p:nvSpPr>
+        <p:spPr>
+          <a:xfrm>
+            <a:off x="320040" y="2011680"/>
+            <a:ext cx="1828800" cy="731520"/>
           </a:xfrm>
           <a:prstGeom prst="rect">
             <a:avLst/>
@@ -4150,26 +4573,126 @@
                 <a:ea typeface="Calibri" pitchFamily="34" charset="-122"/>
                 <a:cs typeface="Calibri" pitchFamily="34" charset="-120"/>
               </a:rPr>
-              <a:t>CLIENT (Navigateur)</a:t>
+              <a:t>CLIENT</a:t>
             </a:r>
             <a:endParaRPr lang="en-US" sz="900" dirty="0"/>
           </a:p>
-        </p:txBody>
-      </p:sp>
-      <p:sp>
-        <p:nvSpPr>
-          <p:cNvPr id="11" name="Shape 9"/>
-          <p:cNvSpPr/>
-          <p:nvPr/>
-        </p:nvSpPr>
-        <p:spPr>
-          <a:xfrm>
-            <a:off x="4114800" y="2148840"/>
-            <a:ext cx="4023360" cy="685800"/>
+          <a:p>
+            <a:pPr algn="ctr" indent="0" marL="0">
+              <a:buNone/>
+            </a:pPr>
+            <a:r>
+              <a:rPr lang="en-US" sz="900" b="1" dirty="0">
+                <a:solidFill>
+                  <a:srgbClr val="F0F0F0"/>
+                </a:solidFill>
+                <a:latin typeface="Calibri" pitchFamily="34" charset="0"/>
+                <a:ea typeface="Calibri" pitchFamily="34" charset="-122"/>
+                <a:cs typeface="Calibri" pitchFamily="34" charset="-120"/>
+              </a:rPr>
+              <a:t>(Navigateur)</a:t>
+            </a:r>
+            <a:endParaRPr lang="en-US" sz="900" dirty="0"/>
+          </a:p>
+        </p:txBody>
+      </p:sp>
+      <p:sp>
+        <p:nvSpPr>
+          <p:cNvPr id="21" name="Shape 19"/>
+          <p:cNvSpPr/>
+          <p:nvPr/>
+        </p:nvSpPr>
+        <p:spPr>
+          <a:xfrm>
+            <a:off x="320040" y="2971800"/>
+            <a:ext cx="1828800" cy="731520"/>
           </a:xfrm>
           <a:prstGeom prst="rect">
             <a:avLst>
-              <a:gd name="adj" fmla="val 10667"/>
+              <a:gd name="adj" fmla="val 10000"/>
+            </a:avLst>
+          </a:prstGeom>
+          <a:solidFill>
+            <a:srgbClr val="2E1A1A"/>
+          </a:solidFill>
+          <a:ln w="19050">
+            <a:solidFill>
+              <a:srgbClr val="C0392B"/>
+            </a:solidFill>
+            <a:prstDash val="solid"/>
+          </a:ln>
+        </p:spPr>
+      </p:sp>
+      <p:sp>
+        <p:nvSpPr>
+          <p:cNvPr id="22" name="Text 20"/>
+          <p:cNvSpPr/>
+          <p:nvPr/>
+        </p:nvSpPr>
+        <p:spPr>
+          <a:xfrm>
+            <a:off x="320040" y="2971800"/>
+            <a:ext cx="1828800" cy="731520"/>
+          </a:xfrm>
+          <a:prstGeom prst="rect">
+            <a:avLst/>
+          </a:prstGeom>
+          <a:noFill/>
+          <a:ln/>
+        </p:spPr>
+        <p:txBody>
+          <a:bodyPr wrap="square" rtlCol="0" anchor="ctr"/>
+          <a:lstStyle/>
+          <a:p>
+            <a:pPr algn="ctr" indent="0" marL="0">
+              <a:buNone/>
+            </a:pPr>
+            <a:r>
+              <a:rPr lang="en-US" sz="900" dirty="0">
+                <a:solidFill>
+                  <a:srgbClr val="E74C3C"/>
+                </a:solidFill>
+                <a:latin typeface="Calibri" pitchFamily="34" charset="0"/>
+                <a:ea typeface="Calibri" pitchFamily="34" charset="-122"/>
+                <a:cs typeface="Calibri" pitchFamily="34" charset="-120"/>
+              </a:rPr>
+              <a:t>Keycloak</a:t>
+            </a:r>
+            <a:endParaRPr lang="en-US" sz="900" dirty="0"/>
+          </a:p>
+          <a:p>
+            <a:pPr algn="ctr" indent="0" marL="0">
+              <a:buNone/>
+            </a:pPr>
+            <a:r>
+              <a:rPr lang="en-US" sz="900" dirty="0">
+                <a:solidFill>
+                  <a:srgbClr val="E74C3C"/>
+                </a:solidFill>
+                <a:latin typeface="Calibri" pitchFamily="34" charset="0"/>
+                <a:ea typeface="Calibri" pitchFamily="34" charset="-122"/>
+                <a:cs typeface="Calibri" pitchFamily="34" charset="-120"/>
+              </a:rPr>
+              <a:t>OAuth2/OIDC · SSO</a:t>
+            </a:r>
+            <a:endParaRPr lang="en-US" sz="900" dirty="0"/>
+          </a:p>
+        </p:txBody>
+      </p:sp>
+      <p:sp>
+        <p:nvSpPr>
+          <p:cNvPr id="23" name="Shape 21"/>
+          <p:cNvSpPr/>
+          <p:nvPr/>
+        </p:nvSpPr>
+        <p:spPr>
+          <a:xfrm>
+            <a:off x="2478024" y="1920240"/>
+            <a:ext cx="1828800" cy="1920240"/>
+          </a:xfrm>
+          <a:prstGeom prst="rect">
+            <a:avLst>
+              <a:gd name="adj" fmla="val 4000"/>
             </a:avLst>
           </a:prstGeom>
           <a:solidFill>
@@ -4185,14 +4708,14 @@
       </p:sp>
       <p:sp>
         <p:nvSpPr>
-          <p:cNvPr id="12" name="Text 10"/>
-          <p:cNvSpPr/>
-          <p:nvPr/>
-        </p:nvSpPr>
-        <p:spPr>
-          <a:xfrm>
-            <a:off x="4114800" y="2176272"/>
-            <a:ext cx="4023360" cy="594360"/>
+          <p:cNvPr id="24" name="Text 22"/>
+          <p:cNvSpPr/>
+          <p:nvPr/>
+        </p:nvSpPr>
+        <p:spPr>
+          <a:xfrm>
+            <a:off x="2478024" y="1920240"/>
+            <a:ext cx="1828800" cy="1920240"/>
           </a:xfrm>
           <a:prstGeom prst="rect">
             <a:avLst/>
@@ -4233,109 +4756,60 @@
                 <a:ea typeface="Calibri" pitchFamily="34" charset="-122"/>
                 <a:cs typeface="Calibri" pitchFamily="34" charset="-120"/>
               </a:rPr>
-              <a:t>GET /api/profile/{id} · Cache 60s</a:t>
+              <a:t>GET /api/profile/{id}</a:t>
             </a:r>
             <a:endParaRPr lang="en-US" sz="900" dirty="0"/>
           </a:p>
-        </p:txBody>
-      </p:sp>
-      <p:sp>
-        <p:nvSpPr>
-          <p:cNvPr id="13" name="Shape 11"/>
-          <p:cNvSpPr/>
-          <p:nvPr/>
-        </p:nvSpPr>
-        <p:spPr>
-          <a:xfrm>
-            <a:off x="274320" y="2148840"/>
-            <a:ext cx="2743200" cy="685800"/>
+          <a:p>
+            <a:pPr algn="ctr" indent="0" marL="0">
+              <a:buNone/>
+            </a:pPr>
+            <a:r>
+              <a:rPr lang="en-US" sz="900" dirty="0">
+                <a:solidFill>
+                  <a:srgbClr val="F39C12"/>
+                </a:solidFill>
+                <a:latin typeface="Calibri" pitchFamily="34" charset="0"/>
+                <a:ea typeface="Calibri" pitchFamily="34" charset="-122"/>
+                <a:cs typeface="Calibri" pitchFamily="34" charset="-120"/>
+              </a:rPr>
+              <a:t>Cache filesystem 60s</a:t>
+            </a:r>
+            <a:endParaRPr lang="en-US" sz="900" dirty="0"/>
+          </a:p>
+          <a:p>
+            <a:pPr algn="ctr" indent="0" marL="0">
+              <a:buNone/>
+            </a:pPr>
+            <a:r>
+              <a:rPr lang="en-US" sz="900" dirty="0">
+                <a:solidFill>
+                  <a:srgbClr val="F39C12"/>
+                </a:solidFill>
+                <a:latin typeface="Calibri" pitchFamily="34" charset="0"/>
+                <a:ea typeface="Calibri" pitchFamily="34" charset="-122"/>
+                <a:cs typeface="Calibri" pitchFamily="34" charset="-120"/>
+              </a:rPr>
+              <a:t>206 si service KO</a:t>
+            </a:r>
+            <a:endParaRPr lang="en-US" sz="900" dirty="0"/>
+          </a:p>
+        </p:txBody>
+      </p:sp>
+      <p:sp>
+        <p:nvSpPr>
+          <p:cNvPr id="25" name="Shape 23"/>
+          <p:cNvSpPr/>
+          <p:nvPr/>
+        </p:nvSpPr>
+        <p:spPr>
+          <a:xfrm>
+            <a:off x="4636008" y="2011680"/>
+            <a:ext cx="1828800" cy="777240"/>
           </a:xfrm>
           <a:prstGeom prst="rect">
             <a:avLst>
-              <a:gd name="adj" fmla="val 10667"/>
-            </a:avLst>
-          </a:prstGeom>
-          <a:solidFill>
-            <a:srgbClr val="2E1A1A"/>
-          </a:solidFill>
-          <a:ln w="19050">
-            <a:solidFill>
-              <a:srgbClr val="C0392B"/>
-            </a:solidFill>
-            <a:prstDash val="solid"/>
-          </a:ln>
-        </p:spPr>
-      </p:sp>
-      <p:sp>
-        <p:nvSpPr>
-          <p:cNvPr id="14" name="Text 12"/>
-          <p:cNvSpPr/>
-          <p:nvPr/>
-        </p:nvSpPr>
-        <p:spPr>
-          <a:xfrm>
-            <a:off x="274320" y="2176272"/>
-            <a:ext cx="2743200" cy="594360"/>
-          </a:xfrm>
-          <a:prstGeom prst="rect">
-            <a:avLst/>
-          </a:prstGeom>
-          <a:noFill/>
-          <a:ln/>
-        </p:spPr>
-        <p:txBody>
-          <a:bodyPr wrap="square" rtlCol="0" anchor="ctr"/>
-          <a:lstStyle/>
-          <a:p>
-            <a:pPr algn="ctr" indent="0" marL="0">
-              <a:buNone/>
-            </a:pPr>
-            <a:r>
-              <a:rPr lang="en-US" sz="900" dirty="0">
-                <a:solidFill>
-                  <a:srgbClr val="E74C3C"/>
-                </a:solidFill>
-                <a:latin typeface="Calibri" pitchFamily="34" charset="0"/>
-                <a:ea typeface="Calibri" pitchFamily="34" charset="-122"/>
-                <a:cs typeface="Calibri" pitchFamily="34" charset="-120"/>
-              </a:rPr>
-              <a:t>Keycloak</a:t>
-            </a:r>
-            <a:endParaRPr lang="en-US" sz="900" dirty="0"/>
-          </a:p>
-          <a:p>
-            <a:pPr algn="ctr" indent="0" marL="0">
-              <a:buNone/>
-            </a:pPr>
-            <a:r>
-              <a:rPr lang="en-US" sz="900" dirty="0">
-                <a:solidFill>
-                  <a:srgbClr val="E74C3C"/>
-                </a:solidFill>
-                <a:latin typeface="Calibri" pitchFamily="34" charset="0"/>
-                <a:ea typeface="Calibri" pitchFamily="34" charset="-122"/>
-                <a:cs typeface="Calibri" pitchFamily="34" charset="-120"/>
-              </a:rPr>
-              <a:t>OAuth2/OIDC · SSO</a:t>
-            </a:r>
-            <a:endParaRPr lang="en-US" sz="900" dirty="0"/>
-          </a:p>
-        </p:txBody>
-      </p:sp>
-      <p:sp>
-        <p:nvSpPr>
-          <p:cNvPr id="15" name="Shape 13"/>
-          <p:cNvSpPr/>
-          <p:nvPr/>
-        </p:nvSpPr>
-        <p:spPr>
-          <a:xfrm>
-            <a:off x="4114800" y="3291840"/>
-            <a:ext cx="2743200" cy="685800"/>
-          </a:xfrm>
-          <a:prstGeom prst="rect">
-            <a:avLst>
-              <a:gd name="adj" fmla="val 10667"/>
+              <a:gd name="adj" fmla="val 9412"/>
             </a:avLst>
           </a:prstGeom>
           <a:solidFill>
@@ -4351,14 +4825,14 @@
       </p:sp>
       <p:sp>
         <p:nvSpPr>
-          <p:cNvPr id="16" name="Text 14"/>
-          <p:cNvSpPr/>
-          <p:nvPr/>
-        </p:nvSpPr>
-        <p:spPr>
-          <a:xfrm>
-            <a:off x="4114800" y="3337560"/>
-            <a:ext cx="2743200" cy="594360"/>
+          <p:cNvPr id="26" name="Text 24"/>
+          <p:cNvSpPr/>
+          <p:nvPr/>
+        </p:nvSpPr>
+        <p:spPr>
+          <a:xfrm>
+            <a:off x="4636008" y="2011680"/>
+            <a:ext cx="1828800" cy="777240"/>
           </a:xfrm>
           <a:prstGeom prst="rect">
             <a:avLst/>
@@ -4374,7 +4848,7 @@
               <a:buNone/>
             </a:pPr>
             <a:r>
-              <a:rPr lang="en-US" sz="800" dirty="0">
+              <a:rPr lang="en-US" sz="900" dirty="0">
                 <a:solidFill>
                   <a:srgbClr val="F0F0F0"/>
                 </a:solidFill>
@@ -4384,14 +4858,14 @@
               </a:rPr>
               <a:t>UserService</a:t>
             </a:r>
-            <a:endParaRPr lang="en-US" sz="800" dirty="0"/>
+            <a:endParaRPr lang="en-US" sz="900" dirty="0"/>
           </a:p>
           <a:p>
             <a:pPr algn="ctr" indent="0" marL="0">
               <a:buNone/>
             </a:pPr>
             <a:r>
-              <a:rPr lang="en-US" sz="800" dirty="0">
+              <a:rPr lang="en-US" sz="900" dirty="0">
                 <a:solidFill>
                   <a:srgbClr val="F0F0F0"/>
                 </a:solidFill>
@@ -4401,24 +4875,24 @@
               </a:rPr>
               <a:t>/internal/users</a:t>
             </a:r>
-            <a:endParaRPr lang="en-US" sz="800" dirty="0"/>
-          </a:p>
-        </p:txBody>
-      </p:sp>
-      <p:sp>
-        <p:nvSpPr>
-          <p:cNvPr id="17" name="Shape 15"/>
-          <p:cNvSpPr/>
-          <p:nvPr/>
-        </p:nvSpPr>
-        <p:spPr>
-          <a:xfrm>
-            <a:off x="7315200" y="3291840"/>
-            <a:ext cx="2743200" cy="685800"/>
+            <a:endParaRPr lang="en-US" sz="900" dirty="0"/>
+          </a:p>
+        </p:txBody>
+      </p:sp>
+      <p:sp>
+        <p:nvSpPr>
+          <p:cNvPr id="27" name="Shape 25"/>
+          <p:cNvSpPr/>
+          <p:nvPr/>
+        </p:nvSpPr>
+        <p:spPr>
+          <a:xfrm>
+            <a:off x="4636008" y="3017520"/>
+            <a:ext cx="1828800" cy="777240"/>
           </a:xfrm>
           <a:prstGeom prst="rect">
             <a:avLst>
-              <a:gd name="adj" fmla="val 10667"/>
+              <a:gd name="adj" fmla="val 9412"/>
             </a:avLst>
           </a:prstGeom>
           <a:solidFill>
@@ -4434,14 +4908,14 @@
       </p:sp>
       <p:sp>
         <p:nvSpPr>
-          <p:cNvPr id="18" name="Text 16"/>
-          <p:cNvSpPr/>
-          <p:nvPr/>
-        </p:nvSpPr>
-        <p:spPr>
-          <a:xfrm>
-            <a:off x="7315200" y="3337560"/>
-            <a:ext cx="2743200" cy="594360"/>
+          <p:cNvPr id="28" name="Text 26"/>
+          <p:cNvSpPr/>
+          <p:nvPr/>
+        </p:nvSpPr>
+        <p:spPr>
+          <a:xfrm>
+            <a:off x="4636008" y="3017520"/>
+            <a:ext cx="1828800" cy="777240"/>
           </a:xfrm>
           <a:prstGeom prst="rect">
             <a:avLst/>
@@ -4457,7 +4931,7 @@
               <a:buNone/>
             </a:pPr>
             <a:r>
-              <a:rPr lang="en-US" sz="800" dirty="0">
+              <a:rPr lang="en-US" sz="900" dirty="0">
                 <a:solidFill>
                   <a:srgbClr val="F0F0F0"/>
                 </a:solidFill>
@@ -4467,14 +4941,14 @@
               </a:rPr>
               <a:t>SubscriptionService</a:t>
             </a:r>
-            <a:endParaRPr lang="en-US" sz="800" dirty="0"/>
+            <a:endParaRPr lang="en-US" sz="900" dirty="0"/>
           </a:p>
           <a:p>
             <a:pPr algn="ctr" indent="0" marL="0">
               <a:buNone/>
             </a:pPr>
             <a:r>
-              <a:rPr lang="en-US" sz="800" dirty="0">
+              <a:rPr lang="en-US" sz="900" dirty="0">
                 <a:solidFill>
                   <a:srgbClr val="F0F0F0"/>
                 </a:solidFill>
@@ -4484,24 +4958,24 @@
               </a:rPr>
               <a:t>/internal/subscriptions</a:t>
             </a:r>
-            <a:endParaRPr lang="en-US" sz="800" dirty="0"/>
-          </a:p>
-        </p:txBody>
-      </p:sp>
-      <p:sp>
-        <p:nvSpPr>
-          <p:cNvPr id="19" name="Shape 17"/>
-          <p:cNvSpPr/>
-          <p:nvPr/>
-        </p:nvSpPr>
-        <p:spPr>
-          <a:xfrm>
-            <a:off x="1645920" y="4297680"/>
-            <a:ext cx="8961120" cy="777240"/>
+            <a:endParaRPr lang="en-US" sz="900" dirty="0"/>
+          </a:p>
+        </p:txBody>
+      </p:sp>
+      <p:sp>
+        <p:nvSpPr>
+          <p:cNvPr id="29" name="Shape 27"/>
+          <p:cNvSpPr/>
+          <p:nvPr/>
+        </p:nvSpPr>
+        <p:spPr>
+          <a:xfrm>
+            <a:off x="6793992" y="1920240"/>
+            <a:ext cx="1828800" cy="1920240"/>
           </a:xfrm>
           <a:prstGeom prst="rect">
             <a:avLst>
-              <a:gd name="adj" fmla="val 9412"/>
+              <a:gd name="adj" fmla="val 4000"/>
             </a:avLst>
           </a:prstGeom>
           <a:solidFill>
@@ -4517,14 +4991,14 @@
       </p:sp>
       <p:sp>
         <p:nvSpPr>
-          <p:cNvPr id="20" name="Text 18"/>
-          <p:cNvSpPr/>
-          <p:nvPr/>
-        </p:nvSpPr>
-        <p:spPr>
-          <a:xfrm>
-            <a:off x="1645920" y="4315968"/>
-            <a:ext cx="8961120" cy="685800"/>
+          <p:cNvPr id="30" name="Text 28"/>
+          <p:cNvSpPr/>
+          <p:nvPr/>
+        </p:nvSpPr>
+        <p:spPr>
+          <a:xfrm>
+            <a:off x="6793992" y="1920240"/>
+            <a:ext cx="1828800" cy="1920240"/>
           </a:xfrm>
           <a:prstGeom prst="rect">
             <a:avLst/>
@@ -4540,7 +5014,7 @@
               <a:buNone/>
             </a:pPr>
             <a:r>
-              <a:rPr lang="en-US" sz="1000" dirty="0">
+              <a:rPr lang="en-US" sz="900" dirty="0">
                 <a:solidFill>
                   <a:srgbClr val="F0F0F0"/>
                 </a:solidFill>
@@ -4548,16 +5022,22 @@
                 <a:ea typeface="Calibri" pitchFamily="34" charset="-122"/>
                 <a:cs typeface="Calibri" pitchFamily="34" charset="-120"/>
               </a:rPr>
-              <a:t>Application Symfony 6.4 / PHP 8.2</a:t>
-            </a:r>
-            <a:endParaRPr lang="en-US" sz="1000" dirty="0"/>
+              <a:t>Symfony 6.4 / PHP 8.2</a:t>
+            </a:r>
+            <a:endParaRPr lang="en-US" sz="900" dirty="0"/>
           </a:p>
           <a:p>
             <a:pPr algn="ctr" indent="0" marL="0">
               <a:buNone/>
             </a:pPr>
-            <a:r>
-              <a:rPr lang="en-US" sz="1000" dirty="0">
+            <a:endParaRPr lang="en-US" sz="900" dirty="0"/>
+          </a:p>
+          <a:p>
+            <a:pPr algn="ctr" indent="0" marL="0">
+              <a:buNone/>
+            </a:pPr>
+            <a:r>
+              <a:rPr lang="en-US" sz="900" dirty="0">
                 <a:solidFill>
                   <a:srgbClr val="F0F0F0"/>
                 </a:solidFill>
@@ -4565,22 +5045,56 @@
                 <a:ea typeface="Calibri" pitchFamily="34" charset="-122"/>
                 <a:cs typeface="Calibri" pitchFamily="34" charset="-120"/>
               </a:rPr>
-              <a:t>Controllers · Messenger · Security</a:t>
-            </a:r>
-            <a:endParaRPr lang="en-US" sz="1000" dirty="0"/>
-          </a:p>
-        </p:txBody>
-      </p:sp>
-      <p:sp>
-        <p:nvSpPr>
-          <p:cNvPr id="21" name="Shape 19"/>
-          <p:cNvSpPr/>
-          <p:nvPr/>
-        </p:nvSpPr>
-        <p:spPr>
-          <a:xfrm>
-            <a:off x="274320" y="5349240"/>
-            <a:ext cx="3200400" cy="685800"/>
+              <a:t>Controllers</a:t>
+            </a:r>
+            <a:endParaRPr lang="en-US" sz="900" dirty="0"/>
+          </a:p>
+          <a:p>
+            <a:pPr algn="ctr" indent="0" marL="0">
+              <a:buNone/>
+            </a:pPr>
+            <a:r>
+              <a:rPr lang="en-US" sz="900" dirty="0">
+                <a:solidFill>
+                  <a:srgbClr val="F0F0F0"/>
+                </a:solidFill>
+                <a:latin typeface="Calibri" pitchFamily="34" charset="0"/>
+                <a:ea typeface="Calibri" pitchFamily="34" charset="-122"/>
+                <a:cs typeface="Calibri" pitchFamily="34" charset="-120"/>
+              </a:rPr>
+              <a:t>Messenger</a:t>
+            </a:r>
+            <a:endParaRPr lang="en-US" sz="900" dirty="0"/>
+          </a:p>
+          <a:p>
+            <a:pPr algn="ctr" indent="0" marL="0">
+              <a:buNone/>
+            </a:pPr>
+            <a:r>
+              <a:rPr lang="en-US" sz="900" dirty="0">
+                <a:solidFill>
+                  <a:srgbClr val="F0F0F0"/>
+                </a:solidFill>
+                <a:latin typeface="Calibri" pitchFamily="34" charset="0"/>
+                <a:ea typeface="Calibri" pitchFamily="34" charset="-122"/>
+                <a:cs typeface="Calibri" pitchFamily="34" charset="-120"/>
+              </a:rPr>
+              <a:t>Security</a:t>
+            </a:r>
+            <a:endParaRPr lang="en-US" sz="900" dirty="0"/>
+          </a:p>
+        </p:txBody>
+      </p:sp>
+      <p:sp>
+        <p:nvSpPr>
+          <p:cNvPr id="31" name="Shape 29"/>
+          <p:cNvSpPr/>
+          <p:nvPr/>
+        </p:nvSpPr>
+        <p:spPr>
+          <a:xfrm>
+            <a:off x="8951976" y="1920240"/>
+            <a:ext cx="2962656" cy="685800"/>
           </a:xfrm>
           <a:prstGeom prst="rect">
             <a:avLst>
@@ -4600,14 +5114,14 @@
       </p:sp>
       <p:sp>
         <p:nvSpPr>
-          <p:cNvPr id="22" name="Text 20"/>
-          <p:cNvSpPr/>
-          <p:nvPr/>
-        </p:nvSpPr>
-        <p:spPr>
-          <a:xfrm>
-            <a:off x="274320" y="5394960"/>
-            <a:ext cx="3200400" cy="594360"/>
+          <p:cNvPr id="32" name="Text 30"/>
+          <p:cNvSpPr/>
+          <p:nvPr/>
+        </p:nvSpPr>
+        <p:spPr>
+          <a:xfrm>
+            <a:off x="8951976" y="1920240"/>
+            <a:ext cx="2962656" cy="685800"/>
           </a:xfrm>
           <a:prstGeom prst="rect">
             <a:avLst/>
@@ -4631,39 +5145,22 @@
                 <a:ea typeface="Calibri" pitchFamily="34" charset="-122"/>
                 <a:cs typeface="Calibri" pitchFamily="34" charset="-120"/>
               </a:rPr>
-              <a:t>PostgreSQL</a:t>
+              <a:t>PostgreSQL · Doctrine</a:t>
             </a:r>
             <a:endParaRPr lang="en-US" sz="900" dirty="0"/>
           </a:p>
-          <a:p>
-            <a:pPr algn="ctr" indent="0" marL="0">
-              <a:buNone/>
-            </a:pPr>
-            <a:r>
-              <a:rPr lang="en-US" sz="900" dirty="0">
-                <a:solidFill>
-                  <a:srgbClr val="B2B2B2"/>
-                </a:solidFill>
-                <a:latin typeface="Calibri" pitchFamily="34" charset="0"/>
-                <a:ea typeface="Calibri" pitchFamily="34" charset="-122"/>
-                <a:cs typeface="Calibri" pitchFamily="34" charset="-120"/>
-              </a:rPr>
-              <a:t>Doctrine</a:t>
-            </a:r>
-            <a:endParaRPr lang="en-US" sz="900" dirty="0"/>
-          </a:p>
-        </p:txBody>
-      </p:sp>
-      <p:sp>
-        <p:nvSpPr>
-          <p:cNvPr id="23" name="Shape 21"/>
-          <p:cNvSpPr/>
-          <p:nvPr/>
-        </p:nvSpPr>
-        <p:spPr>
-          <a:xfrm>
-            <a:off x="4572000" y="5349240"/>
-            <a:ext cx="3200400" cy="685800"/>
+        </p:txBody>
+      </p:sp>
+      <p:sp>
+        <p:nvSpPr>
+          <p:cNvPr id="33" name="Shape 31"/>
+          <p:cNvSpPr/>
+          <p:nvPr/>
+        </p:nvSpPr>
+        <p:spPr>
+          <a:xfrm>
+            <a:off x="8951976" y="2834640"/>
+            <a:ext cx="2962656" cy="685800"/>
           </a:xfrm>
           <a:prstGeom prst="rect">
             <a:avLst>
@@ -4683,14 +5180,14 @@
       </p:sp>
       <p:sp>
         <p:nvSpPr>
-          <p:cNvPr id="24" name="Text 22"/>
-          <p:cNvSpPr/>
-          <p:nvPr/>
-        </p:nvSpPr>
-        <p:spPr>
-          <a:xfrm>
-            <a:off x="4572000" y="5394960"/>
-            <a:ext cx="3200400" cy="594360"/>
+          <p:cNvPr id="34" name="Text 32"/>
+          <p:cNvSpPr/>
+          <p:nvPr/>
+        </p:nvSpPr>
+        <p:spPr>
+          <a:xfrm>
+            <a:off x="8951976" y="2834640"/>
+            <a:ext cx="2962656" cy="685800"/>
           </a:xfrm>
           <a:prstGeom prst="rect">
             <a:avLst/>
@@ -4714,39 +5211,22 @@
                 <a:ea typeface="Calibri" pitchFamily="34" charset="-122"/>
                 <a:cs typeface="Calibri" pitchFamily="34" charset="-120"/>
               </a:rPr>
-              <a:t>RabbitMQ</a:t>
+              <a:t>RabbitMQ · AMQP/sync://</a:t>
             </a:r>
             <a:endParaRPr lang="en-US" sz="900" dirty="0"/>
           </a:p>
-          <a:p>
-            <a:pPr algn="ctr" indent="0" marL="0">
-              <a:buNone/>
-            </a:pPr>
-            <a:r>
-              <a:rPr lang="en-US" sz="900" dirty="0">
-                <a:solidFill>
-                  <a:srgbClr val="B2B2B2"/>
-                </a:solidFill>
-                <a:latin typeface="Calibri" pitchFamily="34" charset="0"/>
-                <a:ea typeface="Calibri" pitchFamily="34" charset="-122"/>
-                <a:cs typeface="Calibri" pitchFamily="34" charset="-120"/>
-              </a:rPr>
-              <a:t>AMQP/sync://</a:t>
-            </a:r>
-            <a:endParaRPr lang="en-US" sz="900" dirty="0"/>
-          </a:p>
-        </p:txBody>
-      </p:sp>
-      <p:sp>
-        <p:nvSpPr>
-          <p:cNvPr id="25" name="Shape 23"/>
-          <p:cNvSpPr/>
-          <p:nvPr/>
-        </p:nvSpPr>
-        <p:spPr>
-          <a:xfrm>
-            <a:off x="8869680" y="5349240"/>
-            <a:ext cx="3200400" cy="685800"/>
+        </p:txBody>
+      </p:sp>
+      <p:sp>
+        <p:nvSpPr>
+          <p:cNvPr id="35" name="Shape 33"/>
+          <p:cNvSpPr/>
+          <p:nvPr/>
+        </p:nvSpPr>
+        <p:spPr>
+          <a:xfrm>
+            <a:off x="8951976" y="3749040"/>
+            <a:ext cx="2962656" cy="685800"/>
           </a:xfrm>
           <a:prstGeom prst="rect">
             <a:avLst>
@@ -4766,14 +5246,14 @@
       </p:sp>
       <p:sp>
         <p:nvSpPr>
-          <p:cNvPr id="26" name="Text 24"/>
-          <p:cNvSpPr/>
-          <p:nvPr/>
-        </p:nvSpPr>
-        <p:spPr>
-          <a:xfrm>
-            <a:off x="8869680" y="5394960"/>
-            <a:ext cx="3200400" cy="594360"/>
+          <p:cNvPr id="36" name="Text 34"/>
+          <p:cNvSpPr/>
+          <p:nvPr/>
+        </p:nvSpPr>
+        <p:spPr>
+          <a:xfrm>
+            <a:off x="8951976" y="3749040"/>
+            <a:ext cx="2962656" cy="685800"/>
           </a:xfrm>
           <a:prstGeom prst="rect">
             <a:avLst/>
@@ -4797,39 +5277,61 @@
                 <a:ea typeface="Calibri" pitchFamily="34" charset="-122"/>
                 <a:cs typeface="Calibri" pitchFamily="34" charset="-120"/>
               </a:rPr>
-              <a:t>Monolog</a:t>
+              <a:t>Monolog · Logs JSON</a:t>
             </a:r>
             <a:endParaRPr lang="en-US" sz="900" dirty="0"/>
           </a:p>
+        </p:txBody>
+      </p:sp>
+      <p:sp>
+        <p:nvSpPr>
+          <p:cNvPr id="37" name="Text 35"/>
+          <p:cNvSpPr/>
+          <p:nvPr/>
+        </p:nvSpPr>
+        <p:spPr>
+          <a:xfrm>
+            <a:off x="2157984" y="2624328"/>
+            <a:ext cx="310896" cy="329184"/>
+          </a:xfrm>
+          <a:prstGeom prst="rect">
+            <a:avLst/>
+          </a:prstGeom>
+          <a:noFill/>
+          <a:ln/>
+        </p:spPr>
+        <p:txBody>
+          <a:bodyPr wrap="square" rtlCol="0" anchor="ctr"/>
+          <a:lstStyle/>
           <a:p>
             <a:pPr algn="ctr" indent="0" marL="0">
               <a:buNone/>
             </a:pPr>
             <a:r>
-              <a:rPr lang="en-US" sz="900" dirty="0">
-                <a:solidFill>
-                  <a:srgbClr val="B2B2B2"/>
-                </a:solidFill>
-                <a:latin typeface="Calibri" pitchFamily="34" charset="0"/>
-                <a:ea typeface="Calibri" pitchFamily="34" charset="-122"/>
-                <a:cs typeface="Calibri" pitchFamily="34" charset="-120"/>
-              </a:rPr>
-              <a:t>Logs JSON</a:t>
-            </a:r>
-            <a:endParaRPr lang="en-US" sz="900" dirty="0"/>
-          </a:p>
-        </p:txBody>
-      </p:sp>
-      <p:sp>
-        <p:nvSpPr>
-          <p:cNvPr id="27" name="Text 25"/>
-          <p:cNvSpPr/>
-          <p:nvPr/>
-        </p:nvSpPr>
-        <p:spPr>
-          <a:xfrm>
-            <a:off x="6035040" y="1737360"/>
-            <a:ext cx="274320" cy="411480"/>
+              <a:rPr lang="en-US" sz="1400" b="1" dirty="0">
+                <a:solidFill>
+                  <a:srgbClr val="C0392B"/>
+                </a:solidFill>
+                <a:latin typeface="Calibri" pitchFamily="34" charset="0"/>
+                <a:ea typeface="Calibri" pitchFamily="34" charset="-122"/>
+                <a:cs typeface="Calibri" pitchFamily="34" charset="-120"/>
+              </a:rPr>
+              <a:t>→</a:t>
+            </a:r>
+            <a:endParaRPr lang="en-US" sz="1400" dirty="0"/>
+          </a:p>
+        </p:txBody>
+      </p:sp>
+      <p:sp>
+        <p:nvSpPr>
+          <p:cNvPr id="38" name="Text 36"/>
+          <p:cNvSpPr/>
+          <p:nvPr/>
+        </p:nvSpPr>
+        <p:spPr>
+          <a:xfrm>
+            <a:off x="4315968" y="2624328"/>
+            <a:ext cx="310896" cy="329184"/>
           </a:xfrm>
           <a:prstGeom prst="rect">
             <a:avLst/>
@@ -4845,27 +5347,30 @@
               <a:buNone/>
             </a:pPr>
             <a:r>
-              <a:rPr lang="en-US" sz="1200" dirty="0">
-                <a:solidFill>
-                  <a:srgbClr val="B2B2B2"/>
-                </a:solidFill>
-              </a:rPr>
-              <a:t>↓</a:t>
-            </a:r>
-            <a:endParaRPr lang="en-US" sz="1200" dirty="0"/>
-          </a:p>
-        </p:txBody>
-      </p:sp>
-      <p:sp>
-        <p:nvSpPr>
-          <p:cNvPr id="28" name="Text 26"/>
-          <p:cNvSpPr/>
-          <p:nvPr/>
-        </p:nvSpPr>
-        <p:spPr>
-          <a:xfrm>
-            <a:off x="6035040" y="2834640"/>
-            <a:ext cx="274320" cy="457200"/>
+              <a:rPr lang="en-US" sz="1400" b="1" dirty="0">
+                <a:solidFill>
+                  <a:srgbClr val="C0392B"/>
+                </a:solidFill>
+                <a:latin typeface="Calibri" pitchFamily="34" charset="0"/>
+                <a:ea typeface="Calibri" pitchFamily="34" charset="-122"/>
+                <a:cs typeface="Calibri" pitchFamily="34" charset="-120"/>
+              </a:rPr>
+              <a:t>→</a:t>
+            </a:r>
+            <a:endParaRPr lang="en-US" sz="1400" dirty="0"/>
+          </a:p>
+        </p:txBody>
+      </p:sp>
+      <p:sp>
+        <p:nvSpPr>
+          <p:cNvPr id="39" name="Text 37"/>
+          <p:cNvSpPr/>
+          <p:nvPr/>
+        </p:nvSpPr>
+        <p:spPr>
+          <a:xfrm>
+            <a:off x="6473952" y="2624328"/>
+            <a:ext cx="310896" cy="329184"/>
           </a:xfrm>
           <a:prstGeom prst="rect">
             <a:avLst/>
@@ -4881,27 +5386,30 @@
               <a:buNone/>
             </a:pPr>
             <a:r>
-              <a:rPr lang="en-US" sz="1200" dirty="0">
-                <a:solidFill>
-                  <a:srgbClr val="B2B2B2"/>
-                </a:solidFill>
-              </a:rPr>
-              <a:t>↓</a:t>
-            </a:r>
-            <a:endParaRPr lang="en-US" sz="1200" dirty="0"/>
-          </a:p>
-        </p:txBody>
-      </p:sp>
-      <p:sp>
-        <p:nvSpPr>
-          <p:cNvPr id="29" name="Text 27"/>
-          <p:cNvSpPr/>
-          <p:nvPr/>
-        </p:nvSpPr>
-        <p:spPr>
-          <a:xfrm>
-            <a:off x="6035040" y="3840480"/>
-            <a:ext cx="274320" cy="457200"/>
+              <a:rPr lang="en-US" sz="1400" b="1" dirty="0">
+                <a:solidFill>
+                  <a:srgbClr val="C0392B"/>
+                </a:solidFill>
+                <a:latin typeface="Calibri" pitchFamily="34" charset="0"/>
+                <a:ea typeface="Calibri" pitchFamily="34" charset="-122"/>
+                <a:cs typeface="Calibri" pitchFamily="34" charset="-120"/>
+              </a:rPr>
+              <a:t>→</a:t>
+            </a:r>
+            <a:endParaRPr lang="en-US" sz="1400" dirty="0"/>
+          </a:p>
+        </p:txBody>
+      </p:sp>
+      <p:sp>
+        <p:nvSpPr>
+          <p:cNvPr id="40" name="Text 38"/>
+          <p:cNvSpPr/>
+          <p:nvPr/>
+        </p:nvSpPr>
+        <p:spPr>
+          <a:xfrm>
+            <a:off x="8631936" y="2624328"/>
+            <a:ext cx="310896" cy="329184"/>
           </a:xfrm>
           <a:prstGeom prst="rect">
             <a:avLst/>
@@ -4917,50 +5425,17 @@
               <a:buNone/>
             </a:pPr>
             <a:r>
-              <a:rPr lang="en-US" sz="1200" dirty="0">
-                <a:solidFill>
-                  <a:srgbClr val="B2B2B2"/>
-                </a:solidFill>
-              </a:rPr>
-              <a:t>↓</a:t>
-            </a:r>
-            <a:endParaRPr lang="en-US" sz="1200" dirty="0"/>
-          </a:p>
-        </p:txBody>
-      </p:sp>
-      <p:sp>
-        <p:nvSpPr>
-          <p:cNvPr id="30" name="Text 28"/>
-          <p:cNvSpPr/>
-          <p:nvPr/>
-        </p:nvSpPr>
-        <p:spPr>
-          <a:xfrm>
-            <a:off x="6035040" y="5029200"/>
-            <a:ext cx="274320" cy="320040"/>
-          </a:xfrm>
-          <a:prstGeom prst="rect">
-            <a:avLst/>
-          </a:prstGeom>
-          <a:noFill/>
-          <a:ln/>
-        </p:spPr>
-        <p:txBody>
-          <a:bodyPr wrap="square" rtlCol="0" anchor="ctr"/>
-          <a:lstStyle/>
-          <a:p>
-            <a:pPr algn="ctr" indent="0" marL="0">
-              <a:buNone/>
-            </a:pPr>
-            <a:r>
-              <a:rPr lang="en-US" sz="1200" dirty="0">
-                <a:solidFill>
-                  <a:srgbClr val="B2B2B2"/>
-                </a:solidFill>
-              </a:rPr>
-              <a:t>↓</a:t>
-            </a:r>
-            <a:endParaRPr lang="en-US" sz="1200" dirty="0"/>
+              <a:rPr lang="en-US" sz="1400" b="1" dirty="0">
+                <a:solidFill>
+                  <a:srgbClr val="C0392B"/>
+                </a:solidFill>
+                <a:latin typeface="Calibri" pitchFamily="34" charset="0"/>
+                <a:ea typeface="Calibri" pitchFamily="34" charset="-122"/>
+                <a:cs typeface="Calibri" pitchFamily="34" charset="-120"/>
+              </a:rPr>
+              <a:t>→</a:t>
+            </a:r>
+            <a:endParaRPr lang="en-US" sz="1400" dirty="0"/>
           </a:p>
         </p:txBody>
       </p:sp>
@@ -5202,9 +5677,9 @@
                 <a:solidFill>
                   <a:srgbClr val="F0F0F0"/>
                 </a:solidFill>
-                <a:latin typeface="Georgia" pitchFamily="34" charset="0"/>
-                <a:ea typeface="Georgia" pitchFamily="34" charset="-122"/>
-                <a:cs typeface="Georgia" pitchFamily="34" charset="-120"/>
+                <a:latin typeface="Palatino Linotype" pitchFamily="34" charset="0"/>
+                <a:ea typeface="Palatino Linotype" pitchFamily="34" charset="-122"/>
+                <a:cs typeface="Palatino Linotype" pitchFamily="34" charset="-120"/>
               </a:rPr>
               <a:t>5 technologies validées en POC</a:t>
             </a:r>
@@ -5219,9 +5694,9 @@
                 <a:solidFill>
                   <a:srgbClr val="F0F0F0"/>
                 </a:solidFill>
-                <a:latin typeface="Georgia" pitchFamily="34" charset="0"/>
-                <a:ea typeface="Georgia" pitchFamily="34" charset="-122"/>
-                <a:cs typeface="Georgia" pitchFamily="34" charset="-120"/>
+                <a:latin typeface="Palatino Linotype" pitchFamily="34" charset="0"/>
+                <a:ea typeface="Palatino Linotype" pitchFamily="34" charset="-122"/>
+                <a:cs typeface="Palatino Linotype" pitchFamily="34" charset="-120"/>
               </a:rPr>
               <a:t>avant intégration</a:t>
             </a:r>
@@ -6272,9 +6747,9 @@
                 <a:solidFill>
                   <a:srgbClr val="F0F0F0"/>
                 </a:solidFill>
-                <a:latin typeface="Georgia" pitchFamily="34" charset="0"/>
-                <a:ea typeface="Georgia" pitchFamily="34" charset="-122"/>
-                <a:cs typeface="Georgia" pitchFamily="34" charset="-120"/>
+                <a:latin typeface="Palatino Linotype" pitchFamily="34" charset="0"/>
+                <a:ea typeface="Palatino Linotype" pitchFamily="34" charset="-122"/>
+                <a:cs typeface="Palatino Linotype" pitchFamily="34" charset="-120"/>
               </a:rPr>
               <a:t>Résultats — chiffres clés</a:t>
             </a:r>
@@ -6338,9 +6813,9 @@
                 <a:solidFill>
                   <a:srgbClr val="F0F0F0"/>
                 </a:solidFill>
-                <a:latin typeface="Georgia" pitchFamily="34" charset="0"/>
-                <a:ea typeface="Georgia" pitchFamily="34" charset="-122"/>
-                <a:cs typeface="Georgia" pitchFamily="34" charset="-120"/>
+                <a:latin typeface="Palatino Linotype" pitchFamily="34" charset="0"/>
+                <a:ea typeface="Palatino Linotype" pitchFamily="34" charset="-122"/>
+                <a:cs typeface="Palatino Linotype" pitchFamily="34" charset="-120"/>
               </a:rPr>
               <a:t>59</a:t>
             </a:r>
@@ -6502,9 +6977,9 @@
                 <a:solidFill>
                   <a:srgbClr val="F0F0F0"/>
                 </a:solidFill>
-                <a:latin typeface="Georgia" pitchFamily="34" charset="0"/>
-                <a:ea typeface="Georgia" pitchFamily="34" charset="-122"/>
-                <a:cs typeface="Georgia" pitchFamily="34" charset="-120"/>
+                <a:latin typeface="Palatino Linotype" pitchFamily="34" charset="0"/>
+                <a:ea typeface="Palatino Linotype" pitchFamily="34" charset="-122"/>
+                <a:cs typeface="Palatino Linotype" pitchFamily="34" charset="-120"/>
               </a:rPr>
               <a:t>78,95%</a:t>
             </a:r>
@@ -6666,9 +7141,9 @@
                 <a:solidFill>
                   <a:srgbClr val="F0F0F0"/>
                 </a:solidFill>
-                <a:latin typeface="Georgia" pitchFamily="34" charset="0"/>
-                <a:ea typeface="Georgia" pitchFamily="34" charset="-122"/>
-                <a:cs typeface="Georgia" pitchFamily="34" charset="-120"/>
+                <a:latin typeface="Palatino Linotype" pitchFamily="34" charset="0"/>
+                <a:ea typeface="Palatino Linotype" pitchFamily="34" charset="-122"/>
+                <a:cs typeface="Palatino Linotype" pitchFamily="34" charset="-120"/>
               </a:rPr>
               <a:t>35/35</a:t>
             </a:r>
@@ -6830,9 +7305,9 @@
                 <a:solidFill>
                   <a:srgbClr val="F0F0F0"/>
                 </a:solidFill>
-                <a:latin typeface="Georgia" pitchFamily="34" charset="0"/>
-                <a:ea typeface="Georgia" pitchFamily="34" charset="-122"/>
-                <a:cs typeface="Georgia" pitchFamily="34" charset="-120"/>
+                <a:latin typeface="Palatino Linotype" pitchFamily="34" charset="0"/>
+                <a:ea typeface="Palatino Linotype" pitchFamily="34" charset="-122"/>
+                <a:cs typeface="Palatino Linotype" pitchFamily="34" charset="-120"/>
               </a:rPr>
               <a:t>0</a:t>
             </a:r>
@@ -7242,9 +7717,9 @@
                 <a:solidFill>
                   <a:srgbClr val="F0F0F0"/>
                 </a:solidFill>
-                <a:latin typeface="Georgia" pitchFamily="34" charset="0"/>
-                <a:ea typeface="Georgia" pitchFamily="34" charset="-122"/>
-                <a:cs typeface="Georgia" pitchFamily="34" charset="-120"/>
+                <a:latin typeface="Palatino Linotype" pitchFamily="34" charset="0"/>
+                <a:ea typeface="Palatino Linotype" pitchFamily="34" charset="-122"/>
+                <a:cs typeface="Palatino Linotype" pitchFamily="34" charset="-120"/>
               </a:rPr>
               <a:t>Orchestrer la production</a:t>
             </a:r>
@@ -7259,9 +7734,9 @@
                 <a:solidFill>
                   <a:srgbClr val="F0F0F0"/>
                 </a:solidFill>
-                <a:latin typeface="Georgia" pitchFamily="34" charset="0"/>
-                <a:ea typeface="Georgia" pitchFamily="34" charset="-122"/>
-                <a:cs typeface="Georgia" pitchFamily="34" charset="-120"/>
+                <a:latin typeface="Palatino Linotype" pitchFamily="34" charset="0"/>
+                <a:ea typeface="Palatino Linotype" pitchFamily="34" charset="-122"/>
+                <a:cs typeface="Palatino Linotype" pitchFamily="34" charset="-120"/>
               </a:rPr>
               <a:t>pour garantir la disponibilité</a:t>
             </a:r>
@@ -7329,7 +7804,7 @@
                 <a:ea typeface="Calibri" pitchFamily="34" charset="-122"/>
                 <a:cs typeface="Calibri" pitchFamily="34" charset="-120"/>
               </a:rPr>
-              <a:t>🔄  Restart automatique</a:t>
+              <a:t>Restart automatique</a:t>
             </a:r>
             <a:endParaRPr lang="en-US" sz="1400" dirty="0"/>
           </a:p>
@@ -7451,7 +7926,7 @@
                 <a:ea typeface="Calibri" pitchFamily="34" charset="-122"/>
                 <a:cs typeface="Calibri" pitchFamily="34" charset="-120"/>
               </a:rPr>
-              <a:t>🏥  Health check /healthy</a:t>
+              <a:t>Health check /healthy</a:t>
             </a:r>
             <a:endParaRPr lang="en-US" sz="1400" dirty="0"/>
           </a:p>
@@ -7573,7 +8048,7 @@
                 <a:ea typeface="Calibri" pitchFamily="34" charset="-122"/>
                 <a:cs typeface="Calibri" pitchFamily="34" charset="-120"/>
               </a:rPr>
-              <a:t>🗄️  Persistance des données</a:t>
+              <a:t>Persistance des données</a:t>
             </a:r>
             <a:endParaRPr lang="en-US" sz="1400" dirty="0"/>
           </a:p>
@@ -7695,7 +8170,7 @@
                 <a:ea typeface="Calibri" pitchFamily="34" charset="-122"/>
                 <a:cs typeface="Calibri" pitchFamily="34" charset="-120"/>
               </a:rPr>
-              <a:t>⚡  Performance validée k6</a:t>
+              <a:t>Performance validée k6</a:t>
             </a:r>
             <a:endParaRPr lang="en-US" sz="1400" dirty="0"/>
           </a:p>
@@ -7817,7 +8292,7 @@
                 <a:ea typeface="Calibri" pitchFamily="34" charset="-122"/>
                 <a:cs typeface="Calibri" pitchFamily="34" charset="-120"/>
               </a:rPr>
-              <a:t>🚀  Roadmap scalabilité : Kubernetes (CKA) → Load Balancer → Multi-instances → SLA 99,9%</a:t>
+              <a:t>Roadmap scalabilité : Kubernetes (CKA) → Load Balancer → Multi-instances → SLA 99,9%</a:t>
             </a:r>
             <a:endParaRPr lang="en-US" sz="1000" dirty="0"/>
           </a:p>
@@ -7943,9 +8418,9 @@
                 <a:solidFill>
                   <a:srgbClr val="F0F0F0"/>
                 </a:solidFill>
-                <a:latin typeface="Georgia" pitchFamily="34" charset="0"/>
-                <a:ea typeface="Georgia" pitchFamily="34" charset="-122"/>
-                <a:cs typeface="Georgia" pitchFamily="34" charset="-120"/>
+                <a:latin typeface="Palatino Linotype" pitchFamily="34" charset="0"/>
+                <a:ea typeface="Palatino Linotype" pitchFamily="34" charset="-122"/>
+                <a:cs typeface="Palatino Linotype" pitchFamily="34" charset="-120"/>
               </a:rPr>
               <a:t>Sécurité &amp; Remédiation</a:t>
             </a:r>
@@ -8230,9 +8705,9 @@
                 <a:solidFill>
                   <a:srgbClr val="F0F0F0"/>
                 </a:solidFill>
-                <a:latin typeface="Georgia" pitchFamily="34" charset="0"/>
-                <a:ea typeface="Georgia" pitchFamily="34" charset="-122"/>
-                <a:cs typeface="Georgia" pitchFamily="34" charset="-120"/>
+                <a:latin typeface="Palatino Linotype" pitchFamily="34" charset="0"/>
+                <a:ea typeface="Palatino Linotype" pitchFamily="34" charset="-122"/>
+                <a:cs typeface="Palatino Linotype" pitchFamily="34" charset="-120"/>
               </a:rPr>
               <a:t>7 vulnérabilités identifiées en v1</a:t>
             </a:r>
@@ -8504,7 +8979,7 @@
                 <a:ea typeface="Calibri" pitchFamily="34" charset="-122"/>
                 <a:cs typeface="Calibri" pitchFamily="34" charset="-120"/>
               </a:rPr>
-              <a:t>SQLite sans chiffrement en prod</a:t>
+              <a:t>Connexions PostgreSQL sans SSL/TLS</a:t>
             </a:r>
             <a:endParaRPr lang="en-US" sz="1100" dirty="0"/>
           </a:p>
@@ -9647,9 +10122,9 @@
                 <a:solidFill>
                   <a:srgbClr val="F0F0F0"/>
                 </a:solidFill>
-                <a:latin typeface="Georgia" pitchFamily="34" charset="0"/>
-                <a:ea typeface="Georgia" pitchFamily="34" charset="-122"/>
-                <a:cs typeface="Georgia" pitchFamily="34" charset="-120"/>
+                <a:latin typeface="Palatino Linotype" pitchFamily="34" charset="0"/>
+                <a:ea typeface="Palatino Linotype" pitchFamily="34" charset="-122"/>
+                <a:cs typeface="Palatino Linotype" pitchFamily="34" charset="-120"/>
               </a:rPr>
               <a:t>3 sprints — du critique au préventif</a:t>
             </a:r>
@@ -9713,9 +10188,9 @@
                 <a:solidFill>
                   <a:srgbClr val="F0F0F0"/>
                 </a:solidFill>
-                <a:latin typeface="Georgia" pitchFamily="34" charset="0"/>
-                <a:ea typeface="Georgia" pitchFamily="34" charset="-122"/>
-                <a:cs typeface="Georgia" pitchFamily="34" charset="-120"/>
+                <a:latin typeface="Palatino Linotype" pitchFamily="34" charset="0"/>
+                <a:ea typeface="Palatino Linotype" pitchFamily="34" charset="-122"/>
+                <a:cs typeface="Palatino Linotype" pitchFamily="34" charset="-120"/>
               </a:rPr>
               <a:t>Sprint 1</a:t>
             </a:r>
@@ -9730,9 +10205,9 @@
                 <a:solidFill>
                   <a:srgbClr val="F0F0F0"/>
                 </a:solidFill>
-                <a:latin typeface="Georgia" pitchFamily="34" charset="0"/>
-                <a:ea typeface="Georgia" pitchFamily="34" charset="-122"/>
-                <a:cs typeface="Georgia" pitchFamily="34" charset="-120"/>
+                <a:latin typeface="Palatino Linotype" pitchFamily="34" charset="0"/>
+                <a:ea typeface="Palatino Linotype" pitchFamily="34" charset="-122"/>
+                <a:cs typeface="Palatino Linotype" pitchFamily="34" charset="-120"/>
               </a:rPr>
               <a:t>Immédiat</a:t>
             </a:r>
@@ -9836,7 +10311,7 @@
                 <a:ea typeface="Calibri" pitchFamily="34" charset="-122"/>
                 <a:cs typeface="Calibri" pitchFamily="34" charset="-120"/>
               </a:rPr>
-              <a:t>• Migrer vers PostgreSQL</a:t>
+              <a:t>• Activer SSL/TLS sur PostgreSQL</a:t>
             </a:r>
             <a:endParaRPr lang="en-US" sz="1200" dirty="0"/>
           </a:p>
@@ -9962,9 +10437,9 @@
                 <a:solidFill>
                   <a:srgbClr val="F0F0F0"/>
                 </a:solidFill>
-                <a:latin typeface="Georgia" pitchFamily="34" charset="0"/>
-                <a:ea typeface="Georgia" pitchFamily="34" charset="-122"/>
-                <a:cs typeface="Georgia" pitchFamily="34" charset="-120"/>
+                <a:latin typeface="Palatino Linotype" pitchFamily="34" charset="0"/>
+                <a:ea typeface="Palatino Linotype" pitchFamily="34" charset="-122"/>
+                <a:cs typeface="Palatino Linotype" pitchFamily="34" charset="-120"/>
               </a:rPr>
               <a:t>Sprint 2</a:t>
             </a:r>
@@ -9979,9 +10454,9 @@
                 <a:solidFill>
                   <a:srgbClr val="F0F0F0"/>
                 </a:solidFill>
-                <a:latin typeface="Georgia" pitchFamily="34" charset="0"/>
-                <a:ea typeface="Georgia" pitchFamily="34" charset="-122"/>
-                <a:cs typeface="Georgia" pitchFamily="34" charset="-120"/>
+                <a:latin typeface="Palatino Linotype" pitchFamily="34" charset="0"/>
+                <a:ea typeface="Palatino Linotype" pitchFamily="34" charset="-122"/>
+                <a:cs typeface="Palatino Linotype" pitchFamily="34" charset="-120"/>
               </a:rPr>
               <a:t>1 mois</a:t>
             </a:r>
@@ -10211,9 +10686,9 @@
                 <a:solidFill>
                   <a:srgbClr val="F0F0F0"/>
                 </a:solidFill>
-                <a:latin typeface="Georgia" pitchFamily="34" charset="0"/>
-                <a:ea typeface="Georgia" pitchFamily="34" charset="-122"/>
-                <a:cs typeface="Georgia" pitchFamily="34" charset="-120"/>
+                <a:latin typeface="Palatino Linotype" pitchFamily="34" charset="0"/>
+                <a:ea typeface="Palatino Linotype" pitchFamily="34" charset="-122"/>
+                <a:cs typeface="Palatino Linotype" pitchFamily="34" charset="-120"/>
               </a:rPr>
               <a:t>Sprint 3</a:t>
             </a:r>
@@ -10228,9 +10703,9 @@
                 <a:solidFill>
                   <a:srgbClr val="F0F0F0"/>
                 </a:solidFill>
-                <a:latin typeface="Georgia" pitchFamily="34" charset="0"/>
-                <a:ea typeface="Georgia" pitchFamily="34" charset="-122"/>
-                <a:cs typeface="Georgia" pitchFamily="34" charset="-120"/>
+                <a:latin typeface="Palatino Linotype" pitchFamily="34" charset="0"/>
+                <a:ea typeface="Palatino Linotype" pitchFamily="34" charset="-122"/>
+                <a:cs typeface="Palatino Linotype" pitchFamily="34" charset="-120"/>
               </a:rPr>
               <a:t>3 mois</a:t>
             </a:r>
@@ -10642,9 +11117,9 @@
                 <a:solidFill>
                   <a:srgbClr val="F0F0F0"/>
                 </a:solidFill>
-                <a:latin typeface="Georgia" pitchFamily="34" charset="0"/>
-                <a:ea typeface="Georgia" pitchFamily="34" charset="-122"/>
-                <a:cs typeface="Georgia" pitchFamily="34" charset="-120"/>
+                <a:latin typeface="Palatino Linotype" pitchFamily="34" charset="0"/>
+                <a:ea typeface="Palatino Linotype" pitchFamily="34" charset="-122"/>
+                <a:cs typeface="Palatino Linotype" pitchFamily="34" charset="-120"/>
               </a:rPr>
               <a:t>3 mesures préventives</a:t>
             </a:r>
@@ -10659,9 +11134,9 @@
                 <a:solidFill>
                   <a:srgbClr val="F0F0F0"/>
                 </a:solidFill>
-                <a:latin typeface="Georgia" pitchFamily="34" charset="0"/>
-                <a:ea typeface="Georgia" pitchFamily="34" charset="-122"/>
-                <a:cs typeface="Georgia" pitchFamily="34" charset="-120"/>
+                <a:latin typeface="Palatino Linotype" pitchFamily="34" charset="0"/>
+                <a:ea typeface="Palatino Linotype" pitchFamily="34" charset="-122"/>
+                <a:cs typeface="Palatino Linotype" pitchFamily="34" charset="-120"/>
               </a:rPr>
               <a:t>pour la v2</a:t>
             </a:r>
@@ -10725,9 +11200,9 @@
                 <a:solidFill>
                   <a:srgbClr val="E74C3C"/>
                 </a:solidFill>
-                <a:latin typeface="Georgia" pitchFamily="34" charset="0"/>
-                <a:ea typeface="Georgia" pitchFamily="34" charset="-122"/>
-                <a:cs typeface="Georgia" pitchFamily="34" charset="-120"/>
+                <a:latin typeface="Palatino Linotype" pitchFamily="34" charset="0"/>
+                <a:ea typeface="Palatino Linotype" pitchFamily="34" charset="-122"/>
+                <a:cs typeface="Palatino Linotype" pitchFamily="34" charset="-120"/>
               </a:rPr>
               <a:t>01</a:t>
             </a:r>
@@ -10737,43 +11212,7 @@
       </p:sp>
       <p:sp>
         <p:nvSpPr>
-          <p:cNvPr id="11" name="Text 9"/>
-          <p:cNvSpPr/>
-          <p:nvPr/>
-        </p:nvSpPr>
-        <p:spPr>
-          <a:xfrm>
-            <a:off x="2926080" y="2834640"/>
-            <a:ext cx="914400" cy="731520"/>
-          </a:xfrm>
-          <a:prstGeom prst="rect">
-            <a:avLst/>
-          </a:prstGeom>
-          <a:noFill/>
-          <a:ln/>
-        </p:spPr>
-        <p:txBody>
-          <a:bodyPr wrap="square" rtlCol="0" anchor="ctr"/>
-          <a:lstStyle/>
-          <a:p>
-            <a:pPr algn="r" indent="0" marL="0">
-              <a:buNone/>
-            </a:pPr>
-            <a:r>
-              <a:rPr lang="en-US" sz="2800" dirty="0">
-                <a:solidFill>
-                  <a:srgbClr val="000000"/>
-                </a:solidFill>
-              </a:rPr>
-              <a:t>🔐</a:t>
-            </a:r>
-            <a:endParaRPr lang="en-US" sz="2800" dirty="0"/>
-          </a:p>
-        </p:txBody>
-      </p:sp>
-      <p:sp>
-        <p:nvSpPr>
-          <p:cNvPr id="12" name="Shape 10"/>
+          <p:cNvPr id="11" name="Shape 9"/>
           <p:cNvSpPr/>
           <p:nvPr/>
         </p:nvSpPr>
@@ -10793,7 +11232,7 @@
       </p:sp>
       <p:sp>
         <p:nvSpPr>
-          <p:cNvPr id="13" name="Text 11"/>
+          <p:cNvPr id="12" name="Text 10"/>
           <p:cNvSpPr/>
           <p:nvPr/>
         </p:nvSpPr>
@@ -10832,7 +11271,7 @@
       </p:sp>
       <p:sp>
         <p:nvSpPr>
-          <p:cNvPr id="14" name="Text 12"/>
+          <p:cNvPr id="13" name="Text 11"/>
           <p:cNvSpPr/>
           <p:nvPr/>
         </p:nvSpPr>
@@ -10905,7 +11344,7 @@
       </p:sp>
       <p:sp>
         <p:nvSpPr>
-          <p:cNvPr id="15" name="Shape 13"/>
+          <p:cNvPr id="14" name="Shape 12"/>
           <p:cNvSpPr/>
           <p:nvPr/>
         </p:nvSpPr>
@@ -10932,7 +11371,7 @@
       </p:sp>
       <p:sp>
         <p:nvSpPr>
-          <p:cNvPr id="16" name="Text 14"/>
+          <p:cNvPr id="15" name="Text 13"/>
           <p:cNvSpPr/>
           <p:nvPr/>
         </p:nvSpPr>
@@ -10959,9 +11398,9 @@
                 <a:solidFill>
                   <a:srgbClr val="E74C3C"/>
                 </a:solidFill>
-                <a:latin typeface="Georgia" pitchFamily="34" charset="0"/>
-                <a:ea typeface="Georgia" pitchFamily="34" charset="-122"/>
-                <a:cs typeface="Georgia" pitchFamily="34" charset="-120"/>
+                <a:latin typeface="Palatino Linotype" pitchFamily="34" charset="0"/>
+                <a:ea typeface="Palatino Linotype" pitchFamily="34" charset="-122"/>
+                <a:cs typeface="Palatino Linotype" pitchFamily="34" charset="-120"/>
               </a:rPr>
               <a:t>02</a:t>
             </a:r>
@@ -10971,43 +11410,7 @@
       </p:sp>
       <p:sp>
         <p:nvSpPr>
-          <p:cNvPr id="17" name="Text 15"/>
-          <p:cNvSpPr/>
-          <p:nvPr/>
-        </p:nvSpPr>
-        <p:spPr>
-          <a:xfrm>
-            <a:off x="6858000" y="2834640"/>
-            <a:ext cx="914400" cy="731520"/>
-          </a:xfrm>
-          <a:prstGeom prst="rect">
-            <a:avLst/>
-          </a:prstGeom>
-          <a:noFill/>
-          <a:ln/>
-        </p:spPr>
-        <p:txBody>
-          <a:bodyPr wrap="square" rtlCol="0" anchor="ctr"/>
-          <a:lstStyle/>
-          <a:p>
-            <a:pPr algn="r" indent="0" marL="0">
-              <a:buNone/>
-            </a:pPr>
-            <a:r>
-              <a:rPr lang="en-US" sz="2800" dirty="0">
-                <a:solidFill>
-                  <a:srgbClr val="000000"/>
-                </a:solidFill>
-              </a:rPr>
-              <a:t>🕵️</a:t>
-            </a:r>
-            <a:endParaRPr lang="en-US" sz="2800" dirty="0"/>
-          </a:p>
-        </p:txBody>
-      </p:sp>
-      <p:sp>
-        <p:nvSpPr>
-          <p:cNvPr id="18" name="Shape 16"/>
+          <p:cNvPr id="16" name="Shape 14"/>
           <p:cNvSpPr/>
           <p:nvPr/>
         </p:nvSpPr>
@@ -11027,7 +11430,7 @@
       </p:sp>
       <p:sp>
         <p:nvSpPr>
-          <p:cNvPr id="19" name="Text 17"/>
+          <p:cNvPr id="17" name="Text 15"/>
           <p:cNvSpPr/>
           <p:nvPr/>
         </p:nvSpPr>
@@ -11066,7 +11469,7 @@
       </p:sp>
       <p:sp>
         <p:nvSpPr>
-          <p:cNvPr id="20" name="Text 18"/>
+          <p:cNvPr id="18" name="Text 16"/>
           <p:cNvSpPr/>
           <p:nvPr/>
         </p:nvSpPr>
@@ -11139,7 +11542,7 @@
       </p:sp>
       <p:sp>
         <p:nvSpPr>
-          <p:cNvPr id="21" name="Shape 19"/>
+          <p:cNvPr id="19" name="Shape 17"/>
           <p:cNvSpPr/>
           <p:nvPr/>
         </p:nvSpPr>
@@ -11166,7 +11569,7 @@
       </p:sp>
       <p:sp>
         <p:nvSpPr>
-          <p:cNvPr id="22" name="Text 20"/>
+          <p:cNvPr id="20" name="Text 18"/>
           <p:cNvSpPr/>
           <p:nvPr/>
         </p:nvSpPr>
@@ -11193,9 +11596,9 @@
                 <a:solidFill>
                   <a:srgbClr val="E74C3C"/>
                 </a:solidFill>
-                <a:latin typeface="Georgia" pitchFamily="34" charset="0"/>
-                <a:ea typeface="Georgia" pitchFamily="34" charset="-122"/>
-                <a:cs typeface="Georgia" pitchFamily="34" charset="-120"/>
+                <a:latin typeface="Palatino Linotype" pitchFamily="34" charset="0"/>
+                <a:ea typeface="Palatino Linotype" pitchFamily="34" charset="-122"/>
+                <a:cs typeface="Palatino Linotype" pitchFamily="34" charset="-120"/>
               </a:rPr>
               <a:t>03</a:t>
             </a:r>
@@ -11205,43 +11608,7 @@
       </p:sp>
       <p:sp>
         <p:nvSpPr>
-          <p:cNvPr id="23" name="Text 21"/>
-          <p:cNvSpPr/>
-          <p:nvPr/>
-        </p:nvSpPr>
-        <p:spPr>
-          <a:xfrm>
-            <a:off x="10789920" y="2834640"/>
-            <a:ext cx="914400" cy="731520"/>
-          </a:xfrm>
-          <a:prstGeom prst="rect">
-            <a:avLst/>
-          </a:prstGeom>
-          <a:noFill/>
-          <a:ln/>
-        </p:spPr>
-        <p:txBody>
-          <a:bodyPr wrap="square" rtlCol="0" anchor="ctr"/>
-          <a:lstStyle/>
-          <a:p>
-            <a:pPr algn="r" indent="0" marL="0">
-              <a:buNone/>
-            </a:pPr>
-            <a:r>
-              <a:rPr lang="en-US" sz="2800" dirty="0">
-                <a:solidFill>
-                  <a:srgbClr val="000000"/>
-                </a:solidFill>
-              </a:rPr>
-              <a:t>📦</a:t>
-            </a:r>
-            <a:endParaRPr lang="en-US" sz="2800" dirty="0"/>
-          </a:p>
-        </p:txBody>
-      </p:sp>
-      <p:sp>
-        <p:nvSpPr>
-          <p:cNvPr id="24" name="Shape 22"/>
+          <p:cNvPr id="21" name="Shape 19"/>
           <p:cNvSpPr/>
           <p:nvPr/>
         </p:nvSpPr>
@@ -11261,7 +11628,7 @@
       </p:sp>
       <p:sp>
         <p:nvSpPr>
-          <p:cNvPr id="25" name="Text 23"/>
+          <p:cNvPr id="22" name="Text 20"/>
           <p:cNvSpPr/>
           <p:nvPr/>
         </p:nvSpPr>
@@ -11300,7 +11667,7 @@
       </p:sp>
       <p:sp>
         <p:nvSpPr>
-          <p:cNvPr id="26" name="Text 24"/>
+          <p:cNvPr id="23" name="Text 21"/>
           <p:cNvSpPr/>
           <p:nvPr/>
         </p:nvSpPr>
@@ -11609,9 +11976,9 @@
                 <a:solidFill>
                   <a:srgbClr val="F0F0F0"/>
                 </a:solidFill>
-                <a:latin typeface="Georgia" pitchFamily="34" charset="0"/>
-                <a:ea typeface="Georgia" pitchFamily="34" charset="-122"/>
-                <a:cs typeface="Georgia" pitchFamily="34" charset="-120"/>
+                <a:latin typeface="Palatino Linotype" pitchFamily="34" charset="0"/>
+                <a:ea typeface="Palatino Linotype" pitchFamily="34" charset="-122"/>
+                <a:cs typeface="Palatino Linotype" pitchFamily="34" charset="-120"/>
               </a:rPr>
               <a:t>Livraison complète de la v1</a:t>
             </a:r>
@@ -11679,7 +12046,7 @@
                 <a:ea typeface="Calibri" pitchFamily="34" charset="-122"/>
                 <a:cs typeface="Calibri" pitchFamily="34" charset="-120"/>
               </a:rPr>
-              <a:t>✅ Livré</a:t>
+              <a:t>Livré</a:t>
             </a:r>
             <a:endParaRPr lang="en-US" sz="1400" dirty="0"/>
           </a:p>
@@ -11921,7 +12288,7 @@
                 <a:ea typeface="Calibri" pitchFamily="34" charset="-122"/>
                 <a:cs typeface="Calibri" pitchFamily="34" charset="-120"/>
               </a:rPr>
-              <a:t>📊 Mesuré</a:t>
+              <a:t>Mesuré</a:t>
             </a:r>
             <a:endParaRPr lang="en-US" sz="1400" dirty="0"/>
           </a:p>
@@ -12163,7 +12530,7 @@
                 <a:ea typeface="Calibri" pitchFamily="34" charset="-122"/>
                 <a:cs typeface="Calibri" pitchFamily="34" charset="-120"/>
               </a:rPr>
-              <a:t>🚀 Perspective v2</a:t>
+              <a:t>Perspective v2</a:t>
             </a:r>
             <a:endParaRPr lang="en-US" sz="1400" dirty="0"/>
           </a:p>
@@ -12222,7 +12589,7 @@
                 <a:ea typeface="Calibri" pitchFamily="34" charset="-122"/>
                 <a:cs typeface="Calibri" pitchFamily="34" charset="-120"/>
               </a:rPr>
-              <a:t>▸  PostgreSQL + RabbitMQ</a:t>
+              <a:t>▸  RabbitMQ AMQP en production</a:t>
             </a:r>
             <a:endParaRPr lang="en-US" sz="1100" dirty="0"/>
           </a:p>
@@ -12583,9 +12950,9 @@
                 <a:solidFill>
                   <a:srgbClr val="F0F0F0"/>
                 </a:solidFill>
-                <a:latin typeface="Georgia" pitchFamily="34" charset="0"/>
-                <a:ea typeface="Georgia" pitchFamily="34" charset="-122"/>
-                <a:cs typeface="Georgia" pitchFamily="34" charset="-120"/>
+                <a:latin typeface="Palatino Linotype" pitchFamily="34" charset="0"/>
+                <a:ea typeface="Palatino Linotype" pitchFamily="34" charset="-122"/>
+                <a:cs typeface="Palatino Linotype" pitchFamily="34" charset="-120"/>
               </a:rPr>
               <a:t>Sommaire</a:t>
             </a:r>
@@ -12649,9 +13016,9 @@
                 <a:solidFill>
                   <a:srgbClr val="E74C3C"/>
                 </a:solidFill>
-                <a:latin typeface="Georgia" pitchFamily="34" charset="0"/>
-                <a:ea typeface="Georgia" pitchFamily="34" charset="-122"/>
-                <a:cs typeface="Georgia" pitchFamily="34" charset="-120"/>
+                <a:latin typeface="Palatino Linotype" pitchFamily="34" charset="0"/>
+                <a:ea typeface="Palatino Linotype" pitchFamily="34" charset="-122"/>
+                <a:cs typeface="Palatino Linotype" pitchFamily="34" charset="-120"/>
               </a:rPr>
               <a:t>01</a:t>
             </a:r>
@@ -12930,9 +13297,9 @@
                 <a:solidFill>
                   <a:srgbClr val="E74C3C"/>
                 </a:solidFill>
-                <a:latin typeface="Georgia" pitchFamily="34" charset="0"/>
-                <a:ea typeface="Georgia" pitchFamily="34" charset="-122"/>
-                <a:cs typeface="Georgia" pitchFamily="34" charset="-120"/>
+                <a:latin typeface="Palatino Linotype" pitchFamily="34" charset="0"/>
+                <a:ea typeface="Palatino Linotype" pitchFamily="34" charset="-122"/>
+                <a:cs typeface="Palatino Linotype" pitchFamily="34" charset="-120"/>
               </a:rPr>
               <a:t>02</a:t>
             </a:r>
@@ -13211,9 +13578,9 @@
                 <a:solidFill>
                   <a:srgbClr val="E74C3C"/>
                 </a:solidFill>
-                <a:latin typeface="Georgia" pitchFamily="34" charset="0"/>
-                <a:ea typeface="Georgia" pitchFamily="34" charset="-122"/>
-                <a:cs typeface="Georgia" pitchFamily="34" charset="-120"/>
+                <a:latin typeface="Palatino Linotype" pitchFamily="34" charset="0"/>
+                <a:ea typeface="Palatino Linotype" pitchFamily="34" charset="-122"/>
+                <a:cs typeface="Palatino Linotype" pitchFamily="34" charset="-120"/>
               </a:rPr>
               <a:t>03</a:t>
             </a:r>
@@ -13470,14 +13837,53 @@
       </p:grpSpPr>
       <p:sp>
         <p:nvSpPr>
-          <p:cNvPr id="2" name="Shape 0"/>
-          <p:cNvSpPr/>
-          <p:nvPr/>
-        </p:nvSpPr>
-        <p:spPr>
-          <a:xfrm>
-            <a:off x="0" y="0"/>
-            <a:ext cx="457200" cy="6858000"/>
+          <p:cNvPr id="2" name="Text 0"/>
+          <p:cNvSpPr/>
+          <p:nvPr/>
+        </p:nvSpPr>
+        <p:spPr>
+          <a:xfrm>
+            <a:off x="0" y="1463040"/>
+            <a:ext cx="12192000" cy="2743200"/>
+          </a:xfrm>
+          <a:prstGeom prst="rect">
+            <a:avLst/>
+          </a:prstGeom>
+          <a:noFill/>
+          <a:ln/>
+        </p:spPr>
+        <p:txBody>
+          <a:bodyPr wrap="square" rtlCol="0" anchor="ctr"/>
+          <a:lstStyle/>
+          <a:p>
+            <a:pPr algn="ctr" indent="0" marL="0">
+              <a:buNone/>
+            </a:pPr>
+            <a:r>
+              <a:rPr lang="en-US" sz="9600" b="1" dirty="0">
+                <a:solidFill>
+                  <a:srgbClr val="F0F0F0"/>
+                </a:solidFill>
+                <a:latin typeface="Palatino Linotype" pitchFamily="34" charset="0"/>
+                <a:ea typeface="Palatino Linotype" pitchFamily="34" charset="-122"/>
+                <a:cs typeface="Palatino Linotype" pitchFamily="34" charset="-120"/>
+              </a:rPr>
+              <a:t>Merci</a:t>
+            </a:r>
+            <a:endParaRPr lang="en-US" sz="9600" dirty="0"/>
+          </a:p>
+        </p:txBody>
+      </p:sp>
+      <p:sp>
+        <p:nvSpPr>
+          <p:cNvPr id="3" name="Shape 1"/>
+          <p:cNvSpPr/>
+          <p:nvPr/>
+        </p:nvSpPr>
+        <p:spPr>
+          <a:xfrm>
+            <a:off x="1371600" y="4480560"/>
+            <a:ext cx="9418320" cy="64008"/>
           </a:xfrm>
           <a:prstGeom prst="rect">
             <a:avLst/>
@@ -13487,221 +13893,6 @@
           </a:solidFill>
           <a:ln/>
         </p:spPr>
-      </p:sp>
-      <p:sp>
-        <p:nvSpPr>
-          <p:cNvPr id="3" name="Text 1"/>
-          <p:cNvSpPr/>
-          <p:nvPr/>
-        </p:nvSpPr>
-        <p:spPr>
-          <a:xfrm>
-            <a:off x="731520" y="1097280"/>
-            <a:ext cx="10058400" cy="1828800"/>
-          </a:xfrm>
-          <a:prstGeom prst="rect">
-            <a:avLst/>
-          </a:prstGeom>
-          <a:noFill/>
-          <a:ln/>
-        </p:spPr>
-        <p:txBody>
-          <a:bodyPr wrap="square" rtlCol="0" anchor="ctr"/>
-          <a:lstStyle/>
-          <a:p>
-            <a:pPr indent="0" marL="0">
-              <a:buNone/>
-            </a:pPr>
-            <a:r>
-              <a:rPr lang="en-US" sz="7200" b="1" dirty="0">
-                <a:solidFill>
-                  <a:srgbClr val="F0F0F0"/>
-                </a:solidFill>
-                <a:latin typeface="Georgia" pitchFamily="34" charset="0"/>
-                <a:ea typeface="Georgia" pitchFamily="34" charset="-122"/>
-                <a:cs typeface="Georgia" pitchFamily="34" charset="-120"/>
-              </a:rPr>
-              <a:t>Merci</a:t>
-            </a:r>
-            <a:endParaRPr lang="en-US" sz="7200" dirty="0"/>
-          </a:p>
-        </p:txBody>
-      </p:sp>
-      <p:sp>
-        <p:nvSpPr>
-          <p:cNvPr id="4" name="Shape 2"/>
-          <p:cNvSpPr/>
-          <p:nvPr/>
-        </p:nvSpPr>
-        <p:spPr>
-          <a:xfrm>
-            <a:off x="731520" y="3108960"/>
-            <a:ext cx="4572000" cy="54864"/>
-          </a:xfrm>
-          <a:prstGeom prst="rect">
-            <a:avLst/>
-          </a:prstGeom>
-          <a:solidFill>
-            <a:srgbClr val="C0392B"/>
-          </a:solidFill>
-          <a:ln/>
-        </p:spPr>
-      </p:sp>
-      <p:sp>
-        <p:nvSpPr>
-          <p:cNvPr id="5" name="Text 3"/>
-          <p:cNvSpPr/>
-          <p:nvPr/>
-        </p:nvSpPr>
-        <p:spPr>
-          <a:xfrm>
-            <a:off x="731520" y="3291840"/>
-            <a:ext cx="7315200" cy="822960"/>
-          </a:xfrm>
-          <a:prstGeom prst="rect">
-            <a:avLst/>
-          </a:prstGeom>
-          <a:noFill/>
-          <a:ln/>
-        </p:spPr>
-        <p:txBody>
-          <a:bodyPr wrap="square" rtlCol="0" anchor="ctr"/>
-          <a:lstStyle/>
-          <a:p>
-            <a:pPr indent="0" marL="0">
-              <a:buNone/>
-            </a:pPr>
-            <a:r>
-              <a:rPr lang="en-US" sz="3000" i="1" dirty="0">
-                <a:solidFill>
-                  <a:srgbClr val="B2B2B2"/>
-                </a:solidFill>
-                <a:latin typeface="Georgia" pitchFamily="34" charset="0"/>
-                <a:ea typeface="Georgia" pitchFamily="34" charset="-122"/>
-                <a:cs typeface="Georgia" pitchFamily="34" charset="-120"/>
-              </a:rPr>
-              <a:t>Questions ?</a:t>
-            </a:r>
-            <a:endParaRPr lang="en-US" sz="3000" dirty="0"/>
-          </a:p>
-        </p:txBody>
-      </p:sp>
-      <p:sp>
-        <p:nvSpPr>
-          <p:cNvPr id="6" name="Text 4"/>
-          <p:cNvSpPr/>
-          <p:nvPr/>
-        </p:nvSpPr>
-        <p:spPr>
-          <a:xfrm>
-            <a:off x="731520" y="4389120"/>
-            <a:ext cx="9144000" cy="411480"/>
-          </a:xfrm>
-          <a:prstGeom prst="rect">
-            <a:avLst/>
-          </a:prstGeom>
-          <a:noFill/>
-          <a:ln/>
-        </p:spPr>
-        <p:txBody>
-          <a:bodyPr wrap="square" rtlCol="0" anchor="ctr"/>
-          <a:lstStyle/>
-          <a:p>
-            <a:pPr indent="0" marL="0">
-              <a:buNone/>
-            </a:pPr>
-            <a:r>
-              <a:rPr lang="en-US" sz="1300" dirty="0">
-                <a:solidFill>
-                  <a:srgbClr val="F39C12"/>
-                </a:solidFill>
-                <a:latin typeface="Calibri" pitchFamily="34" charset="0"/>
-                <a:ea typeface="Calibri" pitchFamily="34" charset="-122"/>
-                <a:cs typeface="Calibri" pitchFamily="34" charset="-120"/>
-              </a:rPr>
-              <a:t>🔗  github.com/Brok3nWings/lpmde</a:t>
-            </a:r>
-            <a:endParaRPr lang="en-US" sz="1300" dirty="0"/>
-          </a:p>
-        </p:txBody>
-      </p:sp>
-      <p:sp>
-        <p:nvSpPr>
-          <p:cNvPr id="7" name="Text 5"/>
-          <p:cNvSpPr/>
-          <p:nvPr/>
-        </p:nvSpPr>
-        <p:spPr>
-          <a:xfrm>
-            <a:off x="731520" y="4892040"/>
-            <a:ext cx="9144000" cy="411480"/>
-          </a:xfrm>
-          <a:prstGeom prst="rect">
-            <a:avLst/>
-          </a:prstGeom>
-          <a:noFill/>
-          <a:ln/>
-        </p:spPr>
-        <p:txBody>
-          <a:bodyPr wrap="square" rtlCol="0" anchor="ctr"/>
-          <a:lstStyle/>
-          <a:p>
-            <a:pPr indent="0" marL="0">
-              <a:buNone/>
-            </a:pPr>
-            <a:r>
-              <a:rPr lang="en-US" sz="1300" dirty="0">
-                <a:solidFill>
-                  <a:srgbClr val="F39C12"/>
-                </a:solidFill>
-                <a:latin typeface="Calibri" pitchFamily="34" charset="0"/>
-                <a:ea typeface="Calibri" pitchFamily="34" charset="-122"/>
-                <a:cs typeface="Calibri" pitchFamily="34" charset="-120"/>
-              </a:rPr>
-              <a:t>🖥  Staging : http://localhost:8089</a:t>
-            </a:r>
-            <a:endParaRPr lang="en-US" sz="1300" dirty="0"/>
-          </a:p>
-        </p:txBody>
-      </p:sp>
-      <p:sp>
-        <p:nvSpPr>
-          <p:cNvPr id="8" name="Text 6"/>
-          <p:cNvSpPr/>
-          <p:nvPr/>
-        </p:nvSpPr>
-        <p:spPr>
-          <a:xfrm>
-            <a:off x="731520" y="5394960"/>
-            <a:ext cx="9144000" cy="411480"/>
-          </a:xfrm>
-          <a:prstGeom prst="rect">
-            <a:avLst/>
-          </a:prstGeom>
-          <a:noFill/>
-          <a:ln/>
-        </p:spPr>
-        <p:txBody>
-          <a:bodyPr wrap="square" rtlCol="0" anchor="ctr"/>
-          <a:lstStyle/>
-          <a:p>
-            <a:pPr indent="0" marL="0">
-              <a:buNone/>
-            </a:pPr>
-            <a:r>
-              <a:rPr lang="en-US" sz="1300" dirty="0">
-                <a:solidFill>
-                  <a:srgbClr val="F39C12"/>
-                </a:solidFill>
-                <a:latin typeface="Calibri" pitchFamily="34" charset="0"/>
-                <a:ea typeface="Calibri" pitchFamily="34" charset="-122"/>
-                <a:cs typeface="Calibri" pitchFamily="34" charset="-120"/>
-              </a:rPr>
-              <a:t>🚀  Production : http://localhost:8088</a:t>
-            </a:r>
-            <a:endParaRPr lang="en-US" sz="1300" dirty="0"/>
-          </a:p>
-        </p:txBody>
       </p:sp>
     </p:spTree>
   </p:cSld>
@@ -13941,9 +14132,9 @@
                 <a:solidFill>
                   <a:srgbClr val="F0F0F0"/>
                 </a:solidFill>
-                <a:latin typeface="Georgia" pitchFamily="34" charset="0"/>
-                <a:ea typeface="Georgia" pitchFamily="34" charset="-122"/>
-                <a:cs typeface="Georgia" pitchFamily="34" charset="-120"/>
+                <a:latin typeface="Palatino Linotype" pitchFamily="34" charset="0"/>
+                <a:ea typeface="Palatino Linotype" pitchFamily="34" charset="-122"/>
+                <a:cs typeface="Palatino Linotype" pitchFamily="34" charset="-120"/>
               </a:rPr>
               <a:t>La mission</a:t>
             </a:r>
@@ -13959,12 +14150,210 @@
         </p:nvSpPr>
         <p:spPr>
           <a:xfrm>
-            <a:off x="365760" y="3291840"/>
-            <a:ext cx="11430000" cy="822960"/>
+            <a:off x="365760" y="2743200"/>
+            <a:ext cx="3657600" cy="3657600"/>
           </a:xfrm>
           <a:prstGeom prst="rect">
             <a:avLst>
-              <a:gd name="adj" fmla="val 8889"/>
+              <a:gd name="adj" fmla="val 2000"/>
+            </a:avLst>
+          </a:prstGeom>
+          <a:solidFill>
+            <a:srgbClr val="2E1A1A"/>
+          </a:solidFill>
+          <a:ln w="19050">
+            <a:solidFill>
+              <a:srgbClr val="C0392B"/>
+            </a:solidFill>
+            <a:prstDash val="solid"/>
+          </a:ln>
+        </p:spPr>
+      </p:sp>
+      <p:sp>
+        <p:nvSpPr>
+          <p:cNvPr id="10" name="Text 8"/>
+          <p:cNvSpPr/>
+          <p:nvPr/>
+        </p:nvSpPr>
+        <p:spPr>
+          <a:xfrm>
+            <a:off x="502920" y="2834640"/>
+            <a:ext cx="731520" cy="594360"/>
+          </a:xfrm>
+          <a:prstGeom prst="rect">
+            <a:avLst/>
+          </a:prstGeom>
+          <a:noFill/>
+          <a:ln/>
+        </p:spPr>
+        <p:txBody>
+          <a:bodyPr wrap="square" rtlCol="0" anchor="ctr"/>
+          <a:lstStyle/>
+          <a:p>
+            <a:pPr indent="0" marL="0">
+              <a:buNone/>
+            </a:pPr>
+            <a:r>
+              <a:rPr lang="en-US" sz="2800" b="1" dirty="0">
+                <a:solidFill>
+                  <a:srgbClr val="E74C3C"/>
+                </a:solidFill>
+                <a:latin typeface="Palatino Linotype" pitchFamily="34" charset="0"/>
+                <a:ea typeface="Palatino Linotype" pitchFamily="34" charset="-122"/>
+                <a:cs typeface="Palatino Linotype" pitchFamily="34" charset="-120"/>
+              </a:rPr>
+              <a:t>01</a:t>
+            </a:r>
+            <a:endParaRPr lang="en-US" sz="2800" dirty="0"/>
+          </a:p>
+        </p:txBody>
+      </p:sp>
+      <p:sp>
+        <p:nvSpPr>
+          <p:cNvPr id="11" name="Text 9"/>
+          <p:cNvSpPr/>
+          <p:nvPr/>
+        </p:nvSpPr>
+        <p:spPr>
+          <a:xfrm>
+            <a:off x="502920" y="3429000"/>
+            <a:ext cx="3383280" cy="502920"/>
+          </a:xfrm>
+          <a:prstGeom prst="rect">
+            <a:avLst/>
+          </a:prstGeom>
+          <a:noFill/>
+          <a:ln/>
+        </p:spPr>
+        <p:txBody>
+          <a:bodyPr wrap="square" rtlCol="0" anchor="ctr"/>
+          <a:lstStyle/>
+          <a:p>
+            <a:pPr indent="0" marL="0">
+              <a:buNone/>
+            </a:pPr>
+            <a:r>
+              <a:rPr lang="en-US" sz="1300" b="1" dirty="0">
+                <a:solidFill>
+                  <a:srgbClr val="F0F0F0"/>
+                </a:solidFill>
+                <a:latin typeface="Calibri" pitchFamily="34" charset="0"/>
+                <a:ea typeface="Calibri" pitchFamily="34" charset="-122"/>
+                <a:cs typeface="Calibri" pitchFamily="34" charset="-120"/>
+              </a:rPr>
+              <a:t>L'entreprise</a:t>
+            </a:r>
+            <a:endParaRPr lang="en-US" sz="1300" dirty="0"/>
+          </a:p>
+        </p:txBody>
+      </p:sp>
+      <p:sp>
+        <p:nvSpPr>
+          <p:cNvPr id="12" name="Shape 10"/>
+          <p:cNvSpPr/>
+          <p:nvPr/>
+        </p:nvSpPr>
+        <p:spPr>
+          <a:xfrm>
+            <a:off x="502920" y="3977640"/>
+            <a:ext cx="3200400" cy="36576"/>
+          </a:xfrm>
+          <a:prstGeom prst="rect">
+            <a:avLst/>
+          </a:prstGeom>
+          <a:solidFill>
+            <a:srgbClr val="C0392B"/>
+          </a:solidFill>
+          <a:ln/>
+        </p:spPr>
+      </p:sp>
+      <p:sp>
+        <p:nvSpPr>
+          <p:cNvPr id="13" name="Text 11"/>
+          <p:cNvSpPr/>
+          <p:nvPr/>
+        </p:nvSpPr>
+        <p:spPr>
+          <a:xfrm>
+            <a:off x="548640" y="4069080"/>
+            <a:ext cx="3291840" cy="2011680"/>
+          </a:xfrm>
+          <a:prstGeom prst="rect">
+            <a:avLst/>
+          </a:prstGeom>
+          <a:noFill/>
+          <a:ln/>
+        </p:spPr>
+        <p:txBody>
+          <a:bodyPr wrap="square" rtlCol="0" anchor="ctr"/>
+          <a:lstStyle/>
+          <a:p>
+            <a:pPr indent="0" marL="0">
+              <a:buNone/>
+            </a:pPr>
+            <a:r>
+              <a:rPr lang="en-US" sz="1200" dirty="0">
+                <a:solidFill>
+                  <a:srgbClr val="B2B2B2"/>
+                </a:solidFill>
+                <a:latin typeface="Calibri" pitchFamily="34" charset="0"/>
+                <a:ea typeface="Calibri" pitchFamily="34" charset="-122"/>
+                <a:cs typeface="Calibri" pitchFamily="34" charset="-120"/>
+              </a:rPr>
+              <a:t>10 ans dans le secteur horrifique</a:t>
+            </a:r>
+            <a:endParaRPr lang="en-US" sz="1200" dirty="0"/>
+          </a:p>
+          <a:p>
+            <a:pPr indent="0" marL="0">
+              <a:buNone/>
+            </a:pPr>
+            <a:r>
+              <a:rPr lang="en-US" sz="1200" dirty="0">
+                <a:solidFill>
+                  <a:srgbClr val="B2B2B2"/>
+                </a:solidFill>
+                <a:latin typeface="Calibri" pitchFamily="34" charset="0"/>
+                <a:ea typeface="Calibri" pitchFamily="34" charset="-122"/>
+                <a:cs typeface="Calibri" pitchFamily="34" charset="-120"/>
+              </a:rPr>
+              <a:t>SI fragmenté — CMS basique</a:t>
+            </a:r>
+            <a:endParaRPr lang="en-US" sz="1200" dirty="0"/>
+          </a:p>
+          <a:p>
+            <a:pPr indent="0" marL="0">
+              <a:buNone/>
+            </a:pPr>
+            <a:r>
+              <a:rPr lang="en-US" sz="1200" dirty="0">
+                <a:solidFill>
+                  <a:srgbClr val="B2B2B2"/>
+                </a:solidFill>
+                <a:latin typeface="Calibri" pitchFamily="34" charset="0"/>
+                <a:ea typeface="Calibri" pitchFamily="34" charset="-122"/>
+                <a:cs typeface="Calibri" pitchFamily="34" charset="-120"/>
+              </a:rPr>
+              <a:t>Aucune vente en ligne</a:t>
+            </a:r>
+            <a:endParaRPr lang="en-US" sz="1200" dirty="0"/>
+          </a:p>
+        </p:txBody>
+      </p:sp>
+      <p:sp>
+        <p:nvSpPr>
+          <p:cNvPr id="14" name="Shape 12"/>
+          <p:cNvSpPr/>
+          <p:nvPr/>
+        </p:nvSpPr>
+        <p:spPr>
+          <a:xfrm>
+            <a:off x="4297680" y="2743200"/>
+            <a:ext cx="3657600" cy="3657600"/>
+          </a:xfrm>
+          <a:prstGeom prst="rect">
+            <a:avLst>
+              <a:gd name="adj" fmla="val 2000"/>
             </a:avLst>
           </a:prstGeom>
           <a:solidFill>
@@ -13980,14 +14369,14 @@
       </p:sp>
       <p:sp>
         <p:nvSpPr>
-          <p:cNvPr id="10" name="Text 8"/>
-          <p:cNvSpPr/>
-          <p:nvPr/>
-        </p:nvSpPr>
-        <p:spPr>
-          <a:xfrm>
-            <a:off x="640080" y="3383280"/>
-            <a:ext cx="10789920" cy="640080"/>
+          <p:cNvPr id="15" name="Text 13"/>
+          <p:cNvSpPr/>
+          <p:nvPr/>
+        </p:nvSpPr>
+        <p:spPr>
+          <a:xfrm>
+            <a:off x="4434840" y="2834640"/>
+            <a:ext cx="731520" cy="594360"/>
           </a:xfrm>
           <a:prstGeom prst="rect">
             <a:avLst/>
@@ -14003,7 +14392,46 @@
               <a:buNone/>
             </a:pPr>
             <a:r>
-              <a:rPr lang="en-US" sz="1400" dirty="0">
+              <a:rPr lang="en-US" sz="2800" b="1" dirty="0">
+                <a:solidFill>
+                  <a:srgbClr val="E74C3C"/>
+                </a:solidFill>
+                <a:latin typeface="Palatino Linotype" pitchFamily="34" charset="0"/>
+                <a:ea typeface="Palatino Linotype" pitchFamily="34" charset="-122"/>
+                <a:cs typeface="Palatino Linotype" pitchFamily="34" charset="-120"/>
+              </a:rPr>
+              <a:t>02</a:t>
+            </a:r>
+            <a:endParaRPr lang="en-US" sz="2800" dirty="0"/>
+          </a:p>
+        </p:txBody>
+      </p:sp>
+      <p:sp>
+        <p:nvSpPr>
+          <p:cNvPr id="16" name="Text 14"/>
+          <p:cNvSpPr/>
+          <p:nvPr/>
+        </p:nvSpPr>
+        <p:spPr>
+          <a:xfrm>
+            <a:off x="4434840" y="3429000"/>
+            <a:ext cx="3383280" cy="502920"/>
+          </a:xfrm>
+          <a:prstGeom prst="rect">
+            <a:avLst/>
+          </a:prstGeom>
+          <a:noFill/>
+          <a:ln/>
+        </p:spPr>
+        <p:txBody>
+          <a:bodyPr wrap="square" rtlCol="0" anchor="ctr"/>
+          <a:lstStyle/>
+          <a:p>
+            <a:pPr indent="0" marL="0">
+              <a:buNone/>
+            </a:pPr>
+            <a:r>
+              <a:rPr lang="en-US" sz="1300" b="1" dirty="0">
                 <a:solidFill>
                   <a:srgbClr val="F0F0F0"/>
                 </a:solidFill>
@@ -14011,47 +14439,123 @@
                 <a:ea typeface="Calibri" pitchFamily="34" charset="-122"/>
                 <a:cs typeface="Calibri" pitchFamily="34" charset="-120"/>
               </a:rPr>
-              <a:t>🏚  Entreprise de 10 ans — SI fragmenté, pas</a:t>
-            </a:r>
-            <a:endParaRPr lang="en-US" sz="1400" dirty="0"/>
-          </a:p>
+              <a:t>La mission</a:t>
+            </a:r>
+            <a:endParaRPr lang="en-US" sz="1300" dirty="0"/>
+          </a:p>
+        </p:txBody>
+      </p:sp>
+      <p:sp>
+        <p:nvSpPr>
+          <p:cNvPr id="17" name="Shape 15"/>
+          <p:cNvSpPr/>
+          <p:nvPr/>
+        </p:nvSpPr>
+        <p:spPr>
+          <a:xfrm>
+            <a:off x="4434840" y="3977640"/>
+            <a:ext cx="3200400" cy="36576"/>
+          </a:xfrm>
+          <a:prstGeom prst="rect">
+            <a:avLst/>
+          </a:prstGeom>
+          <a:solidFill>
+            <a:srgbClr val="C0392B"/>
+          </a:solidFill>
+          <a:ln/>
+        </p:spPr>
+      </p:sp>
+      <p:sp>
+        <p:nvSpPr>
+          <p:cNvPr id="18" name="Text 16"/>
+          <p:cNvSpPr/>
+          <p:nvPr/>
+        </p:nvSpPr>
+        <p:spPr>
+          <a:xfrm>
+            <a:off x="4480560" y="4069080"/>
+            <a:ext cx="3291840" cy="2011680"/>
+          </a:xfrm>
+          <a:prstGeom prst="rect">
+            <a:avLst/>
+          </a:prstGeom>
+          <a:noFill/>
+          <a:ln/>
+        </p:spPr>
+        <p:txBody>
+          <a:bodyPr wrap="square" rtlCol="0" anchor="ctr"/>
+          <a:lstStyle/>
           <a:p>
             <a:pPr indent="0" marL="0">
               <a:buNone/>
             </a:pPr>
             <a:r>
-              <a:rPr lang="en-US" sz="1400" dirty="0">
-                <a:solidFill>
-                  <a:srgbClr val="F0F0F0"/>
-                </a:solidFill>
-                <a:latin typeface="Calibri" pitchFamily="34" charset="0"/>
-                <a:ea typeface="Calibri" pitchFamily="34" charset="-122"/>
-                <a:cs typeface="Calibri" pitchFamily="34" charset="-120"/>
-              </a:rPr>
-              <a:t>de vente en ligne, CMS basique</a:t>
-            </a:r>
-            <a:endParaRPr lang="en-US" sz="1400" dirty="0"/>
-          </a:p>
-        </p:txBody>
-      </p:sp>
-      <p:sp>
-        <p:nvSpPr>
-          <p:cNvPr id="11" name="Shape 9"/>
-          <p:cNvSpPr/>
-          <p:nvPr/>
-        </p:nvSpPr>
-        <p:spPr>
-          <a:xfrm>
-            <a:off x="365760" y="4297680"/>
-            <a:ext cx="11430000" cy="822960"/>
+              <a:rPr lang="en-US" sz="1200" dirty="0">
+                <a:solidFill>
+                  <a:srgbClr val="B2B2B2"/>
+                </a:solidFill>
+                <a:latin typeface="Calibri" pitchFamily="34" charset="0"/>
+                <a:ea typeface="Calibri" pitchFamily="34" charset="-122"/>
+                <a:cs typeface="Calibri" pitchFamily="34" charset="-120"/>
+              </a:rPr>
+              <a:t>Développer la v1 de la future</a:t>
+            </a:r>
+            <a:endParaRPr lang="en-US" sz="1200" dirty="0"/>
+          </a:p>
+          <a:p>
+            <a:pPr indent="0" marL="0">
+              <a:buNone/>
+            </a:pPr>
+            <a:r>
+              <a:rPr lang="en-US" sz="1200" dirty="0">
+                <a:solidFill>
+                  <a:srgbClr val="B2B2B2"/>
+                </a:solidFill>
+                <a:latin typeface="Calibri" pitchFamily="34" charset="0"/>
+                <a:ea typeface="Calibri" pitchFamily="34" charset="-122"/>
+                <a:cs typeface="Calibri" pitchFamily="34" charset="-120"/>
+              </a:rPr>
+              <a:t>plateforme numérique</a:t>
+            </a:r>
+            <a:endParaRPr lang="en-US" sz="1200" dirty="0"/>
+          </a:p>
+          <a:p>
+            <a:pPr indent="0" marL="0">
+              <a:buNone/>
+            </a:pPr>
+            <a:r>
+              <a:rPr lang="en-US" sz="1200" dirty="0">
+                <a:solidFill>
+                  <a:srgbClr val="B2B2B2"/>
+                </a:solidFill>
+                <a:latin typeface="Calibri" pitchFamily="34" charset="0"/>
+                <a:ea typeface="Calibri" pitchFamily="34" charset="-122"/>
+                <a:cs typeface="Calibri" pitchFamily="34" charset="-120"/>
+              </a:rPr>
+              <a:t>Base technique solide et évolutive</a:t>
+            </a:r>
+            <a:endParaRPr lang="en-US" sz="1200" dirty="0"/>
+          </a:p>
+        </p:txBody>
+      </p:sp>
+      <p:sp>
+        <p:nvSpPr>
+          <p:cNvPr id="19" name="Shape 17"/>
+          <p:cNvSpPr/>
+          <p:nvPr/>
+        </p:nvSpPr>
+        <p:spPr>
+          <a:xfrm>
+            <a:off x="8229600" y="2743200"/>
+            <a:ext cx="3657600" cy="3657600"/>
           </a:xfrm>
           <a:prstGeom prst="rect">
             <a:avLst>
-              <a:gd name="adj" fmla="val 8889"/>
+              <a:gd name="adj" fmla="val 2000"/>
             </a:avLst>
           </a:prstGeom>
           <a:solidFill>
-            <a:srgbClr val="1A1A2E"/>
+            <a:srgbClr val="1A2E1A"/>
           </a:solidFill>
           <a:ln w="19050">
             <a:solidFill>
@@ -14063,14 +14567,14 @@
       </p:sp>
       <p:sp>
         <p:nvSpPr>
-          <p:cNvPr id="12" name="Text 10"/>
-          <p:cNvSpPr/>
-          <p:nvPr/>
-        </p:nvSpPr>
-        <p:spPr>
-          <a:xfrm>
-            <a:off x="640080" y="4389120"/>
-            <a:ext cx="10789920" cy="640080"/>
+          <p:cNvPr id="20" name="Text 18"/>
+          <p:cNvSpPr/>
+          <p:nvPr/>
+        </p:nvSpPr>
+        <p:spPr>
+          <a:xfrm>
+            <a:off x="8366760" y="2834640"/>
+            <a:ext cx="731520" cy="594360"/>
           </a:xfrm>
           <a:prstGeom prst="rect">
             <a:avLst/>
@@ -14086,7 +14590,46 @@
               <a:buNone/>
             </a:pPr>
             <a:r>
-              <a:rPr lang="en-US" sz="1400" dirty="0">
+              <a:rPr lang="en-US" sz="2800" b="1" dirty="0">
+                <a:solidFill>
+                  <a:srgbClr val="E74C3C"/>
+                </a:solidFill>
+                <a:latin typeface="Palatino Linotype" pitchFamily="34" charset="0"/>
+                <a:ea typeface="Palatino Linotype" pitchFamily="34" charset="-122"/>
+                <a:cs typeface="Palatino Linotype" pitchFamily="34" charset="-120"/>
+              </a:rPr>
+              <a:t>03</a:t>
+            </a:r>
+            <a:endParaRPr lang="en-US" sz="2800" dirty="0"/>
+          </a:p>
+        </p:txBody>
+      </p:sp>
+      <p:sp>
+        <p:nvSpPr>
+          <p:cNvPr id="21" name="Text 19"/>
+          <p:cNvSpPr/>
+          <p:nvPr/>
+        </p:nvSpPr>
+        <p:spPr>
+          <a:xfrm>
+            <a:off x="8366760" y="3429000"/>
+            <a:ext cx="3383280" cy="502920"/>
+          </a:xfrm>
+          <a:prstGeom prst="rect">
+            <a:avLst/>
+          </a:prstGeom>
+          <a:noFill/>
+          <a:ln/>
+        </p:spPr>
+        <p:txBody>
+          <a:bodyPr wrap="square" rtlCol="0" anchor="ctr"/>
+          <a:lstStyle/>
+          <a:p>
+            <a:pPr indent="0" marL="0">
+              <a:buNone/>
+            </a:pPr>
+            <a:r>
+              <a:rPr lang="en-US" sz="1300" b="1" dirty="0">
                 <a:solidFill>
                   <a:srgbClr val="F0F0F0"/>
                 </a:solidFill>
@@ -14094,109 +14637,102 @@
                 <a:ea typeface="Calibri" pitchFamily="34" charset="-122"/>
                 <a:cs typeface="Calibri" pitchFamily="34" charset="-120"/>
               </a:rPr>
-              <a:t>🎯  Mission : développer la v1 de la future</a:t>
-            </a:r>
-            <a:endParaRPr lang="en-US" sz="1400" dirty="0"/>
-          </a:p>
+              <a:t>Mon rôle — Lead Developer</a:t>
+            </a:r>
+            <a:endParaRPr lang="en-US" sz="1300" dirty="0"/>
+          </a:p>
+        </p:txBody>
+      </p:sp>
+      <p:sp>
+        <p:nvSpPr>
+          <p:cNvPr id="22" name="Shape 20"/>
+          <p:cNvSpPr/>
+          <p:nvPr/>
+        </p:nvSpPr>
+        <p:spPr>
+          <a:xfrm>
+            <a:off x="8366760" y="3977640"/>
+            <a:ext cx="3200400" cy="36576"/>
+          </a:xfrm>
+          <a:prstGeom prst="rect">
+            <a:avLst/>
+          </a:prstGeom>
+          <a:solidFill>
+            <a:srgbClr val="C0392B"/>
+          </a:solidFill>
+          <a:ln/>
+        </p:spPr>
+      </p:sp>
+      <p:sp>
+        <p:nvSpPr>
+          <p:cNvPr id="23" name="Text 21"/>
+          <p:cNvSpPr/>
+          <p:nvPr/>
+        </p:nvSpPr>
+        <p:spPr>
+          <a:xfrm>
+            <a:off x="8412480" y="4069080"/>
+            <a:ext cx="3291840" cy="2011680"/>
+          </a:xfrm>
+          <a:prstGeom prst="rect">
+            <a:avLst/>
+          </a:prstGeom>
+          <a:noFill/>
+          <a:ln/>
+        </p:spPr>
+        <p:txBody>
+          <a:bodyPr wrap="square" rtlCol="0" anchor="ctr"/>
+          <a:lstStyle/>
           <a:p>
             <a:pPr indent="0" marL="0">
               <a:buNone/>
             </a:pPr>
             <a:r>
-              <a:rPr lang="en-US" sz="1400" dirty="0">
-                <a:solidFill>
-                  <a:srgbClr val="F0F0F0"/>
-                </a:solidFill>
-                <a:latin typeface="Calibri" pitchFamily="34" charset="0"/>
-                <a:ea typeface="Calibri" pitchFamily="34" charset="-122"/>
-                <a:cs typeface="Calibri" pitchFamily="34" charset="-120"/>
-              </a:rPr>
-              <a:t>plateforme numérique</a:t>
-            </a:r>
-            <a:endParaRPr lang="en-US" sz="1400" dirty="0"/>
-          </a:p>
-        </p:txBody>
-      </p:sp>
-      <p:sp>
-        <p:nvSpPr>
-          <p:cNvPr id="13" name="Shape 11"/>
-          <p:cNvSpPr/>
-          <p:nvPr/>
-        </p:nvSpPr>
-        <p:spPr>
-          <a:xfrm>
-            <a:off x="365760" y="5303520"/>
-            <a:ext cx="11430000" cy="822960"/>
-          </a:xfrm>
-          <a:prstGeom prst="rect">
-            <a:avLst>
-              <a:gd name="adj" fmla="val 8889"/>
-            </a:avLst>
-          </a:prstGeom>
-          <a:solidFill>
-            <a:srgbClr val="1A1A2E"/>
-          </a:solidFill>
-          <a:ln w="19050">
-            <a:solidFill>
-              <a:srgbClr val="C0392B"/>
-            </a:solidFill>
-            <a:prstDash val="solid"/>
-          </a:ln>
-        </p:spPr>
-      </p:sp>
-      <p:sp>
-        <p:nvSpPr>
-          <p:cNvPr id="14" name="Text 12"/>
-          <p:cNvSpPr/>
-          <p:nvPr/>
-        </p:nvSpPr>
-        <p:spPr>
-          <a:xfrm>
-            <a:off x="640080" y="5394960"/>
-            <a:ext cx="10789920" cy="640080"/>
-          </a:xfrm>
-          <a:prstGeom prst="rect">
-            <a:avLst/>
-          </a:prstGeom>
-          <a:noFill/>
-          <a:ln/>
-        </p:spPr>
-        <p:txBody>
-          <a:bodyPr wrap="square" rtlCol="0" anchor="ctr"/>
-          <a:lstStyle/>
+              <a:rPr lang="en-US" sz="1200" dirty="0">
+                <a:solidFill>
+                  <a:srgbClr val="B2B2B2"/>
+                </a:solidFill>
+                <a:latin typeface="Calibri" pitchFamily="34" charset="0"/>
+                <a:ea typeface="Calibri" pitchFamily="34" charset="-122"/>
+                <a:cs typeface="Calibri" pitchFamily="34" charset="-120"/>
+              </a:rPr>
+              <a:t>Processus qualité &amp; ISO 25010</a:t>
+            </a:r>
+            <a:endParaRPr lang="en-US" sz="1200" dirty="0"/>
+          </a:p>
           <a:p>
             <a:pPr indent="0" marL="0">
               <a:buNone/>
             </a:pPr>
             <a:r>
-              <a:rPr lang="en-US" sz="1400" dirty="0">
-                <a:solidFill>
-                  <a:srgbClr val="F0F0F0"/>
-                </a:solidFill>
-                <a:latin typeface="Calibri" pitchFamily="34" charset="0"/>
-                <a:ea typeface="Calibri" pitchFamily="34" charset="-122"/>
-                <a:cs typeface="Calibri" pitchFamily="34" charset="-120"/>
-              </a:rPr>
-              <a:t>👨‍💻  Rôle Lead Developer : processus qualité,</a:t>
-            </a:r>
-            <a:endParaRPr lang="en-US" sz="1400" dirty="0"/>
+              <a:rPr lang="en-US" sz="1200" dirty="0">
+                <a:solidFill>
+                  <a:srgbClr val="B2B2B2"/>
+                </a:solidFill>
+                <a:latin typeface="Calibri" pitchFamily="34" charset="0"/>
+                <a:ea typeface="Calibri" pitchFamily="34" charset="-122"/>
+                <a:cs typeface="Calibri" pitchFamily="34" charset="-120"/>
+              </a:rPr>
+              <a:t>POC fonctionnel &amp; architecture</a:t>
+            </a:r>
+            <a:endParaRPr lang="en-US" sz="1200" dirty="0"/>
           </a:p>
           <a:p>
             <a:pPr indent="0" marL="0">
               <a:buNone/>
             </a:pPr>
             <a:r>
-              <a:rPr lang="en-US" sz="1400" dirty="0">
-                <a:solidFill>
-                  <a:srgbClr val="F0F0F0"/>
-                </a:solidFill>
-                <a:latin typeface="Calibri" pitchFamily="34" charset="0"/>
-                <a:ea typeface="Calibri" pitchFamily="34" charset="-122"/>
-                <a:cs typeface="Calibri" pitchFamily="34" charset="-120"/>
-              </a:rPr>
-              <a:t>POC fonctionnel, analyse sécurité</a:t>
-            </a:r>
-            <a:endParaRPr lang="en-US" sz="1400" dirty="0"/>
+              <a:rPr lang="en-US" sz="1200" dirty="0">
+                <a:solidFill>
+                  <a:srgbClr val="B2B2B2"/>
+                </a:solidFill>
+                <a:latin typeface="Calibri" pitchFamily="34" charset="0"/>
+                <a:ea typeface="Calibri" pitchFamily="34" charset="-122"/>
+                <a:cs typeface="Calibri" pitchFamily="34" charset="-120"/>
+              </a:rPr>
+              <a:t>Analyse sécurité &amp; remédiation</a:t>
+            </a:r>
+            <a:endParaRPr lang="en-US" sz="1200" dirty="0"/>
           </a:p>
         </p:txBody>
       </p:sp>
@@ -14340,9 +14876,9 @@
                 <a:solidFill>
                   <a:srgbClr val="F0F0F0"/>
                 </a:solidFill>
-                <a:latin typeface="Georgia" pitchFamily="34" charset="0"/>
-                <a:ea typeface="Georgia" pitchFamily="34" charset="-122"/>
-                <a:cs typeface="Georgia" pitchFamily="34" charset="-120"/>
+                <a:latin typeface="Palatino Linotype" pitchFamily="34" charset="0"/>
+                <a:ea typeface="Palatino Linotype" pitchFamily="34" charset="-122"/>
+                <a:cs typeface="Palatino Linotype" pitchFamily="34" charset="-120"/>
               </a:rPr>
               <a:t>Processus Qualité</a:t>
             </a:r>
@@ -14627,9 +15163,9 @@
                 <a:solidFill>
                   <a:srgbClr val="F0F0F0"/>
                 </a:solidFill>
-                <a:latin typeface="Georgia" pitchFamily="34" charset="0"/>
-                <a:ea typeface="Georgia" pitchFamily="34" charset="-122"/>
-                <a:cs typeface="Georgia" pitchFamily="34" charset="-120"/>
+                <a:latin typeface="Palatino Linotype" pitchFamily="34" charset="0"/>
+                <a:ea typeface="Palatino Linotype" pitchFamily="34" charset="-122"/>
+                <a:cs typeface="Palatino Linotype" pitchFamily="34" charset="-120"/>
               </a:rPr>
               <a:t>4 métriques pour éviter</a:t>
             </a:r>
@@ -14644,9 +15180,9 @@
                 <a:solidFill>
                   <a:srgbClr val="F0F0F0"/>
                 </a:solidFill>
-                <a:latin typeface="Georgia" pitchFamily="34" charset="0"/>
-                <a:ea typeface="Georgia" pitchFamily="34" charset="-122"/>
-                <a:cs typeface="Georgia" pitchFamily="34" charset="-120"/>
+                <a:latin typeface="Palatino Linotype" pitchFamily="34" charset="0"/>
+                <a:ea typeface="Palatino Linotype" pitchFamily="34" charset="-122"/>
+                <a:cs typeface="Palatino Linotype" pitchFamily="34" charset="-120"/>
               </a:rPr>
               <a:t>la dette technique</a:t>
             </a:r>
@@ -14766,9 +15302,9 @@
                 <a:solidFill>
                   <a:srgbClr val="E74C3C"/>
                 </a:solidFill>
-                <a:latin typeface="Georgia" pitchFamily="34" charset="0"/>
-                <a:ea typeface="Georgia" pitchFamily="34" charset="-122"/>
-                <a:cs typeface="Georgia" pitchFamily="34" charset="-120"/>
+                <a:latin typeface="Palatino Linotype" pitchFamily="34" charset="0"/>
+                <a:ea typeface="Palatino Linotype" pitchFamily="34" charset="-122"/>
+                <a:cs typeface="Palatino Linotype" pitchFamily="34" charset="-120"/>
               </a:rPr>
               <a:t>59,11%</a:t>
             </a:r>
@@ -14783,9 +15319,9 @@
                 <a:solidFill>
                   <a:srgbClr val="E74C3C"/>
                 </a:solidFill>
-                <a:latin typeface="Georgia" pitchFamily="34" charset="0"/>
-                <a:ea typeface="Georgia" pitchFamily="34" charset="-122"/>
-                <a:cs typeface="Georgia" pitchFamily="34" charset="-120"/>
+                <a:latin typeface="Palatino Linotype" pitchFamily="34" charset="0"/>
+                <a:ea typeface="Palatino Linotype" pitchFamily="34" charset="-122"/>
+                <a:cs typeface="Palatino Linotype" pitchFamily="34" charset="-120"/>
               </a:rPr>
               <a:t>lignes</a:t>
             </a:r>
@@ -15003,9 +15539,9 @@
                 <a:solidFill>
                   <a:srgbClr val="E74C3C"/>
                 </a:solidFill>
-                <a:latin typeface="Georgia" pitchFamily="34" charset="0"/>
-                <a:ea typeface="Georgia" pitchFamily="34" charset="-122"/>
-                <a:cs typeface="Georgia" pitchFamily="34" charset="-120"/>
+                <a:latin typeface="Palatino Linotype" pitchFamily="34" charset="0"/>
+                <a:ea typeface="Palatino Linotype" pitchFamily="34" charset="-122"/>
+                <a:cs typeface="Palatino Linotype" pitchFamily="34" charset="-120"/>
               </a:rPr>
               <a:t>0</a:t>
             </a:r>
@@ -15020,9 +15556,9 @@
                 <a:solidFill>
                   <a:srgbClr val="E74C3C"/>
                 </a:solidFill>
-                <a:latin typeface="Georgia" pitchFamily="34" charset="0"/>
-                <a:ea typeface="Georgia" pitchFamily="34" charset="-122"/>
-                <a:cs typeface="Georgia" pitchFamily="34" charset="-120"/>
+                <a:latin typeface="Palatino Linotype" pitchFamily="34" charset="0"/>
+                <a:ea typeface="Palatino Linotype" pitchFamily="34" charset="-122"/>
+                <a:cs typeface="Palatino Linotype" pitchFamily="34" charset="-120"/>
               </a:rPr>
               <a:t>CRITICAL</a:t>
             </a:r>
@@ -15240,9 +15776,9 @@
                 <a:solidFill>
                   <a:srgbClr val="E74C3C"/>
                 </a:solidFill>
-                <a:latin typeface="Georgia" pitchFamily="34" charset="0"/>
-                <a:ea typeface="Georgia" pitchFamily="34" charset="-122"/>
-                <a:cs typeface="Georgia" pitchFamily="34" charset="-120"/>
+                <a:latin typeface="Palatino Linotype" pitchFamily="34" charset="0"/>
+                <a:ea typeface="Palatino Linotype" pitchFamily="34" charset="-122"/>
+                <a:cs typeface="Palatino Linotype" pitchFamily="34" charset="-120"/>
               </a:rPr>
               <a:t>&lt; 200ms</a:t>
             </a:r>
@@ -15460,9 +15996,9 @@
                 <a:solidFill>
                   <a:srgbClr val="E74C3C"/>
                 </a:solidFill>
-                <a:latin typeface="Georgia" pitchFamily="34" charset="0"/>
-                <a:ea typeface="Georgia" pitchFamily="34" charset="-122"/>
-                <a:cs typeface="Georgia" pitchFamily="34" charset="-120"/>
+                <a:latin typeface="Palatino Linotype" pitchFamily="34" charset="0"/>
+                <a:ea typeface="Palatino Linotype" pitchFamily="34" charset="-122"/>
+                <a:cs typeface="Palatino Linotype" pitchFamily="34" charset="-120"/>
               </a:rPr>
               <a:t>SonarCloud</a:t>
             </a:r>
@@ -15477,9 +16013,9 @@
                 <a:solidFill>
                   <a:srgbClr val="E74C3C"/>
                 </a:solidFill>
-                <a:latin typeface="Georgia" pitchFamily="34" charset="0"/>
-                <a:ea typeface="Georgia" pitchFamily="34" charset="-122"/>
-                <a:cs typeface="Georgia" pitchFamily="34" charset="-120"/>
+                <a:latin typeface="Palatino Linotype" pitchFamily="34" charset="0"/>
+                <a:ea typeface="Palatino Linotype" pitchFamily="34" charset="-122"/>
+                <a:cs typeface="Palatino Linotype" pitchFamily="34" charset="-120"/>
               </a:rPr>
               <a:t>actif</a:t>
             </a:r>
@@ -15823,9 +16359,9 @@
                 <a:solidFill>
                   <a:srgbClr val="F0F0F0"/>
                 </a:solidFill>
-                <a:latin typeface="Georgia" pitchFamily="34" charset="0"/>
-                <a:ea typeface="Georgia" pitchFamily="34" charset="-122"/>
-                <a:cs typeface="Georgia" pitchFamily="34" charset="-120"/>
+                <a:latin typeface="Palatino Linotype" pitchFamily="34" charset="0"/>
+                <a:ea typeface="Palatino Linotype" pitchFamily="34" charset="-122"/>
+                <a:cs typeface="Palatino Linotype" pitchFamily="34" charset="-120"/>
               </a:rPr>
               <a:t>Shift Left Security</a:t>
             </a:r>
@@ -15840,9 +16376,9 @@
                 <a:solidFill>
                   <a:srgbClr val="F0F0F0"/>
                 </a:solidFill>
-                <a:latin typeface="Georgia" pitchFamily="34" charset="0"/>
-                <a:ea typeface="Georgia" pitchFamily="34" charset="-122"/>
-                <a:cs typeface="Georgia" pitchFamily="34" charset="-120"/>
+                <a:latin typeface="Palatino Linotype" pitchFamily="34" charset="0"/>
+                <a:ea typeface="Palatino Linotype" pitchFamily="34" charset="-122"/>
+                <a:cs typeface="Palatino Linotype" pitchFamily="34" charset="-120"/>
               </a:rPr>
               <a:t>— la sécurité à chaque étape</a:t>
             </a:r>
@@ -15906,9 +16442,9 @@
                 <a:solidFill>
                   <a:srgbClr val="F0F0F0"/>
                 </a:solidFill>
-                <a:latin typeface="Georgia" pitchFamily="34" charset="0"/>
-                <a:ea typeface="Georgia" pitchFamily="34" charset="-122"/>
-                <a:cs typeface="Georgia" pitchFamily="34" charset="-120"/>
+                <a:latin typeface="Palatino Linotype" pitchFamily="34" charset="0"/>
+                <a:ea typeface="Palatino Linotype" pitchFamily="34" charset="-122"/>
+                <a:cs typeface="Palatino Linotype" pitchFamily="34" charset="-120"/>
               </a:rPr>
               <a:t>Plan</a:t>
             </a:r>
@@ -16000,42 +16536,6 @@
         </p:nvSpPr>
         <p:spPr>
           <a:xfrm>
-            <a:off x="1051560" y="4983480"/>
-            <a:ext cx="548640" cy="365760"/>
-          </a:xfrm>
-          <a:prstGeom prst="rect">
-            <a:avLst/>
-          </a:prstGeom>
-          <a:noFill/>
-          <a:ln/>
-        </p:spPr>
-        <p:txBody>
-          <a:bodyPr wrap="square" rtlCol="0" anchor="ctr"/>
-          <a:lstStyle/>
-          <a:p>
-            <a:pPr algn="ctr" indent="0" marL="0">
-              <a:buNone/>
-            </a:pPr>
-            <a:r>
-              <a:rPr lang="en-US" sz="1400" dirty="0">
-                <a:solidFill>
-                  <a:srgbClr val="000000"/>
-                </a:solidFill>
-              </a:rPr>
-              <a:t>🔒</a:t>
-            </a:r>
-            <a:endParaRPr lang="en-US" sz="1400" dirty="0"/>
-          </a:p>
-        </p:txBody>
-      </p:sp>
-      <p:sp>
-        <p:nvSpPr>
-          <p:cNvPr id="14" name="Text 12"/>
-          <p:cNvSpPr/>
-          <p:nvPr/>
-        </p:nvSpPr>
-        <p:spPr>
-          <a:xfrm>
             <a:off x="2377440" y="3657600"/>
             <a:ext cx="365760" cy="548640"/>
           </a:xfrm>
@@ -16069,7 +16569,7 @@
       </p:sp>
       <p:sp>
         <p:nvSpPr>
-          <p:cNvPr id="15" name="Shape 13"/>
+          <p:cNvPr id="14" name="Shape 12"/>
           <p:cNvSpPr/>
           <p:nvPr/>
         </p:nvSpPr>
@@ -16096,7 +16596,7 @@
       </p:sp>
       <p:sp>
         <p:nvSpPr>
-          <p:cNvPr id="16" name="Text 14"/>
+          <p:cNvPr id="15" name="Text 13"/>
           <p:cNvSpPr/>
           <p:nvPr/>
         </p:nvSpPr>
@@ -16123,9 +16623,9 @@
                 <a:solidFill>
                   <a:srgbClr val="F0F0F0"/>
                 </a:solidFill>
-                <a:latin typeface="Georgia" pitchFamily="34" charset="0"/>
-                <a:ea typeface="Georgia" pitchFamily="34" charset="-122"/>
-                <a:cs typeface="Georgia" pitchFamily="34" charset="-120"/>
+                <a:latin typeface="Palatino Linotype" pitchFamily="34" charset="0"/>
+                <a:ea typeface="Palatino Linotype" pitchFamily="34" charset="-122"/>
+                <a:cs typeface="Palatino Linotype" pitchFamily="34" charset="-120"/>
               </a:rPr>
               <a:t>Code</a:t>
             </a:r>
@@ -16135,7 +16635,7 @@
       </p:sp>
       <p:sp>
         <p:nvSpPr>
-          <p:cNvPr id="17" name="Shape 15"/>
+          <p:cNvPr id="16" name="Shape 14"/>
           <p:cNvSpPr/>
           <p:nvPr/>
         </p:nvSpPr>
@@ -16155,7 +16655,7 @@
       </p:sp>
       <p:sp>
         <p:nvSpPr>
-          <p:cNvPr id="18" name="Text 16"/>
+          <p:cNvPr id="17" name="Text 15"/>
           <p:cNvSpPr/>
           <p:nvPr/>
         </p:nvSpPr>
@@ -16211,43 +16711,7 @@
       </p:sp>
       <p:sp>
         <p:nvSpPr>
-          <p:cNvPr id="19" name="Text 17"/>
-          <p:cNvSpPr/>
-          <p:nvPr/>
-        </p:nvSpPr>
-        <p:spPr>
-          <a:xfrm>
-            <a:off x="3429000" y="4983480"/>
-            <a:ext cx="548640" cy="365760"/>
-          </a:xfrm>
-          <a:prstGeom prst="rect">
-            <a:avLst/>
-          </a:prstGeom>
-          <a:noFill/>
-          <a:ln/>
-        </p:spPr>
-        <p:txBody>
-          <a:bodyPr wrap="square" rtlCol="0" anchor="ctr"/>
-          <a:lstStyle/>
-          <a:p>
-            <a:pPr algn="ctr" indent="0" marL="0">
-              <a:buNone/>
-            </a:pPr>
-            <a:r>
-              <a:rPr lang="en-US" sz="1400" dirty="0">
-                <a:solidFill>
-                  <a:srgbClr val="000000"/>
-                </a:solidFill>
-              </a:rPr>
-              <a:t>🔒</a:t>
-            </a:r>
-            <a:endParaRPr lang="en-US" sz="1400" dirty="0"/>
-          </a:p>
-        </p:txBody>
-      </p:sp>
-      <p:sp>
-        <p:nvSpPr>
-          <p:cNvPr id="20" name="Text 18"/>
+          <p:cNvPr id="18" name="Text 16"/>
           <p:cNvSpPr/>
           <p:nvPr/>
         </p:nvSpPr>
@@ -16286,7 +16750,7 @@
       </p:sp>
       <p:sp>
         <p:nvSpPr>
-          <p:cNvPr id="21" name="Shape 19"/>
+          <p:cNvPr id="19" name="Shape 17"/>
           <p:cNvSpPr/>
           <p:nvPr/>
         </p:nvSpPr>
@@ -16313,7 +16777,7 @@
       </p:sp>
       <p:sp>
         <p:nvSpPr>
-          <p:cNvPr id="22" name="Text 20"/>
+          <p:cNvPr id="20" name="Text 18"/>
           <p:cNvSpPr/>
           <p:nvPr/>
         </p:nvSpPr>
@@ -16340,9 +16804,9 @@
                 <a:solidFill>
                   <a:srgbClr val="F0F0F0"/>
                 </a:solidFill>
-                <a:latin typeface="Georgia" pitchFamily="34" charset="0"/>
-                <a:ea typeface="Georgia" pitchFamily="34" charset="-122"/>
-                <a:cs typeface="Georgia" pitchFamily="34" charset="-120"/>
+                <a:latin typeface="Palatino Linotype" pitchFamily="34" charset="0"/>
+                <a:ea typeface="Palatino Linotype" pitchFamily="34" charset="-122"/>
+                <a:cs typeface="Palatino Linotype" pitchFamily="34" charset="-120"/>
               </a:rPr>
               <a:t>Build</a:t>
             </a:r>
@@ -16352,7 +16816,7 @@
       </p:sp>
       <p:sp>
         <p:nvSpPr>
-          <p:cNvPr id="23" name="Shape 21"/>
+          <p:cNvPr id="21" name="Shape 19"/>
           <p:cNvSpPr/>
           <p:nvPr/>
         </p:nvSpPr>
@@ -16372,7 +16836,7 @@
       </p:sp>
       <p:sp>
         <p:nvSpPr>
-          <p:cNvPr id="24" name="Text 22"/>
+          <p:cNvPr id="22" name="Text 20"/>
           <p:cNvSpPr/>
           <p:nvPr/>
         </p:nvSpPr>
@@ -16428,43 +16892,7 @@
       </p:sp>
       <p:sp>
         <p:nvSpPr>
-          <p:cNvPr id="25" name="Text 23"/>
-          <p:cNvSpPr/>
-          <p:nvPr/>
-        </p:nvSpPr>
-        <p:spPr>
-          <a:xfrm>
-            <a:off x="5806440" y="4983480"/>
-            <a:ext cx="548640" cy="365760"/>
-          </a:xfrm>
-          <a:prstGeom prst="rect">
-            <a:avLst/>
-          </a:prstGeom>
-          <a:noFill/>
-          <a:ln/>
-        </p:spPr>
-        <p:txBody>
-          <a:bodyPr wrap="square" rtlCol="0" anchor="ctr"/>
-          <a:lstStyle/>
-          <a:p>
-            <a:pPr algn="ctr" indent="0" marL="0">
-              <a:buNone/>
-            </a:pPr>
-            <a:r>
-              <a:rPr lang="en-US" sz="1400" dirty="0">
-                <a:solidFill>
-                  <a:srgbClr val="000000"/>
-                </a:solidFill>
-              </a:rPr>
-              <a:t>🔒</a:t>
-            </a:r>
-            <a:endParaRPr lang="en-US" sz="1400" dirty="0"/>
-          </a:p>
-        </p:txBody>
-      </p:sp>
-      <p:sp>
-        <p:nvSpPr>
-          <p:cNvPr id="26" name="Text 24"/>
+          <p:cNvPr id="23" name="Text 21"/>
           <p:cNvSpPr/>
           <p:nvPr/>
         </p:nvSpPr>
@@ -16503,7 +16931,7 @@
       </p:sp>
       <p:sp>
         <p:nvSpPr>
-          <p:cNvPr id="27" name="Shape 25"/>
+          <p:cNvPr id="24" name="Shape 22"/>
           <p:cNvSpPr/>
           <p:nvPr/>
         </p:nvSpPr>
@@ -16530,7 +16958,7 @@
       </p:sp>
       <p:sp>
         <p:nvSpPr>
-          <p:cNvPr id="28" name="Text 26"/>
+          <p:cNvPr id="25" name="Text 23"/>
           <p:cNvSpPr/>
           <p:nvPr/>
         </p:nvSpPr>
@@ -16557,9 +16985,9 @@
                 <a:solidFill>
                   <a:srgbClr val="F0F0F0"/>
                 </a:solidFill>
-                <a:latin typeface="Georgia" pitchFamily="34" charset="0"/>
-                <a:ea typeface="Georgia" pitchFamily="34" charset="-122"/>
-                <a:cs typeface="Georgia" pitchFamily="34" charset="-120"/>
+                <a:latin typeface="Palatino Linotype" pitchFamily="34" charset="0"/>
+                <a:ea typeface="Palatino Linotype" pitchFamily="34" charset="-122"/>
+                <a:cs typeface="Palatino Linotype" pitchFamily="34" charset="-120"/>
               </a:rPr>
               <a:t>Test</a:t>
             </a:r>
@@ -16569,7 +16997,7 @@
       </p:sp>
       <p:sp>
         <p:nvSpPr>
-          <p:cNvPr id="29" name="Shape 27"/>
+          <p:cNvPr id="26" name="Shape 24"/>
           <p:cNvSpPr/>
           <p:nvPr/>
         </p:nvSpPr>
@@ -16589,7 +17017,7 @@
       </p:sp>
       <p:sp>
         <p:nvSpPr>
-          <p:cNvPr id="30" name="Text 28"/>
+          <p:cNvPr id="27" name="Text 25"/>
           <p:cNvSpPr/>
           <p:nvPr/>
         </p:nvSpPr>
@@ -16645,43 +17073,7 @@
       </p:sp>
       <p:sp>
         <p:nvSpPr>
-          <p:cNvPr id="31" name="Text 29"/>
-          <p:cNvSpPr/>
-          <p:nvPr/>
-        </p:nvSpPr>
-        <p:spPr>
-          <a:xfrm>
-            <a:off x="8183880" y="4983480"/>
-            <a:ext cx="548640" cy="365760"/>
-          </a:xfrm>
-          <a:prstGeom prst="rect">
-            <a:avLst/>
-          </a:prstGeom>
-          <a:noFill/>
-          <a:ln/>
-        </p:spPr>
-        <p:txBody>
-          <a:bodyPr wrap="square" rtlCol="0" anchor="ctr"/>
-          <a:lstStyle/>
-          <a:p>
-            <a:pPr algn="ctr" indent="0" marL="0">
-              <a:buNone/>
-            </a:pPr>
-            <a:r>
-              <a:rPr lang="en-US" sz="1400" dirty="0">
-                <a:solidFill>
-                  <a:srgbClr val="000000"/>
-                </a:solidFill>
-              </a:rPr>
-              <a:t>🔒</a:t>
-            </a:r>
-            <a:endParaRPr lang="en-US" sz="1400" dirty="0"/>
-          </a:p>
-        </p:txBody>
-      </p:sp>
-      <p:sp>
-        <p:nvSpPr>
-          <p:cNvPr id="32" name="Text 30"/>
+          <p:cNvPr id="28" name="Text 26"/>
           <p:cNvSpPr/>
           <p:nvPr/>
         </p:nvSpPr>
@@ -16720,7 +17112,7 @@
       </p:sp>
       <p:sp>
         <p:nvSpPr>
-          <p:cNvPr id="33" name="Shape 31"/>
+          <p:cNvPr id="29" name="Shape 27"/>
           <p:cNvSpPr/>
           <p:nvPr/>
         </p:nvSpPr>
@@ -16747,7 +17139,7 @@
       </p:sp>
       <p:sp>
         <p:nvSpPr>
-          <p:cNvPr id="34" name="Text 32"/>
+          <p:cNvPr id="30" name="Text 28"/>
           <p:cNvSpPr/>
           <p:nvPr/>
         </p:nvSpPr>
@@ -16774,9 +17166,9 @@
                 <a:solidFill>
                   <a:srgbClr val="F0F0F0"/>
                 </a:solidFill>
-                <a:latin typeface="Georgia" pitchFamily="34" charset="0"/>
-                <a:ea typeface="Georgia" pitchFamily="34" charset="-122"/>
-                <a:cs typeface="Georgia" pitchFamily="34" charset="-120"/>
+                <a:latin typeface="Palatino Linotype" pitchFamily="34" charset="0"/>
+                <a:ea typeface="Palatino Linotype" pitchFamily="34" charset="-122"/>
+                <a:cs typeface="Palatino Linotype" pitchFamily="34" charset="-120"/>
               </a:rPr>
               <a:t>Deploy</a:t>
             </a:r>
@@ -16786,7 +17178,7 @@
       </p:sp>
       <p:sp>
         <p:nvSpPr>
-          <p:cNvPr id="35" name="Shape 33"/>
+          <p:cNvPr id="31" name="Shape 29"/>
           <p:cNvSpPr/>
           <p:nvPr/>
         </p:nvSpPr>
@@ -16806,7 +17198,7 @@
       </p:sp>
       <p:sp>
         <p:nvSpPr>
-          <p:cNvPr id="36" name="Text 34"/>
+          <p:cNvPr id="32" name="Text 30"/>
           <p:cNvSpPr/>
           <p:nvPr/>
         </p:nvSpPr>
@@ -16857,42 +17249,6 @@
               <a:t>Runner</a:t>
             </a:r>
             <a:endParaRPr lang="en-US" sz="1200" dirty="0"/>
-          </a:p>
-        </p:txBody>
-      </p:sp>
-      <p:sp>
-        <p:nvSpPr>
-          <p:cNvPr id="37" name="Text 35"/>
-          <p:cNvSpPr/>
-          <p:nvPr/>
-        </p:nvSpPr>
-        <p:spPr>
-          <a:xfrm>
-            <a:off x="10561320" y="4983480"/>
-            <a:ext cx="548640" cy="365760"/>
-          </a:xfrm>
-          <a:prstGeom prst="rect">
-            <a:avLst/>
-          </a:prstGeom>
-          <a:noFill/>
-          <a:ln/>
-        </p:spPr>
-        <p:txBody>
-          <a:bodyPr wrap="square" rtlCol="0" anchor="ctr"/>
-          <a:lstStyle/>
-          <a:p>
-            <a:pPr algn="ctr" indent="0" marL="0">
-              <a:buNone/>
-            </a:pPr>
-            <a:r>
-              <a:rPr lang="en-US" sz="1400" dirty="0">
-                <a:solidFill>
-                  <a:srgbClr val="000000"/>
-                </a:solidFill>
-              </a:rPr>
-              <a:t>🔒</a:t>
-            </a:r>
-            <a:endParaRPr lang="en-US" sz="1400" dirty="0"/>
           </a:p>
         </p:txBody>
       </p:sp>
@@ -17134,9 +17490,9 @@
                 <a:solidFill>
                   <a:srgbClr val="F0F0F0"/>
                 </a:solidFill>
-                <a:latin typeface="Georgia" pitchFamily="34" charset="0"/>
-                <a:ea typeface="Georgia" pitchFamily="34" charset="-122"/>
-                <a:cs typeface="Georgia" pitchFamily="34" charset="-120"/>
+                <a:latin typeface="Palatino Linotype" pitchFamily="34" charset="0"/>
+                <a:ea typeface="Palatino Linotype" pitchFamily="34" charset="-122"/>
+                <a:cs typeface="Palatino Linotype" pitchFamily="34" charset="-120"/>
               </a:rPr>
               <a:t>Pipeline 11 jobs</a:t>
             </a:r>
@@ -17146,18 +17502,77 @@
       </p:sp>
       <p:sp>
         <p:nvSpPr>
-          <p:cNvPr id="9" name="Shape 7"/>
-          <p:cNvSpPr/>
-          <p:nvPr/>
-        </p:nvSpPr>
-        <p:spPr>
-          <a:xfrm>
-            <a:off x="5394960" y="1188720"/>
-            <a:ext cx="1463040" cy="502920"/>
+          <p:cNvPr id="9" name="Text 7"/>
+          <p:cNvSpPr/>
+          <p:nvPr/>
+        </p:nvSpPr>
+        <p:spPr>
+          <a:xfrm>
+            <a:off x="457200" y="1261872"/>
+            <a:ext cx="1508760" cy="274320"/>
+          </a:xfrm>
+          <a:prstGeom prst="rect">
+            <a:avLst/>
+          </a:prstGeom>
+          <a:noFill/>
+          <a:ln/>
+        </p:spPr>
+        <p:txBody>
+          <a:bodyPr wrap="square" rtlCol="0" anchor="ctr"/>
+          <a:lstStyle/>
+          <a:p>
+            <a:pPr algn="ctr" indent="0" marL="0">
+              <a:buNone/>
+            </a:pPr>
+            <a:r>
+              <a:rPr lang="en-US" sz="750" b="1" spc="30" kern="0" dirty="0">
+                <a:solidFill>
+                  <a:srgbClr val="B2B2B2"/>
+                </a:solidFill>
+                <a:latin typeface="Calibri" pitchFamily="34" charset="0"/>
+                <a:ea typeface="Calibri" pitchFamily="34" charset="-122"/>
+                <a:cs typeface="Calibri" pitchFamily="34" charset="-120"/>
+              </a:rPr>
+              <a:t>① INSTALL</a:t>
+            </a:r>
+            <a:endParaRPr lang="en-US" sz="750" dirty="0"/>
+          </a:p>
+        </p:txBody>
+      </p:sp>
+      <p:sp>
+        <p:nvSpPr>
+          <p:cNvPr id="10" name="Shape 8"/>
+          <p:cNvSpPr/>
+          <p:nvPr/>
+        </p:nvSpPr>
+        <p:spPr>
+          <a:xfrm>
+            <a:off x="708660" y="1536192"/>
+            <a:ext cx="1005840" cy="27432"/>
+          </a:xfrm>
+          <a:prstGeom prst="rect">
+            <a:avLst/>
+          </a:prstGeom>
+          <a:solidFill>
+            <a:srgbClr val="C0392B"/>
+          </a:solidFill>
+          <a:ln/>
+        </p:spPr>
+      </p:sp>
+      <p:sp>
+        <p:nvSpPr>
+          <p:cNvPr id="11" name="Shape 9"/>
+          <p:cNvSpPr/>
+          <p:nvPr/>
+        </p:nvSpPr>
+        <p:spPr>
+          <a:xfrm>
+            <a:off x="457200" y="3474720"/>
+            <a:ext cx="1508760" cy="640080"/>
           </a:xfrm>
           <a:prstGeom prst="rect">
             <a:avLst>
-              <a:gd name="adj" fmla="val 14545"/>
+              <a:gd name="adj" fmla="val 11429"/>
             </a:avLst>
           </a:prstGeom>
           <a:solidFill>
@@ -17173,14 +17588,14 @@
       </p:sp>
       <p:sp>
         <p:nvSpPr>
-          <p:cNvPr id="10" name="Text 8"/>
-          <p:cNvSpPr/>
-          <p:nvPr/>
-        </p:nvSpPr>
-        <p:spPr>
-          <a:xfrm>
-            <a:off x="5394960" y="1234440"/>
-            <a:ext cx="1463040" cy="411480"/>
+          <p:cNvPr id="12" name="Text 10"/>
+          <p:cNvSpPr/>
+          <p:nvPr/>
+        </p:nvSpPr>
+        <p:spPr>
+          <a:xfrm>
+            <a:off x="457200" y="3502152"/>
+            <a:ext cx="1508760" cy="585216"/>
           </a:xfrm>
           <a:prstGeom prst="rect">
             <a:avLst/>
@@ -17196,7 +17611,7 @@
               <a:buNone/>
             </a:pPr>
             <a:r>
-              <a:rPr lang="en-US" sz="1000" b="1" dirty="0">
+              <a:rPr lang="en-US" sz="900" dirty="0">
                 <a:solidFill>
                   <a:srgbClr val="27AE60"/>
                 </a:solidFill>
@@ -17206,24 +17621,122 @@
               </a:rPr>
               <a:t>install</a:t>
             </a:r>
-            <a:endParaRPr lang="en-US" sz="1000" dirty="0"/>
-          </a:p>
-        </p:txBody>
-      </p:sp>
-      <p:sp>
-        <p:nvSpPr>
-          <p:cNvPr id="11" name="Shape 9"/>
-          <p:cNvSpPr/>
-          <p:nvPr/>
-        </p:nvSpPr>
-        <p:spPr>
-          <a:xfrm>
-            <a:off x="914400" y="2011680"/>
-            <a:ext cx="2286000" cy="594360"/>
+            <a:endParaRPr lang="en-US" sz="900" dirty="0"/>
+          </a:p>
+        </p:txBody>
+      </p:sp>
+      <p:sp>
+        <p:nvSpPr>
+          <p:cNvPr id="13" name="Text 11"/>
+          <p:cNvSpPr/>
+          <p:nvPr/>
+        </p:nvSpPr>
+        <p:spPr>
+          <a:xfrm>
+            <a:off x="1984248" y="3630168"/>
+            <a:ext cx="329184" cy="329184"/>
+          </a:xfrm>
+          <a:prstGeom prst="rect">
+            <a:avLst/>
+          </a:prstGeom>
+          <a:noFill/>
+          <a:ln/>
+        </p:spPr>
+        <p:txBody>
+          <a:bodyPr wrap="square" rtlCol="0" anchor="ctr"/>
+          <a:lstStyle/>
+          <a:p>
+            <a:pPr algn="ctr" indent="0" marL="0">
+              <a:buNone/>
+            </a:pPr>
+            <a:r>
+              <a:rPr lang="en-US" sz="1600" b="1" dirty="0">
+                <a:solidFill>
+                  <a:srgbClr val="C0392B"/>
+                </a:solidFill>
+                <a:latin typeface="Calibri" pitchFamily="34" charset="0"/>
+                <a:ea typeface="Calibri" pitchFamily="34" charset="-122"/>
+                <a:cs typeface="Calibri" pitchFamily="34" charset="-120"/>
+              </a:rPr>
+              <a:t>→</a:t>
+            </a:r>
+            <a:endParaRPr lang="en-US" sz="1600" dirty="0"/>
+          </a:p>
+        </p:txBody>
+      </p:sp>
+      <p:sp>
+        <p:nvSpPr>
+          <p:cNvPr id="14" name="Text 12"/>
+          <p:cNvSpPr/>
+          <p:nvPr/>
+        </p:nvSpPr>
+        <p:spPr>
+          <a:xfrm>
+            <a:off x="2331720" y="1261872"/>
+            <a:ext cx="1508760" cy="274320"/>
+          </a:xfrm>
+          <a:prstGeom prst="rect">
+            <a:avLst/>
+          </a:prstGeom>
+          <a:noFill/>
+          <a:ln/>
+        </p:spPr>
+        <p:txBody>
+          <a:bodyPr wrap="square" rtlCol="0" anchor="ctr"/>
+          <a:lstStyle/>
+          <a:p>
+            <a:pPr algn="ctr" indent="0" marL="0">
+              <a:buNone/>
+            </a:pPr>
+            <a:r>
+              <a:rPr lang="en-US" sz="750" b="1" spc="30" kern="0" dirty="0">
+                <a:solidFill>
+                  <a:srgbClr val="B2B2B2"/>
+                </a:solidFill>
+                <a:latin typeface="Calibri" pitchFamily="34" charset="0"/>
+                <a:ea typeface="Calibri" pitchFamily="34" charset="-122"/>
+                <a:cs typeface="Calibri" pitchFamily="34" charset="-120"/>
+              </a:rPr>
+              <a:t>② SECURITY · TESTS</a:t>
+            </a:r>
+            <a:endParaRPr lang="en-US" sz="750" dirty="0"/>
+          </a:p>
+        </p:txBody>
+      </p:sp>
+      <p:sp>
+        <p:nvSpPr>
+          <p:cNvPr id="15" name="Shape 13"/>
+          <p:cNvSpPr/>
+          <p:nvPr/>
+        </p:nvSpPr>
+        <p:spPr>
+          <a:xfrm>
+            <a:off x="2583180" y="1536192"/>
+            <a:ext cx="1005840" cy="27432"/>
+          </a:xfrm>
+          <a:prstGeom prst="rect">
+            <a:avLst/>
+          </a:prstGeom>
+          <a:solidFill>
+            <a:srgbClr val="C0392B"/>
+          </a:solidFill>
+          <a:ln/>
+        </p:spPr>
+      </p:sp>
+      <p:sp>
+        <p:nvSpPr>
+          <p:cNvPr id="16" name="Shape 14"/>
+          <p:cNvSpPr/>
+          <p:nvPr/>
+        </p:nvSpPr>
+        <p:spPr>
+          <a:xfrm>
+            <a:off x="2331720" y="2377440"/>
+            <a:ext cx="1508760" cy="640080"/>
           </a:xfrm>
           <a:prstGeom prst="rect">
             <a:avLst>
-              <a:gd name="adj" fmla="val 12308"/>
+              <a:gd name="adj" fmla="val 11429"/>
             </a:avLst>
           </a:prstGeom>
           <a:solidFill>
@@ -17239,14 +17752,14 @@
       </p:sp>
       <p:sp>
         <p:nvSpPr>
-          <p:cNvPr id="12" name="Text 10"/>
-          <p:cNvSpPr/>
-          <p:nvPr/>
-        </p:nvSpPr>
-        <p:spPr>
-          <a:xfrm>
-            <a:off x="914400" y="2057400"/>
-            <a:ext cx="2286000" cy="502920"/>
+          <p:cNvPr id="17" name="Text 15"/>
+          <p:cNvSpPr/>
+          <p:nvPr/>
+        </p:nvSpPr>
+        <p:spPr>
+          <a:xfrm>
+            <a:off x="2331720" y="2404872"/>
+            <a:ext cx="1508760" cy="585216"/>
           </a:xfrm>
           <a:prstGeom prst="rect">
             <a:avLst/>
@@ -17295,18 +17808,18 @@
       </p:sp>
       <p:sp>
         <p:nvSpPr>
-          <p:cNvPr id="13" name="Shape 11"/>
-          <p:cNvSpPr/>
-          <p:nvPr/>
-        </p:nvSpPr>
-        <p:spPr>
-          <a:xfrm>
-            <a:off x="3657600" y="2011680"/>
-            <a:ext cx="2286000" cy="594360"/>
+          <p:cNvPr id="18" name="Shape 16"/>
+          <p:cNvSpPr/>
+          <p:nvPr/>
+        </p:nvSpPr>
+        <p:spPr>
+          <a:xfrm>
+            <a:off x="2331720" y="3108960"/>
+            <a:ext cx="1508760" cy="640080"/>
           </a:xfrm>
           <a:prstGeom prst="rect">
             <a:avLst>
-              <a:gd name="adj" fmla="val 12308"/>
+              <a:gd name="adj" fmla="val 11429"/>
             </a:avLst>
           </a:prstGeom>
           <a:solidFill>
@@ -17322,14 +17835,14 @@
       </p:sp>
       <p:sp>
         <p:nvSpPr>
-          <p:cNvPr id="14" name="Text 12"/>
-          <p:cNvSpPr/>
-          <p:nvPr/>
-        </p:nvSpPr>
-        <p:spPr>
-          <a:xfrm>
-            <a:off x="3657600" y="2057400"/>
-            <a:ext cx="2286000" cy="502920"/>
+          <p:cNvPr id="19" name="Text 17"/>
+          <p:cNvSpPr/>
+          <p:nvPr/>
+        </p:nvSpPr>
+        <p:spPr>
+          <a:xfrm>
+            <a:off x="2331720" y="3136392"/>
+            <a:ext cx="1508760" cy="585216"/>
           </a:xfrm>
           <a:prstGeom prst="rect">
             <a:avLst/>
@@ -17378,18 +17891,18 @@
       </p:sp>
       <p:sp>
         <p:nvSpPr>
-          <p:cNvPr id="15" name="Shape 13"/>
-          <p:cNvSpPr/>
-          <p:nvPr/>
-        </p:nvSpPr>
-        <p:spPr>
-          <a:xfrm>
-            <a:off x="6400800" y="2011680"/>
-            <a:ext cx="2286000" cy="594360"/>
+          <p:cNvPr id="20" name="Shape 18"/>
+          <p:cNvSpPr/>
+          <p:nvPr/>
+        </p:nvSpPr>
+        <p:spPr>
+          <a:xfrm>
+            <a:off x="2331720" y="3840480"/>
+            <a:ext cx="1508760" cy="640080"/>
           </a:xfrm>
           <a:prstGeom prst="rect">
             <a:avLst>
-              <a:gd name="adj" fmla="val 12308"/>
+              <a:gd name="adj" fmla="val 11429"/>
             </a:avLst>
           </a:prstGeom>
           <a:solidFill>
@@ -17405,14 +17918,14 @@
       </p:sp>
       <p:sp>
         <p:nvSpPr>
-          <p:cNvPr id="16" name="Text 14"/>
-          <p:cNvSpPr/>
-          <p:nvPr/>
-        </p:nvSpPr>
-        <p:spPr>
-          <a:xfrm>
-            <a:off x="6400800" y="2057400"/>
-            <a:ext cx="2286000" cy="502920"/>
+          <p:cNvPr id="21" name="Text 19"/>
+          <p:cNvSpPr/>
+          <p:nvPr/>
+        </p:nvSpPr>
+        <p:spPr>
+          <a:xfrm>
+            <a:off x="2331720" y="3867912"/>
+            <a:ext cx="1508760" cy="585216"/>
           </a:xfrm>
           <a:prstGeom prst="rect">
             <a:avLst/>
@@ -17461,18 +17974,18 @@
       </p:sp>
       <p:sp>
         <p:nvSpPr>
-          <p:cNvPr id="17" name="Shape 15"/>
-          <p:cNvSpPr/>
-          <p:nvPr/>
-        </p:nvSpPr>
-        <p:spPr>
-          <a:xfrm>
-            <a:off x="9144000" y="2011680"/>
-            <a:ext cx="2286000" cy="594360"/>
+          <p:cNvPr id="22" name="Shape 20"/>
+          <p:cNvSpPr/>
+          <p:nvPr/>
+        </p:nvSpPr>
+        <p:spPr>
+          <a:xfrm>
+            <a:off x="2331720" y="4572000"/>
+            <a:ext cx="1508760" cy="640080"/>
           </a:xfrm>
           <a:prstGeom prst="rect">
             <a:avLst>
-              <a:gd name="adj" fmla="val 12308"/>
+              <a:gd name="adj" fmla="val 11429"/>
             </a:avLst>
           </a:prstGeom>
           <a:solidFill>
@@ -17488,14 +18001,14 @@
       </p:sp>
       <p:sp>
         <p:nvSpPr>
-          <p:cNvPr id="18" name="Text 16"/>
-          <p:cNvSpPr/>
-          <p:nvPr/>
-        </p:nvSpPr>
-        <p:spPr>
-          <a:xfrm>
-            <a:off x="9144000" y="2057400"/>
-            <a:ext cx="2286000" cy="502920"/>
+          <p:cNvPr id="23" name="Text 21"/>
+          <p:cNvSpPr/>
+          <p:nvPr/>
+        </p:nvSpPr>
+        <p:spPr>
+          <a:xfrm>
+            <a:off x="2331720" y="4599432"/>
+            <a:ext cx="1508760" cy="585216"/>
           </a:xfrm>
           <a:prstGeom prst="rect">
             <a:avLst/>
@@ -17544,14 +18057,14 @@
       </p:sp>
       <p:sp>
         <p:nvSpPr>
-          <p:cNvPr id="19" name="Text 17"/>
-          <p:cNvSpPr/>
-          <p:nvPr/>
-        </p:nvSpPr>
-        <p:spPr>
-          <a:xfrm>
-            <a:off x="5943600" y="1691640"/>
-            <a:ext cx="457200" cy="365760"/>
+          <p:cNvPr id="24" name="Text 22"/>
+          <p:cNvSpPr/>
+          <p:nvPr/>
+        </p:nvSpPr>
+        <p:spPr>
+          <a:xfrm>
+            <a:off x="3858768" y="3630168"/>
+            <a:ext cx="329184" cy="329184"/>
           </a:xfrm>
           <a:prstGeom prst="rect">
             <a:avLst/>
@@ -17567,31 +18080,93 @@
               <a:buNone/>
             </a:pPr>
             <a:r>
-              <a:rPr lang="en-US" sz="1400" dirty="0">
+              <a:rPr lang="en-US" sz="1600" b="1" dirty="0">
+                <a:solidFill>
+                  <a:srgbClr val="C0392B"/>
+                </a:solidFill>
+                <a:latin typeface="Calibri" pitchFamily="34" charset="0"/>
+                <a:ea typeface="Calibri" pitchFamily="34" charset="-122"/>
+                <a:cs typeface="Calibri" pitchFamily="34" charset="-120"/>
+              </a:rPr>
+              <a:t>→</a:t>
+            </a:r>
+            <a:endParaRPr lang="en-US" sz="1600" dirty="0"/>
+          </a:p>
+        </p:txBody>
+      </p:sp>
+      <p:sp>
+        <p:nvSpPr>
+          <p:cNvPr id="25" name="Text 23"/>
+          <p:cNvSpPr/>
+          <p:nvPr/>
+        </p:nvSpPr>
+        <p:spPr>
+          <a:xfrm>
+            <a:off x="4206240" y="1261872"/>
+            <a:ext cx="1508760" cy="274320"/>
+          </a:xfrm>
+          <a:prstGeom prst="rect">
+            <a:avLst/>
+          </a:prstGeom>
+          <a:noFill/>
+          <a:ln/>
+        </p:spPr>
+        <p:txBody>
+          <a:bodyPr wrap="square" rtlCol="0" anchor="ctr"/>
+          <a:lstStyle/>
+          <a:p>
+            <a:pPr algn="ctr" indent="0" marL="0">
+              <a:buNone/>
+            </a:pPr>
+            <a:r>
+              <a:rPr lang="en-US" sz="750" b="1" spc="30" kern="0" dirty="0">
                 <a:solidFill>
                   <a:srgbClr val="B2B2B2"/>
                 </a:solidFill>
-              </a:rPr>
-              <a:t>↓</a:t>
-            </a:r>
-            <a:endParaRPr lang="en-US" sz="1400" dirty="0"/>
-          </a:p>
-        </p:txBody>
-      </p:sp>
-      <p:sp>
-        <p:nvSpPr>
-          <p:cNvPr id="20" name="Shape 18"/>
-          <p:cNvSpPr/>
-          <p:nvPr/>
-        </p:nvSpPr>
-        <p:spPr>
-          <a:xfrm>
-            <a:off x="2286000" y="2880360"/>
-            <a:ext cx="2286000" cy="594360"/>
+                <a:latin typeface="Calibri" pitchFamily="34" charset="0"/>
+                <a:ea typeface="Calibri" pitchFamily="34" charset="-122"/>
+                <a:cs typeface="Calibri" pitchFamily="34" charset="-120"/>
+              </a:rPr>
+              <a:t>③ QUALITY</a:t>
+            </a:r>
+            <a:endParaRPr lang="en-US" sz="750" dirty="0"/>
+          </a:p>
+        </p:txBody>
+      </p:sp>
+      <p:sp>
+        <p:nvSpPr>
+          <p:cNvPr id="26" name="Shape 24"/>
+          <p:cNvSpPr/>
+          <p:nvPr/>
+        </p:nvSpPr>
+        <p:spPr>
+          <a:xfrm>
+            <a:off x="4457700" y="1536192"/>
+            <a:ext cx="1005840" cy="27432"/>
+          </a:xfrm>
+          <a:prstGeom prst="rect">
+            <a:avLst/>
+          </a:prstGeom>
+          <a:solidFill>
+            <a:srgbClr val="C0392B"/>
+          </a:solidFill>
+          <a:ln/>
+        </p:spPr>
+      </p:sp>
+      <p:sp>
+        <p:nvSpPr>
+          <p:cNvPr id="27" name="Shape 25"/>
+          <p:cNvSpPr/>
+          <p:nvPr/>
+        </p:nvSpPr>
+        <p:spPr>
+          <a:xfrm>
+            <a:off x="4206240" y="3108960"/>
+            <a:ext cx="1508760" cy="640080"/>
           </a:xfrm>
           <a:prstGeom prst="rect">
             <a:avLst>
-              <a:gd name="adj" fmla="val 12308"/>
+              <a:gd name="adj" fmla="val 11429"/>
             </a:avLst>
           </a:prstGeom>
           <a:solidFill>
@@ -17607,14 +18182,14 @@
       </p:sp>
       <p:sp>
         <p:nvSpPr>
-          <p:cNvPr id="21" name="Text 19"/>
-          <p:cNvSpPr/>
-          <p:nvPr/>
-        </p:nvSpPr>
-        <p:spPr>
-          <a:xfrm>
-            <a:off x="2286000" y="2926080"/>
-            <a:ext cx="2286000" cy="502920"/>
+          <p:cNvPr id="28" name="Text 26"/>
+          <p:cNvSpPr/>
+          <p:nvPr/>
+        </p:nvSpPr>
+        <p:spPr>
+          <a:xfrm>
+            <a:off x="4206240" y="3136392"/>
+            <a:ext cx="1508760" cy="585216"/>
           </a:xfrm>
           <a:prstGeom prst="rect">
             <a:avLst/>
@@ -17663,18 +18238,18 @@
       </p:sp>
       <p:sp>
         <p:nvSpPr>
-          <p:cNvPr id="22" name="Shape 20"/>
-          <p:cNvSpPr/>
-          <p:nvPr/>
-        </p:nvSpPr>
-        <p:spPr>
-          <a:xfrm>
-            <a:off x="6583680" y="2880360"/>
-            <a:ext cx="2286000" cy="594360"/>
+          <p:cNvPr id="29" name="Shape 27"/>
+          <p:cNvSpPr/>
+          <p:nvPr/>
+        </p:nvSpPr>
+        <p:spPr>
+          <a:xfrm>
+            <a:off x="4206240" y="3840480"/>
+            <a:ext cx="1508760" cy="640080"/>
           </a:xfrm>
           <a:prstGeom prst="rect">
             <a:avLst>
-              <a:gd name="adj" fmla="val 12308"/>
+              <a:gd name="adj" fmla="val 11429"/>
             </a:avLst>
           </a:prstGeom>
           <a:solidFill>
@@ -17690,14 +18265,14 @@
       </p:sp>
       <p:sp>
         <p:nvSpPr>
-          <p:cNvPr id="23" name="Text 21"/>
-          <p:cNvSpPr/>
-          <p:nvPr/>
-        </p:nvSpPr>
-        <p:spPr>
-          <a:xfrm>
-            <a:off x="6583680" y="2926080"/>
-            <a:ext cx="2286000" cy="502920"/>
+          <p:cNvPr id="30" name="Text 28"/>
+          <p:cNvSpPr/>
+          <p:nvPr/>
+        </p:nvSpPr>
+        <p:spPr>
+          <a:xfrm>
+            <a:off x="4206240" y="3867912"/>
+            <a:ext cx="1508760" cy="585216"/>
           </a:xfrm>
           <a:prstGeom prst="rect">
             <a:avLst/>
@@ -17746,18 +18321,116 @@
       </p:sp>
       <p:sp>
         <p:nvSpPr>
-          <p:cNvPr id="24" name="Shape 22"/>
-          <p:cNvSpPr/>
-          <p:nvPr/>
-        </p:nvSpPr>
-        <p:spPr>
-          <a:xfrm>
-            <a:off x="5394960" y="3749040"/>
-            <a:ext cx="1463040" cy="548640"/>
+          <p:cNvPr id="31" name="Text 29"/>
+          <p:cNvSpPr/>
+          <p:nvPr/>
+        </p:nvSpPr>
+        <p:spPr>
+          <a:xfrm>
+            <a:off x="5733288" y="3630168"/>
+            <a:ext cx="329184" cy="329184"/>
+          </a:xfrm>
+          <a:prstGeom prst="rect">
+            <a:avLst/>
+          </a:prstGeom>
+          <a:noFill/>
+          <a:ln/>
+        </p:spPr>
+        <p:txBody>
+          <a:bodyPr wrap="square" rtlCol="0" anchor="ctr"/>
+          <a:lstStyle/>
+          <a:p>
+            <a:pPr algn="ctr" indent="0" marL="0">
+              <a:buNone/>
+            </a:pPr>
+            <a:r>
+              <a:rPr lang="en-US" sz="1600" b="1" dirty="0">
+                <a:solidFill>
+                  <a:srgbClr val="C0392B"/>
+                </a:solidFill>
+                <a:latin typeface="Calibri" pitchFamily="34" charset="0"/>
+                <a:ea typeface="Calibri" pitchFamily="34" charset="-122"/>
+                <a:cs typeface="Calibri" pitchFamily="34" charset="-120"/>
+              </a:rPr>
+              <a:t>→</a:t>
+            </a:r>
+            <a:endParaRPr lang="en-US" sz="1600" dirty="0"/>
+          </a:p>
+        </p:txBody>
+      </p:sp>
+      <p:sp>
+        <p:nvSpPr>
+          <p:cNvPr id="32" name="Text 30"/>
+          <p:cNvSpPr/>
+          <p:nvPr/>
+        </p:nvSpPr>
+        <p:spPr>
+          <a:xfrm>
+            <a:off x="6080760" y="1261872"/>
+            <a:ext cx="1508760" cy="274320"/>
+          </a:xfrm>
+          <a:prstGeom prst="rect">
+            <a:avLst/>
+          </a:prstGeom>
+          <a:noFill/>
+          <a:ln/>
+        </p:spPr>
+        <p:txBody>
+          <a:bodyPr wrap="square" rtlCol="0" anchor="ctr"/>
+          <a:lstStyle/>
+          <a:p>
+            <a:pPr algn="ctr" indent="0" marL="0">
+              <a:buNone/>
+            </a:pPr>
+            <a:r>
+              <a:rPr lang="en-US" sz="750" b="1" spc="30" kern="0" dirty="0">
+                <a:solidFill>
+                  <a:srgbClr val="B2B2B2"/>
+                </a:solidFill>
+                <a:latin typeface="Calibri" pitchFamily="34" charset="0"/>
+                <a:ea typeface="Calibri" pitchFamily="34" charset="-122"/>
+                <a:cs typeface="Calibri" pitchFamily="34" charset="-120"/>
+              </a:rPr>
+              <a:t>④ BUILD</a:t>
+            </a:r>
+            <a:endParaRPr lang="en-US" sz="750" dirty="0"/>
+          </a:p>
+        </p:txBody>
+      </p:sp>
+      <p:sp>
+        <p:nvSpPr>
+          <p:cNvPr id="33" name="Shape 31"/>
+          <p:cNvSpPr/>
+          <p:nvPr/>
+        </p:nvSpPr>
+        <p:spPr>
+          <a:xfrm>
+            <a:off x="6332220" y="1536192"/>
+            <a:ext cx="1005840" cy="27432"/>
+          </a:xfrm>
+          <a:prstGeom prst="rect">
+            <a:avLst/>
+          </a:prstGeom>
+          <a:solidFill>
+            <a:srgbClr val="C0392B"/>
+          </a:solidFill>
+          <a:ln/>
+        </p:spPr>
+      </p:sp>
+      <p:sp>
+        <p:nvSpPr>
+          <p:cNvPr id="34" name="Shape 32"/>
+          <p:cNvSpPr/>
+          <p:nvPr/>
+        </p:nvSpPr>
+        <p:spPr>
+          <a:xfrm>
+            <a:off x="6080760" y="3474720"/>
+            <a:ext cx="1508760" cy="640080"/>
           </a:xfrm>
           <a:prstGeom prst="rect">
             <a:avLst>
-              <a:gd name="adj" fmla="val 13333"/>
+              <a:gd name="adj" fmla="val 11429"/>
             </a:avLst>
           </a:prstGeom>
           <a:solidFill>
@@ -17773,14 +18446,14 @@
       </p:sp>
       <p:sp>
         <p:nvSpPr>
-          <p:cNvPr id="25" name="Text 23"/>
-          <p:cNvSpPr/>
-          <p:nvPr/>
-        </p:nvSpPr>
-        <p:spPr>
-          <a:xfrm>
-            <a:off x="5394960" y="3767328"/>
-            <a:ext cx="1463040" cy="502920"/>
+          <p:cNvPr id="35" name="Text 33"/>
+          <p:cNvSpPr/>
+          <p:nvPr/>
+        </p:nvSpPr>
+        <p:spPr>
+          <a:xfrm>
+            <a:off x="6080760" y="3502152"/>
+            <a:ext cx="1508760" cy="585216"/>
           </a:xfrm>
           <a:prstGeom prst="rect">
             <a:avLst/>
@@ -17796,7 +18469,7 @@
               <a:buNone/>
             </a:pPr>
             <a:r>
-              <a:rPr lang="en-US" sz="800" dirty="0">
+              <a:rPr lang="en-US" sz="900" dirty="0">
                 <a:solidFill>
                   <a:srgbClr val="F39C12"/>
                 </a:solidFill>
@@ -17806,14 +18479,14 @@
               </a:rPr>
               <a:t>build-image</a:t>
             </a:r>
-            <a:endParaRPr lang="en-US" sz="800" dirty="0"/>
+            <a:endParaRPr lang="en-US" sz="900" dirty="0"/>
           </a:p>
           <a:p>
             <a:pPr algn="ctr" indent="0" marL="0">
               <a:buNone/>
             </a:pPr>
             <a:r>
-              <a:rPr lang="en-US" sz="800" dirty="0">
+              <a:rPr lang="en-US" sz="900" dirty="0">
                 <a:solidFill>
                   <a:srgbClr val="F39C12"/>
                 </a:solidFill>
@@ -17823,24 +18496,122 @@
               </a:rPr>
               <a:t>🖥 self-hosted</a:t>
             </a:r>
-            <a:endParaRPr lang="en-US" sz="800" dirty="0"/>
-          </a:p>
-        </p:txBody>
-      </p:sp>
-      <p:sp>
-        <p:nvSpPr>
-          <p:cNvPr id="26" name="Shape 24"/>
-          <p:cNvSpPr/>
-          <p:nvPr/>
-        </p:nvSpPr>
-        <p:spPr>
-          <a:xfrm>
-            <a:off x="5394960" y="4572000"/>
-            <a:ext cx="1463040" cy="548640"/>
+            <a:endParaRPr lang="en-US" sz="900" dirty="0"/>
+          </a:p>
+        </p:txBody>
+      </p:sp>
+      <p:sp>
+        <p:nvSpPr>
+          <p:cNvPr id="36" name="Text 34"/>
+          <p:cNvSpPr/>
+          <p:nvPr/>
+        </p:nvSpPr>
+        <p:spPr>
+          <a:xfrm>
+            <a:off x="7607808" y="3630168"/>
+            <a:ext cx="329184" cy="329184"/>
+          </a:xfrm>
+          <a:prstGeom prst="rect">
+            <a:avLst/>
+          </a:prstGeom>
+          <a:noFill/>
+          <a:ln/>
+        </p:spPr>
+        <p:txBody>
+          <a:bodyPr wrap="square" rtlCol="0" anchor="ctr"/>
+          <a:lstStyle/>
+          <a:p>
+            <a:pPr algn="ctr" indent="0" marL="0">
+              <a:buNone/>
+            </a:pPr>
+            <a:r>
+              <a:rPr lang="en-US" sz="1600" b="1" dirty="0">
+                <a:solidFill>
+                  <a:srgbClr val="C0392B"/>
+                </a:solidFill>
+                <a:latin typeface="Calibri" pitchFamily="34" charset="0"/>
+                <a:ea typeface="Calibri" pitchFamily="34" charset="-122"/>
+                <a:cs typeface="Calibri" pitchFamily="34" charset="-120"/>
+              </a:rPr>
+              <a:t>→</a:t>
+            </a:r>
+            <a:endParaRPr lang="en-US" sz="1600" dirty="0"/>
+          </a:p>
+        </p:txBody>
+      </p:sp>
+      <p:sp>
+        <p:nvSpPr>
+          <p:cNvPr id="37" name="Text 35"/>
+          <p:cNvSpPr/>
+          <p:nvPr/>
+        </p:nvSpPr>
+        <p:spPr>
+          <a:xfrm>
+            <a:off x="7955280" y="1261872"/>
+            <a:ext cx="1508760" cy="274320"/>
+          </a:xfrm>
+          <a:prstGeom prst="rect">
+            <a:avLst/>
+          </a:prstGeom>
+          <a:noFill/>
+          <a:ln/>
+        </p:spPr>
+        <p:txBody>
+          <a:bodyPr wrap="square" rtlCol="0" anchor="ctr"/>
+          <a:lstStyle/>
+          <a:p>
+            <a:pPr algn="ctr" indent="0" marL="0">
+              <a:buNone/>
+            </a:pPr>
+            <a:r>
+              <a:rPr lang="en-US" sz="750" b="1" spc="30" kern="0" dirty="0">
+                <a:solidFill>
+                  <a:srgbClr val="B2B2B2"/>
+                </a:solidFill>
+                <a:latin typeface="Calibri" pitchFamily="34" charset="0"/>
+                <a:ea typeface="Calibri" pitchFamily="34" charset="-122"/>
+                <a:cs typeface="Calibri" pitchFamily="34" charset="-120"/>
+              </a:rPr>
+              <a:t>⑤ SCAN</a:t>
+            </a:r>
+            <a:endParaRPr lang="en-US" sz="750" dirty="0"/>
+          </a:p>
+        </p:txBody>
+      </p:sp>
+      <p:sp>
+        <p:nvSpPr>
+          <p:cNvPr id="38" name="Shape 36"/>
+          <p:cNvSpPr/>
+          <p:nvPr/>
+        </p:nvSpPr>
+        <p:spPr>
+          <a:xfrm>
+            <a:off x="8206740" y="1536192"/>
+            <a:ext cx="1005840" cy="27432"/>
+          </a:xfrm>
+          <a:prstGeom prst="rect">
+            <a:avLst/>
+          </a:prstGeom>
+          <a:solidFill>
+            <a:srgbClr val="C0392B"/>
+          </a:solidFill>
+          <a:ln/>
+        </p:spPr>
+      </p:sp>
+      <p:sp>
+        <p:nvSpPr>
+          <p:cNvPr id="39" name="Shape 37"/>
+          <p:cNvSpPr/>
+          <p:nvPr/>
+        </p:nvSpPr>
+        <p:spPr>
+          <a:xfrm>
+            <a:off x="7955280" y="3474720"/>
+            <a:ext cx="1508760" cy="640080"/>
           </a:xfrm>
           <a:prstGeom prst="rect">
             <a:avLst>
-              <a:gd name="adj" fmla="val 13333"/>
+              <a:gd name="adj" fmla="val 11429"/>
             </a:avLst>
           </a:prstGeom>
           <a:solidFill>
@@ -17856,14 +18627,14 @@
       </p:sp>
       <p:sp>
         <p:nvSpPr>
-          <p:cNvPr id="27" name="Text 25"/>
-          <p:cNvSpPr/>
-          <p:nvPr/>
-        </p:nvSpPr>
-        <p:spPr>
-          <a:xfrm>
-            <a:off x="5394960" y="4590288"/>
-            <a:ext cx="1463040" cy="502920"/>
+          <p:cNvPr id="40" name="Text 38"/>
+          <p:cNvSpPr/>
+          <p:nvPr/>
+        </p:nvSpPr>
+        <p:spPr>
+          <a:xfrm>
+            <a:off x="7955280" y="3502152"/>
+            <a:ext cx="1508760" cy="585216"/>
           </a:xfrm>
           <a:prstGeom prst="rect">
             <a:avLst/>
@@ -17879,7 +18650,7 @@
               <a:buNone/>
             </a:pPr>
             <a:r>
-              <a:rPr lang="en-US" sz="800" dirty="0">
+              <a:rPr lang="en-US" sz="900" dirty="0">
                 <a:solidFill>
                   <a:srgbClr val="E74C3C"/>
                 </a:solidFill>
@@ -17889,14 +18660,14 @@
               </a:rPr>
               <a:t>trivy</a:t>
             </a:r>
-            <a:endParaRPr lang="en-US" sz="800" dirty="0"/>
+            <a:endParaRPr lang="en-US" sz="900" dirty="0"/>
           </a:p>
           <a:p>
             <a:pPr algn="ctr" indent="0" marL="0">
               <a:buNone/>
             </a:pPr>
             <a:r>
-              <a:rPr lang="en-US" sz="800" dirty="0">
+              <a:rPr lang="en-US" sz="900" dirty="0">
                 <a:solidFill>
                   <a:srgbClr val="E74C3C"/>
                 </a:solidFill>
@@ -17906,24 +18677,122 @@
               </a:rPr>
               <a:t>image-scan</a:t>
             </a:r>
-            <a:endParaRPr lang="en-US" sz="800" dirty="0"/>
-          </a:p>
-        </p:txBody>
-      </p:sp>
-      <p:sp>
-        <p:nvSpPr>
-          <p:cNvPr id="28" name="Shape 26"/>
-          <p:cNvSpPr/>
-          <p:nvPr/>
-        </p:nvSpPr>
-        <p:spPr>
-          <a:xfrm>
-            <a:off x="3200400" y="5440680"/>
-            <a:ext cx="2286000" cy="685800"/>
+            <a:endParaRPr lang="en-US" sz="900" dirty="0"/>
+          </a:p>
+        </p:txBody>
+      </p:sp>
+      <p:sp>
+        <p:nvSpPr>
+          <p:cNvPr id="41" name="Text 39"/>
+          <p:cNvSpPr/>
+          <p:nvPr/>
+        </p:nvSpPr>
+        <p:spPr>
+          <a:xfrm>
+            <a:off x="9482328" y="3630168"/>
+            <a:ext cx="329184" cy="329184"/>
+          </a:xfrm>
+          <a:prstGeom prst="rect">
+            <a:avLst/>
+          </a:prstGeom>
+          <a:noFill/>
+          <a:ln/>
+        </p:spPr>
+        <p:txBody>
+          <a:bodyPr wrap="square" rtlCol="0" anchor="ctr"/>
+          <a:lstStyle/>
+          <a:p>
+            <a:pPr algn="ctr" indent="0" marL="0">
+              <a:buNone/>
+            </a:pPr>
+            <a:r>
+              <a:rPr lang="en-US" sz="1600" b="1" dirty="0">
+                <a:solidFill>
+                  <a:srgbClr val="C0392B"/>
+                </a:solidFill>
+                <a:latin typeface="Calibri" pitchFamily="34" charset="0"/>
+                <a:ea typeface="Calibri" pitchFamily="34" charset="-122"/>
+                <a:cs typeface="Calibri" pitchFamily="34" charset="-120"/>
+              </a:rPr>
+              <a:t>→</a:t>
+            </a:r>
+            <a:endParaRPr lang="en-US" sz="1600" dirty="0"/>
+          </a:p>
+        </p:txBody>
+      </p:sp>
+      <p:sp>
+        <p:nvSpPr>
+          <p:cNvPr id="42" name="Text 40"/>
+          <p:cNvSpPr/>
+          <p:nvPr/>
+        </p:nvSpPr>
+        <p:spPr>
+          <a:xfrm>
+            <a:off x="9829800" y="1261872"/>
+            <a:ext cx="1508760" cy="274320"/>
+          </a:xfrm>
+          <a:prstGeom prst="rect">
+            <a:avLst/>
+          </a:prstGeom>
+          <a:noFill/>
+          <a:ln/>
+        </p:spPr>
+        <p:txBody>
+          <a:bodyPr wrap="square" rtlCol="0" anchor="ctr"/>
+          <a:lstStyle/>
+          <a:p>
+            <a:pPr algn="ctr" indent="0" marL="0">
+              <a:buNone/>
+            </a:pPr>
+            <a:r>
+              <a:rPr lang="en-US" sz="750" b="1" spc="30" kern="0" dirty="0">
+                <a:solidFill>
+                  <a:srgbClr val="B2B2B2"/>
+                </a:solidFill>
+                <a:latin typeface="Calibri" pitchFamily="34" charset="0"/>
+                <a:ea typeface="Calibri" pitchFamily="34" charset="-122"/>
+                <a:cs typeface="Calibri" pitchFamily="34" charset="-120"/>
+              </a:rPr>
+              <a:t>⑥ DEPLOY</a:t>
+            </a:r>
+            <a:endParaRPr lang="en-US" sz="750" dirty="0"/>
+          </a:p>
+        </p:txBody>
+      </p:sp>
+      <p:sp>
+        <p:nvSpPr>
+          <p:cNvPr id="43" name="Shape 41"/>
+          <p:cNvSpPr/>
+          <p:nvPr/>
+        </p:nvSpPr>
+        <p:spPr>
+          <a:xfrm>
+            <a:off x="10081260" y="1536192"/>
+            <a:ext cx="1005840" cy="27432"/>
+          </a:xfrm>
+          <a:prstGeom prst="rect">
+            <a:avLst/>
+          </a:prstGeom>
+          <a:solidFill>
+            <a:srgbClr val="C0392B"/>
+          </a:solidFill>
+          <a:ln/>
+        </p:spPr>
+      </p:sp>
+      <p:sp>
+        <p:nvSpPr>
+          <p:cNvPr id="44" name="Shape 42"/>
+          <p:cNvSpPr/>
+          <p:nvPr/>
+        </p:nvSpPr>
+        <p:spPr>
+          <a:xfrm>
+            <a:off x="9829800" y="3108960"/>
+            <a:ext cx="1508760" cy="640080"/>
           </a:xfrm>
           <a:prstGeom prst="rect">
             <a:avLst>
-              <a:gd name="adj" fmla="val 10667"/>
+              <a:gd name="adj" fmla="val 11429"/>
             </a:avLst>
           </a:prstGeom>
           <a:solidFill>
@@ -17939,14 +18808,14 @@
       </p:sp>
       <p:sp>
         <p:nvSpPr>
-          <p:cNvPr id="29" name="Text 27"/>
-          <p:cNvSpPr/>
-          <p:nvPr/>
-        </p:nvSpPr>
-        <p:spPr>
-          <a:xfrm>
-            <a:off x="3200400" y="5458968"/>
-            <a:ext cx="2286000" cy="658368"/>
+          <p:cNvPr id="45" name="Text 43"/>
+          <p:cNvSpPr/>
+          <p:nvPr/>
+        </p:nvSpPr>
+        <p:spPr>
+          <a:xfrm>
+            <a:off x="9829800" y="3136392"/>
+            <a:ext cx="1508760" cy="585216"/>
           </a:xfrm>
           <a:prstGeom prst="rect">
             <a:avLst/>
@@ -17962,7 +18831,7 @@
               <a:buNone/>
             </a:pPr>
             <a:r>
-              <a:rPr lang="en-US" sz="800" dirty="0">
+              <a:rPr lang="en-US" sz="900" dirty="0">
                 <a:solidFill>
                   <a:srgbClr val="27AE60"/>
                 </a:solidFill>
@@ -17970,16 +18839,16 @@
                 <a:ea typeface="Calibri" pitchFamily="34" charset="-122"/>
                 <a:cs typeface="Calibri" pitchFamily="34" charset="-120"/>
               </a:rPr>
-              <a:t>deploy</a:t>
-            </a:r>
-            <a:endParaRPr lang="en-US" sz="800" dirty="0"/>
+              <a:t>staging</a:t>
+            </a:r>
+            <a:endParaRPr lang="en-US" sz="900" dirty="0"/>
           </a:p>
           <a:p>
             <a:pPr algn="ctr" indent="0" marL="0">
               <a:buNone/>
             </a:pPr>
             <a:r>
-              <a:rPr lang="en-US" sz="800" dirty="0">
+              <a:rPr lang="en-US" sz="900" dirty="0">
                 <a:solidFill>
                   <a:srgbClr val="27AE60"/>
                 </a:solidFill>
@@ -17987,43 +18856,26 @@
                 <a:ea typeface="Calibri" pitchFamily="34" charset="-122"/>
                 <a:cs typeface="Calibri" pitchFamily="34" charset="-120"/>
               </a:rPr>
-              <a:t>staging</a:t>
-            </a:r>
-            <a:endParaRPr lang="en-US" sz="800" dirty="0"/>
-          </a:p>
-          <a:p>
-            <a:pPr algn="ctr" indent="0" marL="0">
-              <a:buNone/>
-            </a:pPr>
-            <a:r>
-              <a:rPr lang="en-US" sz="800" dirty="0">
-                <a:solidFill>
-                  <a:srgbClr val="27AE60"/>
-                </a:solidFill>
-                <a:latin typeface="Calibri" pitchFamily="34" charset="0"/>
-                <a:ea typeface="Calibri" pitchFamily="34" charset="-122"/>
-                <a:cs typeface="Calibri" pitchFamily="34" charset="-120"/>
-              </a:rPr>
               <a:t>:8089</a:t>
             </a:r>
-            <a:endParaRPr lang="en-US" sz="800" dirty="0"/>
-          </a:p>
-        </p:txBody>
-      </p:sp>
-      <p:sp>
-        <p:nvSpPr>
-          <p:cNvPr id="30" name="Shape 28"/>
-          <p:cNvSpPr/>
-          <p:nvPr/>
-        </p:nvSpPr>
-        <p:spPr>
-          <a:xfrm>
-            <a:off x="7680960" y="5440680"/>
-            <a:ext cx="2286000" cy="685800"/>
+            <a:endParaRPr lang="en-US" sz="900" dirty="0"/>
+          </a:p>
+        </p:txBody>
+      </p:sp>
+      <p:sp>
+        <p:nvSpPr>
+          <p:cNvPr id="46" name="Shape 44"/>
+          <p:cNvSpPr/>
+          <p:nvPr/>
+        </p:nvSpPr>
+        <p:spPr>
+          <a:xfrm>
+            <a:off x="9829800" y="3840480"/>
+            <a:ext cx="1508760" cy="640080"/>
           </a:xfrm>
           <a:prstGeom prst="rect">
             <a:avLst>
-              <a:gd name="adj" fmla="val 10667"/>
+              <a:gd name="adj" fmla="val 11429"/>
             </a:avLst>
           </a:prstGeom>
           <a:solidFill>
@@ -18039,14 +18891,14 @@
       </p:sp>
       <p:sp>
         <p:nvSpPr>
-          <p:cNvPr id="31" name="Text 29"/>
-          <p:cNvSpPr/>
-          <p:nvPr/>
-        </p:nvSpPr>
-        <p:spPr>
-          <a:xfrm>
-            <a:off x="7680960" y="5458968"/>
-            <a:ext cx="2286000" cy="658368"/>
+          <p:cNvPr id="47" name="Text 45"/>
+          <p:cNvSpPr/>
+          <p:nvPr/>
+        </p:nvSpPr>
+        <p:spPr>
+          <a:xfrm>
+            <a:off x="9829800" y="3867912"/>
+            <a:ext cx="1508760" cy="585216"/>
           </a:xfrm>
           <a:prstGeom prst="rect">
             <a:avLst/>
@@ -18062,7 +18914,7 @@
               <a:buNone/>
             </a:pPr>
             <a:r>
-              <a:rPr lang="en-US" sz="800" dirty="0">
+              <a:rPr lang="en-US" sz="900" dirty="0">
                 <a:solidFill>
                   <a:srgbClr val="27AE60"/>
                 </a:solidFill>
@@ -18070,16 +18922,16 @@
                 <a:ea typeface="Calibri" pitchFamily="34" charset="-122"/>
                 <a:cs typeface="Calibri" pitchFamily="34" charset="-120"/>
               </a:rPr>
-              <a:t>deploy</a:t>
-            </a:r>
-            <a:endParaRPr lang="en-US" sz="800" dirty="0"/>
+              <a:t>production</a:t>
+            </a:r>
+            <a:endParaRPr lang="en-US" sz="900" dirty="0"/>
           </a:p>
           <a:p>
             <a:pPr algn="ctr" indent="0" marL="0">
               <a:buNone/>
             </a:pPr>
             <a:r>
-              <a:rPr lang="en-US" sz="800" dirty="0">
+              <a:rPr lang="en-US" sz="900" dirty="0">
                 <a:solidFill>
                   <a:srgbClr val="27AE60"/>
                 </a:solidFill>
@@ -18087,176 +18939,15 @@
                 <a:ea typeface="Calibri" pitchFamily="34" charset="-122"/>
                 <a:cs typeface="Calibri" pitchFamily="34" charset="-120"/>
               </a:rPr>
-              <a:t>production</a:t>
-            </a:r>
-            <a:endParaRPr lang="en-US" sz="800" dirty="0"/>
-          </a:p>
-          <a:p>
-            <a:pPr algn="ctr" indent="0" marL="0">
-              <a:buNone/>
-            </a:pPr>
-            <a:r>
-              <a:rPr lang="en-US" sz="800" dirty="0">
-                <a:solidFill>
-                  <a:srgbClr val="27AE60"/>
-                </a:solidFill>
-                <a:latin typeface="Calibri" pitchFamily="34" charset="0"/>
-                <a:ea typeface="Calibri" pitchFamily="34" charset="-122"/>
-                <a:cs typeface="Calibri" pitchFamily="34" charset="-120"/>
-              </a:rPr>
               <a:t>:8088</a:t>
             </a:r>
-            <a:endParaRPr lang="en-US" sz="800" dirty="0"/>
-          </a:p>
-        </p:txBody>
-      </p:sp>
-      <p:sp>
-        <p:nvSpPr>
-          <p:cNvPr id="32" name="Text 30"/>
-          <p:cNvSpPr/>
-          <p:nvPr/>
-        </p:nvSpPr>
-        <p:spPr>
-          <a:xfrm>
-            <a:off x="5989320" y="3429000"/>
-            <a:ext cx="365760" cy="320040"/>
-          </a:xfrm>
-          <a:prstGeom prst="rect">
-            <a:avLst/>
-          </a:prstGeom>
-          <a:noFill/>
-          <a:ln/>
-        </p:spPr>
-        <p:txBody>
-          <a:bodyPr wrap="square" rtlCol="0" anchor="ctr"/>
-          <a:lstStyle/>
-          <a:p>
-            <a:pPr algn="ctr" indent="0" marL="0">
-              <a:buNone/>
-            </a:pPr>
-            <a:r>
-              <a:rPr lang="en-US" sz="1200" dirty="0">
-                <a:solidFill>
-                  <a:srgbClr val="B2B2B2"/>
-                </a:solidFill>
-              </a:rPr>
-              <a:t>↓</a:t>
-            </a:r>
-            <a:endParaRPr lang="en-US" sz="1200" dirty="0"/>
-          </a:p>
-        </p:txBody>
-      </p:sp>
-      <p:sp>
-        <p:nvSpPr>
-          <p:cNvPr id="33" name="Text 31"/>
-          <p:cNvSpPr/>
-          <p:nvPr/>
-        </p:nvSpPr>
-        <p:spPr>
-          <a:xfrm>
-            <a:off x="5989320" y="4251960"/>
-            <a:ext cx="365760" cy="320040"/>
-          </a:xfrm>
-          <a:prstGeom prst="rect">
-            <a:avLst/>
-          </a:prstGeom>
-          <a:noFill/>
-          <a:ln/>
-        </p:spPr>
-        <p:txBody>
-          <a:bodyPr wrap="square" rtlCol="0" anchor="ctr"/>
-          <a:lstStyle/>
-          <a:p>
-            <a:pPr algn="ctr" indent="0" marL="0">
-              <a:buNone/>
-            </a:pPr>
-            <a:r>
-              <a:rPr lang="en-US" sz="1200" dirty="0">
-                <a:solidFill>
-                  <a:srgbClr val="B2B2B2"/>
-                </a:solidFill>
-              </a:rPr>
-              <a:t>↓</a:t>
-            </a:r>
-            <a:endParaRPr lang="en-US" sz="1200" dirty="0"/>
-          </a:p>
-        </p:txBody>
-      </p:sp>
-      <p:sp>
-        <p:nvSpPr>
-          <p:cNvPr id="34" name="Text 32"/>
-          <p:cNvSpPr/>
-          <p:nvPr/>
-        </p:nvSpPr>
-        <p:spPr>
-          <a:xfrm>
-            <a:off x="5989320" y="5074920"/>
-            <a:ext cx="365760" cy="320040"/>
-          </a:xfrm>
-          <a:prstGeom prst="rect">
-            <a:avLst/>
-          </a:prstGeom>
-          <a:noFill/>
-          <a:ln/>
-        </p:spPr>
-        <p:txBody>
-          <a:bodyPr wrap="square" rtlCol="0" anchor="ctr"/>
-          <a:lstStyle/>
-          <a:p>
-            <a:pPr algn="ctr" indent="0" marL="0">
-              <a:buNone/>
-            </a:pPr>
-            <a:r>
-              <a:rPr lang="en-US" sz="1200" dirty="0">
-                <a:solidFill>
-                  <a:srgbClr val="B2B2B2"/>
-                </a:solidFill>
-              </a:rPr>
-              <a:t>↓</a:t>
-            </a:r>
-            <a:endParaRPr lang="en-US" sz="1200" dirty="0"/>
-          </a:p>
-        </p:txBody>
-      </p:sp>
-      <p:sp>
-        <p:nvSpPr>
-          <p:cNvPr id="35" name="Text 33"/>
-          <p:cNvSpPr/>
-          <p:nvPr/>
-        </p:nvSpPr>
-        <p:spPr>
-          <a:xfrm>
-            <a:off x="5989320" y="5897880"/>
-            <a:ext cx="365760" cy="320040"/>
-          </a:xfrm>
-          <a:prstGeom prst="rect">
-            <a:avLst/>
-          </a:prstGeom>
-          <a:noFill/>
-          <a:ln/>
-        </p:spPr>
-        <p:txBody>
-          <a:bodyPr wrap="square" rtlCol="0" anchor="ctr"/>
-          <a:lstStyle/>
-          <a:p>
-            <a:pPr algn="ctr" indent="0" marL="0">
-              <a:buNone/>
-            </a:pPr>
-            <a:r>
-              <a:rPr lang="en-US" sz="1200" dirty="0">
-                <a:solidFill>
-                  <a:srgbClr val="B2B2B2"/>
-                </a:solidFill>
-              </a:rPr>
-              <a:t>↓</a:t>
-            </a:r>
-            <a:endParaRPr lang="en-US" sz="1200" dirty="0"/>
-          </a:p>
-        </p:txBody>
-      </p:sp>
-      <p:sp>
-        <p:nvSpPr>
-          <p:cNvPr id="36" name="Shape 34"/>
+            <a:endParaRPr lang="en-US" sz="900" dirty="0"/>
+          </a:p>
+        </p:txBody>
+      </p:sp>
+      <p:sp>
+        <p:nvSpPr>
+          <p:cNvPr id="48" name="Shape 46"/>
           <p:cNvSpPr/>
           <p:nvPr/>
         </p:nvSpPr>
@@ -18276,7 +18967,7 @@
       </p:sp>
       <p:sp>
         <p:nvSpPr>
-          <p:cNvPr id="37" name="Text 35"/>
+          <p:cNvPr id="49" name="Text 47"/>
           <p:cNvSpPr/>
           <p:nvPr/>
         </p:nvSpPr>
@@ -18315,7 +19006,7 @@
       </p:sp>
       <p:sp>
         <p:nvSpPr>
-          <p:cNvPr id="38" name="Shape 36"/>
+          <p:cNvPr id="50" name="Shape 48"/>
           <p:cNvSpPr/>
           <p:nvPr/>
         </p:nvSpPr>
@@ -18335,7 +19026,7 @@
       </p:sp>
       <p:sp>
         <p:nvSpPr>
-          <p:cNvPr id="39" name="Text 37"/>
+          <p:cNvPr id="51" name="Text 49"/>
           <p:cNvSpPr/>
           <p:nvPr/>
         </p:nvSpPr>
@@ -18374,7 +19065,7 @@
       </p:sp>
       <p:sp>
         <p:nvSpPr>
-          <p:cNvPr id="40" name="Shape 38"/>
+          <p:cNvPr id="52" name="Shape 50"/>
           <p:cNvSpPr/>
           <p:nvPr/>
         </p:nvSpPr>
@@ -18394,7 +19085,7 @@
       </p:sp>
       <p:sp>
         <p:nvSpPr>
-          <p:cNvPr id="41" name="Text 39"/>
+          <p:cNvPr id="53" name="Text 51"/>
           <p:cNvSpPr/>
           <p:nvPr/>
         </p:nvSpPr>
@@ -18669,9 +19360,9 @@
                 <a:solidFill>
                   <a:srgbClr val="F0F0F0"/>
                 </a:solidFill>
-                <a:latin typeface="Georgia" pitchFamily="34" charset="0"/>
-                <a:ea typeface="Georgia" pitchFamily="34" charset="-122"/>
-                <a:cs typeface="Georgia" pitchFamily="34" charset="-120"/>
+                <a:latin typeface="Palatino Linotype" pitchFamily="34" charset="0"/>
+                <a:ea typeface="Palatino Linotype" pitchFamily="34" charset="-122"/>
+                <a:cs typeface="Palatino Linotype" pitchFamily="34" charset="-120"/>
               </a:rPr>
               <a:t>Cartographie des compétences</a:t>
             </a:r>
@@ -18735,9 +19426,9 @@
                 <a:solidFill>
                   <a:srgbClr val="E74C3C"/>
                 </a:solidFill>
-                <a:latin typeface="Georgia" pitchFamily="34" charset="0"/>
-                <a:ea typeface="Georgia" pitchFamily="34" charset="-122"/>
-                <a:cs typeface="Georgia" pitchFamily="34" charset="-120"/>
+                <a:latin typeface="Palatino Linotype" pitchFamily="34" charset="0"/>
+                <a:ea typeface="Palatino Linotype" pitchFamily="34" charset="-122"/>
+                <a:cs typeface="Palatino Linotype" pitchFamily="34" charset="-120"/>
               </a:rPr>
               <a:t>×1</a:t>
             </a:r>
@@ -18916,9 +19607,9 @@
                 <a:solidFill>
                   <a:srgbClr val="E74C3C"/>
                 </a:solidFill>
-                <a:latin typeface="Georgia" pitchFamily="34" charset="0"/>
-                <a:ea typeface="Georgia" pitchFamily="34" charset="-122"/>
-                <a:cs typeface="Georgia" pitchFamily="34" charset="-120"/>
+                <a:latin typeface="Palatino Linotype" pitchFamily="34" charset="0"/>
+                <a:ea typeface="Palatino Linotype" pitchFamily="34" charset="-122"/>
+                <a:cs typeface="Palatino Linotype" pitchFamily="34" charset="-120"/>
               </a:rPr>
               <a:t>×2</a:t>
             </a:r>
@@ -19097,9 +19788,9 @@
                 <a:solidFill>
                   <a:srgbClr val="E74C3C"/>
                 </a:solidFill>
-                <a:latin typeface="Georgia" pitchFamily="34" charset="0"/>
-                <a:ea typeface="Georgia" pitchFamily="34" charset="-122"/>
-                <a:cs typeface="Georgia" pitchFamily="34" charset="-120"/>
+                <a:latin typeface="Palatino Linotype" pitchFamily="34" charset="0"/>
+                <a:ea typeface="Palatino Linotype" pitchFamily="34" charset="-122"/>
+                <a:cs typeface="Palatino Linotype" pitchFamily="34" charset="-120"/>
               </a:rPr>
               <a:t>×1</a:t>
             </a:r>
@@ -19278,9 +19969,9 @@
                 <a:solidFill>
                   <a:srgbClr val="E74C3C"/>
                 </a:solidFill>
-                <a:latin typeface="Georgia" pitchFamily="34" charset="0"/>
-                <a:ea typeface="Georgia" pitchFamily="34" charset="-122"/>
-                <a:cs typeface="Georgia" pitchFamily="34" charset="-120"/>
+                <a:latin typeface="Palatino Linotype" pitchFamily="34" charset="0"/>
+                <a:ea typeface="Palatino Linotype" pitchFamily="34" charset="-122"/>
+                <a:cs typeface="Palatino Linotype" pitchFamily="34" charset="-120"/>
               </a:rPr>
               <a:t>×1</a:t>
             </a:r>
@@ -19463,7 +20154,7 @@
                 <a:ea typeface="Calibri" pitchFamily="34" charset="-122"/>
                 <a:cs typeface="Calibri" pitchFamily="34" charset="-120"/>
               </a:rPr>
-              <a:t>📚  Formation proposée :</a:t>
+              <a:t>Formation proposée :</a:t>
             </a:r>
             <a:endParaRPr lang="en-US" sz="1200" dirty="0"/>
           </a:p>
@@ -19628,9 +20319,9 @@
                 <a:solidFill>
                   <a:srgbClr val="F0F0F0"/>
                 </a:solidFill>
-                <a:latin typeface="Georgia" pitchFamily="34" charset="0"/>
-                <a:ea typeface="Georgia" pitchFamily="34" charset="-122"/>
-                <a:cs typeface="Georgia" pitchFamily="34" charset="-120"/>
+                <a:latin typeface="Palatino Linotype" pitchFamily="34" charset="0"/>
+                <a:ea typeface="Palatino Linotype" pitchFamily="34" charset="-122"/>
+                <a:cs typeface="Palatino Linotype" pitchFamily="34" charset="-120"/>
               </a:rPr>
               <a:t>Développement &amp; Déploiement</a:t>
             </a:r>

--- a/presentation-LPMDE.pptx
+++ b/presentation-LPMDE.pptx
@@ -4,6 +4,9 @@
   <p:sldMasterIdLst>
     <p:sldMasterId id="2147483648" r:id="rId1"/>
   </p:sldMasterIdLst>
+  <p:notesMasterIdLst>
+    <p:notesMasterId r:id="rId22"/>
+  </p:notesMasterIdLst>
   <p:sldIdLst>
     <p:sldId id="256" r:id="rId2"/>
     <p:sldId id="257" r:id="rId3"/>
@@ -26,9 +29,6 @@
     <p:sldId id="274" r:id="rId20"/>
     <p:sldId id="275" r:id="rId21"/>
   </p:sldIdLst>
-  <p:notesMasterIdLst>
-    <p:notesMasterId r:id="rId22"/>
-  </p:notesMasterIdLst>
   <p:sldSz cx="12192000" cy="6858000"/>
   <p:notesSz cx="6858000" cy="12192000"/>
   <p:defaultTextStyle>
@@ -123,6 +123,11 @@
       </a:defRPr>
     </a:lvl9pPr>
   </p:defaultTextStyle>
+  <p:extLst>
+    <p:ext uri="{EFAFB233-063F-42B5-8137-9DF3F51BA10A}">
+      <p15:sldGuideLst xmlns:p15="http://schemas.microsoft.com/office/powerpoint/2012/main"/>
+    </p:ext>
+  </p:extLst>
 </p:presentation>
 </file>
 
@@ -148,234 +153,10 @@
           <a:chExt cx="0" cy="0"/>
         </a:xfrm>
       </p:grpSpPr>
-      <p:sp>
-        <p:nvSpPr>
-          <p:cNvPr id="2" name="Header Placeholder 1"/>
-          <p:cNvSpPr>
-            <a:spLocks noGrp="1"/>
-          </p:cNvSpPr>
-          <p:nvPr>
-            <p:ph type="hdr" sz="quarter"/>
-          </p:nvPr>
-        </p:nvSpPr>
-        <p:spPr>
-          <a:xfrm>
-            <a:off x="0" y="0"/>
-            <a:ext cx="2971800" cy="458788"/>
-          </a:xfrm>
-          <a:prstGeom prst="rect">
-            <a:avLst/>
-          </a:prstGeom>
-        </p:spPr>
-        <p:txBody>
-          <a:bodyPr vert="horz" lIns="91440" tIns="45720" rIns="91440" bIns="45720" rtlCol="0"/>
-          <a:lstStyle>
-            <a:lvl1pPr algn="l">
-              <a:defRPr sz="1200"/>
-            </a:lvl1pPr>
-          </a:lstStyle>
-          <a:p>
-            <a:endParaRPr lang="en-US"/>
-          </a:p>
-        </p:txBody>
-      </p:sp>
-      <p:sp>
-        <p:nvSpPr>
-          <p:cNvPr id="3" name="Date Placeholder 2"/>
-          <p:cNvSpPr>
-            <a:spLocks noGrp="1"/>
-          </p:cNvSpPr>
-          <p:nvPr>
-            <p:ph type="dt" idx="1"/>
-          </p:nvPr>
-        </p:nvSpPr>
-        <p:spPr>
-          <a:xfrm>
-            <a:off x="3884613" y="0"/>
-            <a:ext cx="2971800" cy="458788"/>
-          </a:xfrm>
-          <a:prstGeom prst="rect">
-            <a:avLst/>
-          </a:prstGeom>
-        </p:spPr>
-        <p:txBody>
-          <a:bodyPr vert="horz" lIns="91440" tIns="45720" rIns="91440" bIns="45720" rtlCol="0"/>
-          <a:lstStyle>
-            <a:lvl1pPr algn="r">
-              <a:defRPr sz="1200"/>
-            </a:lvl1pPr>
-          </a:lstStyle>
-          <a:p>
-            <a:fld id="{5282F153-3F37-0F45-9E97-73ACFA13230C}" type="datetimeFigureOut">
-              <a:rPr lang="en-US"/>
-              <a:t>7/23/19</a:t>
-            </a:fld>
-            <a:endParaRPr lang="en-US"/>
-          </a:p>
-        </p:txBody>
-      </p:sp>
-      <p:sp>
-        <p:nvSpPr>
-          <p:cNvPr id="4" name="Slide Image Placeholder 3"/>
-          <p:cNvSpPr>
-            <a:spLocks noGrp="1" noRot="1" noChangeAspect="1"/>
-          </p:cNvSpPr>
-          <p:nvPr>
-            <p:ph type="sldImg" idx="2"/>
-          </p:nvPr>
-        </p:nvSpPr>
-        <p:spPr>
-          <a:xfrm>
-            <a:off x="685800" y="1143000"/>
-            <a:ext cx="5486400" cy="3086100"/>
-          </a:xfrm>
-          <a:prstGeom prst="rect">
-            <a:avLst/>
-          </a:prstGeom>
-          <a:noFill/>
-          <a:ln w="12700">
-            <a:solidFill>
-              <a:prstClr val="black"/>
-            </a:solidFill>
-          </a:ln>
-        </p:spPr>
-        <p:txBody>
-          <a:bodyPr vert="horz" lIns="91440" tIns="45720" rIns="91440" bIns="45720" rtlCol="0" anchor="ctr"/>
-          <a:lstStyle/>
-          <a:p>
-            <a:endParaRPr lang="en-US"/>
-          </a:p>
-        </p:txBody>
-      </p:sp>
-      <p:sp>
-        <p:nvSpPr>
-          <p:cNvPr id="5" name="Notes Placeholder 4"/>
-          <p:cNvSpPr>
-            <a:spLocks noGrp="1"/>
-          </p:cNvSpPr>
-          <p:nvPr>
-            <p:ph type="body" sz="quarter" idx="3"/>
-          </p:nvPr>
-        </p:nvSpPr>
-        <p:spPr>
-          <a:xfrm>
-            <a:off x="685800" y="4400550"/>
-            <a:ext cx="5486400" cy="3600450"/>
-          </a:xfrm>
-          <a:prstGeom prst="rect">
-            <a:avLst/>
-          </a:prstGeom>
-        </p:spPr>
-        <p:txBody>
-          <a:bodyPr vert="horz" lIns="91440" tIns="45720" rIns="91440" bIns="45720" rtlCol="0"/>
-          <a:lstStyle/>
-          <a:p>
-            <a:pPr lvl="0"/>
-            <a:r>
-              <a:rPr lang="en-US"/>
-              <a:t>Click to edit Master text styles</a:t>
-            </a:r>
-          </a:p>
-          <a:p>
-            <a:pPr lvl="1"/>
-            <a:r>
-              <a:rPr lang="en-US"/>
-              <a:t>Second level</a:t>
-            </a:r>
-          </a:p>
-          <a:p>
-            <a:pPr lvl="2"/>
-            <a:r>
-              <a:rPr lang="en-US"/>
-              <a:t>Third level</a:t>
-            </a:r>
-          </a:p>
-          <a:p>
-            <a:pPr lvl="3"/>
-            <a:r>
-              <a:rPr lang="en-US"/>
-              <a:t>Fourth level</a:t>
-            </a:r>
-          </a:p>
-          <a:p>
-            <a:pPr lvl="4"/>
-            <a:r>
-              <a:rPr lang="en-US"/>
-              <a:t>Fifth level</a:t>
-            </a:r>
-          </a:p>
-        </p:txBody>
-      </p:sp>
-      <p:sp>
-        <p:nvSpPr>
-          <p:cNvPr id="6" name="Footer Placeholder 5"/>
-          <p:cNvSpPr>
-            <a:spLocks noGrp="1"/>
-          </p:cNvSpPr>
-          <p:nvPr>
-            <p:ph type="ftr" sz="quarter" idx="4"/>
-          </p:nvPr>
-        </p:nvSpPr>
-        <p:spPr>
-          <a:xfrm>
-            <a:off x="0" y="8685213"/>
-            <a:ext cx="2971800" cy="458787"/>
-          </a:xfrm>
-          <a:prstGeom prst="rect">
-            <a:avLst/>
-          </a:prstGeom>
-        </p:spPr>
-        <p:txBody>
-          <a:bodyPr vert="horz" lIns="91440" tIns="45720" rIns="91440" bIns="45720" rtlCol="0" anchor="b"/>
-          <a:lstStyle>
-            <a:lvl1pPr algn="l">
-              <a:defRPr sz="1200"/>
-            </a:lvl1pPr>
-          </a:lstStyle>
-          <a:p>
-            <a:endParaRPr lang="en-US"/>
-          </a:p>
-        </p:txBody>
-      </p:sp>
-      <p:sp>
-        <p:nvSpPr>
-          <p:cNvPr id="7" name="Slide Number Placeholder 6"/>
-          <p:cNvSpPr>
-            <a:spLocks noGrp="1"/>
-          </p:cNvSpPr>
-          <p:nvPr>
-            <p:ph type="sldNum" sz="quarter" idx="5"/>
-          </p:nvPr>
-        </p:nvSpPr>
-        <p:spPr>
-          <a:xfrm>
-            <a:off x="3884613" y="8685213"/>
-            <a:ext cx="2971800" cy="458787"/>
-          </a:xfrm>
-          <a:prstGeom prst="rect">
-            <a:avLst/>
-          </a:prstGeom>
-        </p:spPr>
-        <p:txBody>
-          <a:bodyPr vert="horz" lIns="91440" tIns="45720" rIns="91440" bIns="45720" rtlCol="0" anchor="b"/>
-          <a:lstStyle>
-            <a:lvl1pPr algn="r">
-              <a:defRPr sz="1200"/>
-            </a:lvl1pPr>
-          </a:lstStyle>
-          <a:p>
-            <a:fld id="{CE5E9CC1-C706-0F49-92D6-E571CC5EEA8F}" type="slidenum">
-              <a:rPr lang="en-US"/>
-              <a:t>‹#›</a:t>
-            </a:fld>
-            <a:endParaRPr lang="en-US"/>
-          </a:p>
-        </p:txBody>
-      </p:sp>
     </p:spTree>
     <p:extLst>
       <p:ext uri="{BB962C8B-B14F-4D97-AF65-F5344CB8AC3E}">
-        <p14:creationId xmlns:p14="http://schemas.microsoft.com/office/powerpoint/2010/main" val="1024086991"/>
+        <p14:creationId xmlns:p14="http://schemas.microsoft.com/office/powerpoint/2010/main" val="4127195395"/>
       </p:ext>
     </p:extLst>
   </p:cSld>
@@ -529,7 +310,6 @@
 - Comment j'ai audité la sécurité et proposé un plan de remédiation concret
 On parcourt tout ça ensemble, n'hésitez pas à m'interrompre si quelque chose mérite d'être précisé.</a:t>
             </a:r>
-            <a:endParaRPr lang="en-US" dirty="0"/>
           </a:p>
         </p:txBody>
       </p:sp>
@@ -621,7 +401,6 @@
 US-03 — Catalogue produits : endpoint public GET /api/products accessible sans authentification. C'est délibéré — la navigation sur le catalogue doit fonctionner sans connexion pour favoriser la conversion.
 US-04 — Notifications asynchrones : Symfony Messenger gère les notifications de manière asynchrone. En développement, le transport sync:// est transparent — pas de RabbitMQ à configurer. En production, il bascule sur AMQP sans aucune modification du code applicatif. C'est le concept d'infrastructure transparente.</a:t>
             </a:r>
-            <a:endParaRPr lang="en-US" dirty="0"/>
           </a:p>
         </p:txBody>
       </p:sp>
@@ -719,7 +498,6 @@
 - RabbitMQ pour les messages AMQP en production (sync:// en dev)
 - Monolog pour les logs JSON structurés et indexables</a:t>
             </a:r>
-            <a:endParaRPr lang="en-US" dirty="0"/>
           </a:p>
         </p:txBody>
       </p:sp>
@@ -812,7 +590,6 @@
 GitHub Actions ✅ Validé : le self-hosted runner sous Windows exécute les 11 jobs. Le déploiement automatique vers staging et production fonctionne à chaque push sur la branche main.
 Docker / Apache ⚠️ Problème résolu : c'est la difficulté technique principale rencontrée. mod_php sous Apache ne transmet pas automatiquement les variables d'environnement Docker à PHP. La solution : ajouter une directive SetEnv explicite dans la configuration Apache pour chaque variable nécessaire.</a:t>
             </a:r>
-            <a:endParaRPr lang="en-US" dirty="0"/>
           </a:p>
         </p:txBody>
       </p:sp>
@@ -905,7 +682,6 @@
 0 CVE Critical : Trivy scanne l'image Docker finale construite par le pipeline et ne remonte aucune vulnérabilité critique. C'est le résultat d'un choix d'image de base maintenue et des scans intégrés dès le build.
 La barre verte en bas rappelle que tout ça est produit par le pipeline complet — de l'installation jusqu'au déploiement en production.</a:t>
             </a:r>
-            <a:endParaRPr lang="en-US" dirty="0"/>
           </a:p>
         </p:txBody>
       </p:sp>
@@ -998,7 +774,6 @@
 ⚡ Performance validée k6 : les tests de charge confirment que l'application tient la charge simulée. 35 checks réussis avec un p95 sous 200ms. C'est une validation quantifiée, pas juste une impression.
 Roadmap scalabilité : ces mécanismes garantissent la disponibilité sur un seul serveur. La vraie haute disponibilité horizontale — multi-instances, load balancer, SLA 99,9% — nécessite Kubernetes, qui est dans la roadmap v2.</a:t>
             </a:r>
-            <a:endParaRPr lang="en-US" dirty="0"/>
           </a:p>
         </p:txBody>
       </p:sp>
@@ -1090,7 +865,6 @@
 - Le plan de remédiation concret en 3 sprints pour les traiter progressivement
 - Les 3 mesures préventives prévues pour la v2 pour passer d'une posture réactive à proactive</a:t>
             </a:r>
-            <a:endParaRPr lang="en-US" dirty="0"/>
           </a:p>
         </p:txBody>
       </p:sp>
@@ -1185,7 +959,6 @@
 V-06 — MOYENNE : logs sans anonymisation RGPD. Les logs Monolog peuvent contenir des adresses IP, emails ou autres données personnelles — non conforme au RGPD.
 V-07 — BASSE : image Docker php:8.2-apache volumineuse. Une image large augmente inutilement la surface d'attaque potentielle. Migration vers alpine ou distroless recommandée.</a:t>
             </a:r>
-            <a:endParaRPr lang="en-US" dirty="0"/>
           </a:p>
         </p:txBody>
       </p:sp>
@@ -1288,7 +1061,6 @@
 • Audit RGPD complet : revue exhaustive de tous les traitements de données personnelles.
 Impact attendu : la surface d'attaque globale est significativement réduite.</a:t>
             </a:r>
-            <a:endParaRPr lang="en-US" dirty="0"/>
           </a:p>
         </p:txBody>
       </p:sp>
@@ -1382,7 +1154,6 @@
 03 — SCA avec Dependabot :
 Les dépendances déclarées dans composer.json vieillissent et accumulent des CVE. Dependabot surveille en continu toutes les dépendances et ouvre automatiquement des Pull Requests de mise à jour dès qu'une faille est connue. L'équipe n'a plus à surveiller manuellement les bulletins de sécurité — c'est automatisé.</a:t>
             </a:r>
-            <a:endParaRPr lang="en-US" dirty="0"/>
           </a:p>
         </p:txBody>
       </p:sp>
@@ -1485,7 +1256,6 @@
 - Kubernetes : orchestration multi-instances pour la vraie scalabilité horizontale et le SLA 99,9%.
 - Espace communautaire : la fonctionnalité métier prioritaire identifiée pour enrichir la plateforme en v2.</a:t>
             </a:r>
-            <a:endParaRPr lang="en-US" dirty="0"/>
           </a:p>
         </p:txBody>
       </p:sp>
@@ -1588,7 +1358,6 @@
 - Mesures préventives v2 : les 3 dispositifs proactifs prévus pour la prochaine version — Vault, DAST, Dependabot.
 - Bilan de la mission : récapitulatif de ce qui a été livré, mesuré, et les perspectives pour la v2.</a:t>
             </a:r>
-            <a:endParaRPr lang="en-US" dirty="0"/>
           </a:p>
         </p:txBody>
       </p:sp>
@@ -1679,7 +1448,6 @@
 Je suis disponible pour toutes vos questions — que ce soit sur les choix techniques, l'organisation du pipeline, la sécurité ou les perspectives v2.
 N'hésitez pas à demander une démonstration live — les environnements staging sur le port 8089 et production sur le port 8088 sont actifs sur ma machine en ce moment.</a:t>
             </a:r>
-            <a:endParaRPr lang="en-US" dirty="0"/>
           </a:p>
         </p:txBody>
       </p:sp>
@@ -1770,7 +1538,6 @@
 🎯 La mission : développer la v1 de leur future plateforme numérique. L'objectif n'est pas de tout livrer d'un coup, c'est de poser une base technique solide, testée et sécurisée, sur laquelle la v2 pourra s'appuyer.
 👨‍💻 Mon rôle de Lead Developer : je suis responsable de trois choses — définir le processus qualité pour que le code soit fiable, livrer un POC fonctionnel qui valide les choix techniques, et réaliser une analyse de sécurité complète avec un plan d'action. Ce n'est pas uniquement développer — c'est structurer la démarche de bout en bout.</a:t>
             </a:r>
-            <a:endParaRPr lang="en-US" dirty="0"/>
           </a:p>
         </p:txBody>
       </p:sp>
@@ -1863,7 +1630,6 @@
 - Le pipeline de 11 jobs qui automatise tout ça
 - La cartographie de l'équipe nécessaire pour faire tourner ce type de projet</a:t>
             </a:r>
-            <a:endParaRPr lang="en-US" dirty="0"/>
           </a:p>
         </p:txBody>
       </p:sp>
@@ -1955,7 +1721,6 @@
 Temps de réponse p95 (Performance) : toutes les requêtes répondent en moins de 200ms au 95e percentile. Mesuré sous charge simulée par k6 — c'est un indicateur réaliste, pas un test à vide.
 Code smells / duplications (Maintenabilité) : SonarCloud analyse en continu le code poussé sur GitHub et remonte les duplications, les mauvaises pratiques et la dette technique. L'objectif est de garder un code maintenable dans le temps.</a:t>
             </a:r>
-            <a:endParaRPr lang="en-US" dirty="0"/>
           </a:p>
         </p:txBody>
       </p:sp>
@@ -2048,7 +1813,6 @@
 Test : PHPUnit pour les tests unitaires et k6 pour les tests end-to-end de performance. La qualité fonctionnelle est vérifiée avant tout déploiement.
 Deploy : le déploiement est assuré par un runner self-hosted sur ma machine locale, qui gère les environnements staging et production de manière automatisée.</a:t>
             </a:r>
-            <a:endParaRPr lang="en-US" dirty="0"/>
           </a:p>
         </p:txBody>
       </p:sp>
@@ -2151,7 +1915,6 @@
 - production sur le port 8088 : environnement de production
 Les étapes ④ ⑤ ⑥ s'exécutent uniquement sur le self-hosted runner car elles nécessitent l'accès à l'infrastructure locale.</a:t>
             </a:r>
-            <a:endParaRPr lang="en-US" dirty="0"/>
           </a:p>
         </p:txBody>
       </p:sp>
@@ -2245,7 +2008,6 @@
 Formation proposée — CKA (Certified Kubernetes Administrator) :
 C'est la certification de référence pour l'administration Kubernetes, délivrée par la Linux Foundation. 3 mois de formation entièrement en ligne. Pourquoi cette formation ? Parce que Kubernetes est l'étape suivante pour passer à une vraie scalabilité horizontale — c'est directement dans la roadmap v2 du projet.</a:t>
             </a:r>
-            <a:endParaRPr lang="en-US" dirty="0"/>
           </a:p>
         </p:txBody>
       </p:sp>
@@ -2338,7 +2100,6 @@
 - Les expérimentations en bac à sable avant intégration
 - Les résultats concrets et les mécanismes qui garantissent la disponibilité</a:t>
             </a:r>
-            <a:endParaRPr lang="en-US" dirty="0"/>
           </a:p>
         </p:txBody>
       </p:sp>
@@ -2411,6 +2172,11 @@
 <file path=ppt/slideMasters/slideMaster1.xml><?xml version="1.0" encoding="utf-8"?>
 <p:sldMaster xmlns:a="http://schemas.openxmlformats.org/drawingml/2006/main" xmlns:r="http://schemas.openxmlformats.org/officeDocument/2006/relationships" xmlns:p="http://schemas.openxmlformats.org/presentationml/2006/main">
   <p:cSld>
+    <p:bg>
+      <p:bgRef idx="1001">
+        <a:schemeClr val="bg1"/>
+      </p:bgRef>
+    </p:bg>
     <p:spTree>
       <p:nvGrpSpPr>
         <p:cNvPr id="1" name=""/>
@@ -2693,6 +2459,7 @@
         <a:solidFill>
           <a:srgbClr val="0D0D0D"/>
         </a:solidFill>
+        <a:effectLst/>
       </p:bgPr>
     </p:bg>
     <p:spTree>
@@ -2728,6 +2495,13 @@
           </a:solidFill>
           <a:ln/>
         </p:spPr>
+        <p:txBody>
+          <a:bodyPr/>
+          <a:lstStyle/>
+          <a:p>
+            <a:endParaRPr lang="fr-FR"/>
+          </a:p>
+        </p:txBody>
       </p:sp>
       <p:sp>
         <p:nvSpPr>
@@ -2750,7 +2524,7 @@
           <a:bodyPr wrap="square" rtlCol="0" anchor="ctr"/>
           <a:lstStyle/>
           <a:p>
-            <a:pPr indent="0" marL="0">
+            <a:pPr marL="0" indent="0">
               <a:buNone/>
             </a:pPr>
             <a:r>
@@ -2767,7 +2541,7 @@
             <a:endParaRPr lang="en-US" sz="4800" dirty="0"/>
           </a:p>
           <a:p>
-            <a:pPr indent="0" marL="0">
+            <a:pPr marL="0" indent="0">
               <a:buNone/>
             </a:pPr>
             <a:r>
@@ -2806,7 +2580,7 @@
           <a:bodyPr wrap="square" rtlCol="0" anchor="ctr"/>
           <a:lstStyle/>
           <a:p>
-            <a:pPr indent="0" marL="0">
+            <a:pPr marL="0" indent="0">
               <a:buNone/>
             </a:pPr>
             <a:r>
@@ -2843,6 +2617,13 @@
           </a:solidFill>
           <a:ln/>
         </p:spPr>
+        <p:txBody>
+          <a:bodyPr/>
+          <a:lstStyle/>
+          <a:p>
+            <a:endParaRPr lang="fr-FR"/>
+          </a:p>
+        </p:txBody>
       </p:sp>
       <p:sp>
         <p:nvSpPr>
@@ -2865,7 +2646,7 @@
           <a:bodyPr wrap="square" rtlCol="0" anchor="ctr"/>
           <a:lstStyle/>
           <a:p>
-            <a:pPr indent="0" marL="0">
+            <a:pPr marL="0" indent="0">
               <a:buNone/>
             </a:pPr>
             <a:r>
@@ -2904,7 +2685,7 @@
           <a:bodyPr wrap="square" rtlCol="0" anchor="ctr"/>
           <a:lstStyle/>
           <a:p>
-            <a:pPr algn="r" indent="0" marL="0">
+            <a:pPr marL="0" indent="0" algn="r">
               <a:buNone/>
             </a:pPr>
             <a:r>
@@ -2938,6 +2719,7 @@
         <a:solidFill>
           <a:srgbClr val="0D0D0D"/>
         </a:solidFill>
+        <a:effectLst/>
       </p:bgPr>
     </p:bg>
     <p:spTree>
@@ -2973,6 +2755,13 @@
           </a:solidFill>
           <a:ln/>
         </p:spPr>
+        <p:txBody>
+          <a:bodyPr/>
+          <a:lstStyle/>
+          <a:p>
+            <a:endParaRPr lang="fr-FR"/>
+          </a:p>
+        </p:txBody>
       </p:sp>
       <p:sp>
         <p:nvSpPr>
@@ -2993,6 +2782,13 @@
           </a:solidFill>
           <a:ln/>
         </p:spPr>
+        <p:txBody>
+          <a:bodyPr/>
+          <a:lstStyle/>
+          <a:p>
+            <a:endParaRPr lang="fr-FR"/>
+          </a:p>
+        </p:txBody>
       </p:sp>
       <p:sp>
         <p:nvSpPr>
@@ -3015,7 +2811,7 @@
           <a:bodyPr wrap="square" rtlCol="0" anchor="ctr"/>
           <a:lstStyle/>
           <a:p>
-            <a:pPr indent="0" marL="0">
+            <a:pPr marL="0" indent="0">
               <a:buNone/>
             </a:pPr>
             <a:r>
@@ -3054,7 +2850,7 @@
           <a:bodyPr wrap="square" rtlCol="0" anchor="ctr"/>
           <a:lstStyle/>
           <a:p>
-            <a:pPr algn="r" indent="0" marL="0">
+            <a:pPr marL="0" indent="0" algn="r">
               <a:buNone/>
             </a:pPr>
             <a:r>
@@ -3091,6 +2887,13 @@
           </a:solidFill>
           <a:ln/>
         </p:spPr>
+        <p:txBody>
+          <a:bodyPr/>
+          <a:lstStyle/>
+          <a:p>
+            <a:endParaRPr lang="fr-FR"/>
+          </a:p>
+        </p:txBody>
       </p:sp>
       <p:sp>
         <p:nvSpPr>
@@ -3113,11 +2916,11 @@
           <a:bodyPr wrap="square" rtlCol="0" anchor="ctr"/>
           <a:lstStyle/>
           <a:p>
-            <a:pPr indent="0" marL="0">
-              <a:buNone/>
-            </a:pPr>
-            <a:r>
-              <a:rPr lang="en-US" sz="1100" b="1" spc="200" kern="0" dirty="0">
+            <a:pPr marL="0" indent="0">
+              <a:buNone/>
+            </a:pPr>
+            <a:r>
+              <a:rPr lang="en-US" sz="1100" b="1" kern="0" spc="200" dirty="0">
                 <a:solidFill>
                   <a:srgbClr val="E74C3C"/>
                 </a:solidFill>
@@ -3152,7 +2955,7 @@
           <a:bodyPr wrap="square" rtlCol="0" anchor="ctr"/>
           <a:lstStyle/>
           <a:p>
-            <a:pPr indent="0" marL="0">
+            <a:pPr marL="0" indent="0">
               <a:buNone/>
             </a:pPr>
             <a:r>
@@ -3182,9 +2985,7 @@
             <a:ext cx="5760720" cy="1737360"/>
           </a:xfrm>
           <a:prstGeom prst="rect">
-            <a:avLst>
-              <a:gd name="adj" fmla="val 4211"/>
-            </a:avLst>
+            <a:avLst/>
           </a:prstGeom>
           <a:solidFill>
             <a:srgbClr val="2E1A1A"/>
@@ -3196,6 +2997,13 @@
             <a:prstDash val="solid"/>
           </a:ln>
         </p:spPr>
+        <p:txBody>
+          <a:bodyPr/>
+          <a:lstStyle/>
+          <a:p>
+            <a:endParaRPr lang="fr-FR"/>
+          </a:p>
+        </p:txBody>
       </p:sp>
       <p:sp>
         <p:nvSpPr>
@@ -3218,7 +3026,7 @@
           <a:bodyPr wrap="square" rtlCol="0" anchor="ctr"/>
           <a:lstStyle/>
           <a:p>
-            <a:pPr indent="0" marL="0">
+            <a:pPr marL="0" indent="0">
               <a:buNone/>
             </a:pPr>
             <a:r>
@@ -3257,7 +3065,7 @@
           <a:bodyPr wrap="square" rtlCol="0" anchor="ctr"/>
           <a:lstStyle/>
           <a:p>
-            <a:pPr algn="r" indent="0" marL="0">
+            <a:pPr marL="0" indent="0" algn="r">
               <a:buNone/>
             </a:pPr>
             <a:r>
@@ -3296,7 +3104,7 @@
           <a:bodyPr wrap="square" rtlCol="0" anchor="ctr"/>
           <a:lstStyle/>
           <a:p>
-            <a:pPr indent="0" marL="0">
+            <a:pPr marL="0" indent="0">
               <a:buNone/>
             </a:pPr>
             <a:r>
@@ -3335,7 +3143,7 @@
           <a:bodyPr wrap="square" rtlCol="0" anchor="ctr"/>
           <a:lstStyle/>
           <a:p>
-            <a:pPr indent="0" marL="0">
+            <a:pPr marL="0" indent="0">
               <a:buNone/>
             </a:pPr>
             <a:r>
@@ -3352,7 +3160,7 @@
             <a:endParaRPr lang="en-US" sz="1100" dirty="0"/>
           </a:p>
           <a:p>
-            <a:pPr indent="0" marL="0">
+            <a:pPr marL="0" indent="0">
               <a:buNone/>
             </a:pPr>
             <a:r>
@@ -3382,9 +3190,7 @@
             <a:ext cx="5760720" cy="1737360"/>
           </a:xfrm>
           <a:prstGeom prst="rect">
-            <a:avLst>
-              <a:gd name="adj" fmla="val 4211"/>
-            </a:avLst>
+            <a:avLst/>
           </a:prstGeom>
           <a:solidFill>
             <a:srgbClr val="1A1A2E"/>
@@ -3396,6 +3202,13 @@
             <a:prstDash val="solid"/>
           </a:ln>
         </p:spPr>
+        <p:txBody>
+          <a:bodyPr/>
+          <a:lstStyle/>
+          <a:p>
+            <a:endParaRPr lang="fr-FR"/>
+          </a:p>
+        </p:txBody>
       </p:sp>
       <p:sp>
         <p:nvSpPr>
@@ -3418,7 +3231,7 @@
           <a:bodyPr wrap="square" rtlCol="0" anchor="ctr"/>
           <a:lstStyle/>
           <a:p>
-            <a:pPr indent="0" marL="0">
+            <a:pPr marL="0" indent="0">
               <a:buNone/>
             </a:pPr>
             <a:r>
@@ -3457,7 +3270,7 @@
           <a:bodyPr wrap="square" rtlCol="0" anchor="ctr"/>
           <a:lstStyle/>
           <a:p>
-            <a:pPr algn="r" indent="0" marL="0">
+            <a:pPr marL="0" indent="0" algn="r">
               <a:buNone/>
             </a:pPr>
             <a:r>
@@ -3496,7 +3309,7 @@
           <a:bodyPr wrap="square" rtlCol="0" anchor="ctr"/>
           <a:lstStyle/>
           <a:p>
-            <a:pPr indent="0" marL="0">
+            <a:pPr marL="0" indent="0">
               <a:buNone/>
             </a:pPr>
             <a:r>
@@ -3535,7 +3348,7 @@
           <a:bodyPr wrap="square" rtlCol="0" anchor="ctr"/>
           <a:lstStyle/>
           <a:p>
-            <a:pPr indent="0" marL="0">
+            <a:pPr marL="0" indent="0">
               <a:buNone/>
             </a:pPr>
             <a:r>
@@ -3552,7 +3365,7 @@
             <a:endParaRPr lang="en-US" sz="1100" dirty="0"/>
           </a:p>
           <a:p>
-            <a:pPr indent="0" marL="0">
+            <a:pPr marL="0" indent="0">
               <a:buNone/>
             </a:pPr>
             <a:r>
@@ -3582,9 +3395,7 @@
             <a:ext cx="5760720" cy="1737360"/>
           </a:xfrm>
           <a:prstGeom prst="rect">
-            <a:avLst>
-              <a:gd name="adj" fmla="val 4211"/>
-            </a:avLst>
+            <a:avLst/>
           </a:prstGeom>
           <a:solidFill>
             <a:srgbClr val="1A2E1A"/>
@@ -3596,6 +3407,13 @@
             <a:prstDash val="solid"/>
           </a:ln>
         </p:spPr>
+        <p:txBody>
+          <a:bodyPr/>
+          <a:lstStyle/>
+          <a:p>
+            <a:endParaRPr lang="fr-FR"/>
+          </a:p>
+        </p:txBody>
       </p:sp>
       <p:sp>
         <p:nvSpPr>
@@ -3618,7 +3436,7 @@
           <a:bodyPr wrap="square" rtlCol="0" anchor="ctr"/>
           <a:lstStyle/>
           <a:p>
-            <a:pPr indent="0" marL="0">
+            <a:pPr marL="0" indent="0">
               <a:buNone/>
             </a:pPr>
             <a:r>
@@ -3657,7 +3475,7 @@
           <a:bodyPr wrap="square" rtlCol="0" anchor="ctr"/>
           <a:lstStyle/>
           <a:p>
-            <a:pPr algn="r" indent="0" marL="0">
+            <a:pPr marL="0" indent="0" algn="r">
               <a:buNone/>
             </a:pPr>
             <a:r>
@@ -3696,7 +3514,7 @@
           <a:bodyPr wrap="square" rtlCol="0" anchor="ctr"/>
           <a:lstStyle/>
           <a:p>
-            <a:pPr indent="0" marL="0">
+            <a:pPr marL="0" indent="0">
               <a:buNone/>
             </a:pPr>
             <a:r>
@@ -3735,7 +3553,7 @@
           <a:bodyPr wrap="square" rtlCol="0" anchor="ctr"/>
           <a:lstStyle/>
           <a:p>
-            <a:pPr indent="0" marL="0">
+            <a:pPr marL="0" indent="0">
               <a:buNone/>
             </a:pPr>
             <a:r>
@@ -3752,7 +3570,7 @@
             <a:endParaRPr lang="en-US" sz="1100" dirty="0"/>
           </a:p>
           <a:p>
-            <a:pPr indent="0" marL="0">
+            <a:pPr marL="0" indent="0">
               <a:buNone/>
             </a:pPr>
             <a:r>
@@ -3782,9 +3600,7 @@
             <a:ext cx="5760720" cy="1737360"/>
           </a:xfrm>
           <a:prstGeom prst="rect">
-            <a:avLst>
-              <a:gd name="adj" fmla="val 4211"/>
-            </a:avLst>
+            <a:avLst/>
           </a:prstGeom>
           <a:solidFill>
             <a:srgbClr val="2E2A1A"/>
@@ -3796,6 +3612,13 @@
             <a:prstDash val="solid"/>
           </a:ln>
         </p:spPr>
+        <p:txBody>
+          <a:bodyPr/>
+          <a:lstStyle/>
+          <a:p>
+            <a:endParaRPr lang="fr-FR"/>
+          </a:p>
+        </p:txBody>
       </p:sp>
       <p:sp>
         <p:nvSpPr>
@@ -3818,7 +3641,7 @@
           <a:bodyPr wrap="square" rtlCol="0" anchor="ctr"/>
           <a:lstStyle/>
           <a:p>
-            <a:pPr indent="0" marL="0">
+            <a:pPr marL="0" indent="0">
               <a:buNone/>
             </a:pPr>
             <a:r>
@@ -3857,7 +3680,7 @@
           <a:bodyPr wrap="square" rtlCol="0" anchor="ctr"/>
           <a:lstStyle/>
           <a:p>
-            <a:pPr algn="r" indent="0" marL="0">
+            <a:pPr marL="0" indent="0" algn="r">
               <a:buNone/>
             </a:pPr>
             <a:r>
@@ -3896,7 +3719,7 @@
           <a:bodyPr wrap="square" rtlCol="0" anchor="ctr"/>
           <a:lstStyle/>
           <a:p>
-            <a:pPr indent="0" marL="0">
+            <a:pPr marL="0" indent="0">
               <a:buNone/>
             </a:pPr>
             <a:r>
@@ -3935,7 +3758,7 @@
           <a:bodyPr wrap="square" rtlCol="0" anchor="ctr"/>
           <a:lstStyle/>
           <a:p>
-            <a:pPr indent="0" marL="0">
+            <a:pPr marL="0" indent="0">
               <a:buNone/>
             </a:pPr>
             <a:r>
@@ -3952,7 +3775,7 @@
             <a:endParaRPr lang="en-US" sz="1100" dirty="0"/>
           </a:p>
           <a:p>
-            <a:pPr indent="0" marL="0">
+            <a:pPr marL="0" indent="0">
               <a:buNone/>
             </a:pPr>
             <a:r>
@@ -3986,6 +3809,7 @@
         <a:solidFill>
           <a:srgbClr val="0D0D0D"/>
         </a:solidFill>
+        <a:effectLst/>
       </p:bgPr>
     </p:bg>
     <p:spTree>
@@ -4021,6 +3845,13 @@
           </a:solidFill>
           <a:ln/>
         </p:spPr>
+        <p:txBody>
+          <a:bodyPr/>
+          <a:lstStyle/>
+          <a:p>
+            <a:endParaRPr lang="fr-FR"/>
+          </a:p>
+        </p:txBody>
       </p:sp>
       <p:sp>
         <p:nvSpPr>
@@ -4041,6 +3872,13 @@
           </a:solidFill>
           <a:ln/>
         </p:spPr>
+        <p:txBody>
+          <a:bodyPr/>
+          <a:lstStyle/>
+          <a:p>
+            <a:endParaRPr lang="fr-FR"/>
+          </a:p>
+        </p:txBody>
       </p:sp>
       <p:sp>
         <p:nvSpPr>
@@ -4063,7 +3901,7 @@
           <a:bodyPr wrap="square" rtlCol="0" anchor="ctr"/>
           <a:lstStyle/>
           <a:p>
-            <a:pPr indent="0" marL="0">
+            <a:pPr marL="0" indent="0">
               <a:buNone/>
             </a:pPr>
             <a:r>
@@ -4102,7 +3940,7 @@
           <a:bodyPr wrap="square" rtlCol="0" anchor="ctr"/>
           <a:lstStyle/>
           <a:p>
-            <a:pPr algn="r" indent="0" marL="0">
+            <a:pPr marL="0" indent="0" algn="r">
               <a:buNone/>
             </a:pPr>
             <a:r>
@@ -4141,11 +3979,11 @@
           <a:bodyPr wrap="square" rtlCol="0" anchor="ctr"/>
           <a:lstStyle/>
           <a:p>
-            <a:pPr indent="0" marL="0">
-              <a:buNone/>
-            </a:pPr>
-            <a:r>
-              <a:rPr lang="en-US" sz="900" b="1" spc="200" kern="0" dirty="0">
+            <a:pPr marL="0" indent="0">
+              <a:buNone/>
+            </a:pPr>
+            <a:r>
+              <a:rPr lang="en-US" sz="900" b="1" kern="0" spc="200" dirty="0">
                 <a:solidFill>
                   <a:srgbClr val="E74C3C"/>
                 </a:solidFill>
@@ -4178,6 +4016,13 @@
           </a:solidFill>
           <a:ln/>
         </p:spPr>
+        <p:txBody>
+          <a:bodyPr/>
+          <a:lstStyle/>
+          <a:p>
+            <a:endParaRPr lang="fr-FR"/>
+          </a:p>
+        </p:txBody>
       </p:sp>
       <p:sp>
         <p:nvSpPr>
@@ -4200,7 +4045,7 @@
           <a:bodyPr wrap="square" rtlCol="0" anchor="ctr"/>
           <a:lstStyle/>
           <a:p>
-            <a:pPr indent="0" marL="0">
+            <a:pPr marL="0" indent="0">
               <a:buNone/>
             </a:pPr>
             <a:r>
@@ -4239,11 +4084,11 @@
           <a:bodyPr wrap="square" rtlCol="0" anchor="ctr"/>
           <a:lstStyle/>
           <a:p>
-            <a:pPr algn="ctr" indent="0" marL="0">
-              <a:buNone/>
-            </a:pPr>
-            <a:r>
-              <a:rPr lang="en-US" sz="800" b="1" spc="100" kern="0" dirty="0">
+            <a:pPr marL="0" indent="0" algn="ctr">
+              <a:buNone/>
+            </a:pPr>
+            <a:r>
+              <a:rPr lang="en-US" sz="800" b="1" kern="0" spc="100" dirty="0">
                 <a:solidFill>
                   <a:srgbClr val="E74C3C"/>
                 </a:solidFill>
@@ -4276,6 +4121,13 @@
           </a:solidFill>
           <a:ln/>
         </p:spPr>
+        <p:txBody>
+          <a:bodyPr/>
+          <a:lstStyle/>
+          <a:p>
+            <a:endParaRPr lang="fr-FR"/>
+          </a:p>
+        </p:txBody>
       </p:sp>
       <p:sp>
         <p:nvSpPr>
@@ -4298,11 +4150,11 @@
           <a:bodyPr wrap="square" rtlCol="0" anchor="ctr"/>
           <a:lstStyle/>
           <a:p>
-            <a:pPr algn="ctr" indent="0" marL="0">
-              <a:buNone/>
-            </a:pPr>
-            <a:r>
-              <a:rPr lang="en-US" sz="800" b="1" spc="100" kern="0" dirty="0">
+            <a:pPr marL="0" indent="0" algn="ctr">
+              <a:buNone/>
+            </a:pPr>
+            <a:r>
+              <a:rPr lang="en-US" sz="800" b="1" kern="0" spc="100" dirty="0">
                 <a:solidFill>
                   <a:srgbClr val="E74C3C"/>
                 </a:solidFill>
@@ -4335,6 +4187,13 @@
           </a:solidFill>
           <a:ln/>
         </p:spPr>
+        <p:txBody>
+          <a:bodyPr/>
+          <a:lstStyle/>
+          <a:p>
+            <a:endParaRPr lang="fr-FR"/>
+          </a:p>
+        </p:txBody>
       </p:sp>
       <p:sp>
         <p:nvSpPr>
@@ -4357,11 +4216,11 @@
           <a:bodyPr wrap="square" rtlCol="0" anchor="ctr"/>
           <a:lstStyle/>
           <a:p>
-            <a:pPr algn="ctr" indent="0" marL="0">
-              <a:buNone/>
-            </a:pPr>
-            <a:r>
-              <a:rPr lang="en-US" sz="800" b="1" spc="100" kern="0" dirty="0">
+            <a:pPr marL="0" indent="0" algn="ctr">
+              <a:buNone/>
+            </a:pPr>
+            <a:r>
+              <a:rPr lang="en-US" sz="800" b="1" kern="0" spc="100" dirty="0">
                 <a:solidFill>
                   <a:srgbClr val="E74C3C"/>
                 </a:solidFill>
@@ -4394,6 +4253,13 @@
           </a:solidFill>
           <a:ln/>
         </p:spPr>
+        <p:txBody>
+          <a:bodyPr/>
+          <a:lstStyle/>
+          <a:p>
+            <a:endParaRPr lang="fr-FR"/>
+          </a:p>
+        </p:txBody>
       </p:sp>
       <p:sp>
         <p:nvSpPr>
@@ -4416,11 +4282,11 @@
           <a:bodyPr wrap="square" rtlCol="0" anchor="ctr"/>
           <a:lstStyle/>
           <a:p>
-            <a:pPr algn="ctr" indent="0" marL="0">
-              <a:buNone/>
-            </a:pPr>
-            <a:r>
-              <a:rPr lang="en-US" sz="800" b="1" spc="100" kern="0" dirty="0">
+            <a:pPr marL="0" indent="0" algn="ctr">
+              <a:buNone/>
+            </a:pPr>
+            <a:r>
+              <a:rPr lang="en-US" sz="800" b="1" kern="0" spc="100" dirty="0">
                 <a:solidFill>
                   <a:srgbClr val="E74C3C"/>
                 </a:solidFill>
@@ -4453,6 +4319,13 @@
           </a:solidFill>
           <a:ln/>
         </p:spPr>
+        <p:txBody>
+          <a:bodyPr/>
+          <a:lstStyle/>
+          <a:p>
+            <a:endParaRPr lang="fr-FR"/>
+          </a:p>
+        </p:txBody>
       </p:sp>
       <p:sp>
         <p:nvSpPr>
@@ -4475,11 +4348,11 @@
           <a:bodyPr wrap="square" rtlCol="0" anchor="ctr"/>
           <a:lstStyle/>
           <a:p>
-            <a:pPr algn="ctr" indent="0" marL="0">
-              <a:buNone/>
-            </a:pPr>
-            <a:r>
-              <a:rPr lang="en-US" sz="800" b="1" spc="100" kern="0" dirty="0">
+            <a:pPr marL="0" indent="0" algn="ctr">
+              <a:buNone/>
+            </a:pPr>
+            <a:r>
+              <a:rPr lang="en-US" sz="800" b="1" kern="0" spc="100" dirty="0">
                 <a:solidFill>
                   <a:srgbClr val="E74C3C"/>
                 </a:solidFill>
@@ -4512,6 +4385,13 @@
           </a:solidFill>
           <a:ln/>
         </p:spPr>
+        <p:txBody>
+          <a:bodyPr/>
+          <a:lstStyle/>
+          <a:p>
+            <a:endParaRPr lang="fr-FR"/>
+          </a:p>
+        </p:txBody>
       </p:sp>
       <p:sp>
         <p:nvSpPr>
@@ -4525,9 +4405,7 @@
             <a:ext cx="1828800" cy="731520"/>
           </a:xfrm>
           <a:prstGeom prst="rect">
-            <a:avLst>
-              <a:gd name="adj" fmla="val 10000"/>
-            </a:avLst>
+            <a:avLst/>
           </a:prstGeom>
           <a:solidFill>
             <a:srgbClr val="2E1A2E"/>
@@ -4539,6 +4417,13 @@
             <a:prstDash val="solid"/>
           </a:ln>
         </p:spPr>
+        <p:txBody>
+          <a:bodyPr/>
+          <a:lstStyle/>
+          <a:p>
+            <a:endParaRPr lang="fr-FR"/>
+          </a:p>
+        </p:txBody>
       </p:sp>
       <p:sp>
         <p:nvSpPr>
@@ -4561,7 +4446,7 @@
           <a:bodyPr wrap="square" rtlCol="0" anchor="ctr"/>
           <a:lstStyle/>
           <a:p>
-            <a:pPr algn="ctr" indent="0" marL="0">
+            <a:pPr marL="0" indent="0" algn="ctr">
               <a:buNone/>
             </a:pPr>
             <a:r>
@@ -4578,7 +4463,7 @@
             <a:endParaRPr lang="en-US" sz="900" dirty="0"/>
           </a:p>
           <a:p>
-            <a:pPr algn="ctr" indent="0" marL="0">
+            <a:pPr marL="0" indent="0" algn="ctr">
               <a:buNone/>
             </a:pPr>
             <a:r>
@@ -4608,9 +4493,7 @@
             <a:ext cx="1828800" cy="731520"/>
           </a:xfrm>
           <a:prstGeom prst="rect">
-            <a:avLst>
-              <a:gd name="adj" fmla="val 10000"/>
-            </a:avLst>
+            <a:avLst/>
           </a:prstGeom>
           <a:solidFill>
             <a:srgbClr val="2E1A1A"/>
@@ -4622,6 +4505,13 @@
             <a:prstDash val="solid"/>
           </a:ln>
         </p:spPr>
+        <p:txBody>
+          <a:bodyPr/>
+          <a:lstStyle/>
+          <a:p>
+            <a:endParaRPr lang="fr-FR"/>
+          </a:p>
+        </p:txBody>
       </p:sp>
       <p:sp>
         <p:nvSpPr>
@@ -4644,7 +4534,7 @@
           <a:bodyPr wrap="square" rtlCol="0" anchor="ctr"/>
           <a:lstStyle/>
           <a:p>
-            <a:pPr algn="ctr" indent="0" marL="0">
+            <a:pPr marL="0" indent="0" algn="ctr">
               <a:buNone/>
             </a:pPr>
             <a:r>
@@ -4661,7 +4551,7 @@
             <a:endParaRPr lang="en-US" sz="900" dirty="0"/>
           </a:p>
           <a:p>
-            <a:pPr algn="ctr" indent="0" marL="0">
+            <a:pPr marL="0" indent="0" algn="ctr">
               <a:buNone/>
             </a:pPr>
             <a:r>
@@ -4691,9 +4581,7 @@
             <a:ext cx="1828800" cy="1920240"/>
           </a:xfrm>
           <a:prstGeom prst="rect">
-            <a:avLst>
-              <a:gd name="adj" fmla="val 4000"/>
-            </a:avLst>
+            <a:avLst/>
           </a:prstGeom>
           <a:solidFill>
             <a:srgbClr val="1A1A2E"/>
@@ -4705,6 +4593,13 @@
             <a:prstDash val="solid"/>
           </a:ln>
         </p:spPr>
+        <p:txBody>
+          <a:bodyPr/>
+          <a:lstStyle/>
+          <a:p>
+            <a:endParaRPr lang="fr-FR"/>
+          </a:p>
+        </p:txBody>
       </p:sp>
       <p:sp>
         <p:nvSpPr>
@@ -4727,7 +4622,7 @@
           <a:bodyPr wrap="square" rtlCol="0" anchor="ctr"/>
           <a:lstStyle/>
           <a:p>
-            <a:pPr algn="ctr" indent="0" marL="0">
+            <a:pPr marL="0" indent="0" algn="ctr">
               <a:buNone/>
             </a:pPr>
             <a:r>
@@ -4744,7 +4639,7 @@
             <a:endParaRPr lang="en-US" sz="900" dirty="0"/>
           </a:p>
           <a:p>
-            <a:pPr algn="ctr" indent="0" marL="0">
+            <a:pPr marL="0" indent="0" algn="ctr">
               <a:buNone/>
             </a:pPr>
             <a:r>
@@ -4761,7 +4656,7 @@
             <a:endParaRPr lang="en-US" sz="900" dirty="0"/>
           </a:p>
           <a:p>
-            <a:pPr algn="ctr" indent="0" marL="0">
+            <a:pPr marL="0" indent="0" algn="ctr">
               <a:buNone/>
             </a:pPr>
             <a:r>
@@ -4778,7 +4673,7 @@
             <a:endParaRPr lang="en-US" sz="900" dirty="0"/>
           </a:p>
           <a:p>
-            <a:pPr algn="ctr" indent="0" marL="0">
+            <a:pPr marL="0" indent="0" algn="ctr">
               <a:buNone/>
             </a:pPr>
             <a:r>
@@ -4808,9 +4703,7 @@
             <a:ext cx="1828800" cy="777240"/>
           </a:xfrm>
           <a:prstGeom prst="rect">
-            <a:avLst>
-              <a:gd name="adj" fmla="val 9412"/>
-            </a:avLst>
+            <a:avLst/>
           </a:prstGeom>
           <a:solidFill>
             <a:srgbClr val="1A2E2E"/>
@@ -4822,6 +4715,13 @@
             <a:prstDash val="solid"/>
           </a:ln>
         </p:spPr>
+        <p:txBody>
+          <a:bodyPr/>
+          <a:lstStyle/>
+          <a:p>
+            <a:endParaRPr lang="fr-FR"/>
+          </a:p>
+        </p:txBody>
       </p:sp>
       <p:sp>
         <p:nvSpPr>
@@ -4844,7 +4744,7 @@
           <a:bodyPr wrap="square" rtlCol="0" anchor="ctr"/>
           <a:lstStyle/>
           <a:p>
-            <a:pPr algn="ctr" indent="0" marL="0">
+            <a:pPr marL="0" indent="0" algn="ctr">
               <a:buNone/>
             </a:pPr>
             <a:r>
@@ -4861,7 +4761,7 @@
             <a:endParaRPr lang="en-US" sz="900" dirty="0"/>
           </a:p>
           <a:p>
-            <a:pPr algn="ctr" indent="0" marL="0">
+            <a:pPr marL="0" indent="0" algn="ctr">
               <a:buNone/>
             </a:pPr>
             <a:r>
@@ -4891,9 +4791,7 @@
             <a:ext cx="1828800" cy="777240"/>
           </a:xfrm>
           <a:prstGeom prst="rect">
-            <a:avLst>
-              <a:gd name="adj" fmla="val 9412"/>
-            </a:avLst>
+            <a:avLst/>
           </a:prstGeom>
           <a:solidFill>
             <a:srgbClr val="1A2E2E"/>
@@ -4905,6 +4803,13 @@
             <a:prstDash val="solid"/>
           </a:ln>
         </p:spPr>
+        <p:txBody>
+          <a:bodyPr/>
+          <a:lstStyle/>
+          <a:p>
+            <a:endParaRPr lang="fr-FR"/>
+          </a:p>
+        </p:txBody>
       </p:sp>
       <p:sp>
         <p:nvSpPr>
@@ -4927,7 +4832,7 @@
           <a:bodyPr wrap="square" rtlCol="0" anchor="ctr"/>
           <a:lstStyle/>
           <a:p>
-            <a:pPr algn="ctr" indent="0" marL="0">
+            <a:pPr marL="0" indent="0" algn="ctr">
               <a:buNone/>
             </a:pPr>
             <a:r>
@@ -4944,7 +4849,7 @@
             <a:endParaRPr lang="en-US" sz="900" dirty="0"/>
           </a:p>
           <a:p>
-            <a:pPr algn="ctr" indent="0" marL="0">
+            <a:pPr marL="0" indent="0" algn="ctr">
               <a:buNone/>
             </a:pPr>
             <a:r>
@@ -4974,9 +4879,7 @@
             <a:ext cx="1828800" cy="1920240"/>
           </a:xfrm>
           <a:prstGeom prst="rect">
-            <a:avLst>
-              <a:gd name="adj" fmla="val 4000"/>
-            </a:avLst>
+            <a:avLst/>
           </a:prstGeom>
           <a:solidFill>
             <a:srgbClr val="1A1A1A"/>
@@ -4988,6 +4891,13 @@
             <a:prstDash val="solid"/>
           </a:ln>
         </p:spPr>
+        <p:txBody>
+          <a:bodyPr/>
+          <a:lstStyle/>
+          <a:p>
+            <a:endParaRPr lang="fr-FR"/>
+          </a:p>
+        </p:txBody>
       </p:sp>
       <p:sp>
         <p:nvSpPr>
@@ -5010,7 +4920,7 @@
           <a:bodyPr wrap="square" rtlCol="0" anchor="ctr"/>
           <a:lstStyle/>
           <a:p>
-            <a:pPr algn="ctr" indent="0" marL="0">
+            <a:pPr marL="0" indent="0" algn="ctr">
               <a:buNone/>
             </a:pPr>
             <a:r>
@@ -5027,13 +4937,13 @@
             <a:endParaRPr lang="en-US" sz="900" dirty="0"/>
           </a:p>
           <a:p>
-            <a:pPr algn="ctr" indent="0" marL="0">
+            <a:pPr marL="0" indent="0" algn="ctr">
               <a:buNone/>
             </a:pPr>
             <a:endParaRPr lang="en-US" sz="900" dirty="0"/>
           </a:p>
           <a:p>
-            <a:pPr algn="ctr" indent="0" marL="0">
+            <a:pPr marL="0" indent="0" algn="ctr">
               <a:buNone/>
             </a:pPr>
             <a:r>
@@ -5050,7 +4960,7 @@
             <a:endParaRPr lang="en-US" sz="900" dirty="0"/>
           </a:p>
           <a:p>
-            <a:pPr algn="ctr" indent="0" marL="0">
+            <a:pPr marL="0" indent="0" algn="ctr">
               <a:buNone/>
             </a:pPr>
             <a:r>
@@ -5067,7 +4977,7 @@
             <a:endParaRPr lang="en-US" sz="900" dirty="0"/>
           </a:p>
           <a:p>
-            <a:pPr algn="ctr" indent="0" marL="0">
+            <a:pPr marL="0" indent="0" algn="ctr">
               <a:buNone/>
             </a:pPr>
             <a:r>
@@ -5097,9 +5007,7 @@
             <a:ext cx="2962656" cy="685800"/>
           </a:xfrm>
           <a:prstGeom prst="rect">
-            <a:avLst>
-              <a:gd name="adj" fmla="val 10667"/>
-            </a:avLst>
+            <a:avLst/>
           </a:prstGeom>
           <a:solidFill>
             <a:srgbClr val="1A2E1A"/>
@@ -5111,6 +5019,13 @@
             <a:prstDash val="solid"/>
           </a:ln>
         </p:spPr>
+        <p:txBody>
+          <a:bodyPr/>
+          <a:lstStyle/>
+          <a:p>
+            <a:endParaRPr lang="fr-FR"/>
+          </a:p>
+        </p:txBody>
       </p:sp>
       <p:sp>
         <p:nvSpPr>
@@ -5133,7 +5048,7 @@
           <a:bodyPr wrap="square" rtlCol="0" anchor="ctr"/>
           <a:lstStyle/>
           <a:p>
-            <a:pPr algn="ctr" indent="0" marL="0">
+            <a:pPr marL="0" indent="0" algn="ctr">
               <a:buNone/>
             </a:pPr>
             <a:r>
@@ -5163,9 +5078,7 @@
             <a:ext cx="2962656" cy="685800"/>
           </a:xfrm>
           <a:prstGeom prst="rect">
-            <a:avLst>
-              <a:gd name="adj" fmla="val 10667"/>
-            </a:avLst>
+            <a:avLst/>
           </a:prstGeom>
           <a:solidFill>
             <a:srgbClr val="2E2A1A"/>
@@ -5177,6 +5090,13 @@
             <a:prstDash val="solid"/>
           </a:ln>
         </p:spPr>
+        <p:txBody>
+          <a:bodyPr/>
+          <a:lstStyle/>
+          <a:p>
+            <a:endParaRPr lang="fr-FR"/>
+          </a:p>
+        </p:txBody>
       </p:sp>
       <p:sp>
         <p:nvSpPr>
@@ -5199,7 +5119,7 @@
           <a:bodyPr wrap="square" rtlCol="0" anchor="ctr"/>
           <a:lstStyle/>
           <a:p>
-            <a:pPr algn="ctr" indent="0" marL="0">
+            <a:pPr marL="0" indent="0" algn="ctr">
               <a:buNone/>
             </a:pPr>
             <a:r>
@@ -5229,9 +5149,7 @@
             <a:ext cx="2962656" cy="685800"/>
           </a:xfrm>
           <a:prstGeom prst="rect">
-            <a:avLst>
-              <a:gd name="adj" fmla="val 10667"/>
-            </a:avLst>
+            <a:avLst/>
           </a:prstGeom>
           <a:solidFill>
             <a:srgbClr val="1A1A2E"/>
@@ -5243,6 +5161,13 @@
             <a:prstDash val="solid"/>
           </a:ln>
         </p:spPr>
+        <p:txBody>
+          <a:bodyPr/>
+          <a:lstStyle/>
+          <a:p>
+            <a:endParaRPr lang="fr-FR"/>
+          </a:p>
+        </p:txBody>
       </p:sp>
       <p:sp>
         <p:nvSpPr>
@@ -5265,7 +5190,7 @@
           <a:bodyPr wrap="square" rtlCol="0" anchor="ctr"/>
           <a:lstStyle/>
           <a:p>
-            <a:pPr algn="ctr" indent="0" marL="0">
+            <a:pPr marL="0" indent="0" algn="ctr">
               <a:buNone/>
             </a:pPr>
             <a:r>
@@ -5304,7 +5229,7 @@
           <a:bodyPr wrap="square" rtlCol="0" anchor="ctr"/>
           <a:lstStyle/>
           <a:p>
-            <a:pPr algn="ctr" indent="0" marL="0">
+            <a:pPr marL="0" indent="0" algn="ctr">
               <a:buNone/>
             </a:pPr>
             <a:r>
@@ -5343,7 +5268,7 @@
           <a:bodyPr wrap="square" rtlCol="0" anchor="ctr"/>
           <a:lstStyle/>
           <a:p>
-            <a:pPr algn="ctr" indent="0" marL="0">
+            <a:pPr marL="0" indent="0" algn="ctr">
               <a:buNone/>
             </a:pPr>
             <a:r>
@@ -5382,7 +5307,7 @@
           <a:bodyPr wrap="square" rtlCol="0" anchor="ctr"/>
           <a:lstStyle/>
           <a:p>
-            <a:pPr algn="ctr" indent="0" marL="0">
+            <a:pPr marL="0" indent="0" algn="ctr">
               <a:buNone/>
             </a:pPr>
             <a:r>
@@ -5421,7 +5346,7 @@
           <a:bodyPr wrap="square" rtlCol="0" anchor="ctr"/>
           <a:lstStyle/>
           <a:p>
-            <a:pPr algn="ctr" indent="0" marL="0">
+            <a:pPr marL="0" indent="0" algn="ctr">
               <a:buNone/>
             </a:pPr>
             <a:r>
@@ -5455,6 +5380,7 @@
         <a:solidFill>
           <a:srgbClr val="0D0D0D"/>
         </a:solidFill>
+        <a:effectLst/>
       </p:bgPr>
     </p:bg>
     <p:spTree>
@@ -5490,6 +5416,13 @@
           </a:solidFill>
           <a:ln/>
         </p:spPr>
+        <p:txBody>
+          <a:bodyPr/>
+          <a:lstStyle/>
+          <a:p>
+            <a:endParaRPr lang="fr-FR"/>
+          </a:p>
+        </p:txBody>
       </p:sp>
       <p:sp>
         <p:nvSpPr>
@@ -5510,6 +5443,13 @@
           </a:solidFill>
           <a:ln/>
         </p:spPr>
+        <p:txBody>
+          <a:bodyPr/>
+          <a:lstStyle/>
+          <a:p>
+            <a:endParaRPr lang="fr-FR"/>
+          </a:p>
+        </p:txBody>
       </p:sp>
       <p:sp>
         <p:nvSpPr>
@@ -5532,7 +5472,7 @@
           <a:bodyPr wrap="square" rtlCol="0" anchor="ctr"/>
           <a:lstStyle/>
           <a:p>
-            <a:pPr indent="0" marL="0">
+            <a:pPr marL="0" indent="0">
               <a:buNone/>
             </a:pPr>
             <a:r>
@@ -5571,7 +5511,7 @@
           <a:bodyPr wrap="square" rtlCol="0" anchor="ctr"/>
           <a:lstStyle/>
           <a:p>
-            <a:pPr algn="r" indent="0" marL="0">
+            <a:pPr marL="0" indent="0" algn="r">
               <a:buNone/>
             </a:pPr>
             <a:r>
@@ -5608,6 +5548,13 @@
           </a:solidFill>
           <a:ln/>
         </p:spPr>
+        <p:txBody>
+          <a:bodyPr/>
+          <a:lstStyle/>
+          <a:p>
+            <a:endParaRPr lang="fr-FR"/>
+          </a:p>
+        </p:txBody>
       </p:sp>
       <p:sp>
         <p:nvSpPr>
@@ -5630,11 +5577,11 @@
           <a:bodyPr wrap="square" rtlCol="0" anchor="ctr"/>
           <a:lstStyle/>
           <a:p>
-            <a:pPr indent="0" marL="0">
-              <a:buNone/>
-            </a:pPr>
-            <a:r>
-              <a:rPr lang="en-US" sz="1100" b="1" spc="200" kern="0" dirty="0">
+            <a:pPr marL="0" indent="0">
+              <a:buNone/>
+            </a:pPr>
+            <a:r>
+              <a:rPr lang="en-US" sz="1100" b="1" kern="0" spc="200" dirty="0">
                 <a:solidFill>
                   <a:srgbClr val="E74C3C"/>
                 </a:solidFill>
@@ -5669,7 +5616,7 @@
           <a:bodyPr wrap="square" rtlCol="0" anchor="ctr"/>
           <a:lstStyle/>
           <a:p>
-            <a:pPr indent="0" marL="0">
+            <a:pPr marL="0" indent="0">
               <a:buNone/>
             </a:pPr>
             <a:r>
@@ -5686,7 +5633,7 @@
             <a:endParaRPr lang="en-US" sz="3400" dirty="0"/>
           </a:p>
           <a:p>
-            <a:pPr indent="0" marL="0">
+            <a:pPr marL="0" indent="0">
               <a:buNone/>
             </a:pPr>
             <a:r>
@@ -5716,9 +5663,7 @@
             <a:ext cx="3657600" cy="1463040"/>
           </a:xfrm>
           <a:prstGeom prst="rect">
-            <a:avLst>
-              <a:gd name="adj" fmla="val 5000"/>
-            </a:avLst>
+            <a:avLst/>
           </a:prstGeom>
           <a:solidFill>
             <a:srgbClr val="1A1A2E"/>
@@ -5730,6 +5675,13 @@
             <a:prstDash val="solid"/>
           </a:ln>
         </p:spPr>
+        <p:txBody>
+          <a:bodyPr/>
+          <a:lstStyle/>
+          <a:p>
+            <a:endParaRPr lang="fr-FR"/>
+          </a:p>
+        </p:txBody>
       </p:sp>
       <p:sp>
         <p:nvSpPr>
@@ -5752,7 +5704,7 @@
           <a:bodyPr wrap="square" rtlCol="0" anchor="ctr"/>
           <a:lstStyle/>
           <a:p>
-            <a:pPr indent="0" marL="0">
+            <a:pPr marL="0" indent="0">
               <a:buNone/>
             </a:pPr>
             <a:r>
@@ -5791,7 +5743,7 @@
           <a:bodyPr wrap="square" rtlCol="0" anchor="ctr"/>
           <a:lstStyle/>
           <a:p>
-            <a:pPr indent="0" marL="0">
+            <a:pPr marL="0" indent="0">
               <a:buNone/>
             </a:pPr>
             <a:r>
@@ -5830,7 +5782,7 @@
           <a:bodyPr wrap="square" rtlCol="0" anchor="ctr"/>
           <a:lstStyle/>
           <a:p>
-            <a:pPr indent="0" marL="0">
+            <a:pPr marL="0" indent="0">
               <a:buNone/>
             </a:pPr>
             <a:r>
@@ -5847,7 +5799,7 @@
             <a:endParaRPr lang="en-US" sz="900" dirty="0"/>
           </a:p>
           <a:p>
-            <a:pPr indent="0" marL="0">
+            <a:pPr marL="0" indent="0">
               <a:buNone/>
             </a:pPr>
             <a:r>
@@ -5877,9 +5829,7 @@
             <a:ext cx="3657600" cy="1463040"/>
           </a:xfrm>
           <a:prstGeom prst="rect">
-            <a:avLst>
-              <a:gd name="adj" fmla="val 5000"/>
-            </a:avLst>
+            <a:avLst/>
           </a:prstGeom>
           <a:solidFill>
             <a:srgbClr val="1A1A2E"/>
@@ -5891,6 +5841,13 @@
             <a:prstDash val="solid"/>
           </a:ln>
         </p:spPr>
+        <p:txBody>
+          <a:bodyPr/>
+          <a:lstStyle/>
+          <a:p>
+            <a:endParaRPr lang="fr-FR"/>
+          </a:p>
+        </p:txBody>
       </p:sp>
       <p:sp>
         <p:nvSpPr>
@@ -5913,7 +5870,7 @@
           <a:bodyPr wrap="square" rtlCol="0" anchor="ctr"/>
           <a:lstStyle/>
           <a:p>
-            <a:pPr indent="0" marL="0">
+            <a:pPr marL="0" indent="0">
               <a:buNone/>
             </a:pPr>
             <a:r>
@@ -5952,7 +5909,7 @@
           <a:bodyPr wrap="square" rtlCol="0" anchor="ctr"/>
           <a:lstStyle/>
           <a:p>
-            <a:pPr indent="0" marL="0">
+            <a:pPr marL="0" indent="0">
               <a:buNone/>
             </a:pPr>
             <a:r>
@@ -5991,7 +5948,7 @@
           <a:bodyPr wrap="square" rtlCol="0" anchor="ctr"/>
           <a:lstStyle/>
           <a:p>
-            <a:pPr indent="0" marL="0">
+            <a:pPr marL="0" indent="0">
               <a:buNone/>
             </a:pPr>
             <a:r>
@@ -6008,7 +5965,7 @@
             <a:endParaRPr lang="en-US" sz="900" dirty="0"/>
           </a:p>
           <a:p>
-            <a:pPr indent="0" marL="0">
+            <a:pPr marL="0" indent="0">
               <a:buNone/>
             </a:pPr>
             <a:r>
@@ -6038,9 +5995,7 @@
             <a:ext cx="3657600" cy="1463040"/>
           </a:xfrm>
           <a:prstGeom prst="rect">
-            <a:avLst>
-              <a:gd name="adj" fmla="val 5000"/>
-            </a:avLst>
+            <a:avLst/>
           </a:prstGeom>
           <a:solidFill>
             <a:srgbClr val="1A1A2E"/>
@@ -6052,6 +6007,13 @@
             <a:prstDash val="solid"/>
           </a:ln>
         </p:spPr>
+        <p:txBody>
+          <a:bodyPr/>
+          <a:lstStyle/>
+          <a:p>
+            <a:endParaRPr lang="fr-FR"/>
+          </a:p>
+        </p:txBody>
       </p:sp>
       <p:sp>
         <p:nvSpPr>
@@ -6074,7 +6036,7 @@
           <a:bodyPr wrap="square" rtlCol="0" anchor="ctr"/>
           <a:lstStyle/>
           <a:p>
-            <a:pPr indent="0" marL="0">
+            <a:pPr marL="0" indent="0">
               <a:buNone/>
             </a:pPr>
             <a:r>
@@ -6113,7 +6075,7 @@
           <a:bodyPr wrap="square" rtlCol="0" anchor="ctr"/>
           <a:lstStyle/>
           <a:p>
-            <a:pPr indent="0" marL="0">
+            <a:pPr marL="0" indent="0">
               <a:buNone/>
             </a:pPr>
             <a:r>
@@ -6152,7 +6114,7 @@
           <a:bodyPr wrap="square" rtlCol="0" anchor="ctr"/>
           <a:lstStyle/>
           <a:p>
-            <a:pPr indent="0" marL="0">
+            <a:pPr marL="0" indent="0">
               <a:buNone/>
             </a:pPr>
             <a:r>
@@ -6169,7 +6131,7 @@
             <a:endParaRPr lang="en-US" sz="900" dirty="0"/>
           </a:p>
           <a:p>
-            <a:pPr indent="0" marL="0">
+            <a:pPr marL="0" indent="0">
               <a:buNone/>
             </a:pPr>
             <a:r>
@@ -6199,9 +6161,7 @@
             <a:ext cx="3657600" cy="1463040"/>
           </a:xfrm>
           <a:prstGeom prst="rect">
-            <a:avLst>
-              <a:gd name="adj" fmla="val 5000"/>
-            </a:avLst>
+            <a:avLst/>
           </a:prstGeom>
           <a:solidFill>
             <a:srgbClr val="1A1A2E"/>
@@ -6213,6 +6173,13 @@
             <a:prstDash val="solid"/>
           </a:ln>
         </p:spPr>
+        <p:txBody>
+          <a:bodyPr/>
+          <a:lstStyle/>
+          <a:p>
+            <a:endParaRPr lang="fr-FR"/>
+          </a:p>
+        </p:txBody>
       </p:sp>
       <p:sp>
         <p:nvSpPr>
@@ -6235,7 +6202,7 @@
           <a:bodyPr wrap="square" rtlCol="0" anchor="ctr"/>
           <a:lstStyle/>
           <a:p>
-            <a:pPr indent="0" marL="0">
+            <a:pPr marL="0" indent="0">
               <a:buNone/>
             </a:pPr>
             <a:r>
@@ -6274,7 +6241,7 @@
           <a:bodyPr wrap="square" rtlCol="0" anchor="ctr"/>
           <a:lstStyle/>
           <a:p>
-            <a:pPr indent="0" marL="0">
+            <a:pPr marL="0" indent="0">
               <a:buNone/>
             </a:pPr>
             <a:r>
@@ -6313,7 +6280,7 @@
           <a:bodyPr wrap="square" rtlCol="0" anchor="ctr"/>
           <a:lstStyle/>
           <a:p>
-            <a:pPr indent="0" marL="0">
+            <a:pPr marL="0" indent="0">
               <a:buNone/>
             </a:pPr>
             <a:r>
@@ -6330,7 +6297,7 @@
             <a:endParaRPr lang="en-US" sz="900" dirty="0"/>
           </a:p>
           <a:p>
-            <a:pPr indent="0" marL="0">
+            <a:pPr marL="0" indent="0">
               <a:buNone/>
             </a:pPr>
             <a:r>
@@ -6360,9 +6327,7 @@
             <a:ext cx="3657600" cy="1463040"/>
           </a:xfrm>
           <a:prstGeom prst="rect">
-            <a:avLst>
-              <a:gd name="adj" fmla="val 5000"/>
-            </a:avLst>
+            <a:avLst/>
           </a:prstGeom>
           <a:solidFill>
             <a:srgbClr val="2E2A1A"/>
@@ -6374,6 +6339,13 @@
             <a:prstDash val="solid"/>
           </a:ln>
         </p:spPr>
+        <p:txBody>
+          <a:bodyPr/>
+          <a:lstStyle/>
+          <a:p>
+            <a:endParaRPr lang="fr-FR"/>
+          </a:p>
+        </p:txBody>
       </p:sp>
       <p:sp>
         <p:nvSpPr>
@@ -6396,7 +6368,7 @@
           <a:bodyPr wrap="square" rtlCol="0" anchor="ctr"/>
           <a:lstStyle/>
           <a:p>
-            <a:pPr indent="0" marL="0">
+            <a:pPr marL="0" indent="0">
               <a:buNone/>
             </a:pPr>
             <a:r>
@@ -6435,7 +6407,7 @@
           <a:bodyPr wrap="square" rtlCol="0" anchor="ctr"/>
           <a:lstStyle/>
           <a:p>
-            <a:pPr indent="0" marL="0">
+            <a:pPr marL="0" indent="0">
               <a:buNone/>
             </a:pPr>
             <a:r>
@@ -6474,7 +6446,7 @@
           <a:bodyPr wrap="square" rtlCol="0" anchor="ctr"/>
           <a:lstStyle/>
           <a:p>
-            <a:pPr indent="0" marL="0">
+            <a:pPr marL="0" indent="0">
               <a:buNone/>
             </a:pPr>
             <a:r>
@@ -6491,7 +6463,7 @@
             <a:endParaRPr lang="en-US" sz="900" dirty="0"/>
           </a:p>
           <a:p>
-            <a:pPr indent="0" marL="0">
+            <a:pPr marL="0" indent="0">
               <a:buNone/>
             </a:pPr>
             <a:r>
@@ -6525,6 +6497,7 @@
         <a:solidFill>
           <a:srgbClr val="0D0D0D"/>
         </a:solidFill>
+        <a:effectLst/>
       </p:bgPr>
     </p:bg>
     <p:spTree>
@@ -6560,6 +6533,13 @@
           </a:solidFill>
           <a:ln/>
         </p:spPr>
+        <p:txBody>
+          <a:bodyPr/>
+          <a:lstStyle/>
+          <a:p>
+            <a:endParaRPr lang="fr-FR"/>
+          </a:p>
+        </p:txBody>
       </p:sp>
       <p:sp>
         <p:nvSpPr>
@@ -6580,6 +6560,13 @@
           </a:solidFill>
           <a:ln/>
         </p:spPr>
+        <p:txBody>
+          <a:bodyPr/>
+          <a:lstStyle/>
+          <a:p>
+            <a:endParaRPr lang="fr-FR"/>
+          </a:p>
+        </p:txBody>
       </p:sp>
       <p:sp>
         <p:nvSpPr>
@@ -6602,7 +6589,7 @@
           <a:bodyPr wrap="square" rtlCol="0" anchor="ctr"/>
           <a:lstStyle/>
           <a:p>
-            <a:pPr indent="0" marL="0">
+            <a:pPr marL="0" indent="0">
               <a:buNone/>
             </a:pPr>
             <a:r>
@@ -6641,7 +6628,7 @@
           <a:bodyPr wrap="square" rtlCol="0" anchor="ctr"/>
           <a:lstStyle/>
           <a:p>
-            <a:pPr algn="r" indent="0" marL="0">
+            <a:pPr marL="0" indent="0" algn="r">
               <a:buNone/>
             </a:pPr>
             <a:r>
@@ -6678,6 +6665,13 @@
           </a:solidFill>
           <a:ln/>
         </p:spPr>
+        <p:txBody>
+          <a:bodyPr/>
+          <a:lstStyle/>
+          <a:p>
+            <a:endParaRPr lang="fr-FR"/>
+          </a:p>
+        </p:txBody>
       </p:sp>
       <p:sp>
         <p:nvSpPr>
@@ -6700,11 +6694,11 @@
           <a:bodyPr wrap="square" rtlCol="0" anchor="ctr"/>
           <a:lstStyle/>
           <a:p>
-            <a:pPr indent="0" marL="0">
-              <a:buNone/>
-            </a:pPr>
-            <a:r>
-              <a:rPr lang="en-US" sz="1100" b="1" spc="200" kern="0" dirty="0">
+            <a:pPr marL="0" indent="0">
+              <a:buNone/>
+            </a:pPr>
+            <a:r>
+              <a:rPr lang="en-US" sz="1100" b="1" kern="0" spc="200" dirty="0">
                 <a:solidFill>
                   <a:srgbClr val="E74C3C"/>
                 </a:solidFill>
@@ -6739,7 +6733,7 @@
           <a:bodyPr wrap="square" rtlCol="0" anchor="ctr"/>
           <a:lstStyle/>
           <a:p>
-            <a:pPr indent="0" marL="0">
+            <a:pPr marL="0" indent="0">
               <a:buNone/>
             </a:pPr>
             <a:r>
@@ -6769,9 +6763,7 @@
             <a:ext cx="2743200" cy="3291840"/>
           </a:xfrm>
           <a:prstGeom prst="rect">
-            <a:avLst>
-              <a:gd name="adj" fmla="val 2667"/>
-            </a:avLst>
+            <a:avLst/>
           </a:prstGeom>
           <a:solidFill>
             <a:srgbClr val="1A2E1A"/>
@@ -6783,6 +6775,13 @@
             <a:prstDash val="solid"/>
           </a:ln>
         </p:spPr>
+        <p:txBody>
+          <a:bodyPr/>
+          <a:lstStyle/>
+          <a:p>
+            <a:endParaRPr lang="fr-FR"/>
+          </a:p>
+        </p:txBody>
       </p:sp>
       <p:sp>
         <p:nvSpPr>
@@ -6805,7 +6804,7 @@
           <a:bodyPr wrap="square" rtlCol="0" anchor="ctr"/>
           <a:lstStyle/>
           <a:p>
-            <a:pPr algn="ctr" indent="0" marL="0">
+            <a:pPr marL="0" indent="0" algn="ctr">
               <a:buNone/>
             </a:pPr>
             <a:r>
@@ -6842,6 +6841,13 @@
           </a:solidFill>
           <a:ln/>
         </p:spPr>
+        <p:txBody>
+          <a:bodyPr/>
+          <a:lstStyle/>
+          <a:p>
+            <a:endParaRPr lang="fr-FR"/>
+          </a:p>
+        </p:txBody>
       </p:sp>
       <p:sp>
         <p:nvSpPr>
@@ -6864,7 +6870,7 @@
           <a:bodyPr wrap="square" rtlCol="0" anchor="ctr"/>
           <a:lstStyle/>
           <a:p>
-            <a:pPr algn="ctr" indent="0" marL="0">
+            <a:pPr marL="0" indent="0" algn="ctr">
               <a:buNone/>
             </a:pPr>
             <a:r>
@@ -6903,7 +6909,7 @@
           <a:bodyPr wrap="square" rtlCol="0" anchor="ctr"/>
           <a:lstStyle/>
           <a:p>
-            <a:pPr algn="ctr" indent="0" marL="0">
+            <a:pPr marL="0" indent="0" algn="ctr">
               <a:buNone/>
             </a:pPr>
             <a:r>
@@ -6933,9 +6939,7 @@
             <a:ext cx="2743200" cy="3291840"/>
           </a:xfrm>
           <a:prstGeom prst="rect">
-            <a:avLst>
-              <a:gd name="adj" fmla="val 2667"/>
-            </a:avLst>
+            <a:avLst/>
           </a:prstGeom>
           <a:solidFill>
             <a:srgbClr val="1A1A2E"/>
@@ -6947,6 +6951,13 @@
             <a:prstDash val="solid"/>
           </a:ln>
         </p:spPr>
+        <p:txBody>
+          <a:bodyPr/>
+          <a:lstStyle/>
+          <a:p>
+            <a:endParaRPr lang="fr-FR"/>
+          </a:p>
+        </p:txBody>
       </p:sp>
       <p:sp>
         <p:nvSpPr>
@@ -6969,7 +6980,7 @@
           <a:bodyPr wrap="square" rtlCol="0" anchor="ctr"/>
           <a:lstStyle/>
           <a:p>
-            <a:pPr algn="ctr" indent="0" marL="0">
+            <a:pPr marL="0" indent="0" algn="ctr">
               <a:buNone/>
             </a:pPr>
             <a:r>
@@ -7006,6 +7017,13 @@
           </a:solidFill>
           <a:ln/>
         </p:spPr>
+        <p:txBody>
+          <a:bodyPr/>
+          <a:lstStyle/>
+          <a:p>
+            <a:endParaRPr lang="fr-FR"/>
+          </a:p>
+        </p:txBody>
       </p:sp>
       <p:sp>
         <p:nvSpPr>
@@ -7028,7 +7046,7 @@
           <a:bodyPr wrap="square" rtlCol="0" anchor="ctr"/>
           <a:lstStyle/>
           <a:p>
-            <a:pPr algn="ctr" indent="0" marL="0">
+            <a:pPr marL="0" indent="0" algn="ctr">
               <a:buNone/>
             </a:pPr>
             <a:r>
@@ -7067,7 +7085,7 @@
           <a:bodyPr wrap="square" rtlCol="0" anchor="ctr"/>
           <a:lstStyle/>
           <a:p>
-            <a:pPr algn="ctr" indent="0" marL="0">
+            <a:pPr marL="0" indent="0" algn="ctr">
               <a:buNone/>
             </a:pPr>
             <a:r>
@@ -7097,9 +7115,7 @@
             <a:ext cx="2743200" cy="3291840"/>
           </a:xfrm>
           <a:prstGeom prst="rect">
-            <a:avLst>
-              <a:gd name="adj" fmla="val 2667"/>
-            </a:avLst>
+            <a:avLst/>
           </a:prstGeom>
           <a:solidFill>
             <a:srgbClr val="2E2A1A"/>
@@ -7111,6 +7127,13 @@
             <a:prstDash val="solid"/>
           </a:ln>
         </p:spPr>
+        <p:txBody>
+          <a:bodyPr/>
+          <a:lstStyle/>
+          <a:p>
+            <a:endParaRPr lang="fr-FR"/>
+          </a:p>
+        </p:txBody>
       </p:sp>
       <p:sp>
         <p:nvSpPr>
@@ -7133,7 +7156,7 @@
           <a:bodyPr wrap="square" rtlCol="0" anchor="ctr"/>
           <a:lstStyle/>
           <a:p>
-            <a:pPr algn="ctr" indent="0" marL="0">
+            <a:pPr marL="0" indent="0" algn="ctr">
               <a:buNone/>
             </a:pPr>
             <a:r>
@@ -7170,6 +7193,13 @@
           </a:solidFill>
           <a:ln/>
         </p:spPr>
+        <p:txBody>
+          <a:bodyPr/>
+          <a:lstStyle/>
+          <a:p>
+            <a:endParaRPr lang="fr-FR"/>
+          </a:p>
+        </p:txBody>
       </p:sp>
       <p:sp>
         <p:nvSpPr>
@@ -7192,7 +7222,7 @@
           <a:bodyPr wrap="square" rtlCol="0" anchor="ctr"/>
           <a:lstStyle/>
           <a:p>
-            <a:pPr algn="ctr" indent="0" marL="0">
+            <a:pPr marL="0" indent="0" algn="ctr">
               <a:buNone/>
             </a:pPr>
             <a:r>
@@ -7231,7 +7261,7 @@
           <a:bodyPr wrap="square" rtlCol="0" anchor="ctr"/>
           <a:lstStyle/>
           <a:p>
-            <a:pPr algn="ctr" indent="0" marL="0">
+            <a:pPr marL="0" indent="0" algn="ctr">
               <a:buNone/>
             </a:pPr>
             <a:r>
@@ -7261,9 +7291,7 @@
             <a:ext cx="2743200" cy="3291840"/>
           </a:xfrm>
           <a:prstGeom prst="rect">
-            <a:avLst>
-              <a:gd name="adj" fmla="val 2667"/>
-            </a:avLst>
+            <a:avLst/>
           </a:prstGeom>
           <a:solidFill>
             <a:srgbClr val="2E1A1A"/>
@@ -7275,6 +7303,13 @@
             <a:prstDash val="solid"/>
           </a:ln>
         </p:spPr>
+        <p:txBody>
+          <a:bodyPr/>
+          <a:lstStyle/>
+          <a:p>
+            <a:endParaRPr lang="fr-FR"/>
+          </a:p>
+        </p:txBody>
       </p:sp>
       <p:sp>
         <p:nvSpPr>
@@ -7297,7 +7332,7 @@
           <a:bodyPr wrap="square" rtlCol="0" anchor="ctr"/>
           <a:lstStyle/>
           <a:p>
-            <a:pPr algn="ctr" indent="0" marL="0">
+            <a:pPr marL="0" indent="0" algn="ctr">
               <a:buNone/>
             </a:pPr>
             <a:r>
@@ -7334,6 +7369,13 @@
           </a:solidFill>
           <a:ln/>
         </p:spPr>
+        <p:txBody>
+          <a:bodyPr/>
+          <a:lstStyle/>
+          <a:p>
+            <a:endParaRPr lang="fr-FR"/>
+          </a:p>
+        </p:txBody>
       </p:sp>
       <p:sp>
         <p:nvSpPr>
@@ -7356,7 +7398,7 @@
           <a:bodyPr wrap="square" rtlCol="0" anchor="ctr"/>
           <a:lstStyle/>
           <a:p>
-            <a:pPr algn="ctr" indent="0" marL="0">
+            <a:pPr marL="0" indent="0" algn="ctr">
               <a:buNone/>
             </a:pPr>
             <a:r>
@@ -7395,7 +7437,7 @@
           <a:bodyPr wrap="square" rtlCol="0" anchor="ctr"/>
           <a:lstStyle/>
           <a:p>
-            <a:pPr algn="ctr" indent="0" marL="0">
+            <a:pPr marL="0" indent="0" algn="ctr">
               <a:buNone/>
             </a:pPr>
             <a:r>
@@ -7425,9 +7467,7 @@
             <a:ext cx="11704320" cy="411480"/>
           </a:xfrm>
           <a:prstGeom prst="rect">
-            <a:avLst>
-              <a:gd name="adj" fmla="val 17778"/>
-            </a:avLst>
+            <a:avLst/>
           </a:prstGeom>
           <a:solidFill>
             <a:srgbClr val="1A1A1A"/>
@@ -7439,6 +7479,13 @@
             <a:prstDash val="solid"/>
           </a:ln>
         </p:spPr>
+        <p:txBody>
+          <a:bodyPr/>
+          <a:lstStyle/>
+          <a:p>
+            <a:endParaRPr lang="fr-FR"/>
+          </a:p>
+        </p:txBody>
       </p:sp>
       <p:sp>
         <p:nvSpPr>
@@ -7461,7 +7508,7 @@
           <a:bodyPr wrap="square" rtlCol="0" anchor="ctr"/>
           <a:lstStyle/>
           <a:p>
-            <a:pPr indent="0" marL="0">
+            <a:pPr marL="0" indent="0">
               <a:buNone/>
             </a:pPr>
             <a:r>
@@ -7495,6 +7542,7 @@
         <a:solidFill>
           <a:srgbClr val="0D0D0D"/>
         </a:solidFill>
+        <a:effectLst/>
       </p:bgPr>
     </p:bg>
     <p:spTree>
@@ -7530,6 +7578,13 @@
           </a:solidFill>
           <a:ln/>
         </p:spPr>
+        <p:txBody>
+          <a:bodyPr/>
+          <a:lstStyle/>
+          <a:p>
+            <a:endParaRPr lang="fr-FR"/>
+          </a:p>
+        </p:txBody>
       </p:sp>
       <p:sp>
         <p:nvSpPr>
@@ -7550,6 +7605,13 @@
           </a:solidFill>
           <a:ln/>
         </p:spPr>
+        <p:txBody>
+          <a:bodyPr/>
+          <a:lstStyle/>
+          <a:p>
+            <a:endParaRPr lang="fr-FR"/>
+          </a:p>
+        </p:txBody>
       </p:sp>
       <p:sp>
         <p:nvSpPr>
@@ -7572,7 +7634,7 @@
           <a:bodyPr wrap="square" rtlCol="0" anchor="ctr"/>
           <a:lstStyle/>
           <a:p>
-            <a:pPr indent="0" marL="0">
+            <a:pPr marL="0" indent="0">
               <a:buNone/>
             </a:pPr>
             <a:r>
@@ -7611,7 +7673,7 @@
           <a:bodyPr wrap="square" rtlCol="0" anchor="ctr"/>
           <a:lstStyle/>
           <a:p>
-            <a:pPr algn="r" indent="0" marL="0">
+            <a:pPr marL="0" indent="0" algn="r">
               <a:buNone/>
             </a:pPr>
             <a:r>
@@ -7648,6 +7710,13 @@
           </a:solidFill>
           <a:ln/>
         </p:spPr>
+        <p:txBody>
+          <a:bodyPr/>
+          <a:lstStyle/>
+          <a:p>
+            <a:endParaRPr lang="fr-FR"/>
+          </a:p>
+        </p:txBody>
       </p:sp>
       <p:sp>
         <p:nvSpPr>
@@ -7670,11 +7739,11 @@
           <a:bodyPr wrap="square" rtlCol="0" anchor="ctr"/>
           <a:lstStyle/>
           <a:p>
-            <a:pPr indent="0" marL="0">
-              <a:buNone/>
-            </a:pPr>
-            <a:r>
-              <a:rPr lang="en-US" sz="1100" b="1" spc="200" kern="0" dirty="0">
+            <a:pPr marL="0" indent="0">
+              <a:buNone/>
+            </a:pPr>
+            <a:r>
+              <a:rPr lang="en-US" sz="1100" b="1" kern="0" spc="200" dirty="0">
                 <a:solidFill>
                   <a:srgbClr val="E74C3C"/>
                 </a:solidFill>
@@ -7709,7 +7778,7 @@
           <a:bodyPr wrap="square" rtlCol="0" anchor="ctr"/>
           <a:lstStyle/>
           <a:p>
-            <a:pPr indent="0" marL="0">
+            <a:pPr marL="0" indent="0">
               <a:buNone/>
             </a:pPr>
             <a:r>
@@ -7726,7 +7795,7 @@
             <a:endParaRPr lang="en-US" sz="3400" dirty="0"/>
           </a:p>
           <a:p>
-            <a:pPr indent="0" marL="0">
+            <a:pPr marL="0" indent="0">
               <a:buNone/>
             </a:pPr>
             <a:r>
@@ -7756,9 +7825,7 @@
             <a:ext cx="5760720" cy="1600200"/>
           </a:xfrm>
           <a:prstGeom prst="rect">
-            <a:avLst>
-              <a:gd name="adj" fmla="val 4571"/>
-            </a:avLst>
+            <a:avLst/>
           </a:prstGeom>
           <a:solidFill>
             <a:srgbClr val="1A2E1A"/>
@@ -7770,6 +7837,13 @@
             <a:prstDash val="solid"/>
           </a:ln>
         </p:spPr>
+        <p:txBody>
+          <a:bodyPr/>
+          <a:lstStyle/>
+          <a:p>
+            <a:endParaRPr lang="fr-FR"/>
+          </a:p>
+        </p:txBody>
       </p:sp>
       <p:sp>
         <p:nvSpPr>
@@ -7792,7 +7866,7 @@
           <a:bodyPr wrap="square" rtlCol="0" anchor="ctr"/>
           <a:lstStyle/>
           <a:p>
-            <a:pPr indent="0" marL="0">
+            <a:pPr marL="0" indent="0">
               <a:buNone/>
             </a:pPr>
             <a:r>
@@ -7831,7 +7905,7 @@
           <a:bodyPr wrap="square" rtlCol="0" anchor="ctr"/>
           <a:lstStyle/>
           <a:p>
-            <a:pPr indent="0" marL="0">
+            <a:pPr marL="0" indent="0">
               <a:buNone/>
             </a:pPr>
             <a:r>
@@ -7848,7 +7922,7 @@
             <a:endParaRPr lang="en-US" sz="1200" dirty="0"/>
           </a:p>
           <a:p>
-            <a:pPr indent="0" marL="0">
+            <a:pPr marL="0" indent="0">
               <a:buNone/>
             </a:pPr>
             <a:r>
@@ -7878,9 +7952,7 @@
             <a:ext cx="5760720" cy="1600200"/>
           </a:xfrm>
           <a:prstGeom prst="rect">
-            <a:avLst>
-              <a:gd name="adj" fmla="val 4571"/>
-            </a:avLst>
+            <a:avLst/>
           </a:prstGeom>
           <a:solidFill>
             <a:srgbClr val="1A1A2E"/>
@@ -7892,6 +7964,13 @@
             <a:prstDash val="solid"/>
           </a:ln>
         </p:spPr>
+        <p:txBody>
+          <a:bodyPr/>
+          <a:lstStyle/>
+          <a:p>
+            <a:endParaRPr lang="fr-FR"/>
+          </a:p>
+        </p:txBody>
       </p:sp>
       <p:sp>
         <p:nvSpPr>
@@ -7914,7 +7993,7 @@
           <a:bodyPr wrap="square" rtlCol="0" anchor="ctr"/>
           <a:lstStyle/>
           <a:p>
-            <a:pPr indent="0" marL="0">
+            <a:pPr marL="0" indent="0">
               <a:buNone/>
             </a:pPr>
             <a:r>
@@ -7953,7 +8032,7 @@
           <a:bodyPr wrap="square" rtlCol="0" anchor="ctr"/>
           <a:lstStyle/>
           <a:p>
-            <a:pPr indent="0" marL="0">
+            <a:pPr marL="0" indent="0">
               <a:buNone/>
             </a:pPr>
             <a:r>
@@ -7970,7 +8049,7 @@
             <a:endParaRPr lang="en-US" sz="1200" dirty="0"/>
           </a:p>
           <a:p>
-            <a:pPr indent="0" marL="0">
+            <a:pPr marL="0" indent="0">
               <a:buNone/>
             </a:pPr>
             <a:r>
@@ -8000,9 +8079,7 @@
             <a:ext cx="5760720" cy="1600200"/>
           </a:xfrm>
           <a:prstGeom prst="rect">
-            <a:avLst>
-              <a:gd name="adj" fmla="val 4571"/>
-            </a:avLst>
+            <a:avLst/>
           </a:prstGeom>
           <a:solidFill>
             <a:srgbClr val="2E2A1A"/>
@@ -8014,6 +8091,13 @@
             <a:prstDash val="solid"/>
           </a:ln>
         </p:spPr>
+        <p:txBody>
+          <a:bodyPr/>
+          <a:lstStyle/>
+          <a:p>
+            <a:endParaRPr lang="fr-FR"/>
+          </a:p>
+        </p:txBody>
       </p:sp>
       <p:sp>
         <p:nvSpPr>
@@ -8036,7 +8120,7 @@
           <a:bodyPr wrap="square" rtlCol="0" anchor="ctr"/>
           <a:lstStyle/>
           <a:p>
-            <a:pPr indent="0" marL="0">
+            <a:pPr marL="0" indent="0">
               <a:buNone/>
             </a:pPr>
             <a:r>
@@ -8075,7 +8159,7 @@
           <a:bodyPr wrap="square" rtlCol="0" anchor="ctr"/>
           <a:lstStyle/>
           <a:p>
-            <a:pPr indent="0" marL="0">
+            <a:pPr marL="0" indent="0">
               <a:buNone/>
             </a:pPr>
             <a:r>
@@ -8092,7 +8176,7 @@
             <a:endParaRPr lang="en-US" sz="1200" dirty="0"/>
           </a:p>
           <a:p>
-            <a:pPr indent="0" marL="0">
+            <a:pPr marL="0" indent="0">
               <a:buNone/>
             </a:pPr>
             <a:r>
@@ -8122,9 +8206,7 @@
             <a:ext cx="5760720" cy="1600200"/>
           </a:xfrm>
           <a:prstGeom prst="rect">
-            <a:avLst>
-              <a:gd name="adj" fmla="val 4571"/>
-            </a:avLst>
+            <a:avLst/>
           </a:prstGeom>
           <a:solidFill>
             <a:srgbClr val="1A2E2E"/>
@@ -8136,6 +8218,13 @@
             <a:prstDash val="solid"/>
           </a:ln>
         </p:spPr>
+        <p:txBody>
+          <a:bodyPr/>
+          <a:lstStyle/>
+          <a:p>
+            <a:endParaRPr lang="fr-FR"/>
+          </a:p>
+        </p:txBody>
       </p:sp>
       <p:sp>
         <p:nvSpPr>
@@ -8158,7 +8247,7 @@
           <a:bodyPr wrap="square" rtlCol="0" anchor="ctr"/>
           <a:lstStyle/>
           <a:p>
-            <a:pPr indent="0" marL="0">
+            <a:pPr marL="0" indent="0">
               <a:buNone/>
             </a:pPr>
             <a:r>
@@ -8197,7 +8286,7 @@
           <a:bodyPr wrap="square" rtlCol="0" anchor="ctr"/>
           <a:lstStyle/>
           <a:p>
-            <a:pPr indent="0" marL="0">
+            <a:pPr marL="0" indent="0">
               <a:buNone/>
             </a:pPr>
             <a:r>
@@ -8214,7 +8303,7 @@
             <a:endParaRPr lang="en-US" sz="1200" dirty="0"/>
           </a:p>
           <a:p>
-            <a:pPr indent="0" marL="0">
+            <a:pPr marL="0" indent="0">
               <a:buNone/>
             </a:pPr>
             <a:r>
@@ -8244,9 +8333,7 @@
             <a:ext cx="11704320" cy="320040"/>
           </a:xfrm>
           <a:prstGeom prst="rect">
-            <a:avLst>
-              <a:gd name="adj" fmla="val 22857"/>
-            </a:avLst>
+            <a:avLst/>
           </a:prstGeom>
           <a:solidFill>
             <a:srgbClr val="1A1A1A"/>
@@ -8258,6 +8345,13 @@
             <a:prstDash val="solid"/>
           </a:ln>
         </p:spPr>
+        <p:txBody>
+          <a:bodyPr/>
+          <a:lstStyle/>
+          <a:p>
+            <a:endParaRPr lang="fr-FR"/>
+          </a:p>
+        </p:txBody>
       </p:sp>
       <p:sp>
         <p:nvSpPr>
@@ -8280,7 +8374,7 @@
           <a:bodyPr wrap="square" rtlCol="0" anchor="ctr"/>
           <a:lstStyle/>
           <a:p>
-            <a:pPr indent="0" marL="0">
+            <a:pPr marL="0" indent="0">
               <a:buNone/>
             </a:pPr>
             <a:r>
@@ -8314,6 +8408,7 @@
         <a:solidFill>
           <a:srgbClr val="1A0000"/>
         </a:solidFill>
+        <a:effectLst/>
       </p:bgPr>
     </p:bg>
     <p:spTree>
@@ -8349,6 +8444,13 @@
           </a:solidFill>
           <a:ln/>
         </p:spPr>
+        <p:txBody>
+          <a:bodyPr/>
+          <a:lstStyle/>
+          <a:p>
+            <a:endParaRPr lang="fr-FR"/>
+          </a:p>
+        </p:txBody>
       </p:sp>
       <p:sp>
         <p:nvSpPr>
@@ -8371,11 +8473,11 @@
           <a:bodyPr wrap="square" rtlCol="0" anchor="ctr"/>
           <a:lstStyle/>
           <a:p>
-            <a:pPr algn="ctr" indent="0" marL="0">
-              <a:buNone/>
-            </a:pPr>
-            <a:r>
-              <a:rPr lang="en-US" sz="1400" b="1" spc="600" kern="0" dirty="0">
+            <a:pPr marL="0" indent="0" algn="ctr">
+              <a:buNone/>
+            </a:pPr>
+            <a:r>
+              <a:rPr lang="en-US" sz="1400" b="1" kern="0" spc="600" dirty="0">
                 <a:solidFill>
                   <a:srgbClr val="E74C3C"/>
                 </a:solidFill>
@@ -8410,7 +8512,7 @@
           <a:bodyPr wrap="square" rtlCol="0" anchor="ctr"/>
           <a:lstStyle/>
           <a:p>
-            <a:pPr algn="ctr" indent="0" marL="0">
+            <a:pPr marL="0" indent="0" algn="ctr">
               <a:buNone/>
             </a:pPr>
             <a:r>
@@ -8449,7 +8551,7 @@
           <a:bodyPr wrap="square" rtlCol="0" anchor="ctr"/>
           <a:lstStyle/>
           <a:p>
-            <a:pPr algn="ctr" indent="0" marL="0">
+            <a:pPr marL="0" indent="0" algn="ctr">
               <a:buNone/>
             </a:pPr>
             <a:r>
@@ -8483,6 +8585,7 @@
         <a:solidFill>
           <a:srgbClr val="0D0D0D"/>
         </a:solidFill>
+        <a:effectLst/>
       </p:bgPr>
     </p:bg>
     <p:spTree>
@@ -8518,6 +8621,13 @@
           </a:solidFill>
           <a:ln/>
         </p:spPr>
+        <p:txBody>
+          <a:bodyPr/>
+          <a:lstStyle/>
+          <a:p>
+            <a:endParaRPr lang="fr-FR"/>
+          </a:p>
+        </p:txBody>
       </p:sp>
       <p:sp>
         <p:nvSpPr>
@@ -8538,6 +8648,13 @@
           </a:solidFill>
           <a:ln/>
         </p:spPr>
+        <p:txBody>
+          <a:bodyPr/>
+          <a:lstStyle/>
+          <a:p>
+            <a:endParaRPr lang="fr-FR"/>
+          </a:p>
+        </p:txBody>
       </p:sp>
       <p:sp>
         <p:nvSpPr>
@@ -8560,7 +8677,7 @@
           <a:bodyPr wrap="square" rtlCol="0" anchor="ctr"/>
           <a:lstStyle/>
           <a:p>
-            <a:pPr indent="0" marL="0">
+            <a:pPr marL="0" indent="0">
               <a:buNone/>
             </a:pPr>
             <a:r>
@@ -8599,7 +8716,7 @@
           <a:bodyPr wrap="square" rtlCol="0" anchor="ctr"/>
           <a:lstStyle/>
           <a:p>
-            <a:pPr algn="r" indent="0" marL="0">
+            <a:pPr marL="0" indent="0" algn="r">
               <a:buNone/>
             </a:pPr>
             <a:r>
@@ -8636,6 +8753,13 @@
           </a:solidFill>
           <a:ln/>
         </p:spPr>
+        <p:txBody>
+          <a:bodyPr/>
+          <a:lstStyle/>
+          <a:p>
+            <a:endParaRPr lang="fr-FR"/>
+          </a:p>
+        </p:txBody>
       </p:sp>
       <p:sp>
         <p:nvSpPr>
@@ -8658,11 +8782,11 @@
           <a:bodyPr wrap="square" rtlCol="0" anchor="ctr"/>
           <a:lstStyle/>
           <a:p>
-            <a:pPr indent="0" marL="0">
-              <a:buNone/>
-            </a:pPr>
-            <a:r>
-              <a:rPr lang="en-US" sz="1100" b="1" spc="200" kern="0" dirty="0">
+            <a:pPr marL="0" indent="0">
+              <a:buNone/>
+            </a:pPr>
+            <a:r>
+              <a:rPr lang="en-US" sz="1100" b="1" kern="0" spc="200" dirty="0">
                 <a:solidFill>
                   <a:srgbClr val="E74C3C"/>
                 </a:solidFill>
@@ -8697,7 +8821,7 @@
           <a:bodyPr wrap="square" rtlCol="0" anchor="ctr"/>
           <a:lstStyle/>
           <a:p>
-            <a:pPr indent="0" marL="0">
+            <a:pPr marL="0" indent="0">
               <a:buNone/>
             </a:pPr>
             <a:r>
@@ -8739,6 +8863,13 @@
             <a:prstDash val="solid"/>
           </a:ln>
         </p:spPr>
+        <p:txBody>
+          <a:bodyPr/>
+          <a:lstStyle/>
+          <a:p>
+            <a:endParaRPr lang="fr-FR"/>
+          </a:p>
+        </p:txBody>
       </p:sp>
       <p:sp>
         <p:nvSpPr>
@@ -8761,7 +8892,7 @@
           <a:bodyPr wrap="square" rtlCol="0" anchor="ctr"/>
           <a:lstStyle/>
           <a:p>
-            <a:pPr indent="0" marL="0">
+            <a:pPr marL="0" indent="0">
               <a:buNone/>
             </a:pPr>
             <a:r>
@@ -8800,7 +8931,7 @@
           <a:bodyPr wrap="square" rtlCol="0" anchor="ctr"/>
           <a:lstStyle/>
           <a:p>
-            <a:pPr indent="0" marL="0">
+            <a:pPr marL="0" indent="0">
               <a:buNone/>
             </a:pPr>
             <a:r>
@@ -8842,6 +8973,13 @@
             <a:prstDash val="solid"/>
           </a:ln>
         </p:spPr>
+        <p:txBody>
+          <a:bodyPr/>
+          <a:lstStyle/>
+          <a:p>
+            <a:endParaRPr lang="fr-FR"/>
+          </a:p>
+        </p:txBody>
       </p:sp>
       <p:sp>
         <p:nvSpPr>
@@ -8864,7 +9002,7 @@
           <a:bodyPr wrap="square" rtlCol="0" anchor="ctr"/>
           <a:lstStyle/>
           <a:p>
-            <a:pPr algn="ctr" indent="0" marL="0">
+            <a:pPr marL="0" indent="0" algn="ctr">
               <a:buNone/>
             </a:pPr>
             <a:r>
@@ -8906,6 +9044,13 @@
             <a:prstDash val="solid"/>
           </a:ln>
         </p:spPr>
+        <p:txBody>
+          <a:bodyPr/>
+          <a:lstStyle/>
+          <a:p>
+            <a:endParaRPr lang="fr-FR"/>
+          </a:p>
+        </p:txBody>
       </p:sp>
       <p:sp>
         <p:nvSpPr>
@@ -8928,7 +9073,7 @@
           <a:bodyPr wrap="square" rtlCol="0" anchor="ctr"/>
           <a:lstStyle/>
           <a:p>
-            <a:pPr indent="0" marL="0">
+            <a:pPr marL="0" indent="0">
               <a:buNone/>
             </a:pPr>
             <a:r>
@@ -8967,7 +9112,7 @@
           <a:bodyPr wrap="square" rtlCol="0" anchor="ctr"/>
           <a:lstStyle/>
           <a:p>
-            <a:pPr indent="0" marL="0">
+            <a:pPr marL="0" indent="0">
               <a:buNone/>
             </a:pPr>
             <a:r>
@@ -9009,6 +9154,13 @@
             <a:prstDash val="solid"/>
           </a:ln>
         </p:spPr>
+        <p:txBody>
+          <a:bodyPr/>
+          <a:lstStyle/>
+          <a:p>
+            <a:endParaRPr lang="fr-FR"/>
+          </a:p>
+        </p:txBody>
       </p:sp>
       <p:sp>
         <p:nvSpPr>
@@ -9031,7 +9183,7 @@
           <a:bodyPr wrap="square" rtlCol="0" anchor="ctr"/>
           <a:lstStyle/>
           <a:p>
-            <a:pPr algn="ctr" indent="0" marL="0">
+            <a:pPr marL="0" indent="0" algn="ctr">
               <a:buNone/>
             </a:pPr>
             <a:r>
@@ -9073,6 +9225,13 @@
             <a:prstDash val="solid"/>
           </a:ln>
         </p:spPr>
+        <p:txBody>
+          <a:bodyPr/>
+          <a:lstStyle/>
+          <a:p>
+            <a:endParaRPr lang="fr-FR"/>
+          </a:p>
+        </p:txBody>
       </p:sp>
       <p:sp>
         <p:nvSpPr>
@@ -9095,7 +9254,7 @@
           <a:bodyPr wrap="square" rtlCol="0" anchor="ctr"/>
           <a:lstStyle/>
           <a:p>
-            <a:pPr indent="0" marL="0">
+            <a:pPr marL="0" indent="0">
               <a:buNone/>
             </a:pPr>
             <a:r>
@@ -9134,7 +9293,7 @@
           <a:bodyPr wrap="square" rtlCol="0" anchor="ctr"/>
           <a:lstStyle/>
           <a:p>
-            <a:pPr indent="0" marL="0">
+            <a:pPr marL="0" indent="0">
               <a:buNone/>
             </a:pPr>
             <a:r>
@@ -9176,6 +9335,13 @@
             <a:prstDash val="solid"/>
           </a:ln>
         </p:spPr>
+        <p:txBody>
+          <a:bodyPr/>
+          <a:lstStyle/>
+          <a:p>
+            <a:endParaRPr lang="fr-FR"/>
+          </a:p>
+        </p:txBody>
       </p:sp>
       <p:sp>
         <p:nvSpPr>
@@ -9198,7 +9364,7 @@
           <a:bodyPr wrap="square" rtlCol="0" anchor="ctr"/>
           <a:lstStyle/>
           <a:p>
-            <a:pPr algn="ctr" indent="0" marL="0">
+            <a:pPr marL="0" indent="0" algn="ctr">
               <a:buNone/>
             </a:pPr>
             <a:r>
@@ -9240,6 +9406,13 @@
             <a:prstDash val="solid"/>
           </a:ln>
         </p:spPr>
+        <p:txBody>
+          <a:bodyPr/>
+          <a:lstStyle/>
+          <a:p>
+            <a:endParaRPr lang="fr-FR"/>
+          </a:p>
+        </p:txBody>
       </p:sp>
       <p:sp>
         <p:nvSpPr>
@@ -9262,7 +9435,7 @@
           <a:bodyPr wrap="square" rtlCol="0" anchor="ctr"/>
           <a:lstStyle/>
           <a:p>
-            <a:pPr indent="0" marL="0">
+            <a:pPr marL="0" indent="0">
               <a:buNone/>
             </a:pPr>
             <a:r>
@@ -9301,7 +9474,7 @@
           <a:bodyPr wrap="square" rtlCol="0" anchor="ctr"/>
           <a:lstStyle/>
           <a:p>
-            <a:pPr indent="0" marL="0">
+            <a:pPr marL="0" indent="0">
               <a:buNone/>
             </a:pPr>
             <a:r>
@@ -9343,6 +9516,13 @@
             <a:prstDash val="solid"/>
           </a:ln>
         </p:spPr>
+        <p:txBody>
+          <a:bodyPr/>
+          <a:lstStyle/>
+          <a:p>
+            <a:endParaRPr lang="fr-FR"/>
+          </a:p>
+        </p:txBody>
       </p:sp>
       <p:sp>
         <p:nvSpPr>
@@ -9365,7 +9545,7 @@
           <a:bodyPr wrap="square" rtlCol="0" anchor="ctr"/>
           <a:lstStyle/>
           <a:p>
-            <a:pPr algn="ctr" indent="0" marL="0">
+            <a:pPr marL="0" indent="0" algn="ctr">
               <a:buNone/>
             </a:pPr>
             <a:r>
@@ -9407,6 +9587,13 @@
             <a:prstDash val="solid"/>
           </a:ln>
         </p:spPr>
+        <p:txBody>
+          <a:bodyPr/>
+          <a:lstStyle/>
+          <a:p>
+            <a:endParaRPr lang="fr-FR"/>
+          </a:p>
+        </p:txBody>
       </p:sp>
       <p:sp>
         <p:nvSpPr>
@@ -9429,7 +9616,7 @@
           <a:bodyPr wrap="square" rtlCol="0" anchor="ctr"/>
           <a:lstStyle/>
           <a:p>
-            <a:pPr indent="0" marL="0">
+            <a:pPr marL="0" indent="0">
               <a:buNone/>
             </a:pPr>
             <a:r>
@@ -9468,7 +9655,7 @@
           <a:bodyPr wrap="square" rtlCol="0" anchor="ctr"/>
           <a:lstStyle/>
           <a:p>
-            <a:pPr indent="0" marL="0">
+            <a:pPr marL="0" indent="0">
               <a:buNone/>
             </a:pPr>
             <a:r>
@@ -9510,6 +9697,13 @@
             <a:prstDash val="solid"/>
           </a:ln>
         </p:spPr>
+        <p:txBody>
+          <a:bodyPr/>
+          <a:lstStyle/>
+          <a:p>
+            <a:endParaRPr lang="fr-FR"/>
+          </a:p>
+        </p:txBody>
       </p:sp>
       <p:sp>
         <p:nvSpPr>
@@ -9532,7 +9726,7 @@
           <a:bodyPr wrap="square" rtlCol="0" anchor="ctr"/>
           <a:lstStyle/>
           <a:p>
-            <a:pPr algn="ctr" indent="0" marL="0">
+            <a:pPr marL="0" indent="0" algn="ctr">
               <a:buNone/>
             </a:pPr>
             <a:r>
@@ -9574,6 +9768,13 @@
             <a:prstDash val="solid"/>
           </a:ln>
         </p:spPr>
+        <p:txBody>
+          <a:bodyPr/>
+          <a:lstStyle/>
+          <a:p>
+            <a:endParaRPr lang="fr-FR"/>
+          </a:p>
+        </p:txBody>
       </p:sp>
       <p:sp>
         <p:nvSpPr>
@@ -9596,7 +9797,7 @@
           <a:bodyPr wrap="square" rtlCol="0" anchor="ctr"/>
           <a:lstStyle/>
           <a:p>
-            <a:pPr indent="0" marL="0">
+            <a:pPr marL="0" indent="0">
               <a:buNone/>
             </a:pPr>
             <a:r>
@@ -9635,7 +9836,7 @@
           <a:bodyPr wrap="square" rtlCol="0" anchor="ctr"/>
           <a:lstStyle/>
           <a:p>
-            <a:pPr indent="0" marL="0">
+            <a:pPr marL="0" indent="0">
               <a:buNone/>
             </a:pPr>
             <a:r>
@@ -9677,6 +9878,13 @@
             <a:prstDash val="solid"/>
           </a:ln>
         </p:spPr>
+        <p:txBody>
+          <a:bodyPr/>
+          <a:lstStyle/>
+          <a:p>
+            <a:endParaRPr lang="fr-FR"/>
+          </a:p>
+        </p:txBody>
       </p:sp>
       <p:sp>
         <p:nvSpPr>
@@ -9699,7 +9907,7 @@
           <a:bodyPr wrap="square" rtlCol="0" anchor="ctr"/>
           <a:lstStyle/>
           <a:p>
-            <a:pPr algn="ctr" indent="0" marL="0">
+            <a:pPr marL="0" indent="0" algn="ctr">
               <a:buNone/>
             </a:pPr>
             <a:r>
@@ -9741,6 +9949,13 @@
             <a:prstDash val="solid"/>
           </a:ln>
         </p:spPr>
+        <p:txBody>
+          <a:bodyPr/>
+          <a:lstStyle/>
+          <a:p>
+            <a:endParaRPr lang="fr-FR"/>
+          </a:p>
+        </p:txBody>
       </p:sp>
       <p:sp>
         <p:nvSpPr>
@@ -9763,7 +9978,7 @@
           <a:bodyPr wrap="square" rtlCol="0" anchor="ctr"/>
           <a:lstStyle/>
           <a:p>
-            <a:pPr indent="0" marL="0">
+            <a:pPr marL="0" indent="0">
               <a:buNone/>
             </a:pPr>
             <a:r>
@@ -9802,7 +10017,7 @@
           <a:bodyPr wrap="square" rtlCol="0" anchor="ctr"/>
           <a:lstStyle/>
           <a:p>
-            <a:pPr indent="0" marL="0">
+            <a:pPr marL="0" indent="0">
               <a:buNone/>
             </a:pPr>
             <a:r>
@@ -9844,6 +10059,13 @@
             <a:prstDash val="solid"/>
           </a:ln>
         </p:spPr>
+        <p:txBody>
+          <a:bodyPr/>
+          <a:lstStyle/>
+          <a:p>
+            <a:endParaRPr lang="fr-FR"/>
+          </a:p>
+        </p:txBody>
       </p:sp>
       <p:sp>
         <p:nvSpPr>
@@ -9866,7 +10088,7 @@
           <a:bodyPr wrap="square" rtlCol="0" anchor="ctr"/>
           <a:lstStyle/>
           <a:p>
-            <a:pPr algn="ctr" indent="0" marL="0">
+            <a:pPr marL="0" indent="0" algn="ctr">
               <a:buNone/>
             </a:pPr>
             <a:r>
@@ -9900,6 +10122,7 @@
         <a:solidFill>
           <a:srgbClr val="0D0D0D"/>
         </a:solidFill>
+        <a:effectLst/>
       </p:bgPr>
     </p:bg>
     <p:spTree>
@@ -9935,6 +10158,13 @@
           </a:solidFill>
           <a:ln/>
         </p:spPr>
+        <p:txBody>
+          <a:bodyPr/>
+          <a:lstStyle/>
+          <a:p>
+            <a:endParaRPr lang="fr-FR"/>
+          </a:p>
+        </p:txBody>
       </p:sp>
       <p:sp>
         <p:nvSpPr>
@@ -9955,6 +10185,13 @@
           </a:solidFill>
           <a:ln/>
         </p:spPr>
+        <p:txBody>
+          <a:bodyPr/>
+          <a:lstStyle/>
+          <a:p>
+            <a:endParaRPr lang="fr-FR"/>
+          </a:p>
+        </p:txBody>
       </p:sp>
       <p:sp>
         <p:nvSpPr>
@@ -9977,7 +10214,7 @@
           <a:bodyPr wrap="square" rtlCol="0" anchor="ctr"/>
           <a:lstStyle/>
           <a:p>
-            <a:pPr indent="0" marL="0">
+            <a:pPr marL="0" indent="0">
               <a:buNone/>
             </a:pPr>
             <a:r>
@@ -10016,7 +10253,7 @@
           <a:bodyPr wrap="square" rtlCol="0" anchor="ctr"/>
           <a:lstStyle/>
           <a:p>
-            <a:pPr algn="r" indent="0" marL="0">
+            <a:pPr marL="0" indent="0" algn="r">
               <a:buNone/>
             </a:pPr>
             <a:r>
@@ -10053,6 +10290,13 @@
           </a:solidFill>
           <a:ln/>
         </p:spPr>
+        <p:txBody>
+          <a:bodyPr/>
+          <a:lstStyle/>
+          <a:p>
+            <a:endParaRPr lang="fr-FR"/>
+          </a:p>
+        </p:txBody>
       </p:sp>
       <p:sp>
         <p:nvSpPr>
@@ -10075,11 +10319,11 @@
           <a:bodyPr wrap="square" rtlCol="0" anchor="ctr"/>
           <a:lstStyle/>
           <a:p>
-            <a:pPr indent="0" marL="0">
-              <a:buNone/>
-            </a:pPr>
-            <a:r>
-              <a:rPr lang="en-US" sz="1100" b="1" spc="200" kern="0" dirty="0">
+            <a:pPr marL="0" indent="0">
+              <a:buNone/>
+            </a:pPr>
+            <a:r>
+              <a:rPr lang="en-US" sz="1100" b="1" kern="0" spc="200" dirty="0">
                 <a:solidFill>
                   <a:srgbClr val="E74C3C"/>
                 </a:solidFill>
@@ -10114,7 +10358,7 @@
           <a:bodyPr wrap="square" rtlCol="0" anchor="ctr"/>
           <a:lstStyle/>
           <a:p>
-            <a:pPr indent="0" marL="0">
+            <a:pPr marL="0" indent="0">
               <a:buNone/>
             </a:pPr>
             <a:r>
@@ -10144,9 +10388,7 @@
             <a:ext cx="3657600" cy="3657600"/>
           </a:xfrm>
           <a:prstGeom prst="rect">
-            <a:avLst>
-              <a:gd name="adj" fmla="val 2000"/>
-            </a:avLst>
+            <a:avLst/>
           </a:prstGeom>
           <a:solidFill>
             <a:srgbClr val="2E1A1A"/>
@@ -10158,6 +10400,13 @@
             <a:prstDash val="solid"/>
           </a:ln>
         </p:spPr>
+        <p:txBody>
+          <a:bodyPr/>
+          <a:lstStyle/>
+          <a:p>
+            <a:endParaRPr lang="fr-FR"/>
+          </a:p>
+        </p:txBody>
       </p:sp>
       <p:sp>
         <p:nvSpPr>
@@ -10180,7 +10429,7 @@
           <a:bodyPr wrap="square" rtlCol="0" anchor="ctr"/>
           <a:lstStyle/>
           <a:p>
-            <a:pPr algn="ctr" indent="0" marL="0">
+            <a:pPr marL="0" indent="0" algn="ctr">
               <a:buNone/>
             </a:pPr>
             <a:r>
@@ -10197,7 +10446,7 @@
             <a:endParaRPr lang="en-US" sz="1400" dirty="0"/>
           </a:p>
           <a:p>
-            <a:pPr algn="ctr" indent="0" marL="0">
+            <a:pPr marL="0" indent="0" algn="ctr">
               <a:buNone/>
             </a:pPr>
             <a:r>
@@ -10234,6 +10483,13 @@
           </a:solidFill>
           <a:ln/>
         </p:spPr>
+        <p:txBody>
+          <a:bodyPr/>
+          <a:lstStyle/>
+          <a:p>
+            <a:endParaRPr lang="fr-FR"/>
+          </a:p>
+        </p:txBody>
       </p:sp>
       <p:sp>
         <p:nvSpPr>
@@ -10256,7 +10512,7 @@
           <a:bodyPr wrap="square" rtlCol="0" anchor="ctr"/>
           <a:lstStyle/>
           <a:p>
-            <a:pPr indent="0" marL="0">
+            <a:pPr marL="0" indent="0">
               <a:spcAft>
                 <a:spcPts val="400"/>
               </a:spcAft>
@@ -10276,7 +10532,7 @@
             <a:endParaRPr lang="en-US" sz="1200" dirty="0"/>
           </a:p>
           <a:p>
-            <a:pPr indent="0" marL="0">
+            <a:pPr marL="0" indent="0">
               <a:spcAft>
                 <a:spcPts val="400"/>
               </a:spcAft>
@@ -10296,7 +10552,7 @@
             <a:endParaRPr lang="en-US" sz="1200" dirty="0"/>
           </a:p>
           <a:p>
-            <a:pPr indent="0" marL="0">
+            <a:pPr marL="0" indent="0">
               <a:spcAft>
                 <a:spcPts val="400"/>
               </a:spcAft>
@@ -10341,6 +10597,13 @@
             <a:prstDash val="solid"/>
           </a:ln>
         </p:spPr>
+        <p:txBody>
+          <a:bodyPr/>
+          <a:lstStyle/>
+          <a:p>
+            <a:endParaRPr lang="fr-FR"/>
+          </a:p>
+        </p:txBody>
       </p:sp>
       <p:sp>
         <p:nvSpPr>
@@ -10363,7 +10626,7 @@
           <a:bodyPr wrap="square" rtlCol="0" anchor="ctr"/>
           <a:lstStyle/>
           <a:p>
-            <a:pPr algn="ctr" indent="0" marL="0">
+            <a:pPr marL="0" indent="0" algn="ctr">
               <a:buNone/>
             </a:pPr>
             <a:r>
@@ -10393,9 +10656,7 @@
             <a:ext cx="3657600" cy="3657600"/>
           </a:xfrm>
           <a:prstGeom prst="rect">
-            <a:avLst>
-              <a:gd name="adj" fmla="val 2000"/>
-            </a:avLst>
+            <a:avLst/>
           </a:prstGeom>
           <a:solidFill>
             <a:srgbClr val="2E2A1A"/>
@@ -10407,6 +10668,13 @@
             <a:prstDash val="solid"/>
           </a:ln>
         </p:spPr>
+        <p:txBody>
+          <a:bodyPr/>
+          <a:lstStyle/>
+          <a:p>
+            <a:endParaRPr lang="fr-FR"/>
+          </a:p>
+        </p:txBody>
       </p:sp>
       <p:sp>
         <p:nvSpPr>
@@ -10429,7 +10697,7 @@
           <a:bodyPr wrap="square" rtlCol="0" anchor="ctr"/>
           <a:lstStyle/>
           <a:p>
-            <a:pPr algn="ctr" indent="0" marL="0">
+            <a:pPr marL="0" indent="0" algn="ctr">
               <a:buNone/>
             </a:pPr>
             <a:r>
@@ -10446,7 +10714,7 @@
             <a:endParaRPr lang="en-US" sz="1400" dirty="0"/>
           </a:p>
           <a:p>
-            <a:pPr algn="ctr" indent="0" marL="0">
+            <a:pPr marL="0" indent="0" algn="ctr">
               <a:buNone/>
             </a:pPr>
             <a:r>
@@ -10483,6 +10751,13 @@
           </a:solidFill>
           <a:ln/>
         </p:spPr>
+        <p:txBody>
+          <a:bodyPr/>
+          <a:lstStyle/>
+          <a:p>
+            <a:endParaRPr lang="fr-FR"/>
+          </a:p>
+        </p:txBody>
       </p:sp>
       <p:sp>
         <p:nvSpPr>
@@ -10505,7 +10780,7 @@
           <a:bodyPr wrap="square" rtlCol="0" anchor="ctr"/>
           <a:lstStyle/>
           <a:p>
-            <a:pPr indent="0" marL="0">
+            <a:pPr marL="0" indent="0">
               <a:spcAft>
                 <a:spcPts val="400"/>
               </a:spcAft>
@@ -10525,7 +10800,7 @@
             <a:endParaRPr lang="en-US" sz="1200" dirty="0"/>
           </a:p>
           <a:p>
-            <a:pPr indent="0" marL="0">
+            <a:pPr marL="0" indent="0">
               <a:spcAft>
                 <a:spcPts val="400"/>
               </a:spcAft>
@@ -10545,7 +10820,7 @@
             <a:endParaRPr lang="en-US" sz="1200" dirty="0"/>
           </a:p>
           <a:p>
-            <a:pPr indent="0" marL="0">
+            <a:pPr marL="0" indent="0">
               <a:spcAft>
                 <a:spcPts val="400"/>
               </a:spcAft>
@@ -10590,6 +10865,13 @@
             <a:prstDash val="solid"/>
           </a:ln>
         </p:spPr>
+        <p:txBody>
+          <a:bodyPr/>
+          <a:lstStyle/>
+          <a:p>
+            <a:endParaRPr lang="fr-FR"/>
+          </a:p>
+        </p:txBody>
       </p:sp>
       <p:sp>
         <p:nvSpPr>
@@ -10612,7 +10894,7 @@
           <a:bodyPr wrap="square" rtlCol="0" anchor="ctr"/>
           <a:lstStyle/>
           <a:p>
-            <a:pPr algn="ctr" indent="0" marL="0">
+            <a:pPr marL="0" indent="0" algn="ctr">
               <a:buNone/>
             </a:pPr>
             <a:r>
@@ -10642,9 +10924,7 @@
             <a:ext cx="3657600" cy="3657600"/>
           </a:xfrm>
           <a:prstGeom prst="rect">
-            <a:avLst>
-              <a:gd name="adj" fmla="val 2000"/>
-            </a:avLst>
+            <a:avLst/>
           </a:prstGeom>
           <a:solidFill>
             <a:srgbClr val="1A1A2E"/>
@@ -10656,6 +10936,13 @@
             <a:prstDash val="solid"/>
           </a:ln>
         </p:spPr>
+        <p:txBody>
+          <a:bodyPr/>
+          <a:lstStyle/>
+          <a:p>
+            <a:endParaRPr lang="fr-FR"/>
+          </a:p>
+        </p:txBody>
       </p:sp>
       <p:sp>
         <p:nvSpPr>
@@ -10678,7 +10965,7 @@
           <a:bodyPr wrap="square" rtlCol="0" anchor="ctr"/>
           <a:lstStyle/>
           <a:p>
-            <a:pPr algn="ctr" indent="0" marL="0">
+            <a:pPr marL="0" indent="0" algn="ctr">
               <a:buNone/>
             </a:pPr>
             <a:r>
@@ -10695,7 +10982,7 @@
             <a:endParaRPr lang="en-US" sz="1400" dirty="0"/>
           </a:p>
           <a:p>
-            <a:pPr algn="ctr" indent="0" marL="0">
+            <a:pPr marL="0" indent="0" algn="ctr">
               <a:buNone/>
             </a:pPr>
             <a:r>
@@ -10732,6 +11019,13 @@
           </a:solidFill>
           <a:ln/>
         </p:spPr>
+        <p:txBody>
+          <a:bodyPr/>
+          <a:lstStyle/>
+          <a:p>
+            <a:endParaRPr lang="fr-FR"/>
+          </a:p>
+        </p:txBody>
       </p:sp>
       <p:sp>
         <p:nvSpPr>
@@ -10754,7 +11048,7 @@
           <a:bodyPr wrap="square" rtlCol="0" anchor="ctr"/>
           <a:lstStyle/>
           <a:p>
-            <a:pPr indent="0" marL="0">
+            <a:pPr marL="0" indent="0">
               <a:spcAft>
                 <a:spcPts val="400"/>
               </a:spcAft>
@@ -10774,7 +11068,7 @@
             <a:endParaRPr lang="en-US" sz="1200" dirty="0"/>
           </a:p>
           <a:p>
-            <a:pPr indent="0" marL="0">
+            <a:pPr marL="0" indent="0">
               <a:spcAft>
                 <a:spcPts val="400"/>
               </a:spcAft>
@@ -10794,7 +11088,7 @@
             <a:endParaRPr lang="en-US" sz="1200" dirty="0"/>
           </a:p>
           <a:p>
-            <a:pPr indent="0" marL="0">
+            <a:pPr marL="0" indent="0">
               <a:spcAft>
                 <a:spcPts val="400"/>
               </a:spcAft>
@@ -10839,6 +11133,13 @@
             <a:prstDash val="solid"/>
           </a:ln>
         </p:spPr>
+        <p:txBody>
+          <a:bodyPr/>
+          <a:lstStyle/>
+          <a:p>
+            <a:endParaRPr lang="fr-FR"/>
+          </a:p>
+        </p:txBody>
       </p:sp>
       <p:sp>
         <p:nvSpPr>
@@ -10861,7 +11162,7 @@
           <a:bodyPr wrap="square" rtlCol="0" anchor="ctr"/>
           <a:lstStyle/>
           <a:p>
-            <a:pPr algn="ctr" indent="0" marL="0">
+            <a:pPr marL="0" indent="0" algn="ctr">
               <a:buNone/>
             </a:pPr>
             <a:r>
@@ -10895,6 +11196,7 @@
         <a:solidFill>
           <a:srgbClr val="0D0D0D"/>
         </a:solidFill>
+        <a:effectLst/>
       </p:bgPr>
     </p:bg>
     <p:spTree>
@@ -10930,6 +11232,13 @@
           </a:solidFill>
           <a:ln/>
         </p:spPr>
+        <p:txBody>
+          <a:bodyPr/>
+          <a:lstStyle/>
+          <a:p>
+            <a:endParaRPr lang="fr-FR"/>
+          </a:p>
+        </p:txBody>
       </p:sp>
       <p:sp>
         <p:nvSpPr>
@@ -10950,6 +11259,13 @@
           </a:solidFill>
           <a:ln/>
         </p:spPr>
+        <p:txBody>
+          <a:bodyPr/>
+          <a:lstStyle/>
+          <a:p>
+            <a:endParaRPr lang="fr-FR"/>
+          </a:p>
+        </p:txBody>
       </p:sp>
       <p:sp>
         <p:nvSpPr>
@@ -10972,7 +11288,7 @@
           <a:bodyPr wrap="square" rtlCol="0" anchor="ctr"/>
           <a:lstStyle/>
           <a:p>
-            <a:pPr indent="0" marL="0">
+            <a:pPr marL="0" indent="0">
               <a:buNone/>
             </a:pPr>
             <a:r>
@@ -11011,7 +11327,7 @@
           <a:bodyPr wrap="square" rtlCol="0" anchor="ctr"/>
           <a:lstStyle/>
           <a:p>
-            <a:pPr algn="r" indent="0" marL="0">
+            <a:pPr marL="0" indent="0" algn="r">
               <a:buNone/>
             </a:pPr>
             <a:r>
@@ -11048,6 +11364,13 @@
           </a:solidFill>
           <a:ln/>
         </p:spPr>
+        <p:txBody>
+          <a:bodyPr/>
+          <a:lstStyle/>
+          <a:p>
+            <a:endParaRPr lang="fr-FR"/>
+          </a:p>
+        </p:txBody>
       </p:sp>
       <p:sp>
         <p:nvSpPr>
@@ -11070,11 +11393,11 @@
           <a:bodyPr wrap="square" rtlCol="0" anchor="ctr"/>
           <a:lstStyle/>
           <a:p>
-            <a:pPr indent="0" marL="0">
-              <a:buNone/>
-            </a:pPr>
-            <a:r>
-              <a:rPr lang="en-US" sz="1100" b="1" spc="200" kern="0" dirty="0">
+            <a:pPr marL="0" indent="0">
+              <a:buNone/>
+            </a:pPr>
+            <a:r>
+              <a:rPr lang="en-US" sz="1100" b="1" kern="0" spc="200" dirty="0">
                 <a:solidFill>
                   <a:srgbClr val="E74C3C"/>
                 </a:solidFill>
@@ -11109,7 +11432,7 @@
           <a:bodyPr wrap="square" rtlCol="0" anchor="ctr"/>
           <a:lstStyle/>
           <a:p>
-            <a:pPr indent="0" marL="0">
+            <a:pPr marL="0" indent="0">
               <a:buNone/>
             </a:pPr>
             <a:r>
@@ -11126,7 +11449,7 @@
             <a:endParaRPr lang="en-US" sz="3400" dirty="0"/>
           </a:p>
           <a:p>
-            <a:pPr indent="0" marL="0">
+            <a:pPr marL="0" indent="0">
               <a:buNone/>
             </a:pPr>
             <a:r>
@@ -11156,9 +11479,7 @@
             <a:ext cx="3657600" cy="3749040"/>
           </a:xfrm>
           <a:prstGeom prst="rect">
-            <a:avLst>
-              <a:gd name="adj" fmla="val 2000"/>
-            </a:avLst>
+            <a:avLst/>
           </a:prstGeom>
           <a:solidFill>
             <a:srgbClr val="2E1A1A"/>
@@ -11170,6 +11491,13 @@
             <a:prstDash val="solid"/>
           </a:ln>
         </p:spPr>
+        <p:txBody>
+          <a:bodyPr/>
+          <a:lstStyle/>
+          <a:p>
+            <a:endParaRPr lang="fr-FR"/>
+          </a:p>
+        </p:txBody>
       </p:sp>
       <p:sp>
         <p:nvSpPr>
@@ -11192,7 +11520,7 @@
           <a:bodyPr wrap="square" rtlCol="0" anchor="ctr"/>
           <a:lstStyle/>
           <a:p>
-            <a:pPr indent="0" marL="0">
+            <a:pPr marL="0" indent="0">
               <a:buNone/>
             </a:pPr>
             <a:r>
@@ -11229,6 +11557,13 @@
           </a:solidFill>
           <a:ln/>
         </p:spPr>
+        <p:txBody>
+          <a:bodyPr/>
+          <a:lstStyle/>
+          <a:p>
+            <a:endParaRPr lang="fr-FR"/>
+          </a:p>
+        </p:txBody>
       </p:sp>
       <p:sp>
         <p:nvSpPr>
@@ -11251,7 +11586,7 @@
           <a:bodyPr wrap="square" rtlCol="0" anchor="ctr"/>
           <a:lstStyle/>
           <a:p>
-            <a:pPr indent="0" marL="0">
+            <a:pPr marL="0" indent="0">
               <a:buNone/>
             </a:pPr>
             <a:r>
@@ -11290,7 +11625,7 @@
           <a:bodyPr wrap="square" rtlCol="0" anchor="ctr"/>
           <a:lstStyle/>
           <a:p>
-            <a:pPr indent="0" marL="0">
+            <a:pPr marL="0" indent="0">
               <a:buNone/>
             </a:pPr>
             <a:r>
@@ -11307,7 +11642,7 @@
             <a:endParaRPr lang="en-US" sz="1200" dirty="0"/>
           </a:p>
           <a:p>
-            <a:pPr indent="0" marL="0">
+            <a:pPr marL="0" indent="0">
               <a:buNone/>
             </a:pPr>
             <a:r>
@@ -11324,7 +11659,7 @@
             <a:endParaRPr lang="en-US" sz="1200" dirty="0"/>
           </a:p>
           <a:p>
-            <a:pPr indent="0" marL="0">
+            <a:pPr marL="0" indent="0">
               <a:buNone/>
             </a:pPr>
             <a:r>
@@ -11354,9 +11689,7 @@
             <a:ext cx="3657600" cy="3749040"/>
           </a:xfrm>
           <a:prstGeom prst="rect">
-            <a:avLst>
-              <a:gd name="adj" fmla="val 2000"/>
-            </a:avLst>
+            <a:avLst/>
           </a:prstGeom>
           <a:solidFill>
             <a:srgbClr val="1A1A2E"/>
@@ -11368,6 +11701,13 @@
             <a:prstDash val="solid"/>
           </a:ln>
         </p:spPr>
+        <p:txBody>
+          <a:bodyPr/>
+          <a:lstStyle/>
+          <a:p>
+            <a:endParaRPr lang="fr-FR"/>
+          </a:p>
+        </p:txBody>
       </p:sp>
       <p:sp>
         <p:nvSpPr>
@@ -11390,7 +11730,7 @@
           <a:bodyPr wrap="square" rtlCol="0" anchor="ctr"/>
           <a:lstStyle/>
           <a:p>
-            <a:pPr indent="0" marL="0">
+            <a:pPr marL="0" indent="0">
               <a:buNone/>
             </a:pPr>
             <a:r>
@@ -11427,6 +11767,13 @@
           </a:solidFill>
           <a:ln/>
         </p:spPr>
+        <p:txBody>
+          <a:bodyPr/>
+          <a:lstStyle/>
+          <a:p>
+            <a:endParaRPr lang="fr-FR"/>
+          </a:p>
+        </p:txBody>
       </p:sp>
       <p:sp>
         <p:nvSpPr>
@@ -11449,7 +11796,7 @@
           <a:bodyPr wrap="square" rtlCol="0" anchor="ctr"/>
           <a:lstStyle/>
           <a:p>
-            <a:pPr indent="0" marL="0">
+            <a:pPr marL="0" indent="0">
               <a:buNone/>
             </a:pPr>
             <a:r>
@@ -11488,7 +11835,7 @@
           <a:bodyPr wrap="square" rtlCol="0" anchor="ctr"/>
           <a:lstStyle/>
           <a:p>
-            <a:pPr indent="0" marL="0">
+            <a:pPr marL="0" indent="0">
               <a:buNone/>
             </a:pPr>
             <a:r>
@@ -11505,7 +11852,7 @@
             <a:endParaRPr lang="en-US" sz="1200" dirty="0"/>
           </a:p>
           <a:p>
-            <a:pPr indent="0" marL="0">
+            <a:pPr marL="0" indent="0">
               <a:buNone/>
             </a:pPr>
             <a:r>
@@ -11522,7 +11869,7 @@
             <a:endParaRPr lang="en-US" sz="1200" dirty="0"/>
           </a:p>
           <a:p>
-            <a:pPr indent="0" marL="0">
+            <a:pPr marL="0" indent="0">
               <a:buNone/>
             </a:pPr>
             <a:r>
@@ -11552,9 +11899,7 @@
             <a:ext cx="3657600" cy="3749040"/>
           </a:xfrm>
           <a:prstGeom prst="rect">
-            <a:avLst>
-              <a:gd name="adj" fmla="val 2000"/>
-            </a:avLst>
+            <a:avLst/>
           </a:prstGeom>
           <a:solidFill>
             <a:srgbClr val="1A2E1A"/>
@@ -11566,6 +11911,13 @@
             <a:prstDash val="solid"/>
           </a:ln>
         </p:spPr>
+        <p:txBody>
+          <a:bodyPr/>
+          <a:lstStyle/>
+          <a:p>
+            <a:endParaRPr lang="fr-FR"/>
+          </a:p>
+        </p:txBody>
       </p:sp>
       <p:sp>
         <p:nvSpPr>
@@ -11588,7 +11940,7 @@
           <a:bodyPr wrap="square" rtlCol="0" anchor="ctr"/>
           <a:lstStyle/>
           <a:p>
-            <a:pPr indent="0" marL="0">
+            <a:pPr marL="0" indent="0">
               <a:buNone/>
             </a:pPr>
             <a:r>
@@ -11625,6 +11977,13 @@
           </a:solidFill>
           <a:ln/>
         </p:spPr>
+        <p:txBody>
+          <a:bodyPr/>
+          <a:lstStyle/>
+          <a:p>
+            <a:endParaRPr lang="fr-FR"/>
+          </a:p>
+        </p:txBody>
       </p:sp>
       <p:sp>
         <p:nvSpPr>
@@ -11647,7 +12006,7 @@
           <a:bodyPr wrap="square" rtlCol="0" anchor="ctr"/>
           <a:lstStyle/>
           <a:p>
-            <a:pPr indent="0" marL="0">
+            <a:pPr marL="0" indent="0">
               <a:buNone/>
             </a:pPr>
             <a:r>
@@ -11686,7 +12045,7 @@
           <a:bodyPr wrap="square" rtlCol="0" anchor="ctr"/>
           <a:lstStyle/>
           <a:p>
-            <a:pPr indent="0" marL="0">
+            <a:pPr marL="0" indent="0">
               <a:buNone/>
             </a:pPr>
             <a:r>
@@ -11703,7 +12062,7 @@
             <a:endParaRPr lang="en-US" sz="1200" dirty="0"/>
           </a:p>
           <a:p>
-            <a:pPr indent="0" marL="0">
+            <a:pPr marL="0" indent="0">
               <a:buNone/>
             </a:pPr>
             <a:r>
@@ -11720,7 +12079,7 @@
             <a:endParaRPr lang="en-US" sz="1200" dirty="0"/>
           </a:p>
           <a:p>
-            <a:pPr indent="0" marL="0">
+            <a:pPr marL="0" indent="0">
               <a:buNone/>
             </a:pPr>
             <a:r>
@@ -11754,6 +12113,7 @@
         <a:solidFill>
           <a:srgbClr val="0D0D0D"/>
         </a:solidFill>
+        <a:effectLst/>
       </p:bgPr>
     </p:bg>
     <p:spTree>
@@ -11789,6 +12149,13 @@
           </a:solidFill>
           <a:ln/>
         </p:spPr>
+        <p:txBody>
+          <a:bodyPr/>
+          <a:lstStyle/>
+          <a:p>
+            <a:endParaRPr lang="fr-FR"/>
+          </a:p>
+        </p:txBody>
       </p:sp>
       <p:sp>
         <p:nvSpPr>
@@ -11809,6 +12176,13 @@
           </a:solidFill>
           <a:ln/>
         </p:spPr>
+        <p:txBody>
+          <a:bodyPr/>
+          <a:lstStyle/>
+          <a:p>
+            <a:endParaRPr lang="fr-FR"/>
+          </a:p>
+        </p:txBody>
       </p:sp>
       <p:sp>
         <p:nvSpPr>
@@ -11831,7 +12205,7 @@
           <a:bodyPr wrap="square" rtlCol="0" anchor="ctr"/>
           <a:lstStyle/>
           <a:p>
-            <a:pPr indent="0" marL="0">
+            <a:pPr marL="0" indent="0">
               <a:buNone/>
             </a:pPr>
             <a:r>
@@ -11870,7 +12244,7 @@
           <a:bodyPr wrap="square" rtlCol="0" anchor="ctr"/>
           <a:lstStyle/>
           <a:p>
-            <a:pPr algn="r" indent="0" marL="0">
+            <a:pPr marL="0" indent="0" algn="r">
               <a:buNone/>
             </a:pPr>
             <a:r>
@@ -11907,6 +12281,13 @@
           </a:solidFill>
           <a:ln/>
         </p:spPr>
+        <p:txBody>
+          <a:bodyPr/>
+          <a:lstStyle/>
+          <a:p>
+            <a:endParaRPr lang="fr-FR"/>
+          </a:p>
+        </p:txBody>
       </p:sp>
       <p:sp>
         <p:nvSpPr>
@@ -11929,11 +12310,11 @@
           <a:bodyPr wrap="square" rtlCol="0" anchor="ctr"/>
           <a:lstStyle/>
           <a:p>
-            <a:pPr indent="0" marL="0">
-              <a:buNone/>
-            </a:pPr>
-            <a:r>
-              <a:rPr lang="en-US" sz="1100" b="1" spc="200" kern="0" dirty="0">
+            <a:pPr marL="0" indent="0">
+              <a:buNone/>
+            </a:pPr>
+            <a:r>
+              <a:rPr lang="en-US" sz="1100" b="1" kern="0" spc="200" dirty="0">
                 <a:solidFill>
                   <a:srgbClr val="E74C3C"/>
                 </a:solidFill>
@@ -11968,7 +12349,7 @@
           <a:bodyPr wrap="square" rtlCol="0" anchor="ctr"/>
           <a:lstStyle/>
           <a:p>
-            <a:pPr indent="0" marL="0">
+            <a:pPr marL="0" indent="0">
               <a:buNone/>
             </a:pPr>
             <a:r>
@@ -11998,9 +12379,7 @@
             <a:ext cx="3657600" cy="3749040"/>
           </a:xfrm>
           <a:prstGeom prst="rect">
-            <a:avLst>
-              <a:gd name="adj" fmla="val 2000"/>
-            </a:avLst>
+            <a:avLst/>
           </a:prstGeom>
           <a:solidFill>
             <a:srgbClr val="1A2E1A"/>
@@ -12012,6 +12391,13 @@
             <a:prstDash val="solid"/>
           </a:ln>
         </p:spPr>
+        <p:txBody>
+          <a:bodyPr/>
+          <a:lstStyle/>
+          <a:p>
+            <a:endParaRPr lang="fr-FR"/>
+          </a:p>
+        </p:txBody>
       </p:sp>
       <p:sp>
         <p:nvSpPr>
@@ -12034,7 +12420,7 @@
           <a:bodyPr wrap="square" rtlCol="0" anchor="ctr"/>
           <a:lstStyle/>
           <a:p>
-            <a:pPr algn="ctr" indent="0" marL="0">
+            <a:pPr marL="0" indent="0" algn="ctr">
               <a:buNone/>
             </a:pPr>
             <a:r>
@@ -12071,6 +12457,13 @@
           </a:solidFill>
           <a:ln/>
         </p:spPr>
+        <p:txBody>
+          <a:bodyPr/>
+          <a:lstStyle/>
+          <a:p>
+            <a:endParaRPr lang="fr-FR"/>
+          </a:p>
+        </p:txBody>
       </p:sp>
       <p:sp>
         <p:nvSpPr>
@@ -12093,7 +12486,7 @@
           <a:bodyPr wrap="square" rtlCol="0" anchor="ctr"/>
           <a:lstStyle/>
           <a:p>
-            <a:pPr indent="0" marL="0">
+            <a:pPr marL="0" indent="0">
               <a:buNone/>
             </a:pPr>
             <a:r>
@@ -12132,7 +12525,7 @@
           <a:bodyPr wrap="square" rtlCol="0" anchor="ctr"/>
           <a:lstStyle/>
           <a:p>
-            <a:pPr indent="0" marL="0">
+            <a:pPr marL="0" indent="0">
               <a:buNone/>
             </a:pPr>
             <a:r>
@@ -12171,7 +12564,7 @@
           <a:bodyPr wrap="square" rtlCol="0" anchor="ctr"/>
           <a:lstStyle/>
           <a:p>
-            <a:pPr indent="0" marL="0">
+            <a:pPr marL="0" indent="0">
               <a:buNone/>
             </a:pPr>
             <a:r>
@@ -12210,7 +12603,7 @@
           <a:bodyPr wrap="square" rtlCol="0" anchor="ctr"/>
           <a:lstStyle/>
           <a:p>
-            <a:pPr indent="0" marL="0">
+            <a:pPr marL="0" indent="0">
               <a:buNone/>
             </a:pPr>
             <a:r>
@@ -12240,9 +12633,7 @@
             <a:ext cx="3657600" cy="3749040"/>
           </a:xfrm>
           <a:prstGeom prst="rect">
-            <a:avLst>
-              <a:gd name="adj" fmla="val 2000"/>
-            </a:avLst>
+            <a:avLst/>
           </a:prstGeom>
           <a:solidFill>
             <a:srgbClr val="1A1A2E"/>
@@ -12254,6 +12645,13 @@
             <a:prstDash val="solid"/>
           </a:ln>
         </p:spPr>
+        <p:txBody>
+          <a:bodyPr/>
+          <a:lstStyle/>
+          <a:p>
+            <a:endParaRPr lang="fr-FR"/>
+          </a:p>
+        </p:txBody>
       </p:sp>
       <p:sp>
         <p:nvSpPr>
@@ -12276,7 +12674,7 @@
           <a:bodyPr wrap="square" rtlCol="0" anchor="ctr"/>
           <a:lstStyle/>
           <a:p>
-            <a:pPr algn="ctr" indent="0" marL="0">
+            <a:pPr marL="0" indent="0" algn="ctr">
               <a:buNone/>
             </a:pPr>
             <a:r>
@@ -12313,6 +12711,13 @@
           </a:solidFill>
           <a:ln/>
         </p:spPr>
+        <p:txBody>
+          <a:bodyPr/>
+          <a:lstStyle/>
+          <a:p>
+            <a:endParaRPr lang="fr-FR"/>
+          </a:p>
+        </p:txBody>
       </p:sp>
       <p:sp>
         <p:nvSpPr>
@@ -12335,7 +12740,7 @@
           <a:bodyPr wrap="square" rtlCol="0" anchor="ctr"/>
           <a:lstStyle/>
           <a:p>
-            <a:pPr indent="0" marL="0">
+            <a:pPr marL="0" indent="0">
               <a:buNone/>
             </a:pPr>
             <a:r>
@@ -12374,7 +12779,7 @@
           <a:bodyPr wrap="square" rtlCol="0" anchor="ctr"/>
           <a:lstStyle/>
           <a:p>
-            <a:pPr indent="0" marL="0">
+            <a:pPr marL="0" indent="0">
               <a:buNone/>
             </a:pPr>
             <a:r>
@@ -12413,7 +12818,7 @@
           <a:bodyPr wrap="square" rtlCol="0" anchor="ctr"/>
           <a:lstStyle/>
           <a:p>
-            <a:pPr indent="0" marL="0">
+            <a:pPr marL="0" indent="0">
               <a:buNone/>
             </a:pPr>
             <a:r>
@@ -12452,7 +12857,7 @@
           <a:bodyPr wrap="square" rtlCol="0" anchor="ctr"/>
           <a:lstStyle/>
           <a:p>
-            <a:pPr indent="0" marL="0">
+            <a:pPr marL="0" indent="0">
               <a:buNone/>
             </a:pPr>
             <a:r>
@@ -12482,9 +12887,7 @@
             <a:ext cx="3657600" cy="3749040"/>
           </a:xfrm>
           <a:prstGeom prst="rect">
-            <a:avLst>
-              <a:gd name="adj" fmla="val 2000"/>
-            </a:avLst>
+            <a:avLst/>
           </a:prstGeom>
           <a:solidFill>
             <a:srgbClr val="2E1A1A"/>
@@ -12496,6 +12899,13 @@
             <a:prstDash val="solid"/>
           </a:ln>
         </p:spPr>
+        <p:txBody>
+          <a:bodyPr/>
+          <a:lstStyle/>
+          <a:p>
+            <a:endParaRPr lang="fr-FR"/>
+          </a:p>
+        </p:txBody>
       </p:sp>
       <p:sp>
         <p:nvSpPr>
@@ -12518,7 +12928,7 @@
           <a:bodyPr wrap="square" rtlCol="0" anchor="ctr"/>
           <a:lstStyle/>
           <a:p>
-            <a:pPr algn="ctr" indent="0" marL="0">
+            <a:pPr marL="0" indent="0" algn="ctr">
               <a:buNone/>
             </a:pPr>
             <a:r>
@@ -12555,6 +12965,13 @@
           </a:solidFill>
           <a:ln/>
         </p:spPr>
+        <p:txBody>
+          <a:bodyPr/>
+          <a:lstStyle/>
+          <a:p>
+            <a:endParaRPr lang="fr-FR"/>
+          </a:p>
+        </p:txBody>
       </p:sp>
       <p:sp>
         <p:nvSpPr>
@@ -12577,7 +12994,7 @@
           <a:bodyPr wrap="square" rtlCol="0" anchor="ctr"/>
           <a:lstStyle/>
           <a:p>
-            <a:pPr indent="0" marL="0">
+            <a:pPr marL="0" indent="0">
               <a:buNone/>
             </a:pPr>
             <a:r>
@@ -12616,7 +13033,7 @@
           <a:bodyPr wrap="square" rtlCol="0" anchor="ctr"/>
           <a:lstStyle/>
           <a:p>
-            <a:pPr indent="0" marL="0">
+            <a:pPr marL="0" indent="0">
               <a:buNone/>
             </a:pPr>
             <a:r>
@@ -12655,7 +13072,7 @@
           <a:bodyPr wrap="square" rtlCol="0" anchor="ctr"/>
           <a:lstStyle/>
           <a:p>
-            <a:pPr indent="0" marL="0">
+            <a:pPr marL="0" indent="0">
               <a:buNone/>
             </a:pPr>
             <a:r>
@@ -12694,7 +13111,7 @@
           <a:bodyPr wrap="square" rtlCol="0" anchor="ctr"/>
           <a:lstStyle/>
           <a:p>
-            <a:pPr indent="0" marL="0">
+            <a:pPr marL="0" indent="0">
               <a:buNone/>
             </a:pPr>
             <a:r>
@@ -12728,6 +13145,7 @@
         <a:solidFill>
           <a:srgbClr val="0D0D0D"/>
         </a:solidFill>
+        <a:effectLst/>
       </p:bgPr>
     </p:bg>
     <p:spTree>
@@ -12763,6 +13181,13 @@
           </a:solidFill>
           <a:ln/>
         </p:spPr>
+        <p:txBody>
+          <a:bodyPr/>
+          <a:lstStyle/>
+          <a:p>
+            <a:endParaRPr lang="fr-FR"/>
+          </a:p>
+        </p:txBody>
       </p:sp>
       <p:sp>
         <p:nvSpPr>
@@ -12783,6 +13208,13 @@
           </a:solidFill>
           <a:ln/>
         </p:spPr>
+        <p:txBody>
+          <a:bodyPr/>
+          <a:lstStyle/>
+          <a:p>
+            <a:endParaRPr lang="fr-FR"/>
+          </a:p>
+        </p:txBody>
       </p:sp>
       <p:sp>
         <p:nvSpPr>
@@ -12805,7 +13237,7 @@
           <a:bodyPr wrap="square" rtlCol="0" anchor="ctr"/>
           <a:lstStyle/>
           <a:p>
-            <a:pPr indent="0" marL="0">
+            <a:pPr marL="0" indent="0">
               <a:buNone/>
             </a:pPr>
             <a:r>
@@ -12844,7 +13276,7 @@
           <a:bodyPr wrap="square" rtlCol="0" anchor="ctr"/>
           <a:lstStyle/>
           <a:p>
-            <a:pPr algn="r" indent="0" marL="0">
+            <a:pPr marL="0" indent="0" algn="r">
               <a:buNone/>
             </a:pPr>
             <a:r>
@@ -12881,6 +13313,13 @@
           </a:solidFill>
           <a:ln/>
         </p:spPr>
+        <p:txBody>
+          <a:bodyPr/>
+          <a:lstStyle/>
+          <a:p>
+            <a:endParaRPr lang="fr-FR"/>
+          </a:p>
+        </p:txBody>
       </p:sp>
       <p:sp>
         <p:nvSpPr>
@@ -12903,11 +13342,11 @@
           <a:bodyPr wrap="square" rtlCol="0" anchor="ctr"/>
           <a:lstStyle/>
           <a:p>
-            <a:pPr indent="0" marL="0">
-              <a:buNone/>
-            </a:pPr>
-            <a:r>
-              <a:rPr lang="en-US" sz="1100" b="1" spc="200" kern="0" dirty="0">
+            <a:pPr marL="0" indent="0">
+              <a:buNone/>
+            </a:pPr>
+            <a:r>
+              <a:rPr lang="en-US" sz="1100" b="1" kern="0" spc="200" dirty="0">
                 <a:solidFill>
                   <a:srgbClr val="E74C3C"/>
                 </a:solidFill>
@@ -12942,7 +13381,7 @@
           <a:bodyPr wrap="square" rtlCol="0" anchor="ctr"/>
           <a:lstStyle/>
           <a:p>
-            <a:pPr indent="0" marL="0">
+            <a:pPr marL="0" indent="0">
               <a:buNone/>
             </a:pPr>
             <a:r>
@@ -12972,9 +13411,7 @@
             <a:ext cx="3657600" cy="3657600"/>
           </a:xfrm>
           <a:prstGeom prst="rect">
-            <a:avLst>
-              <a:gd name="adj" fmla="val 2000"/>
-            </a:avLst>
+            <a:avLst/>
           </a:prstGeom>
           <a:solidFill>
             <a:srgbClr val="2E1A1A"/>
@@ -12986,6 +13423,13 @@
             <a:prstDash val="solid"/>
           </a:ln>
         </p:spPr>
+        <p:txBody>
+          <a:bodyPr/>
+          <a:lstStyle/>
+          <a:p>
+            <a:endParaRPr lang="fr-FR"/>
+          </a:p>
+        </p:txBody>
       </p:sp>
       <p:sp>
         <p:nvSpPr>
@@ -13008,7 +13452,7 @@
           <a:bodyPr wrap="square" rtlCol="0" anchor="ctr"/>
           <a:lstStyle/>
           <a:p>
-            <a:pPr indent="0" marL="0">
+            <a:pPr marL="0" indent="0">
               <a:buNone/>
             </a:pPr>
             <a:r>
@@ -13047,7 +13491,7 @@
           <a:bodyPr wrap="square" rtlCol="0" anchor="ctr"/>
           <a:lstStyle/>
           <a:p>
-            <a:pPr indent="0" marL="0">
+            <a:pPr marL="0" indent="0">
               <a:buNone/>
             </a:pPr>
             <a:r>
@@ -13084,6 +13528,13 @@
           </a:solidFill>
           <a:ln/>
         </p:spPr>
+        <p:txBody>
+          <a:bodyPr/>
+          <a:lstStyle/>
+          <a:p>
+            <a:endParaRPr lang="fr-FR"/>
+          </a:p>
+        </p:txBody>
       </p:sp>
       <p:sp>
         <p:nvSpPr>
@@ -13106,7 +13557,7 @@
           <a:bodyPr wrap="square" rtlCol="0" anchor="ctr"/>
           <a:lstStyle/>
           <a:p>
-            <a:pPr indent="0" marL="0">
+            <a:pPr marL="0" indent="0">
               <a:buNone/>
             </a:pPr>
             <a:r>
@@ -13145,7 +13596,7 @@
           <a:bodyPr wrap="square" rtlCol="0" anchor="ctr"/>
           <a:lstStyle/>
           <a:p>
-            <a:pPr indent="0" marL="0">
+            <a:pPr marL="0" indent="0">
               <a:buNone/>
             </a:pPr>
             <a:r>
@@ -13184,7 +13635,7 @@
           <a:bodyPr wrap="square" rtlCol="0" anchor="ctr"/>
           <a:lstStyle/>
           <a:p>
-            <a:pPr indent="0" marL="0">
+            <a:pPr marL="0" indent="0">
               <a:buNone/>
             </a:pPr>
             <a:r>
@@ -13223,7 +13674,7 @@
           <a:bodyPr wrap="square" rtlCol="0" anchor="ctr"/>
           <a:lstStyle/>
           <a:p>
-            <a:pPr indent="0" marL="0">
+            <a:pPr marL="0" indent="0">
               <a:buNone/>
             </a:pPr>
             <a:r>
@@ -13253,9 +13704,7 @@
             <a:ext cx="3657600" cy="3657600"/>
           </a:xfrm>
           <a:prstGeom prst="rect">
-            <a:avLst>
-              <a:gd name="adj" fmla="val 2000"/>
-            </a:avLst>
+            <a:avLst/>
           </a:prstGeom>
           <a:solidFill>
             <a:srgbClr val="1A1A2E"/>
@@ -13267,6 +13716,13 @@
             <a:prstDash val="solid"/>
           </a:ln>
         </p:spPr>
+        <p:txBody>
+          <a:bodyPr/>
+          <a:lstStyle/>
+          <a:p>
+            <a:endParaRPr lang="fr-FR"/>
+          </a:p>
+        </p:txBody>
       </p:sp>
       <p:sp>
         <p:nvSpPr>
@@ -13289,7 +13745,7 @@
           <a:bodyPr wrap="square" rtlCol="0" anchor="ctr"/>
           <a:lstStyle/>
           <a:p>
-            <a:pPr indent="0" marL="0">
+            <a:pPr marL="0" indent="0">
               <a:buNone/>
             </a:pPr>
             <a:r>
@@ -13328,7 +13784,7 @@
           <a:bodyPr wrap="square" rtlCol="0" anchor="ctr"/>
           <a:lstStyle/>
           <a:p>
-            <a:pPr indent="0" marL="0">
+            <a:pPr marL="0" indent="0">
               <a:buNone/>
             </a:pPr>
             <a:r>
@@ -13365,6 +13821,13 @@
           </a:solidFill>
           <a:ln/>
         </p:spPr>
+        <p:txBody>
+          <a:bodyPr/>
+          <a:lstStyle/>
+          <a:p>
+            <a:endParaRPr lang="fr-FR"/>
+          </a:p>
+        </p:txBody>
       </p:sp>
       <p:sp>
         <p:nvSpPr>
@@ -13387,7 +13850,7 @@
           <a:bodyPr wrap="square" rtlCol="0" anchor="ctr"/>
           <a:lstStyle/>
           <a:p>
-            <a:pPr indent="0" marL="0">
+            <a:pPr marL="0" indent="0">
               <a:buNone/>
             </a:pPr>
             <a:r>
@@ -13426,7 +13889,7 @@
           <a:bodyPr wrap="square" rtlCol="0" anchor="ctr"/>
           <a:lstStyle/>
           <a:p>
-            <a:pPr indent="0" marL="0">
+            <a:pPr marL="0" indent="0">
               <a:buNone/>
             </a:pPr>
             <a:r>
@@ -13465,7 +13928,7 @@
           <a:bodyPr wrap="square" rtlCol="0" anchor="ctr"/>
           <a:lstStyle/>
           <a:p>
-            <a:pPr indent="0" marL="0">
+            <a:pPr marL="0" indent="0">
               <a:buNone/>
             </a:pPr>
             <a:r>
@@ -13504,7 +13967,7 @@
           <a:bodyPr wrap="square" rtlCol="0" anchor="ctr"/>
           <a:lstStyle/>
           <a:p>
-            <a:pPr indent="0" marL="0">
+            <a:pPr marL="0" indent="0">
               <a:buNone/>
             </a:pPr>
             <a:r>
@@ -13534,9 +13997,7 @@
             <a:ext cx="3657600" cy="3657600"/>
           </a:xfrm>
           <a:prstGeom prst="rect">
-            <a:avLst>
-              <a:gd name="adj" fmla="val 2000"/>
-            </a:avLst>
+            <a:avLst/>
           </a:prstGeom>
           <a:solidFill>
             <a:srgbClr val="1A2E1A"/>
@@ -13548,6 +14009,13 @@
             <a:prstDash val="solid"/>
           </a:ln>
         </p:spPr>
+        <p:txBody>
+          <a:bodyPr/>
+          <a:lstStyle/>
+          <a:p>
+            <a:endParaRPr lang="fr-FR"/>
+          </a:p>
+        </p:txBody>
       </p:sp>
       <p:sp>
         <p:nvSpPr>
@@ -13570,7 +14038,7 @@
           <a:bodyPr wrap="square" rtlCol="0" anchor="ctr"/>
           <a:lstStyle/>
           <a:p>
-            <a:pPr indent="0" marL="0">
+            <a:pPr marL="0" indent="0">
               <a:buNone/>
             </a:pPr>
             <a:r>
@@ -13609,7 +14077,7 @@
           <a:bodyPr wrap="square" rtlCol="0" anchor="ctr"/>
           <a:lstStyle/>
           <a:p>
-            <a:pPr indent="0" marL="0">
+            <a:pPr marL="0" indent="0">
               <a:buNone/>
             </a:pPr>
             <a:r>
@@ -13646,6 +14114,13 @@
           </a:solidFill>
           <a:ln/>
         </p:spPr>
+        <p:txBody>
+          <a:bodyPr/>
+          <a:lstStyle/>
+          <a:p>
+            <a:endParaRPr lang="fr-FR"/>
+          </a:p>
+        </p:txBody>
       </p:sp>
       <p:sp>
         <p:nvSpPr>
@@ -13668,7 +14143,7 @@
           <a:bodyPr wrap="square" rtlCol="0" anchor="ctr"/>
           <a:lstStyle/>
           <a:p>
-            <a:pPr indent="0" marL="0">
+            <a:pPr marL="0" indent="0">
               <a:buNone/>
             </a:pPr>
             <a:r>
@@ -13707,7 +14182,7 @@
           <a:bodyPr wrap="square" rtlCol="0" anchor="ctr"/>
           <a:lstStyle/>
           <a:p>
-            <a:pPr indent="0" marL="0">
+            <a:pPr marL="0" indent="0">
               <a:buNone/>
             </a:pPr>
             <a:r>
@@ -13746,7 +14221,7 @@
           <a:bodyPr wrap="square" rtlCol="0" anchor="ctr"/>
           <a:lstStyle/>
           <a:p>
-            <a:pPr indent="0" marL="0">
+            <a:pPr marL="0" indent="0">
               <a:buNone/>
             </a:pPr>
             <a:r>
@@ -13785,7 +14260,7 @@
           <a:bodyPr wrap="square" rtlCol="0" anchor="ctr"/>
           <a:lstStyle/>
           <a:p>
-            <a:pPr indent="0" marL="0">
+            <a:pPr marL="0" indent="0">
               <a:buNone/>
             </a:pPr>
             <a:r>
@@ -13819,6 +14294,7 @@
         <a:solidFill>
           <a:srgbClr val="0D0D0D"/>
         </a:solidFill>
+        <a:effectLst/>
       </p:bgPr>
     </p:bg>
     <p:spTree>
@@ -13856,7 +14332,7 @@
           <a:bodyPr wrap="square" rtlCol="0" anchor="ctr"/>
           <a:lstStyle/>
           <a:p>
-            <a:pPr algn="ctr" indent="0" marL="0">
+            <a:pPr marL="0" indent="0" algn="ctr">
               <a:buNone/>
             </a:pPr>
             <a:r>
@@ -13893,6 +14369,13 @@
           </a:solidFill>
           <a:ln/>
         </p:spPr>
+        <p:txBody>
+          <a:bodyPr/>
+          <a:lstStyle/>
+          <a:p>
+            <a:endParaRPr lang="fr-FR"/>
+          </a:p>
+        </p:txBody>
       </p:sp>
     </p:spTree>
   </p:cSld>
@@ -13910,6 +14393,7 @@
         <a:solidFill>
           <a:srgbClr val="0D0D0D"/>
         </a:solidFill>
+        <a:effectLst/>
       </p:bgPr>
     </p:bg>
     <p:spTree>
@@ -13945,6 +14429,13 @@
           </a:solidFill>
           <a:ln/>
         </p:spPr>
+        <p:txBody>
+          <a:bodyPr/>
+          <a:lstStyle/>
+          <a:p>
+            <a:endParaRPr lang="fr-FR"/>
+          </a:p>
+        </p:txBody>
       </p:sp>
       <p:sp>
         <p:nvSpPr>
@@ -13965,6 +14456,13 @@
           </a:solidFill>
           <a:ln/>
         </p:spPr>
+        <p:txBody>
+          <a:bodyPr/>
+          <a:lstStyle/>
+          <a:p>
+            <a:endParaRPr lang="fr-FR"/>
+          </a:p>
+        </p:txBody>
       </p:sp>
       <p:sp>
         <p:nvSpPr>
@@ -13987,7 +14485,7 @@
           <a:bodyPr wrap="square" rtlCol="0" anchor="ctr"/>
           <a:lstStyle/>
           <a:p>
-            <a:pPr indent="0" marL="0">
+            <a:pPr marL="0" indent="0">
               <a:buNone/>
             </a:pPr>
             <a:r>
@@ -14026,7 +14524,7 @@
           <a:bodyPr wrap="square" rtlCol="0" anchor="ctr"/>
           <a:lstStyle/>
           <a:p>
-            <a:pPr algn="r" indent="0" marL="0">
+            <a:pPr marL="0" indent="0" algn="r">
               <a:buNone/>
             </a:pPr>
             <a:r>
@@ -14063,6 +14561,13 @@
           </a:solidFill>
           <a:ln/>
         </p:spPr>
+        <p:txBody>
+          <a:bodyPr/>
+          <a:lstStyle/>
+          <a:p>
+            <a:endParaRPr lang="fr-FR"/>
+          </a:p>
+        </p:txBody>
       </p:sp>
       <p:sp>
         <p:nvSpPr>
@@ -14085,11 +14590,11 @@
           <a:bodyPr wrap="square" rtlCol="0" anchor="ctr"/>
           <a:lstStyle/>
           <a:p>
-            <a:pPr indent="0" marL="0">
-              <a:buNone/>
-            </a:pPr>
-            <a:r>
-              <a:rPr lang="en-US" sz="1100" b="1" spc="200" kern="0" dirty="0">
+            <a:pPr marL="0" indent="0">
+              <a:buNone/>
+            </a:pPr>
+            <a:r>
+              <a:rPr lang="en-US" sz="1100" b="1" kern="0" spc="200" dirty="0">
                 <a:solidFill>
                   <a:srgbClr val="E74C3C"/>
                 </a:solidFill>
@@ -14124,7 +14629,7 @@
           <a:bodyPr wrap="square" rtlCol="0" anchor="ctr"/>
           <a:lstStyle/>
           <a:p>
-            <a:pPr indent="0" marL="0">
+            <a:pPr marL="0" indent="0">
               <a:buNone/>
             </a:pPr>
             <a:r>
@@ -14154,9 +14659,7 @@
             <a:ext cx="3657600" cy="3657600"/>
           </a:xfrm>
           <a:prstGeom prst="rect">
-            <a:avLst>
-              <a:gd name="adj" fmla="val 2000"/>
-            </a:avLst>
+            <a:avLst/>
           </a:prstGeom>
           <a:solidFill>
             <a:srgbClr val="2E1A1A"/>
@@ -14168,6 +14671,13 @@
             <a:prstDash val="solid"/>
           </a:ln>
         </p:spPr>
+        <p:txBody>
+          <a:bodyPr/>
+          <a:lstStyle/>
+          <a:p>
+            <a:endParaRPr lang="fr-FR"/>
+          </a:p>
+        </p:txBody>
       </p:sp>
       <p:sp>
         <p:nvSpPr>
@@ -14190,7 +14700,7 @@
           <a:bodyPr wrap="square" rtlCol="0" anchor="ctr"/>
           <a:lstStyle/>
           <a:p>
-            <a:pPr indent="0" marL="0">
+            <a:pPr marL="0" indent="0">
               <a:buNone/>
             </a:pPr>
             <a:r>
@@ -14229,7 +14739,7 @@
           <a:bodyPr wrap="square" rtlCol="0" anchor="ctr"/>
           <a:lstStyle/>
           <a:p>
-            <a:pPr indent="0" marL="0">
+            <a:pPr marL="0" indent="0">
               <a:buNone/>
             </a:pPr>
             <a:r>
@@ -14266,6 +14776,13 @@
           </a:solidFill>
           <a:ln/>
         </p:spPr>
+        <p:txBody>
+          <a:bodyPr/>
+          <a:lstStyle/>
+          <a:p>
+            <a:endParaRPr lang="fr-FR"/>
+          </a:p>
+        </p:txBody>
       </p:sp>
       <p:sp>
         <p:nvSpPr>
@@ -14288,7 +14805,7 @@
           <a:bodyPr wrap="square" rtlCol="0" anchor="ctr"/>
           <a:lstStyle/>
           <a:p>
-            <a:pPr indent="0" marL="0">
+            <a:pPr marL="0" indent="0">
               <a:buNone/>
             </a:pPr>
             <a:r>
@@ -14305,7 +14822,7 @@
             <a:endParaRPr lang="en-US" sz="1200" dirty="0"/>
           </a:p>
           <a:p>
-            <a:pPr indent="0" marL="0">
+            <a:pPr marL="0" indent="0">
               <a:buNone/>
             </a:pPr>
             <a:r>
@@ -14322,7 +14839,7 @@
             <a:endParaRPr lang="en-US" sz="1200" dirty="0"/>
           </a:p>
           <a:p>
-            <a:pPr indent="0" marL="0">
+            <a:pPr marL="0" indent="0">
               <a:buNone/>
             </a:pPr>
             <a:r>
@@ -14352,9 +14869,7 @@
             <a:ext cx="3657600" cy="3657600"/>
           </a:xfrm>
           <a:prstGeom prst="rect">
-            <a:avLst>
-              <a:gd name="adj" fmla="val 2000"/>
-            </a:avLst>
+            <a:avLst/>
           </a:prstGeom>
           <a:solidFill>
             <a:srgbClr val="1A1A2E"/>
@@ -14366,6 +14881,13 @@
             <a:prstDash val="solid"/>
           </a:ln>
         </p:spPr>
+        <p:txBody>
+          <a:bodyPr/>
+          <a:lstStyle/>
+          <a:p>
+            <a:endParaRPr lang="fr-FR"/>
+          </a:p>
+        </p:txBody>
       </p:sp>
       <p:sp>
         <p:nvSpPr>
@@ -14388,7 +14910,7 @@
           <a:bodyPr wrap="square" rtlCol="0" anchor="ctr"/>
           <a:lstStyle/>
           <a:p>
-            <a:pPr indent="0" marL="0">
+            <a:pPr marL="0" indent="0">
               <a:buNone/>
             </a:pPr>
             <a:r>
@@ -14427,7 +14949,7 @@
           <a:bodyPr wrap="square" rtlCol="0" anchor="ctr"/>
           <a:lstStyle/>
           <a:p>
-            <a:pPr indent="0" marL="0">
+            <a:pPr marL="0" indent="0">
               <a:buNone/>
             </a:pPr>
             <a:r>
@@ -14464,6 +14986,13 @@
           </a:solidFill>
           <a:ln/>
         </p:spPr>
+        <p:txBody>
+          <a:bodyPr/>
+          <a:lstStyle/>
+          <a:p>
+            <a:endParaRPr lang="fr-FR"/>
+          </a:p>
+        </p:txBody>
       </p:sp>
       <p:sp>
         <p:nvSpPr>
@@ -14486,7 +15015,7 @@
           <a:bodyPr wrap="square" rtlCol="0" anchor="ctr"/>
           <a:lstStyle/>
           <a:p>
-            <a:pPr indent="0" marL="0">
+            <a:pPr marL="0" indent="0">
               <a:buNone/>
             </a:pPr>
             <a:r>
@@ -14503,7 +15032,7 @@
             <a:endParaRPr lang="en-US" sz="1200" dirty="0"/>
           </a:p>
           <a:p>
-            <a:pPr indent="0" marL="0">
+            <a:pPr marL="0" indent="0">
               <a:buNone/>
             </a:pPr>
             <a:r>
@@ -14520,7 +15049,7 @@
             <a:endParaRPr lang="en-US" sz="1200" dirty="0"/>
           </a:p>
           <a:p>
-            <a:pPr indent="0" marL="0">
+            <a:pPr marL="0" indent="0">
               <a:buNone/>
             </a:pPr>
             <a:r>
@@ -14550,9 +15079,7 @@
             <a:ext cx="3657600" cy="3657600"/>
           </a:xfrm>
           <a:prstGeom prst="rect">
-            <a:avLst>
-              <a:gd name="adj" fmla="val 2000"/>
-            </a:avLst>
+            <a:avLst/>
           </a:prstGeom>
           <a:solidFill>
             <a:srgbClr val="1A2E1A"/>
@@ -14564,6 +15091,13 @@
             <a:prstDash val="solid"/>
           </a:ln>
         </p:spPr>
+        <p:txBody>
+          <a:bodyPr/>
+          <a:lstStyle/>
+          <a:p>
+            <a:endParaRPr lang="fr-FR"/>
+          </a:p>
+        </p:txBody>
       </p:sp>
       <p:sp>
         <p:nvSpPr>
@@ -14586,7 +15120,7 @@
           <a:bodyPr wrap="square" rtlCol="0" anchor="ctr"/>
           <a:lstStyle/>
           <a:p>
-            <a:pPr indent="0" marL="0">
+            <a:pPr marL="0" indent="0">
               <a:buNone/>
             </a:pPr>
             <a:r>
@@ -14625,7 +15159,7 @@
           <a:bodyPr wrap="square" rtlCol="0" anchor="ctr"/>
           <a:lstStyle/>
           <a:p>
-            <a:pPr indent="0" marL="0">
+            <a:pPr marL="0" indent="0">
               <a:buNone/>
             </a:pPr>
             <a:r>
@@ -14662,6 +15196,13 @@
           </a:solidFill>
           <a:ln/>
         </p:spPr>
+        <p:txBody>
+          <a:bodyPr/>
+          <a:lstStyle/>
+          <a:p>
+            <a:endParaRPr lang="fr-FR"/>
+          </a:p>
+        </p:txBody>
       </p:sp>
       <p:sp>
         <p:nvSpPr>
@@ -14684,7 +15225,7 @@
           <a:bodyPr wrap="square" rtlCol="0" anchor="ctr"/>
           <a:lstStyle/>
           <a:p>
-            <a:pPr indent="0" marL="0">
+            <a:pPr marL="0" indent="0">
               <a:buNone/>
             </a:pPr>
             <a:r>
@@ -14701,7 +15242,7 @@
             <a:endParaRPr lang="en-US" sz="1200" dirty="0"/>
           </a:p>
           <a:p>
-            <a:pPr indent="0" marL="0">
+            <a:pPr marL="0" indent="0">
               <a:buNone/>
             </a:pPr>
             <a:r>
@@ -14718,7 +15259,7 @@
             <a:endParaRPr lang="en-US" sz="1200" dirty="0"/>
           </a:p>
           <a:p>
-            <a:pPr indent="0" marL="0">
+            <a:pPr marL="0" indent="0">
               <a:buNone/>
             </a:pPr>
             <a:r>
@@ -14752,6 +15293,7 @@
         <a:solidFill>
           <a:srgbClr val="C0392B"/>
         </a:solidFill>
+        <a:effectLst/>
       </p:bgPr>
     </p:bg>
     <p:spTree>
@@ -14787,6 +15329,13 @@
           </a:solidFill>
           <a:ln/>
         </p:spPr>
+        <p:txBody>
+          <a:bodyPr/>
+          <a:lstStyle/>
+          <a:p>
+            <a:endParaRPr lang="fr-FR"/>
+          </a:p>
+        </p:txBody>
       </p:sp>
       <p:sp>
         <p:nvSpPr>
@@ -14807,6 +15356,13 @@
           </a:solidFill>
           <a:ln/>
         </p:spPr>
+        <p:txBody>
+          <a:bodyPr/>
+          <a:lstStyle/>
+          <a:p>
+            <a:endParaRPr lang="fr-FR"/>
+          </a:p>
+        </p:txBody>
       </p:sp>
       <p:sp>
         <p:nvSpPr>
@@ -14829,11 +15385,11 @@
           <a:bodyPr wrap="square" rtlCol="0" anchor="ctr"/>
           <a:lstStyle/>
           <a:p>
-            <a:pPr algn="ctr" indent="0" marL="0">
-              <a:buNone/>
-            </a:pPr>
-            <a:r>
-              <a:rPr lang="en-US" sz="1400" b="1" spc="600" kern="0" dirty="0">
+            <a:pPr marL="0" indent="0" algn="ctr">
+              <a:buNone/>
+            </a:pPr>
+            <a:r>
+              <a:rPr lang="en-US" sz="1400" b="1" kern="0" spc="600" dirty="0">
                 <a:solidFill>
                   <a:srgbClr val="E74C3C"/>
                 </a:solidFill>
@@ -14868,7 +15424,7 @@
           <a:bodyPr wrap="square" rtlCol="0" anchor="ctr"/>
           <a:lstStyle/>
           <a:p>
-            <a:pPr algn="ctr" indent="0" marL="0">
+            <a:pPr marL="0" indent="0" algn="ctr">
               <a:buNone/>
             </a:pPr>
             <a:r>
@@ -14907,7 +15463,7 @@
           <a:bodyPr wrap="square" rtlCol="0" anchor="ctr"/>
           <a:lstStyle/>
           <a:p>
-            <a:pPr algn="ctr" indent="0" marL="0">
+            <a:pPr marL="0" indent="0" algn="ctr">
               <a:buNone/>
             </a:pPr>
             <a:r>
@@ -14941,6 +15497,7 @@
         <a:solidFill>
           <a:srgbClr val="0D0D0D"/>
         </a:solidFill>
+        <a:effectLst/>
       </p:bgPr>
     </p:bg>
     <p:spTree>
@@ -14976,6 +15533,13 @@
           </a:solidFill>
           <a:ln/>
         </p:spPr>
+        <p:txBody>
+          <a:bodyPr/>
+          <a:lstStyle/>
+          <a:p>
+            <a:endParaRPr lang="fr-FR"/>
+          </a:p>
+        </p:txBody>
       </p:sp>
       <p:sp>
         <p:nvSpPr>
@@ -14996,6 +15560,13 @@
           </a:solidFill>
           <a:ln/>
         </p:spPr>
+        <p:txBody>
+          <a:bodyPr/>
+          <a:lstStyle/>
+          <a:p>
+            <a:endParaRPr lang="fr-FR"/>
+          </a:p>
+        </p:txBody>
       </p:sp>
       <p:sp>
         <p:nvSpPr>
@@ -15018,7 +15589,7 @@
           <a:bodyPr wrap="square" rtlCol="0" anchor="ctr"/>
           <a:lstStyle/>
           <a:p>
-            <a:pPr indent="0" marL="0">
+            <a:pPr marL="0" indent="0">
               <a:buNone/>
             </a:pPr>
             <a:r>
@@ -15057,7 +15628,7 @@
           <a:bodyPr wrap="square" rtlCol="0" anchor="ctr"/>
           <a:lstStyle/>
           <a:p>
-            <a:pPr algn="r" indent="0" marL="0">
+            <a:pPr marL="0" indent="0" algn="r">
               <a:buNone/>
             </a:pPr>
             <a:r>
@@ -15094,6 +15665,13 @@
           </a:solidFill>
           <a:ln/>
         </p:spPr>
+        <p:txBody>
+          <a:bodyPr/>
+          <a:lstStyle/>
+          <a:p>
+            <a:endParaRPr lang="fr-FR"/>
+          </a:p>
+        </p:txBody>
       </p:sp>
       <p:sp>
         <p:nvSpPr>
@@ -15116,11 +15694,11 @@
           <a:bodyPr wrap="square" rtlCol="0" anchor="ctr"/>
           <a:lstStyle/>
           <a:p>
-            <a:pPr indent="0" marL="0">
-              <a:buNone/>
-            </a:pPr>
-            <a:r>
-              <a:rPr lang="en-US" sz="1100" b="1" spc="200" kern="0" dirty="0">
+            <a:pPr marL="0" indent="0">
+              <a:buNone/>
+            </a:pPr>
+            <a:r>
+              <a:rPr lang="en-US" sz="1100" b="1" kern="0" spc="200" dirty="0">
                 <a:solidFill>
                   <a:srgbClr val="E74C3C"/>
                 </a:solidFill>
@@ -15155,7 +15733,7 @@
           <a:bodyPr wrap="square" rtlCol="0" anchor="ctr"/>
           <a:lstStyle/>
           <a:p>
-            <a:pPr indent="0" marL="0">
+            <a:pPr marL="0" indent="0">
               <a:buNone/>
             </a:pPr>
             <a:r>
@@ -15172,7 +15750,7 @@
             <a:endParaRPr lang="en-US" sz="3400" dirty="0"/>
           </a:p>
           <a:p>
-            <a:pPr indent="0" marL="0">
+            <a:pPr marL="0" indent="0">
               <a:buNone/>
             </a:pPr>
             <a:r>
@@ -15202,9 +15780,7 @@
             <a:ext cx="2743200" cy="3291840"/>
           </a:xfrm>
           <a:prstGeom prst="rect">
-            <a:avLst>
-              <a:gd name="adj" fmla="val 2667"/>
-            </a:avLst>
+            <a:avLst/>
           </a:prstGeom>
           <a:solidFill>
             <a:srgbClr val="1A3A2E"/>
@@ -15216,6 +15792,13 @@
             <a:prstDash val="solid"/>
           </a:ln>
         </p:spPr>
+        <p:txBody>
+          <a:bodyPr/>
+          <a:lstStyle/>
+          <a:p>
+            <a:endParaRPr lang="fr-FR"/>
+          </a:p>
+        </p:txBody>
       </p:sp>
       <p:sp>
         <p:nvSpPr>
@@ -15238,7 +15821,7 @@
           <a:bodyPr wrap="square" rtlCol="0" anchor="ctr"/>
           <a:lstStyle/>
           <a:p>
-            <a:pPr algn="ctr" indent="0" marL="0">
+            <a:pPr marL="0" indent="0" algn="ctr">
               <a:buNone/>
             </a:pPr>
             <a:r>
@@ -15255,7 +15838,7 @@
             <a:endParaRPr lang="en-US" sz="1200" dirty="0"/>
           </a:p>
           <a:p>
-            <a:pPr algn="ctr" indent="0" marL="0">
+            <a:pPr marL="0" indent="0" algn="ctr">
               <a:buNone/>
             </a:pPr>
             <a:r>
@@ -15294,7 +15877,7 @@
           <a:bodyPr wrap="square" rtlCol="0" anchor="ctr"/>
           <a:lstStyle/>
           <a:p>
-            <a:pPr algn="ctr" indent="0" marL="0">
+            <a:pPr marL="0" indent="0" algn="ctr">
               <a:buNone/>
             </a:pPr>
             <a:r>
@@ -15311,7 +15894,7 @@
             <a:endParaRPr lang="en-US" sz="2200" dirty="0"/>
           </a:p>
           <a:p>
-            <a:pPr algn="ctr" indent="0" marL="0">
+            <a:pPr marL="0" indent="0" algn="ctr">
               <a:buNone/>
             </a:pPr>
             <a:r>
@@ -15348,6 +15931,13 @@
           </a:solidFill>
           <a:ln/>
         </p:spPr>
+        <p:txBody>
+          <a:bodyPr/>
+          <a:lstStyle/>
+          <a:p>
+            <a:endParaRPr lang="fr-FR"/>
+          </a:p>
+        </p:txBody>
       </p:sp>
       <p:sp>
         <p:nvSpPr>
@@ -15370,7 +15960,7 @@
           <a:bodyPr wrap="square" rtlCol="0" anchor="ctr"/>
           <a:lstStyle/>
           <a:p>
-            <a:pPr algn="ctr" indent="0" marL="0">
+            <a:pPr marL="0" indent="0" algn="ctr">
               <a:buNone/>
             </a:pPr>
             <a:r>
@@ -15409,7 +15999,7 @@
           <a:bodyPr wrap="square" rtlCol="0" anchor="ctr"/>
           <a:lstStyle/>
           <a:p>
-            <a:pPr algn="ctr" indent="0" marL="0">
+            <a:pPr marL="0" indent="0" algn="ctr">
               <a:buNone/>
             </a:pPr>
             <a:r>
@@ -15439,9 +16029,7 @@
             <a:ext cx="2743200" cy="3291840"/>
           </a:xfrm>
           <a:prstGeom prst="rect">
-            <a:avLst>
-              <a:gd name="adj" fmla="val 2667"/>
-            </a:avLst>
+            <a:avLst/>
           </a:prstGeom>
           <a:solidFill>
             <a:srgbClr val="3A1A1A"/>
@@ -15453,6 +16041,13 @@
             <a:prstDash val="solid"/>
           </a:ln>
         </p:spPr>
+        <p:txBody>
+          <a:bodyPr/>
+          <a:lstStyle/>
+          <a:p>
+            <a:endParaRPr lang="fr-FR"/>
+          </a:p>
+        </p:txBody>
       </p:sp>
       <p:sp>
         <p:nvSpPr>
@@ -15475,7 +16070,7 @@
           <a:bodyPr wrap="square" rtlCol="0" anchor="ctr"/>
           <a:lstStyle/>
           <a:p>
-            <a:pPr algn="ctr" indent="0" marL="0">
+            <a:pPr marL="0" indent="0" algn="ctr">
               <a:buNone/>
             </a:pPr>
             <a:r>
@@ -15492,7 +16087,7 @@
             <a:endParaRPr lang="en-US" sz="1200" dirty="0"/>
           </a:p>
           <a:p>
-            <a:pPr algn="ctr" indent="0" marL="0">
+            <a:pPr marL="0" indent="0" algn="ctr">
               <a:buNone/>
             </a:pPr>
             <a:r>
@@ -15531,7 +16126,7 @@
           <a:bodyPr wrap="square" rtlCol="0" anchor="ctr"/>
           <a:lstStyle/>
           <a:p>
-            <a:pPr algn="ctr" indent="0" marL="0">
+            <a:pPr marL="0" indent="0" algn="ctr">
               <a:buNone/>
             </a:pPr>
             <a:r>
@@ -15548,7 +16143,7 @@
             <a:endParaRPr lang="en-US" sz="2200" dirty="0"/>
           </a:p>
           <a:p>
-            <a:pPr algn="ctr" indent="0" marL="0">
+            <a:pPr marL="0" indent="0" algn="ctr">
               <a:buNone/>
             </a:pPr>
             <a:r>
@@ -15585,6 +16180,13 @@
           </a:solidFill>
           <a:ln/>
         </p:spPr>
+        <p:txBody>
+          <a:bodyPr/>
+          <a:lstStyle/>
+          <a:p>
+            <a:endParaRPr lang="fr-FR"/>
+          </a:p>
+        </p:txBody>
       </p:sp>
       <p:sp>
         <p:nvSpPr>
@@ -15607,7 +16209,7 @@
           <a:bodyPr wrap="square" rtlCol="0" anchor="ctr"/>
           <a:lstStyle/>
           <a:p>
-            <a:pPr algn="ctr" indent="0" marL="0">
+            <a:pPr marL="0" indent="0" algn="ctr">
               <a:buNone/>
             </a:pPr>
             <a:r>
@@ -15646,7 +16248,7 @@
           <a:bodyPr wrap="square" rtlCol="0" anchor="ctr"/>
           <a:lstStyle/>
           <a:p>
-            <a:pPr algn="ctr" indent="0" marL="0">
+            <a:pPr marL="0" indent="0" algn="ctr">
               <a:buNone/>
             </a:pPr>
             <a:r>
@@ -15676,9 +16278,7 @@
             <a:ext cx="2743200" cy="3291840"/>
           </a:xfrm>
           <a:prstGeom prst="rect">
-            <a:avLst>
-              <a:gd name="adj" fmla="val 2667"/>
-            </a:avLst>
+            <a:avLst/>
           </a:prstGeom>
           <a:solidFill>
             <a:srgbClr val="1A2A3A"/>
@@ -15690,6 +16290,13 @@
             <a:prstDash val="solid"/>
           </a:ln>
         </p:spPr>
+        <p:txBody>
+          <a:bodyPr/>
+          <a:lstStyle/>
+          <a:p>
+            <a:endParaRPr lang="fr-FR"/>
+          </a:p>
+        </p:txBody>
       </p:sp>
       <p:sp>
         <p:nvSpPr>
@@ -15712,7 +16319,7 @@
           <a:bodyPr wrap="square" rtlCol="0" anchor="ctr"/>
           <a:lstStyle/>
           <a:p>
-            <a:pPr algn="ctr" indent="0" marL="0">
+            <a:pPr marL="0" indent="0" algn="ctr">
               <a:buNone/>
             </a:pPr>
             <a:r>
@@ -15729,7 +16336,7 @@
             <a:endParaRPr lang="en-US" sz="1200" dirty="0"/>
           </a:p>
           <a:p>
-            <a:pPr algn="ctr" indent="0" marL="0">
+            <a:pPr marL="0" indent="0" algn="ctr">
               <a:buNone/>
             </a:pPr>
             <a:r>
@@ -15768,7 +16375,7 @@
           <a:bodyPr wrap="square" rtlCol="0" anchor="ctr"/>
           <a:lstStyle/>
           <a:p>
-            <a:pPr algn="ctr" indent="0" marL="0">
+            <a:pPr marL="0" indent="0" algn="ctr">
               <a:buNone/>
             </a:pPr>
             <a:r>
@@ -15805,6 +16412,13 @@
           </a:solidFill>
           <a:ln/>
         </p:spPr>
+        <p:txBody>
+          <a:bodyPr/>
+          <a:lstStyle/>
+          <a:p>
+            <a:endParaRPr lang="fr-FR"/>
+          </a:p>
+        </p:txBody>
       </p:sp>
       <p:sp>
         <p:nvSpPr>
@@ -15827,7 +16441,7 @@
           <a:bodyPr wrap="square" rtlCol="0" anchor="ctr"/>
           <a:lstStyle/>
           <a:p>
-            <a:pPr algn="ctr" indent="0" marL="0">
+            <a:pPr marL="0" indent="0" algn="ctr">
               <a:buNone/>
             </a:pPr>
             <a:r>
@@ -15866,7 +16480,7 @@
           <a:bodyPr wrap="square" rtlCol="0" anchor="ctr"/>
           <a:lstStyle/>
           <a:p>
-            <a:pPr algn="ctr" indent="0" marL="0">
+            <a:pPr marL="0" indent="0" algn="ctr">
               <a:buNone/>
             </a:pPr>
             <a:r>
@@ -15896,9 +16510,7 @@
             <a:ext cx="2743200" cy="3291840"/>
           </a:xfrm>
           <a:prstGeom prst="rect">
-            <a:avLst>
-              <a:gd name="adj" fmla="val 2667"/>
-            </a:avLst>
+            <a:avLst/>
           </a:prstGeom>
           <a:solidFill>
             <a:srgbClr val="2A1A3A"/>
@@ -15910,6 +16522,13 @@
             <a:prstDash val="solid"/>
           </a:ln>
         </p:spPr>
+        <p:txBody>
+          <a:bodyPr/>
+          <a:lstStyle/>
+          <a:p>
+            <a:endParaRPr lang="fr-FR"/>
+          </a:p>
+        </p:txBody>
       </p:sp>
       <p:sp>
         <p:nvSpPr>
@@ -15932,7 +16551,7 @@
           <a:bodyPr wrap="square" rtlCol="0" anchor="ctr"/>
           <a:lstStyle/>
           <a:p>
-            <a:pPr algn="ctr" indent="0" marL="0">
+            <a:pPr marL="0" indent="0" algn="ctr">
               <a:buNone/>
             </a:pPr>
             <a:r>
@@ -15949,7 +16568,7 @@
             <a:endParaRPr lang="en-US" sz="1200" dirty="0"/>
           </a:p>
           <a:p>
-            <a:pPr algn="ctr" indent="0" marL="0">
+            <a:pPr marL="0" indent="0" algn="ctr">
               <a:buNone/>
             </a:pPr>
             <a:r>
@@ -15988,7 +16607,7 @@
           <a:bodyPr wrap="square" rtlCol="0" anchor="ctr"/>
           <a:lstStyle/>
           <a:p>
-            <a:pPr algn="ctr" indent="0" marL="0">
+            <a:pPr marL="0" indent="0" algn="ctr">
               <a:buNone/>
             </a:pPr>
             <a:r>
@@ -16005,7 +16624,7 @@
             <a:endParaRPr lang="en-US" sz="2200" dirty="0"/>
           </a:p>
           <a:p>
-            <a:pPr algn="ctr" indent="0" marL="0">
+            <a:pPr marL="0" indent="0" algn="ctr">
               <a:buNone/>
             </a:pPr>
             <a:r>
@@ -16042,6 +16661,13 @@
           </a:solidFill>
           <a:ln/>
         </p:spPr>
+        <p:txBody>
+          <a:bodyPr/>
+          <a:lstStyle/>
+          <a:p>
+            <a:endParaRPr lang="fr-FR"/>
+          </a:p>
+        </p:txBody>
       </p:sp>
       <p:sp>
         <p:nvSpPr>
@@ -16064,7 +16690,7 @@
           <a:bodyPr wrap="square" rtlCol="0" anchor="ctr"/>
           <a:lstStyle/>
           <a:p>
-            <a:pPr algn="ctr" indent="0" marL="0">
+            <a:pPr marL="0" indent="0" algn="ctr">
               <a:buNone/>
             </a:pPr>
             <a:r>
@@ -16103,7 +16729,7 @@
           <a:bodyPr wrap="square" rtlCol="0" anchor="ctr"/>
           <a:lstStyle/>
           <a:p>
-            <a:pPr algn="ctr" indent="0" marL="0">
+            <a:pPr marL="0" indent="0" algn="ctr">
               <a:buNone/>
             </a:pPr>
             <a:r>
@@ -16137,6 +16763,7 @@
         <a:solidFill>
           <a:srgbClr val="0D0D0D"/>
         </a:solidFill>
+        <a:effectLst/>
       </p:bgPr>
     </p:bg>
     <p:spTree>
@@ -16172,6 +16799,13 @@
           </a:solidFill>
           <a:ln/>
         </p:spPr>
+        <p:txBody>
+          <a:bodyPr/>
+          <a:lstStyle/>
+          <a:p>
+            <a:endParaRPr lang="fr-FR"/>
+          </a:p>
+        </p:txBody>
       </p:sp>
       <p:sp>
         <p:nvSpPr>
@@ -16192,6 +16826,13 @@
           </a:solidFill>
           <a:ln/>
         </p:spPr>
+        <p:txBody>
+          <a:bodyPr/>
+          <a:lstStyle/>
+          <a:p>
+            <a:endParaRPr lang="fr-FR"/>
+          </a:p>
+        </p:txBody>
       </p:sp>
       <p:sp>
         <p:nvSpPr>
@@ -16214,7 +16855,7 @@
           <a:bodyPr wrap="square" rtlCol="0" anchor="ctr"/>
           <a:lstStyle/>
           <a:p>
-            <a:pPr indent="0" marL="0">
+            <a:pPr marL="0" indent="0">
               <a:buNone/>
             </a:pPr>
             <a:r>
@@ -16253,7 +16894,7 @@
           <a:bodyPr wrap="square" rtlCol="0" anchor="ctr"/>
           <a:lstStyle/>
           <a:p>
-            <a:pPr algn="r" indent="0" marL="0">
+            <a:pPr marL="0" indent="0" algn="r">
               <a:buNone/>
             </a:pPr>
             <a:r>
@@ -16290,6 +16931,13 @@
           </a:solidFill>
           <a:ln/>
         </p:spPr>
+        <p:txBody>
+          <a:bodyPr/>
+          <a:lstStyle/>
+          <a:p>
+            <a:endParaRPr lang="fr-FR"/>
+          </a:p>
+        </p:txBody>
       </p:sp>
       <p:sp>
         <p:nvSpPr>
@@ -16312,11 +16960,11 @@
           <a:bodyPr wrap="square" rtlCol="0" anchor="ctr"/>
           <a:lstStyle/>
           <a:p>
-            <a:pPr indent="0" marL="0">
-              <a:buNone/>
-            </a:pPr>
-            <a:r>
-              <a:rPr lang="en-US" sz="1100" b="1" spc="200" kern="0" dirty="0">
+            <a:pPr marL="0" indent="0">
+              <a:buNone/>
+            </a:pPr>
+            <a:r>
+              <a:rPr lang="en-US" sz="1100" b="1" kern="0" spc="200" dirty="0">
                 <a:solidFill>
                   <a:srgbClr val="E74C3C"/>
                 </a:solidFill>
@@ -16351,7 +16999,7 @@
           <a:bodyPr wrap="square" rtlCol="0" anchor="ctr"/>
           <a:lstStyle/>
           <a:p>
-            <a:pPr indent="0" marL="0">
+            <a:pPr marL="0" indent="0">
               <a:buNone/>
             </a:pPr>
             <a:r>
@@ -16368,7 +17016,7 @@
             <a:endParaRPr lang="en-US" sz="3400" dirty="0"/>
           </a:p>
           <a:p>
-            <a:pPr indent="0" marL="0">
+            <a:pPr marL="0" indent="0">
               <a:buNone/>
             </a:pPr>
             <a:r>
@@ -16398,9 +17046,7 @@
             <a:ext cx="2103120" cy="2560320"/>
           </a:xfrm>
           <a:prstGeom prst="rect">
-            <a:avLst>
-              <a:gd name="adj" fmla="val 3478"/>
-            </a:avLst>
+            <a:avLst/>
           </a:prstGeom>
           <a:solidFill>
             <a:srgbClr val="1A1A2E"/>
@@ -16412,6 +17058,13 @@
             <a:prstDash val="solid"/>
           </a:ln>
         </p:spPr>
+        <p:txBody>
+          <a:bodyPr/>
+          <a:lstStyle/>
+          <a:p>
+            <a:endParaRPr lang="fr-FR"/>
+          </a:p>
+        </p:txBody>
       </p:sp>
       <p:sp>
         <p:nvSpPr>
@@ -16434,7 +17087,7 @@
           <a:bodyPr wrap="square" rtlCol="0" anchor="ctr"/>
           <a:lstStyle/>
           <a:p>
-            <a:pPr algn="ctr" indent="0" marL="0">
+            <a:pPr marL="0" indent="0" algn="ctr">
               <a:buNone/>
             </a:pPr>
             <a:r>
@@ -16471,6 +17124,13 @@
           </a:solidFill>
           <a:ln/>
         </p:spPr>
+        <p:txBody>
+          <a:bodyPr/>
+          <a:lstStyle/>
+          <a:p>
+            <a:endParaRPr lang="fr-FR"/>
+          </a:p>
+        </p:txBody>
       </p:sp>
       <p:sp>
         <p:nvSpPr>
@@ -16493,7 +17153,7 @@
           <a:bodyPr wrap="square" rtlCol="0" anchor="ctr"/>
           <a:lstStyle/>
           <a:p>
-            <a:pPr algn="ctr" indent="0" marL="0">
+            <a:pPr marL="0" indent="0" algn="ctr">
               <a:buNone/>
             </a:pPr>
             <a:r>
@@ -16510,7 +17170,7 @@
             <a:endParaRPr lang="en-US" sz="1200" dirty="0"/>
           </a:p>
           <a:p>
-            <a:pPr algn="ctr" indent="0" marL="0">
+            <a:pPr marL="0" indent="0" algn="ctr">
               <a:buNone/>
             </a:pPr>
             <a:r>
@@ -16536,20 +17196,20 @@
         </p:nvSpPr>
         <p:spPr>
           <a:xfrm>
-            <a:off x="2377440" y="3657600"/>
-            <a:ext cx="365760" cy="548640"/>
-          </a:xfrm>
-          <a:prstGeom prst="rect">
-            <a:avLst/>
-          </a:prstGeom>
-          <a:noFill/>
-          <a:ln/>
-        </p:spPr>
-        <p:txBody>
-          <a:bodyPr wrap="square" rtlCol="0" anchor="ctr"/>
-          <a:lstStyle/>
-          <a:p>
-            <a:pPr algn="ctr" indent="0" marL="0">
+            <a:off x="2316480" y="3657600"/>
+            <a:ext cx="426720" cy="548640"/>
+          </a:xfrm>
+          <a:prstGeom prst="rect">
+            <a:avLst/>
+          </a:prstGeom>
+          <a:noFill/>
+          <a:ln/>
+        </p:spPr>
+        <p:txBody>
+          <a:bodyPr wrap="square" rtlCol="0" anchor="ctr"/>
+          <a:lstStyle/>
+          <a:p>
+            <a:pPr marL="0" indent="0" algn="ctr">
               <a:buNone/>
             </a:pPr>
             <a:r>
@@ -16579,9 +17239,7 @@
             <a:ext cx="2103120" cy="2560320"/>
           </a:xfrm>
           <a:prstGeom prst="rect">
-            <a:avLst>
-              <a:gd name="adj" fmla="val 3478"/>
-            </a:avLst>
+            <a:avLst/>
           </a:prstGeom>
           <a:solidFill>
             <a:srgbClr val="2E1A1A"/>
@@ -16593,6 +17251,13 @@
             <a:prstDash val="solid"/>
           </a:ln>
         </p:spPr>
+        <p:txBody>
+          <a:bodyPr/>
+          <a:lstStyle/>
+          <a:p>
+            <a:endParaRPr lang="fr-FR"/>
+          </a:p>
+        </p:txBody>
       </p:sp>
       <p:sp>
         <p:nvSpPr>
@@ -16615,7 +17280,7 @@
           <a:bodyPr wrap="square" rtlCol="0" anchor="ctr"/>
           <a:lstStyle/>
           <a:p>
-            <a:pPr algn="ctr" indent="0" marL="0">
+            <a:pPr marL="0" indent="0" algn="ctr">
               <a:buNone/>
             </a:pPr>
             <a:r>
@@ -16652,6 +17317,13 @@
           </a:solidFill>
           <a:ln/>
         </p:spPr>
+        <p:txBody>
+          <a:bodyPr/>
+          <a:lstStyle/>
+          <a:p>
+            <a:endParaRPr lang="fr-FR"/>
+          </a:p>
+        </p:txBody>
       </p:sp>
       <p:sp>
         <p:nvSpPr>
@@ -16674,7 +17346,7 @@
           <a:bodyPr wrap="square" rtlCol="0" anchor="ctr"/>
           <a:lstStyle/>
           <a:p>
-            <a:pPr algn="ctr" indent="0" marL="0">
+            <a:pPr marL="0" indent="0" algn="ctr">
               <a:buNone/>
             </a:pPr>
             <a:r>
@@ -16691,7 +17363,7 @@
             <a:endParaRPr lang="en-US" sz="1200" dirty="0"/>
           </a:p>
           <a:p>
-            <a:pPr algn="ctr" indent="0" marL="0">
+            <a:pPr marL="0" indent="0" algn="ctr">
               <a:buNone/>
             </a:pPr>
             <a:r>
@@ -16717,20 +17389,20 @@
         </p:nvSpPr>
         <p:spPr>
           <a:xfrm>
-            <a:off x="4754880" y="3657600"/>
-            <a:ext cx="365760" cy="548640"/>
-          </a:xfrm>
-          <a:prstGeom prst="rect">
-            <a:avLst/>
-          </a:prstGeom>
-          <a:noFill/>
-          <a:ln/>
-        </p:spPr>
-        <p:txBody>
-          <a:bodyPr wrap="square" rtlCol="0" anchor="ctr"/>
-          <a:lstStyle/>
-          <a:p>
-            <a:pPr algn="ctr" indent="0" marL="0">
+            <a:off x="4693920" y="3657600"/>
+            <a:ext cx="426720" cy="548640"/>
+          </a:xfrm>
+          <a:prstGeom prst="rect">
+            <a:avLst/>
+          </a:prstGeom>
+          <a:noFill/>
+          <a:ln/>
+        </p:spPr>
+        <p:txBody>
+          <a:bodyPr wrap="square" rtlCol="0" anchor="ctr"/>
+          <a:lstStyle/>
+          <a:p>
+            <a:pPr marL="0" indent="0" algn="ctr">
               <a:buNone/>
             </a:pPr>
             <a:r>
@@ -16760,9 +17432,7 @@
             <a:ext cx="2103120" cy="2560320"/>
           </a:xfrm>
           <a:prstGeom prst="rect">
-            <a:avLst>
-              <a:gd name="adj" fmla="val 3478"/>
-            </a:avLst>
+            <a:avLst/>
           </a:prstGeom>
           <a:solidFill>
             <a:srgbClr val="1A2E1A"/>
@@ -16774,6 +17444,13 @@
             <a:prstDash val="solid"/>
           </a:ln>
         </p:spPr>
+        <p:txBody>
+          <a:bodyPr/>
+          <a:lstStyle/>
+          <a:p>
+            <a:endParaRPr lang="fr-FR"/>
+          </a:p>
+        </p:txBody>
       </p:sp>
       <p:sp>
         <p:nvSpPr>
@@ -16796,7 +17473,7 @@
           <a:bodyPr wrap="square" rtlCol="0" anchor="ctr"/>
           <a:lstStyle/>
           <a:p>
-            <a:pPr algn="ctr" indent="0" marL="0">
+            <a:pPr marL="0" indent="0" algn="ctr">
               <a:buNone/>
             </a:pPr>
             <a:r>
@@ -16833,6 +17510,13 @@
           </a:solidFill>
           <a:ln/>
         </p:spPr>
+        <p:txBody>
+          <a:bodyPr/>
+          <a:lstStyle/>
+          <a:p>
+            <a:endParaRPr lang="fr-FR"/>
+          </a:p>
+        </p:txBody>
       </p:sp>
       <p:sp>
         <p:nvSpPr>
@@ -16855,7 +17539,7 @@
           <a:bodyPr wrap="square" rtlCol="0" anchor="ctr"/>
           <a:lstStyle/>
           <a:p>
-            <a:pPr algn="ctr" indent="0" marL="0">
+            <a:pPr marL="0" indent="0" algn="ctr">
               <a:buNone/>
             </a:pPr>
             <a:r>
@@ -16872,7 +17556,7 @@
             <a:endParaRPr lang="en-US" sz="1200" dirty="0"/>
           </a:p>
           <a:p>
-            <a:pPr algn="ctr" indent="0" marL="0">
+            <a:pPr marL="0" indent="0" algn="ctr">
               <a:buNone/>
             </a:pPr>
             <a:r>
@@ -16898,20 +17582,20 @@
         </p:nvSpPr>
         <p:spPr>
           <a:xfrm>
-            <a:off x="7132320" y="3657600"/>
-            <a:ext cx="365760" cy="548640"/>
-          </a:xfrm>
-          <a:prstGeom prst="rect">
-            <a:avLst/>
-          </a:prstGeom>
-          <a:noFill/>
-          <a:ln/>
-        </p:spPr>
-        <p:txBody>
-          <a:bodyPr wrap="square" rtlCol="0" anchor="ctr"/>
-          <a:lstStyle/>
-          <a:p>
-            <a:pPr algn="ctr" indent="0" marL="0">
+            <a:off x="7071360" y="3657600"/>
+            <a:ext cx="426720" cy="548640"/>
+          </a:xfrm>
+          <a:prstGeom prst="rect">
+            <a:avLst/>
+          </a:prstGeom>
+          <a:noFill/>
+          <a:ln/>
+        </p:spPr>
+        <p:txBody>
+          <a:bodyPr wrap="square" rtlCol="0" anchor="ctr"/>
+          <a:lstStyle/>
+          <a:p>
+            <a:pPr marL="0" indent="0" algn="ctr">
               <a:buNone/>
             </a:pPr>
             <a:r>
@@ -16941,9 +17625,7 @@
             <a:ext cx="2103120" cy="2560320"/>
           </a:xfrm>
           <a:prstGeom prst="rect">
-            <a:avLst>
-              <a:gd name="adj" fmla="val 3478"/>
-            </a:avLst>
+            <a:avLst/>
           </a:prstGeom>
           <a:solidFill>
             <a:srgbClr val="2E2A1A"/>
@@ -16955,6 +17637,13 @@
             <a:prstDash val="solid"/>
           </a:ln>
         </p:spPr>
+        <p:txBody>
+          <a:bodyPr/>
+          <a:lstStyle/>
+          <a:p>
+            <a:endParaRPr lang="fr-FR"/>
+          </a:p>
+        </p:txBody>
       </p:sp>
       <p:sp>
         <p:nvSpPr>
@@ -16977,7 +17666,7 @@
           <a:bodyPr wrap="square" rtlCol="0" anchor="ctr"/>
           <a:lstStyle/>
           <a:p>
-            <a:pPr algn="ctr" indent="0" marL="0">
+            <a:pPr marL="0" indent="0" algn="ctr">
               <a:buNone/>
             </a:pPr>
             <a:r>
@@ -17014,6 +17703,13 @@
           </a:solidFill>
           <a:ln/>
         </p:spPr>
+        <p:txBody>
+          <a:bodyPr/>
+          <a:lstStyle/>
+          <a:p>
+            <a:endParaRPr lang="fr-FR"/>
+          </a:p>
+        </p:txBody>
       </p:sp>
       <p:sp>
         <p:nvSpPr>
@@ -17036,7 +17732,7 @@
           <a:bodyPr wrap="square" rtlCol="0" anchor="ctr"/>
           <a:lstStyle/>
           <a:p>
-            <a:pPr algn="ctr" indent="0" marL="0">
+            <a:pPr marL="0" indent="0" algn="ctr">
               <a:buNone/>
             </a:pPr>
             <a:r>
@@ -17053,7 +17749,7 @@
             <a:endParaRPr lang="en-US" sz="1200" dirty="0"/>
           </a:p>
           <a:p>
-            <a:pPr algn="ctr" indent="0" marL="0">
+            <a:pPr marL="0" indent="0" algn="ctr">
               <a:buNone/>
             </a:pPr>
             <a:r>
@@ -17079,20 +17775,20 @@
         </p:nvSpPr>
         <p:spPr>
           <a:xfrm>
-            <a:off x="9509760" y="3657600"/>
-            <a:ext cx="365760" cy="548640"/>
-          </a:xfrm>
-          <a:prstGeom prst="rect">
-            <a:avLst/>
-          </a:prstGeom>
-          <a:noFill/>
-          <a:ln/>
-        </p:spPr>
-        <p:txBody>
-          <a:bodyPr wrap="square" rtlCol="0" anchor="ctr"/>
-          <a:lstStyle/>
-          <a:p>
-            <a:pPr algn="ctr" indent="0" marL="0">
+            <a:off x="9448800" y="3657600"/>
+            <a:ext cx="426720" cy="548640"/>
+          </a:xfrm>
+          <a:prstGeom prst="rect">
+            <a:avLst/>
+          </a:prstGeom>
+          <a:noFill/>
+          <a:ln/>
+        </p:spPr>
+        <p:txBody>
+          <a:bodyPr wrap="square" rtlCol="0" anchor="ctr"/>
+          <a:lstStyle/>
+          <a:p>
+            <a:pPr marL="0" indent="0" algn="ctr">
               <a:buNone/>
             </a:pPr>
             <a:r>
@@ -17122,9 +17818,7 @@
             <a:ext cx="2103120" cy="2560320"/>
           </a:xfrm>
           <a:prstGeom prst="rect">
-            <a:avLst>
-              <a:gd name="adj" fmla="val 3478"/>
-            </a:avLst>
+            <a:avLst/>
           </a:prstGeom>
           <a:solidFill>
             <a:srgbClr val="1A1A2E"/>
@@ -17136,6 +17830,13 @@
             <a:prstDash val="solid"/>
           </a:ln>
         </p:spPr>
+        <p:txBody>
+          <a:bodyPr/>
+          <a:lstStyle/>
+          <a:p>
+            <a:endParaRPr lang="fr-FR"/>
+          </a:p>
+        </p:txBody>
       </p:sp>
       <p:sp>
         <p:nvSpPr>
@@ -17158,7 +17859,7 @@
           <a:bodyPr wrap="square" rtlCol="0" anchor="ctr"/>
           <a:lstStyle/>
           <a:p>
-            <a:pPr algn="ctr" indent="0" marL="0">
+            <a:pPr marL="0" indent="0" algn="ctr">
               <a:buNone/>
             </a:pPr>
             <a:r>
@@ -17195,6 +17896,13 @@
           </a:solidFill>
           <a:ln/>
         </p:spPr>
+        <p:txBody>
+          <a:bodyPr/>
+          <a:lstStyle/>
+          <a:p>
+            <a:endParaRPr lang="fr-FR"/>
+          </a:p>
+        </p:txBody>
       </p:sp>
       <p:sp>
         <p:nvSpPr>
@@ -17217,7 +17925,7 @@
           <a:bodyPr wrap="square" rtlCol="0" anchor="ctr"/>
           <a:lstStyle/>
           <a:p>
-            <a:pPr algn="ctr" indent="0" marL="0">
+            <a:pPr marL="0" indent="0" algn="ctr">
               <a:buNone/>
             </a:pPr>
             <a:r>
@@ -17234,7 +17942,7 @@
             <a:endParaRPr lang="en-US" sz="1200" dirty="0"/>
           </a:p>
           <a:p>
-            <a:pPr algn="ctr" indent="0" marL="0">
+            <a:pPr marL="0" indent="0" algn="ctr">
               <a:buNone/>
             </a:pPr>
             <a:r>
@@ -17268,6 +17976,7 @@
         <a:solidFill>
           <a:srgbClr val="0D0D0D"/>
         </a:solidFill>
+        <a:effectLst/>
       </p:bgPr>
     </p:bg>
     <p:spTree>
@@ -17303,6 +18012,13 @@
           </a:solidFill>
           <a:ln/>
         </p:spPr>
+        <p:txBody>
+          <a:bodyPr/>
+          <a:lstStyle/>
+          <a:p>
+            <a:endParaRPr lang="fr-FR"/>
+          </a:p>
+        </p:txBody>
       </p:sp>
       <p:sp>
         <p:nvSpPr>
@@ -17323,6 +18039,13 @@
           </a:solidFill>
           <a:ln/>
         </p:spPr>
+        <p:txBody>
+          <a:bodyPr/>
+          <a:lstStyle/>
+          <a:p>
+            <a:endParaRPr lang="fr-FR"/>
+          </a:p>
+        </p:txBody>
       </p:sp>
       <p:sp>
         <p:nvSpPr>
@@ -17345,7 +18068,7 @@
           <a:bodyPr wrap="square" rtlCol="0" anchor="ctr"/>
           <a:lstStyle/>
           <a:p>
-            <a:pPr indent="0" marL="0">
+            <a:pPr marL="0" indent="0">
               <a:buNone/>
             </a:pPr>
             <a:r>
@@ -17384,7 +18107,7 @@
           <a:bodyPr wrap="square" rtlCol="0" anchor="ctr"/>
           <a:lstStyle/>
           <a:p>
-            <a:pPr algn="r" indent="0" marL="0">
+            <a:pPr marL="0" indent="0" algn="r">
               <a:buNone/>
             </a:pPr>
             <a:r>
@@ -17423,11 +18146,11 @@
           <a:bodyPr wrap="square" rtlCol="0" anchor="ctr"/>
           <a:lstStyle/>
           <a:p>
-            <a:pPr indent="0" marL="0">
-              <a:buNone/>
-            </a:pPr>
-            <a:r>
-              <a:rPr lang="en-US" sz="900" b="1" spc="200" kern="0" dirty="0">
+            <a:pPr marL="0" indent="0">
+              <a:buNone/>
+            </a:pPr>
+            <a:r>
+              <a:rPr lang="en-US" sz="900" b="1" kern="0" spc="200" dirty="0">
                 <a:solidFill>
                   <a:srgbClr val="E74C3C"/>
                 </a:solidFill>
@@ -17460,6 +18183,13 @@
           </a:solidFill>
           <a:ln/>
         </p:spPr>
+        <p:txBody>
+          <a:bodyPr/>
+          <a:lstStyle/>
+          <a:p>
+            <a:endParaRPr lang="fr-FR"/>
+          </a:p>
+        </p:txBody>
       </p:sp>
       <p:sp>
         <p:nvSpPr>
@@ -17482,7 +18212,7 @@
           <a:bodyPr wrap="square" rtlCol="0" anchor="ctr"/>
           <a:lstStyle/>
           <a:p>
-            <a:pPr indent="0" marL="0">
+            <a:pPr marL="0" indent="0">
               <a:buNone/>
             </a:pPr>
             <a:r>
@@ -17521,11 +18251,11 @@
           <a:bodyPr wrap="square" rtlCol="0" anchor="ctr"/>
           <a:lstStyle/>
           <a:p>
-            <a:pPr algn="ctr" indent="0" marL="0">
-              <a:buNone/>
-            </a:pPr>
-            <a:r>
-              <a:rPr lang="en-US" sz="750" b="1" spc="30" kern="0" dirty="0">
+            <a:pPr marL="0" indent="0" algn="ctr">
+              <a:buNone/>
+            </a:pPr>
+            <a:r>
+              <a:rPr lang="en-US" sz="750" b="1" kern="0" spc="30" dirty="0">
                 <a:solidFill>
                   <a:srgbClr val="B2B2B2"/>
                 </a:solidFill>
@@ -17558,6 +18288,13 @@
           </a:solidFill>
           <a:ln/>
         </p:spPr>
+        <p:txBody>
+          <a:bodyPr/>
+          <a:lstStyle/>
+          <a:p>
+            <a:endParaRPr lang="fr-FR"/>
+          </a:p>
+        </p:txBody>
       </p:sp>
       <p:sp>
         <p:nvSpPr>
@@ -17571,9 +18308,7 @@
             <a:ext cx="1508760" cy="640080"/>
           </a:xfrm>
           <a:prstGeom prst="rect">
-            <a:avLst>
-              <a:gd name="adj" fmla="val 11429"/>
-            </a:avLst>
+            <a:avLst/>
           </a:prstGeom>
           <a:solidFill>
             <a:srgbClr val="1A2E1A"/>
@@ -17585,6 +18320,13 @@
             <a:prstDash val="solid"/>
           </a:ln>
         </p:spPr>
+        <p:txBody>
+          <a:bodyPr/>
+          <a:lstStyle/>
+          <a:p>
+            <a:endParaRPr lang="fr-FR"/>
+          </a:p>
+        </p:txBody>
       </p:sp>
       <p:sp>
         <p:nvSpPr>
@@ -17607,7 +18349,7 @@
           <a:bodyPr wrap="square" rtlCol="0" anchor="ctr"/>
           <a:lstStyle/>
           <a:p>
-            <a:pPr algn="ctr" indent="0" marL="0">
+            <a:pPr marL="0" indent="0" algn="ctr">
               <a:buNone/>
             </a:pPr>
             <a:r>
@@ -17646,7 +18388,7 @@
           <a:bodyPr wrap="square" rtlCol="0" anchor="ctr"/>
           <a:lstStyle/>
           <a:p>
-            <a:pPr algn="ctr" indent="0" marL="0">
+            <a:pPr marL="0" indent="0" algn="ctr">
               <a:buNone/>
             </a:pPr>
             <a:r>
@@ -17685,11 +18427,11 @@
           <a:bodyPr wrap="square" rtlCol="0" anchor="ctr"/>
           <a:lstStyle/>
           <a:p>
-            <a:pPr algn="ctr" indent="0" marL="0">
-              <a:buNone/>
-            </a:pPr>
-            <a:r>
-              <a:rPr lang="en-US" sz="750" b="1" spc="30" kern="0" dirty="0">
+            <a:pPr marL="0" indent="0" algn="ctr">
+              <a:buNone/>
+            </a:pPr>
+            <a:r>
+              <a:rPr lang="en-US" sz="750" b="1" kern="0" spc="30" dirty="0">
                 <a:solidFill>
                   <a:srgbClr val="B2B2B2"/>
                 </a:solidFill>
@@ -17722,6 +18464,13 @@
           </a:solidFill>
           <a:ln/>
         </p:spPr>
+        <p:txBody>
+          <a:bodyPr/>
+          <a:lstStyle/>
+          <a:p>
+            <a:endParaRPr lang="fr-FR"/>
+          </a:p>
+        </p:txBody>
       </p:sp>
       <p:sp>
         <p:nvSpPr>
@@ -17735,9 +18484,7 @@
             <a:ext cx="1508760" cy="640080"/>
           </a:xfrm>
           <a:prstGeom prst="rect">
-            <a:avLst>
-              <a:gd name="adj" fmla="val 11429"/>
-            </a:avLst>
+            <a:avLst/>
           </a:prstGeom>
           <a:solidFill>
             <a:srgbClr val="2E1A1A"/>
@@ -17749,6 +18496,13 @@
             <a:prstDash val="solid"/>
           </a:ln>
         </p:spPr>
+        <p:txBody>
+          <a:bodyPr/>
+          <a:lstStyle/>
+          <a:p>
+            <a:endParaRPr lang="fr-FR"/>
+          </a:p>
+        </p:txBody>
       </p:sp>
       <p:sp>
         <p:nvSpPr>
@@ -17771,7 +18525,7 @@
           <a:bodyPr wrap="square" rtlCol="0" anchor="ctr"/>
           <a:lstStyle/>
           <a:p>
-            <a:pPr algn="ctr" indent="0" marL="0">
+            <a:pPr marL="0" indent="0" algn="ctr">
               <a:buNone/>
             </a:pPr>
             <a:r>
@@ -17788,7 +18542,7 @@
             <a:endParaRPr lang="en-US" sz="900" dirty="0"/>
           </a:p>
           <a:p>
-            <a:pPr algn="ctr" indent="0" marL="0">
+            <a:pPr marL="0" indent="0" algn="ctr">
               <a:buNone/>
             </a:pPr>
             <a:r>
@@ -17818,9 +18572,7 @@
             <a:ext cx="1508760" cy="640080"/>
           </a:xfrm>
           <a:prstGeom prst="rect">
-            <a:avLst>
-              <a:gd name="adj" fmla="val 11429"/>
-            </a:avLst>
+            <a:avLst/>
           </a:prstGeom>
           <a:solidFill>
             <a:srgbClr val="2E1A1A"/>
@@ -17832,6 +18584,13 @@
             <a:prstDash val="solid"/>
           </a:ln>
         </p:spPr>
+        <p:txBody>
+          <a:bodyPr/>
+          <a:lstStyle/>
+          <a:p>
+            <a:endParaRPr lang="fr-FR"/>
+          </a:p>
+        </p:txBody>
       </p:sp>
       <p:sp>
         <p:nvSpPr>
@@ -17854,7 +18613,7 @@
           <a:bodyPr wrap="square" rtlCol="0" anchor="ctr"/>
           <a:lstStyle/>
           <a:p>
-            <a:pPr algn="ctr" indent="0" marL="0">
+            <a:pPr marL="0" indent="0" algn="ctr">
               <a:buNone/>
             </a:pPr>
             <a:r>
@@ -17871,7 +18630,7 @@
             <a:endParaRPr lang="en-US" sz="900" dirty="0"/>
           </a:p>
           <a:p>
-            <a:pPr algn="ctr" indent="0" marL="0">
+            <a:pPr marL="0" indent="0" algn="ctr">
               <a:buNone/>
             </a:pPr>
             <a:r>
@@ -17901,9 +18660,7 @@
             <a:ext cx="1508760" cy="640080"/>
           </a:xfrm>
           <a:prstGeom prst="rect">
-            <a:avLst>
-              <a:gd name="adj" fmla="val 11429"/>
-            </a:avLst>
+            <a:avLst/>
           </a:prstGeom>
           <a:solidFill>
             <a:srgbClr val="1A2E1A"/>
@@ -17915,6 +18672,13 @@
             <a:prstDash val="solid"/>
           </a:ln>
         </p:spPr>
+        <p:txBody>
+          <a:bodyPr/>
+          <a:lstStyle/>
+          <a:p>
+            <a:endParaRPr lang="fr-FR"/>
+          </a:p>
+        </p:txBody>
       </p:sp>
       <p:sp>
         <p:nvSpPr>
@@ -17937,7 +18701,7 @@
           <a:bodyPr wrap="square" rtlCol="0" anchor="ctr"/>
           <a:lstStyle/>
           <a:p>
-            <a:pPr algn="ctr" indent="0" marL="0">
+            <a:pPr marL="0" indent="0" algn="ctr">
               <a:buNone/>
             </a:pPr>
             <a:r>
@@ -17954,7 +18718,7 @@
             <a:endParaRPr lang="en-US" sz="900" dirty="0"/>
           </a:p>
           <a:p>
-            <a:pPr algn="ctr" indent="0" marL="0">
+            <a:pPr marL="0" indent="0" algn="ctr">
               <a:buNone/>
             </a:pPr>
             <a:r>
@@ -17984,9 +18748,7 @@
             <a:ext cx="1508760" cy="640080"/>
           </a:xfrm>
           <a:prstGeom prst="rect">
-            <a:avLst>
-              <a:gd name="adj" fmla="val 11429"/>
-            </a:avLst>
+            <a:avLst/>
           </a:prstGeom>
           <a:solidFill>
             <a:srgbClr val="1A2E1A"/>
@@ -17998,6 +18760,13 @@
             <a:prstDash val="solid"/>
           </a:ln>
         </p:spPr>
+        <p:txBody>
+          <a:bodyPr/>
+          <a:lstStyle/>
+          <a:p>
+            <a:endParaRPr lang="fr-FR"/>
+          </a:p>
+        </p:txBody>
       </p:sp>
       <p:sp>
         <p:nvSpPr>
@@ -18020,7 +18789,7 @@
           <a:bodyPr wrap="square" rtlCol="0" anchor="ctr"/>
           <a:lstStyle/>
           <a:p>
-            <a:pPr algn="ctr" indent="0" marL="0">
+            <a:pPr marL="0" indent="0" algn="ctr">
               <a:buNone/>
             </a:pPr>
             <a:r>
@@ -18037,7 +18806,7 @@
             <a:endParaRPr lang="en-US" sz="900" dirty="0"/>
           </a:p>
           <a:p>
-            <a:pPr algn="ctr" indent="0" marL="0">
+            <a:pPr marL="0" indent="0" algn="ctr">
               <a:buNone/>
             </a:pPr>
             <a:r>
@@ -18076,7 +18845,7 @@
           <a:bodyPr wrap="square" rtlCol="0" anchor="ctr"/>
           <a:lstStyle/>
           <a:p>
-            <a:pPr algn="ctr" indent="0" marL="0">
+            <a:pPr marL="0" indent="0" algn="ctr">
               <a:buNone/>
             </a:pPr>
             <a:r>
@@ -18115,11 +18884,11 @@
           <a:bodyPr wrap="square" rtlCol="0" anchor="ctr"/>
           <a:lstStyle/>
           <a:p>
-            <a:pPr algn="ctr" indent="0" marL="0">
-              <a:buNone/>
-            </a:pPr>
-            <a:r>
-              <a:rPr lang="en-US" sz="750" b="1" spc="30" kern="0" dirty="0">
+            <a:pPr marL="0" indent="0" algn="ctr">
+              <a:buNone/>
+            </a:pPr>
+            <a:r>
+              <a:rPr lang="en-US" sz="750" b="1" kern="0" spc="30" dirty="0">
                 <a:solidFill>
                   <a:srgbClr val="B2B2B2"/>
                 </a:solidFill>
@@ -18152,6 +18921,13 @@
           </a:solidFill>
           <a:ln/>
         </p:spPr>
+        <p:txBody>
+          <a:bodyPr/>
+          <a:lstStyle/>
+          <a:p>
+            <a:endParaRPr lang="fr-FR"/>
+          </a:p>
+        </p:txBody>
       </p:sp>
       <p:sp>
         <p:nvSpPr>
@@ -18165,9 +18941,7 @@
             <a:ext cx="1508760" cy="640080"/>
           </a:xfrm>
           <a:prstGeom prst="rect">
-            <a:avLst>
-              <a:gd name="adj" fmla="val 11429"/>
-            </a:avLst>
+            <a:avLst/>
           </a:prstGeom>
           <a:solidFill>
             <a:srgbClr val="2E1A2E"/>
@@ -18179,6 +18953,13 @@
             <a:prstDash val="solid"/>
           </a:ln>
         </p:spPr>
+        <p:txBody>
+          <a:bodyPr/>
+          <a:lstStyle/>
+          <a:p>
+            <a:endParaRPr lang="fr-FR"/>
+          </a:p>
+        </p:txBody>
       </p:sp>
       <p:sp>
         <p:nvSpPr>
@@ -18201,7 +18982,7 @@
           <a:bodyPr wrap="square" rtlCol="0" anchor="ctr"/>
           <a:lstStyle/>
           <a:p>
-            <a:pPr algn="ctr" indent="0" marL="0">
+            <a:pPr marL="0" indent="0" algn="ctr">
               <a:buNone/>
             </a:pPr>
             <a:r>
@@ -18218,7 +18999,7 @@
             <a:endParaRPr lang="en-US" sz="900" dirty="0"/>
           </a:p>
           <a:p>
-            <a:pPr algn="ctr" indent="0" marL="0">
+            <a:pPr marL="0" indent="0" algn="ctr">
               <a:buNone/>
             </a:pPr>
             <a:r>
@@ -18248,9 +19029,7 @@
             <a:ext cx="1508760" cy="640080"/>
           </a:xfrm>
           <a:prstGeom prst="rect">
-            <a:avLst>
-              <a:gd name="adj" fmla="val 11429"/>
-            </a:avLst>
+            <a:avLst/>
           </a:prstGeom>
           <a:solidFill>
             <a:srgbClr val="1A2E2E"/>
@@ -18262,6 +19041,13 @@
             <a:prstDash val="solid"/>
           </a:ln>
         </p:spPr>
+        <p:txBody>
+          <a:bodyPr/>
+          <a:lstStyle/>
+          <a:p>
+            <a:endParaRPr lang="fr-FR"/>
+          </a:p>
+        </p:txBody>
       </p:sp>
       <p:sp>
         <p:nvSpPr>
@@ -18284,7 +19070,7 @@
           <a:bodyPr wrap="square" rtlCol="0" anchor="ctr"/>
           <a:lstStyle/>
           <a:p>
-            <a:pPr algn="ctr" indent="0" marL="0">
+            <a:pPr marL="0" indent="0" algn="ctr">
               <a:buNone/>
             </a:pPr>
             <a:r>
@@ -18301,7 +19087,7 @@
             <a:endParaRPr lang="en-US" sz="900" dirty="0"/>
           </a:p>
           <a:p>
-            <a:pPr algn="ctr" indent="0" marL="0">
+            <a:pPr marL="0" indent="0" algn="ctr">
               <a:buNone/>
             </a:pPr>
             <a:r>
@@ -18340,7 +19126,7 @@
           <a:bodyPr wrap="square" rtlCol="0" anchor="ctr"/>
           <a:lstStyle/>
           <a:p>
-            <a:pPr algn="ctr" indent="0" marL="0">
+            <a:pPr marL="0" indent="0" algn="ctr">
               <a:buNone/>
             </a:pPr>
             <a:r>
@@ -18379,11 +19165,11 @@
           <a:bodyPr wrap="square" rtlCol="0" anchor="ctr"/>
           <a:lstStyle/>
           <a:p>
-            <a:pPr algn="ctr" indent="0" marL="0">
-              <a:buNone/>
-            </a:pPr>
-            <a:r>
-              <a:rPr lang="en-US" sz="750" b="1" spc="30" kern="0" dirty="0">
+            <a:pPr marL="0" indent="0" algn="ctr">
+              <a:buNone/>
+            </a:pPr>
+            <a:r>
+              <a:rPr lang="en-US" sz="750" b="1" kern="0" spc="30" dirty="0">
                 <a:solidFill>
                   <a:srgbClr val="B2B2B2"/>
                 </a:solidFill>
@@ -18416,6 +19202,13 @@
           </a:solidFill>
           <a:ln/>
         </p:spPr>
+        <p:txBody>
+          <a:bodyPr/>
+          <a:lstStyle/>
+          <a:p>
+            <a:endParaRPr lang="fr-FR"/>
+          </a:p>
+        </p:txBody>
       </p:sp>
       <p:sp>
         <p:nvSpPr>
@@ -18429,9 +19222,7 @@
             <a:ext cx="1508760" cy="640080"/>
           </a:xfrm>
           <a:prstGeom prst="rect">
-            <a:avLst>
-              <a:gd name="adj" fmla="val 11429"/>
-            </a:avLst>
+            <a:avLst/>
           </a:prstGeom>
           <a:solidFill>
             <a:srgbClr val="2E2A1A"/>
@@ -18443,6 +19234,13 @@
             <a:prstDash val="solid"/>
           </a:ln>
         </p:spPr>
+        <p:txBody>
+          <a:bodyPr/>
+          <a:lstStyle/>
+          <a:p>
+            <a:endParaRPr lang="fr-FR"/>
+          </a:p>
+        </p:txBody>
       </p:sp>
       <p:sp>
         <p:nvSpPr>
@@ -18465,7 +19263,7 @@
           <a:bodyPr wrap="square" rtlCol="0" anchor="ctr"/>
           <a:lstStyle/>
           <a:p>
-            <a:pPr algn="ctr" indent="0" marL="0">
+            <a:pPr marL="0" indent="0" algn="ctr">
               <a:buNone/>
             </a:pPr>
             <a:r>
@@ -18482,7 +19280,7 @@
             <a:endParaRPr lang="en-US" sz="900" dirty="0"/>
           </a:p>
           <a:p>
-            <a:pPr algn="ctr" indent="0" marL="0">
+            <a:pPr marL="0" indent="0" algn="ctr">
               <a:buNone/>
             </a:pPr>
             <a:r>
@@ -18521,7 +19319,7 @@
           <a:bodyPr wrap="square" rtlCol="0" anchor="ctr"/>
           <a:lstStyle/>
           <a:p>
-            <a:pPr algn="ctr" indent="0" marL="0">
+            <a:pPr marL="0" indent="0" algn="ctr">
               <a:buNone/>
             </a:pPr>
             <a:r>
@@ -18560,11 +19358,11 @@
           <a:bodyPr wrap="square" rtlCol="0" anchor="ctr"/>
           <a:lstStyle/>
           <a:p>
-            <a:pPr algn="ctr" indent="0" marL="0">
-              <a:buNone/>
-            </a:pPr>
-            <a:r>
-              <a:rPr lang="en-US" sz="750" b="1" spc="30" kern="0" dirty="0">
+            <a:pPr marL="0" indent="0" algn="ctr">
+              <a:buNone/>
+            </a:pPr>
+            <a:r>
+              <a:rPr lang="en-US" sz="750" b="1" kern="0" spc="30" dirty="0">
                 <a:solidFill>
                   <a:srgbClr val="B2B2B2"/>
                 </a:solidFill>
@@ -18597,6 +19395,13 @@
           </a:solidFill>
           <a:ln/>
         </p:spPr>
+        <p:txBody>
+          <a:bodyPr/>
+          <a:lstStyle/>
+          <a:p>
+            <a:endParaRPr lang="fr-FR"/>
+          </a:p>
+        </p:txBody>
       </p:sp>
       <p:sp>
         <p:nvSpPr>
@@ -18610,9 +19415,7 @@
             <a:ext cx="1508760" cy="640080"/>
           </a:xfrm>
           <a:prstGeom prst="rect">
-            <a:avLst>
-              <a:gd name="adj" fmla="val 11429"/>
-            </a:avLst>
+            <a:avLst/>
           </a:prstGeom>
           <a:solidFill>
             <a:srgbClr val="2E1A1A"/>
@@ -18624,6 +19427,13 @@
             <a:prstDash val="solid"/>
           </a:ln>
         </p:spPr>
+        <p:txBody>
+          <a:bodyPr/>
+          <a:lstStyle/>
+          <a:p>
+            <a:endParaRPr lang="fr-FR"/>
+          </a:p>
+        </p:txBody>
       </p:sp>
       <p:sp>
         <p:nvSpPr>
@@ -18646,7 +19456,7 @@
           <a:bodyPr wrap="square" rtlCol="0" anchor="ctr"/>
           <a:lstStyle/>
           <a:p>
-            <a:pPr algn="ctr" indent="0" marL="0">
+            <a:pPr marL="0" indent="0" algn="ctr">
               <a:buNone/>
             </a:pPr>
             <a:r>
@@ -18663,7 +19473,7 @@
             <a:endParaRPr lang="en-US" sz="900" dirty="0"/>
           </a:p>
           <a:p>
-            <a:pPr algn="ctr" indent="0" marL="0">
+            <a:pPr marL="0" indent="0" algn="ctr">
               <a:buNone/>
             </a:pPr>
             <a:r>
@@ -18702,7 +19512,7 @@
           <a:bodyPr wrap="square" rtlCol="0" anchor="ctr"/>
           <a:lstStyle/>
           <a:p>
-            <a:pPr algn="ctr" indent="0" marL="0">
+            <a:pPr marL="0" indent="0" algn="ctr">
               <a:buNone/>
             </a:pPr>
             <a:r>
@@ -18741,11 +19551,11 @@
           <a:bodyPr wrap="square" rtlCol="0" anchor="ctr"/>
           <a:lstStyle/>
           <a:p>
-            <a:pPr algn="ctr" indent="0" marL="0">
-              <a:buNone/>
-            </a:pPr>
-            <a:r>
-              <a:rPr lang="en-US" sz="750" b="1" spc="30" kern="0" dirty="0">
+            <a:pPr marL="0" indent="0" algn="ctr">
+              <a:buNone/>
+            </a:pPr>
+            <a:r>
+              <a:rPr lang="en-US" sz="750" b="1" kern="0" spc="30" dirty="0">
                 <a:solidFill>
                   <a:srgbClr val="B2B2B2"/>
                 </a:solidFill>
@@ -18778,6 +19588,13 @@
           </a:solidFill>
           <a:ln/>
         </p:spPr>
+        <p:txBody>
+          <a:bodyPr/>
+          <a:lstStyle/>
+          <a:p>
+            <a:endParaRPr lang="fr-FR"/>
+          </a:p>
+        </p:txBody>
       </p:sp>
       <p:sp>
         <p:nvSpPr>
@@ -18791,9 +19608,7 @@
             <a:ext cx="1508760" cy="640080"/>
           </a:xfrm>
           <a:prstGeom prst="rect">
-            <a:avLst>
-              <a:gd name="adj" fmla="val 11429"/>
-            </a:avLst>
+            <a:avLst/>
           </a:prstGeom>
           <a:solidFill>
             <a:srgbClr val="1A2A1A"/>
@@ -18805,6 +19620,13 @@
             <a:prstDash val="solid"/>
           </a:ln>
         </p:spPr>
+        <p:txBody>
+          <a:bodyPr/>
+          <a:lstStyle/>
+          <a:p>
+            <a:endParaRPr lang="fr-FR"/>
+          </a:p>
+        </p:txBody>
       </p:sp>
       <p:sp>
         <p:nvSpPr>
@@ -18827,7 +19649,7 @@
           <a:bodyPr wrap="square" rtlCol="0" anchor="ctr"/>
           <a:lstStyle/>
           <a:p>
-            <a:pPr algn="ctr" indent="0" marL="0">
+            <a:pPr marL="0" indent="0" algn="ctr">
               <a:buNone/>
             </a:pPr>
             <a:r>
@@ -18844,7 +19666,7 @@
             <a:endParaRPr lang="en-US" sz="900" dirty="0"/>
           </a:p>
           <a:p>
-            <a:pPr algn="ctr" indent="0" marL="0">
+            <a:pPr marL="0" indent="0" algn="ctr">
               <a:buNone/>
             </a:pPr>
             <a:r>
@@ -18874,9 +19696,7 @@
             <a:ext cx="1508760" cy="640080"/>
           </a:xfrm>
           <a:prstGeom prst="rect">
-            <a:avLst>
-              <a:gd name="adj" fmla="val 11429"/>
-            </a:avLst>
+            <a:avLst/>
           </a:prstGeom>
           <a:solidFill>
             <a:srgbClr val="1A2A1A"/>
@@ -18888,6 +19708,13 @@
             <a:prstDash val="solid"/>
           </a:ln>
         </p:spPr>
+        <p:txBody>
+          <a:bodyPr/>
+          <a:lstStyle/>
+          <a:p>
+            <a:endParaRPr lang="fr-FR"/>
+          </a:p>
+        </p:txBody>
       </p:sp>
       <p:sp>
         <p:nvSpPr>
@@ -18910,7 +19737,7 @@
           <a:bodyPr wrap="square" rtlCol="0" anchor="ctr"/>
           <a:lstStyle/>
           <a:p>
-            <a:pPr algn="ctr" indent="0" marL="0">
+            <a:pPr marL="0" indent="0" algn="ctr">
               <a:buNone/>
             </a:pPr>
             <a:r>
@@ -18927,7 +19754,7 @@
             <a:endParaRPr lang="en-US" sz="900" dirty="0"/>
           </a:p>
           <a:p>
-            <a:pPr algn="ctr" indent="0" marL="0">
+            <a:pPr marL="0" indent="0" algn="ctr">
               <a:buNone/>
             </a:pPr>
             <a:r>
@@ -18964,6 +19791,13 @@
           </a:solidFill>
           <a:ln/>
         </p:spPr>
+        <p:txBody>
+          <a:bodyPr/>
+          <a:lstStyle/>
+          <a:p>
+            <a:endParaRPr lang="fr-FR"/>
+          </a:p>
+        </p:txBody>
       </p:sp>
       <p:sp>
         <p:nvSpPr>
@@ -18986,7 +19820,7 @@
           <a:bodyPr wrap="square" rtlCol="0" anchor="ctr"/>
           <a:lstStyle/>
           <a:p>
-            <a:pPr indent="0" marL="0">
+            <a:pPr marL="0" indent="0">
               <a:buNone/>
             </a:pPr>
             <a:r>
@@ -19023,6 +19857,13 @@
           </a:solidFill>
           <a:ln/>
         </p:spPr>
+        <p:txBody>
+          <a:bodyPr/>
+          <a:lstStyle/>
+          <a:p>
+            <a:endParaRPr lang="fr-FR"/>
+          </a:p>
+        </p:txBody>
       </p:sp>
       <p:sp>
         <p:nvSpPr>
@@ -19045,7 +19886,7 @@
           <a:bodyPr wrap="square" rtlCol="0" anchor="ctr"/>
           <a:lstStyle/>
           <a:p>
-            <a:pPr indent="0" marL="0">
+            <a:pPr marL="0" indent="0">
               <a:buNone/>
             </a:pPr>
             <a:r>
@@ -19082,6 +19923,13 @@
           </a:solidFill>
           <a:ln/>
         </p:spPr>
+        <p:txBody>
+          <a:bodyPr/>
+          <a:lstStyle/>
+          <a:p>
+            <a:endParaRPr lang="fr-FR"/>
+          </a:p>
+        </p:txBody>
       </p:sp>
       <p:sp>
         <p:nvSpPr>
@@ -19104,7 +19952,7 @@
           <a:bodyPr wrap="square" rtlCol="0" anchor="ctr"/>
           <a:lstStyle/>
           <a:p>
-            <a:pPr indent="0" marL="0">
+            <a:pPr marL="0" indent="0">
               <a:buNone/>
             </a:pPr>
             <a:r>
@@ -19138,6 +19986,7 @@
         <a:solidFill>
           <a:srgbClr val="0D0D0D"/>
         </a:solidFill>
+        <a:effectLst/>
       </p:bgPr>
     </p:bg>
     <p:spTree>
@@ -19173,6 +20022,13 @@
           </a:solidFill>
           <a:ln/>
         </p:spPr>
+        <p:txBody>
+          <a:bodyPr/>
+          <a:lstStyle/>
+          <a:p>
+            <a:endParaRPr lang="fr-FR"/>
+          </a:p>
+        </p:txBody>
       </p:sp>
       <p:sp>
         <p:nvSpPr>
@@ -19193,6 +20049,13 @@
           </a:solidFill>
           <a:ln/>
         </p:spPr>
+        <p:txBody>
+          <a:bodyPr/>
+          <a:lstStyle/>
+          <a:p>
+            <a:endParaRPr lang="fr-FR"/>
+          </a:p>
+        </p:txBody>
       </p:sp>
       <p:sp>
         <p:nvSpPr>
@@ -19215,7 +20078,7 @@
           <a:bodyPr wrap="square" rtlCol="0" anchor="ctr"/>
           <a:lstStyle/>
           <a:p>
-            <a:pPr indent="0" marL="0">
+            <a:pPr marL="0" indent="0">
               <a:buNone/>
             </a:pPr>
             <a:r>
@@ -19254,7 +20117,7 @@
           <a:bodyPr wrap="square" rtlCol="0" anchor="ctr"/>
           <a:lstStyle/>
           <a:p>
-            <a:pPr algn="r" indent="0" marL="0">
+            <a:pPr marL="0" indent="0" algn="r">
               <a:buNone/>
             </a:pPr>
             <a:r>
@@ -19291,6 +20154,13 @@
           </a:solidFill>
           <a:ln/>
         </p:spPr>
+        <p:txBody>
+          <a:bodyPr/>
+          <a:lstStyle/>
+          <a:p>
+            <a:endParaRPr lang="fr-FR"/>
+          </a:p>
+        </p:txBody>
       </p:sp>
       <p:sp>
         <p:nvSpPr>
@@ -19313,11 +20183,11 @@
           <a:bodyPr wrap="square" rtlCol="0" anchor="ctr"/>
           <a:lstStyle/>
           <a:p>
-            <a:pPr indent="0" marL="0">
-              <a:buNone/>
-            </a:pPr>
-            <a:r>
-              <a:rPr lang="en-US" sz="1100" b="1" spc="200" kern="0" dirty="0">
+            <a:pPr marL="0" indent="0">
+              <a:buNone/>
+            </a:pPr>
+            <a:r>
+              <a:rPr lang="en-US" sz="1100" b="1" kern="0" spc="200" dirty="0">
                 <a:solidFill>
                   <a:srgbClr val="E74C3C"/>
                 </a:solidFill>
@@ -19352,7 +20222,7 @@
           <a:bodyPr wrap="square" rtlCol="0" anchor="ctr"/>
           <a:lstStyle/>
           <a:p>
-            <a:pPr indent="0" marL="0">
+            <a:pPr marL="0" indent="0">
               <a:buNone/>
             </a:pPr>
             <a:r>
@@ -19382,9 +20252,7 @@
             <a:ext cx="2743200" cy="2560320"/>
           </a:xfrm>
           <a:prstGeom prst="rect">
-            <a:avLst>
-              <a:gd name="adj" fmla="val 2857"/>
-            </a:avLst>
+            <a:avLst/>
           </a:prstGeom>
           <a:solidFill>
             <a:srgbClr val="2E1A1A"/>
@@ -19396,6 +20264,13 @@
             <a:prstDash val="solid"/>
           </a:ln>
         </p:spPr>
+        <p:txBody>
+          <a:bodyPr/>
+          <a:lstStyle/>
+          <a:p>
+            <a:endParaRPr lang="fr-FR"/>
+          </a:p>
+        </p:txBody>
       </p:sp>
       <p:sp>
         <p:nvSpPr>
@@ -19418,7 +20293,7 @@
           <a:bodyPr wrap="square" rtlCol="0" anchor="ctr"/>
           <a:lstStyle/>
           <a:p>
-            <a:pPr algn="r" indent="0" marL="0">
+            <a:pPr marL="0" indent="0" algn="r">
               <a:buNone/>
             </a:pPr>
             <a:r>
@@ -19457,7 +20332,7 @@
           <a:bodyPr wrap="square" rtlCol="0" anchor="ctr"/>
           <a:lstStyle/>
           <a:p>
-            <a:pPr algn="ctr" indent="0" marL="0">
+            <a:pPr marL="0" indent="0" algn="ctr">
               <a:buNone/>
             </a:pPr>
             <a:r>
@@ -19494,6 +20369,13 @@
           </a:solidFill>
           <a:ln/>
         </p:spPr>
+        <p:txBody>
+          <a:bodyPr/>
+          <a:lstStyle/>
+          <a:p>
+            <a:endParaRPr lang="fr-FR"/>
+          </a:p>
+        </p:txBody>
       </p:sp>
       <p:sp>
         <p:nvSpPr>
@@ -19516,7 +20398,7 @@
           <a:bodyPr wrap="square" rtlCol="0" anchor="ctr"/>
           <a:lstStyle/>
           <a:p>
-            <a:pPr algn="ctr" indent="0" marL="0">
+            <a:pPr marL="0" indent="0" algn="ctr">
               <a:buNone/>
             </a:pPr>
             <a:r>
@@ -19533,7 +20415,7 @@
             <a:endParaRPr lang="en-US" sz="1200" dirty="0"/>
           </a:p>
           <a:p>
-            <a:pPr algn="ctr" indent="0" marL="0">
+            <a:pPr marL="0" indent="0" algn="ctr">
               <a:buNone/>
             </a:pPr>
             <a:r>
@@ -19563,9 +20445,7 @@
             <a:ext cx="2743200" cy="2560320"/>
           </a:xfrm>
           <a:prstGeom prst="rect">
-            <a:avLst>
-              <a:gd name="adj" fmla="val 2857"/>
-            </a:avLst>
+            <a:avLst/>
           </a:prstGeom>
           <a:solidFill>
             <a:srgbClr val="1A1A2E"/>
@@ -19577,6 +20457,13 @@
             <a:prstDash val="solid"/>
           </a:ln>
         </p:spPr>
+        <p:txBody>
+          <a:bodyPr/>
+          <a:lstStyle/>
+          <a:p>
+            <a:endParaRPr lang="fr-FR"/>
+          </a:p>
+        </p:txBody>
       </p:sp>
       <p:sp>
         <p:nvSpPr>
@@ -19599,7 +20486,7 @@
           <a:bodyPr wrap="square" rtlCol="0" anchor="ctr"/>
           <a:lstStyle/>
           <a:p>
-            <a:pPr algn="r" indent="0" marL="0">
+            <a:pPr marL="0" indent="0" algn="r">
               <a:buNone/>
             </a:pPr>
             <a:r>
@@ -19638,7 +20525,7 @@
           <a:bodyPr wrap="square" rtlCol="0" anchor="ctr"/>
           <a:lstStyle/>
           <a:p>
-            <a:pPr algn="ctr" indent="0" marL="0">
+            <a:pPr marL="0" indent="0" algn="ctr">
               <a:buNone/>
             </a:pPr>
             <a:r>
@@ -19675,6 +20562,13 @@
           </a:solidFill>
           <a:ln/>
         </p:spPr>
+        <p:txBody>
+          <a:bodyPr/>
+          <a:lstStyle/>
+          <a:p>
+            <a:endParaRPr lang="fr-FR"/>
+          </a:p>
+        </p:txBody>
       </p:sp>
       <p:sp>
         <p:nvSpPr>
@@ -19697,7 +20591,7 @@
           <a:bodyPr wrap="square" rtlCol="0" anchor="ctr"/>
           <a:lstStyle/>
           <a:p>
-            <a:pPr algn="ctr" indent="0" marL="0">
+            <a:pPr marL="0" indent="0" algn="ctr">
               <a:buNone/>
             </a:pPr>
             <a:r>
@@ -19714,7 +20608,7 @@
             <a:endParaRPr lang="en-US" sz="1200" dirty="0"/>
           </a:p>
           <a:p>
-            <a:pPr algn="ctr" indent="0" marL="0">
+            <a:pPr marL="0" indent="0" algn="ctr">
               <a:buNone/>
             </a:pPr>
             <a:r>
@@ -19744,9 +20638,7 @@
             <a:ext cx="2743200" cy="2560320"/>
           </a:xfrm>
           <a:prstGeom prst="rect">
-            <a:avLst>
-              <a:gd name="adj" fmla="val 2857"/>
-            </a:avLst>
+            <a:avLst/>
           </a:prstGeom>
           <a:solidFill>
             <a:srgbClr val="1A2E2E"/>
@@ -19758,6 +20650,13 @@
             <a:prstDash val="solid"/>
           </a:ln>
         </p:spPr>
+        <p:txBody>
+          <a:bodyPr/>
+          <a:lstStyle/>
+          <a:p>
+            <a:endParaRPr lang="fr-FR"/>
+          </a:p>
+        </p:txBody>
       </p:sp>
       <p:sp>
         <p:nvSpPr>
@@ -19780,7 +20679,7 @@
           <a:bodyPr wrap="square" rtlCol="0" anchor="ctr"/>
           <a:lstStyle/>
           <a:p>
-            <a:pPr algn="r" indent="0" marL="0">
+            <a:pPr marL="0" indent="0" algn="r">
               <a:buNone/>
             </a:pPr>
             <a:r>
@@ -19819,7 +20718,7 @@
           <a:bodyPr wrap="square" rtlCol="0" anchor="ctr"/>
           <a:lstStyle/>
           <a:p>
-            <a:pPr algn="ctr" indent="0" marL="0">
+            <a:pPr marL="0" indent="0" algn="ctr">
               <a:buNone/>
             </a:pPr>
             <a:r>
@@ -19856,6 +20755,13 @@
           </a:solidFill>
           <a:ln/>
         </p:spPr>
+        <p:txBody>
+          <a:bodyPr/>
+          <a:lstStyle/>
+          <a:p>
+            <a:endParaRPr lang="fr-FR"/>
+          </a:p>
+        </p:txBody>
       </p:sp>
       <p:sp>
         <p:nvSpPr>
@@ -19878,7 +20784,7 @@
           <a:bodyPr wrap="square" rtlCol="0" anchor="ctr"/>
           <a:lstStyle/>
           <a:p>
-            <a:pPr algn="ctr" indent="0" marL="0">
+            <a:pPr marL="0" indent="0" algn="ctr">
               <a:buNone/>
             </a:pPr>
             <a:r>
@@ -19895,7 +20801,7 @@
             <a:endParaRPr lang="en-US" sz="1200" dirty="0"/>
           </a:p>
           <a:p>
-            <a:pPr algn="ctr" indent="0" marL="0">
+            <a:pPr marL="0" indent="0" algn="ctr">
               <a:buNone/>
             </a:pPr>
             <a:r>
@@ -19925,9 +20831,7 @@
             <a:ext cx="2743200" cy="2560320"/>
           </a:xfrm>
           <a:prstGeom prst="rect">
-            <a:avLst>
-              <a:gd name="adj" fmla="val 2857"/>
-            </a:avLst>
+            <a:avLst/>
           </a:prstGeom>
           <a:solidFill>
             <a:srgbClr val="1A2E1A"/>
@@ -19939,6 +20843,13 @@
             <a:prstDash val="solid"/>
           </a:ln>
         </p:spPr>
+        <p:txBody>
+          <a:bodyPr/>
+          <a:lstStyle/>
+          <a:p>
+            <a:endParaRPr lang="fr-FR"/>
+          </a:p>
+        </p:txBody>
       </p:sp>
       <p:sp>
         <p:nvSpPr>
@@ -19961,7 +20872,7 @@
           <a:bodyPr wrap="square" rtlCol="0" anchor="ctr"/>
           <a:lstStyle/>
           <a:p>
-            <a:pPr algn="r" indent="0" marL="0">
+            <a:pPr marL="0" indent="0" algn="r">
               <a:buNone/>
             </a:pPr>
             <a:r>
@@ -20000,7 +20911,7 @@
           <a:bodyPr wrap="square" rtlCol="0" anchor="ctr"/>
           <a:lstStyle/>
           <a:p>
-            <a:pPr algn="ctr" indent="0" marL="0">
+            <a:pPr marL="0" indent="0" algn="ctr">
               <a:buNone/>
             </a:pPr>
             <a:r>
@@ -20037,6 +20948,13 @@
           </a:solidFill>
           <a:ln/>
         </p:spPr>
+        <p:txBody>
+          <a:bodyPr/>
+          <a:lstStyle/>
+          <a:p>
+            <a:endParaRPr lang="fr-FR"/>
+          </a:p>
+        </p:txBody>
       </p:sp>
       <p:sp>
         <p:nvSpPr>
@@ -20059,7 +20977,7 @@
           <a:bodyPr wrap="square" rtlCol="0" anchor="ctr"/>
           <a:lstStyle/>
           <a:p>
-            <a:pPr algn="ctr" indent="0" marL="0">
+            <a:pPr marL="0" indent="0" algn="ctr">
               <a:buNone/>
             </a:pPr>
             <a:r>
@@ -20076,7 +20994,7 @@
             <a:endParaRPr lang="en-US" sz="1200" dirty="0"/>
           </a:p>
           <a:p>
-            <a:pPr algn="ctr" indent="0" marL="0">
+            <a:pPr marL="0" indent="0" algn="ctr">
               <a:buNone/>
             </a:pPr>
             <a:r>
@@ -20106,9 +21024,7 @@
             <a:ext cx="11704320" cy="822960"/>
           </a:xfrm>
           <a:prstGeom prst="rect">
-            <a:avLst>
-              <a:gd name="adj" fmla="val 8889"/>
-            </a:avLst>
+            <a:avLst/>
           </a:prstGeom>
           <a:solidFill>
             <a:srgbClr val="1A1A1A"/>
@@ -20120,6 +21036,13 @@
             <a:prstDash val="solid"/>
           </a:ln>
         </p:spPr>
+        <p:txBody>
+          <a:bodyPr/>
+          <a:lstStyle/>
+          <a:p>
+            <a:endParaRPr lang="fr-FR"/>
+          </a:p>
+        </p:txBody>
       </p:sp>
       <p:sp>
         <p:nvSpPr>
@@ -20142,7 +21065,7 @@
           <a:bodyPr wrap="square" rtlCol="0" anchor="ctr"/>
           <a:lstStyle/>
           <a:p>
-            <a:pPr indent="0" marL="0">
+            <a:pPr marL="0" indent="0">
               <a:buNone/>
             </a:pPr>
             <a:r>
@@ -20181,7 +21104,7 @@
           <a:bodyPr wrap="square" rtlCol="0" anchor="ctr"/>
           <a:lstStyle/>
           <a:p>
-            <a:pPr indent="0" marL="0">
+            <a:pPr marL="0" indent="0">
               <a:buNone/>
             </a:pPr>
             <a:r>
@@ -20215,6 +21138,7 @@
         <a:solidFill>
           <a:srgbClr val="1A0000"/>
         </a:solidFill>
+        <a:effectLst/>
       </p:bgPr>
     </p:bg>
     <p:spTree>
@@ -20250,6 +21174,13 @@
           </a:solidFill>
           <a:ln/>
         </p:spPr>
+        <p:txBody>
+          <a:bodyPr/>
+          <a:lstStyle/>
+          <a:p>
+            <a:endParaRPr lang="fr-FR"/>
+          </a:p>
+        </p:txBody>
       </p:sp>
       <p:sp>
         <p:nvSpPr>
@@ -20272,11 +21203,11 @@
           <a:bodyPr wrap="square" rtlCol="0" anchor="ctr"/>
           <a:lstStyle/>
           <a:p>
-            <a:pPr algn="ctr" indent="0" marL="0">
-              <a:buNone/>
-            </a:pPr>
-            <a:r>
-              <a:rPr lang="en-US" sz="1400" b="1" spc="600" kern="0" dirty="0">
+            <a:pPr marL="0" indent="0" algn="ctr">
+              <a:buNone/>
+            </a:pPr>
+            <a:r>
+              <a:rPr lang="en-US" sz="1400" b="1" kern="0" spc="600" dirty="0">
                 <a:solidFill>
                   <a:srgbClr val="E74C3C"/>
                 </a:solidFill>
@@ -20311,7 +21242,7 @@
           <a:bodyPr wrap="square" rtlCol="0" anchor="ctr"/>
           <a:lstStyle/>
           <a:p>
-            <a:pPr algn="ctr" indent="0" marL="0">
+            <a:pPr marL="0" indent="0" algn="ctr">
               <a:buNone/>
             </a:pPr>
             <a:r>
@@ -20350,7 +21281,7 @@
           <a:bodyPr wrap="square" rtlCol="0" anchor="ctr"/>
           <a:lstStyle/>
           <a:p>
-            <a:pPr algn="ctr" indent="0" marL="0">
+            <a:pPr marL="0" indent="0" algn="ctr">
               <a:buNone/>
             </a:pPr>
             <a:r>
@@ -20669,4 +21600,319 @@
     </a:ext>
   </a:extLst>
 </a:theme>
+</file>
+
+<file path=ppt/theme/theme2.xml><?xml version="1.0" encoding="utf-8"?>
+<a:theme xmlns:a="http://schemas.openxmlformats.org/drawingml/2006/main" name="Thème Office">
+  <a:themeElements>
+    <a:clrScheme name="Office">
+      <a:dk1>
+        <a:sysClr val="windowText" lastClr="000000"/>
+      </a:dk1>
+      <a:lt1>
+        <a:sysClr val="window" lastClr="FFFFFF"/>
+      </a:lt1>
+      <a:dk2>
+        <a:srgbClr val="0E2841"/>
+      </a:dk2>
+      <a:lt2>
+        <a:srgbClr val="E8E8E8"/>
+      </a:lt2>
+      <a:accent1>
+        <a:srgbClr val="156082"/>
+      </a:accent1>
+      <a:accent2>
+        <a:srgbClr val="E97132"/>
+      </a:accent2>
+      <a:accent3>
+        <a:srgbClr val="196B24"/>
+      </a:accent3>
+      <a:accent4>
+        <a:srgbClr val="0F9ED5"/>
+      </a:accent4>
+      <a:accent5>
+        <a:srgbClr val="A02B93"/>
+      </a:accent5>
+      <a:accent6>
+        <a:srgbClr val="4EA72E"/>
+      </a:accent6>
+      <a:hlink>
+        <a:srgbClr val="467886"/>
+      </a:hlink>
+      <a:folHlink>
+        <a:srgbClr val="96607D"/>
+      </a:folHlink>
+    </a:clrScheme>
+    <a:fontScheme name="Office">
+      <a:majorFont>
+        <a:latin typeface="Aptos Display" panose="02110004020202020204"/>
+        <a:ea typeface=""/>
+        <a:cs typeface=""/>
+        <a:font script="Jpan" typeface="游ゴシック Light"/>
+        <a:font script="Hang" typeface="맑은 고딕"/>
+        <a:font script="Hans" typeface="等线 Light"/>
+        <a:font script="Hant" typeface="新細明體"/>
+        <a:font script="Arab" typeface="Times New Roman"/>
+        <a:font script="Hebr" typeface="Times New Roman"/>
+        <a:font script="Thai" typeface="Angsana New"/>
+        <a:font script="Ethi" typeface="Nyala"/>
+        <a:font script="Beng" typeface="Vrinda"/>
+        <a:font script="Gujr" typeface="Shruti"/>
+        <a:font script="Khmr" typeface="MoolBoran"/>
+        <a:font script="Knda" typeface="Tunga"/>
+        <a:font script="Guru" typeface="Raavi"/>
+        <a:font script="Cans" typeface="Euphemia"/>
+        <a:font script="Cher" typeface="Plantagenet Cherokee"/>
+        <a:font script="Yiii" typeface="Microsoft Yi Baiti"/>
+        <a:font script="Tibt" typeface="Microsoft Himalaya"/>
+        <a:font script="Thaa" typeface="MV Boli"/>
+        <a:font script="Deva" typeface="Mangal"/>
+        <a:font script="Telu" typeface="Gautami"/>
+        <a:font script="Taml" typeface="Latha"/>
+        <a:font script="Syrc" typeface="Estrangelo Edessa"/>
+        <a:font script="Orya" typeface="Kalinga"/>
+        <a:font script="Mlym" typeface="Kartika"/>
+        <a:font script="Laoo" typeface="DokChampa"/>
+        <a:font script="Sinh" typeface="Iskoola Pota"/>
+        <a:font script="Mong" typeface="Mongolian Baiti"/>
+        <a:font script="Viet" typeface="Times New Roman"/>
+        <a:font script="Uigh" typeface="Microsoft Uighur"/>
+        <a:font script="Geor" typeface="Sylfaen"/>
+        <a:font script="Armn" typeface="Arial"/>
+        <a:font script="Bugi" typeface="Leelawadee UI"/>
+        <a:font script="Bopo" typeface="Microsoft JhengHei"/>
+        <a:font script="Java" typeface="Javanese Text"/>
+        <a:font script="Lisu" typeface="Segoe UI"/>
+        <a:font script="Mymr" typeface="Myanmar Text"/>
+        <a:font script="Nkoo" typeface="Ebrima"/>
+        <a:font script="Olck" typeface="Nirmala UI"/>
+        <a:font script="Osma" typeface="Ebrima"/>
+        <a:font script="Phag" typeface="Phagspa"/>
+        <a:font script="Syrn" typeface="Estrangelo Edessa"/>
+        <a:font script="Syrj" typeface="Estrangelo Edessa"/>
+        <a:font script="Syre" typeface="Estrangelo Edessa"/>
+        <a:font script="Sora" typeface="Nirmala UI"/>
+        <a:font script="Tale" typeface="Microsoft Tai Le"/>
+        <a:font script="Talu" typeface="Microsoft New Tai Lue"/>
+        <a:font script="Tfng" typeface="Ebrima"/>
+      </a:majorFont>
+      <a:minorFont>
+        <a:latin typeface="Aptos" panose="02110004020202020204"/>
+        <a:ea typeface=""/>
+        <a:cs typeface=""/>
+        <a:font script="Jpan" typeface="游ゴシック"/>
+        <a:font script="Hang" typeface="맑은 고딕"/>
+        <a:font script="Hans" typeface="等线"/>
+        <a:font script="Hant" typeface="新細明體"/>
+        <a:font script="Arab" typeface="Arial"/>
+        <a:font script="Hebr" typeface="Arial"/>
+        <a:font script="Thai" typeface="Cordia New"/>
+        <a:font script="Ethi" typeface="Nyala"/>
+        <a:font script="Beng" typeface="Vrinda"/>
+        <a:font script="Gujr" typeface="Shruti"/>
+        <a:font script="Khmr" typeface="DaunPenh"/>
+        <a:font script="Knda" typeface="Tunga"/>
+        <a:font script="Guru" typeface="Raavi"/>
+        <a:font script="Cans" typeface="Euphemia"/>
+        <a:font script="Cher" typeface="Plantagenet Cherokee"/>
+        <a:font script="Yiii" typeface="Microsoft Yi Baiti"/>
+        <a:font script="Tibt" typeface="Microsoft Himalaya"/>
+        <a:font script="Thaa" typeface="MV Boli"/>
+        <a:font script="Deva" typeface="Mangal"/>
+        <a:font script="Telu" typeface="Gautami"/>
+        <a:font script="Taml" typeface="Latha"/>
+        <a:font script="Syrc" typeface="Estrangelo Edessa"/>
+        <a:font script="Orya" typeface="Kalinga"/>
+        <a:font script="Mlym" typeface="Kartika"/>
+        <a:font script="Laoo" typeface="DokChampa"/>
+        <a:font script="Sinh" typeface="Iskoola Pota"/>
+        <a:font script="Mong" typeface="Mongolian Baiti"/>
+        <a:font script="Viet" typeface="Arial"/>
+        <a:font script="Uigh" typeface="Microsoft Uighur"/>
+        <a:font script="Geor" typeface="Sylfaen"/>
+        <a:font script="Armn" typeface="Arial"/>
+        <a:font script="Bugi" typeface="Leelawadee UI"/>
+        <a:font script="Bopo" typeface="Microsoft JhengHei"/>
+        <a:font script="Java" typeface="Javanese Text"/>
+        <a:font script="Lisu" typeface="Segoe UI"/>
+        <a:font script="Mymr" typeface="Myanmar Text"/>
+        <a:font script="Nkoo" typeface="Ebrima"/>
+        <a:font script="Olck" typeface="Nirmala UI"/>
+        <a:font script="Osma" typeface="Ebrima"/>
+        <a:font script="Phag" typeface="Phagspa"/>
+        <a:font script="Syrn" typeface="Estrangelo Edessa"/>
+        <a:font script="Syrj" typeface="Estrangelo Edessa"/>
+        <a:font script="Syre" typeface="Estrangelo Edessa"/>
+        <a:font script="Sora" typeface="Nirmala UI"/>
+        <a:font script="Tale" typeface="Microsoft Tai Le"/>
+        <a:font script="Talu" typeface="Microsoft New Tai Lue"/>
+        <a:font script="Tfng" typeface="Ebrima"/>
+      </a:minorFont>
+    </a:fontScheme>
+    <a:fmtScheme name="Office">
+      <a:fillStyleLst>
+        <a:solidFill>
+          <a:schemeClr val="phClr"/>
+        </a:solidFill>
+        <a:gradFill rotWithShape="1">
+          <a:gsLst>
+            <a:gs pos="0">
+              <a:schemeClr val="phClr">
+                <a:lumMod val="110000"/>
+                <a:satMod val="105000"/>
+                <a:tint val="67000"/>
+              </a:schemeClr>
+            </a:gs>
+            <a:gs pos="50000">
+              <a:schemeClr val="phClr">
+                <a:lumMod val="105000"/>
+                <a:satMod val="103000"/>
+                <a:tint val="73000"/>
+              </a:schemeClr>
+            </a:gs>
+            <a:gs pos="100000">
+              <a:schemeClr val="phClr">
+                <a:lumMod val="105000"/>
+                <a:satMod val="109000"/>
+                <a:tint val="81000"/>
+              </a:schemeClr>
+            </a:gs>
+          </a:gsLst>
+          <a:lin ang="5400000" scaled="0"/>
+        </a:gradFill>
+        <a:gradFill rotWithShape="1">
+          <a:gsLst>
+            <a:gs pos="0">
+              <a:schemeClr val="phClr">
+                <a:satMod val="103000"/>
+                <a:lumMod val="102000"/>
+                <a:tint val="94000"/>
+              </a:schemeClr>
+            </a:gs>
+            <a:gs pos="50000">
+              <a:schemeClr val="phClr">
+                <a:satMod val="110000"/>
+                <a:lumMod val="100000"/>
+                <a:shade val="100000"/>
+              </a:schemeClr>
+            </a:gs>
+            <a:gs pos="100000">
+              <a:schemeClr val="phClr">
+                <a:lumMod val="99000"/>
+                <a:satMod val="120000"/>
+                <a:shade val="78000"/>
+              </a:schemeClr>
+            </a:gs>
+          </a:gsLst>
+          <a:lin ang="5400000" scaled="0"/>
+        </a:gradFill>
+      </a:fillStyleLst>
+      <a:lnStyleLst>
+        <a:ln w="12700" cap="flat" cmpd="sng" algn="ctr">
+          <a:solidFill>
+            <a:schemeClr val="phClr"/>
+          </a:solidFill>
+          <a:prstDash val="solid"/>
+          <a:miter lim="800000"/>
+        </a:ln>
+        <a:ln w="19050" cap="flat" cmpd="sng" algn="ctr">
+          <a:solidFill>
+            <a:schemeClr val="phClr"/>
+          </a:solidFill>
+          <a:prstDash val="solid"/>
+          <a:miter lim="800000"/>
+        </a:ln>
+        <a:ln w="25400" cap="flat" cmpd="sng" algn="ctr">
+          <a:solidFill>
+            <a:schemeClr val="phClr"/>
+          </a:solidFill>
+          <a:prstDash val="solid"/>
+          <a:miter lim="800000"/>
+        </a:ln>
+      </a:lnStyleLst>
+      <a:effectStyleLst>
+        <a:effectStyle>
+          <a:effectLst/>
+        </a:effectStyle>
+        <a:effectStyle>
+          <a:effectLst/>
+        </a:effectStyle>
+        <a:effectStyle>
+          <a:effectLst>
+            <a:outerShdw blurRad="57150" dist="19050" dir="5400000" algn="ctr" rotWithShape="0">
+              <a:srgbClr val="000000">
+                <a:alpha val="63000"/>
+              </a:srgbClr>
+            </a:outerShdw>
+          </a:effectLst>
+        </a:effectStyle>
+      </a:effectStyleLst>
+      <a:bgFillStyleLst>
+        <a:solidFill>
+          <a:schemeClr val="phClr"/>
+        </a:solidFill>
+        <a:solidFill>
+          <a:schemeClr val="phClr">
+            <a:tint val="95000"/>
+            <a:satMod val="170000"/>
+          </a:schemeClr>
+        </a:solidFill>
+        <a:gradFill rotWithShape="1">
+          <a:gsLst>
+            <a:gs pos="0">
+              <a:schemeClr val="phClr">
+                <a:tint val="93000"/>
+                <a:satMod val="150000"/>
+                <a:shade val="98000"/>
+                <a:lumMod val="102000"/>
+              </a:schemeClr>
+            </a:gs>
+            <a:gs pos="50000">
+              <a:schemeClr val="phClr">
+                <a:tint val="98000"/>
+                <a:satMod val="130000"/>
+                <a:shade val="90000"/>
+                <a:lumMod val="103000"/>
+              </a:schemeClr>
+            </a:gs>
+            <a:gs pos="100000">
+              <a:schemeClr val="phClr">
+                <a:shade val="63000"/>
+                <a:satMod val="120000"/>
+              </a:schemeClr>
+            </a:gs>
+          </a:gsLst>
+          <a:lin ang="5400000" scaled="0"/>
+        </a:gradFill>
+      </a:bgFillStyleLst>
+    </a:fmtScheme>
+  </a:themeElements>
+  <a:objectDefaults>
+    <a:lnDef>
+      <a:spPr/>
+      <a:bodyPr/>
+      <a:lstStyle/>
+      <a:style>
+        <a:lnRef idx="2">
+          <a:schemeClr val="accent1"/>
+        </a:lnRef>
+        <a:fillRef idx="0">
+          <a:schemeClr val="accent1"/>
+        </a:fillRef>
+        <a:effectRef idx="1">
+          <a:schemeClr val="accent1"/>
+        </a:effectRef>
+        <a:fontRef idx="minor">
+          <a:schemeClr val="tx1"/>
+        </a:fontRef>
+      </a:style>
+    </a:lnDef>
+  </a:objectDefaults>
+  <a:extraClrSchemeLst/>
+  <a:extLst>
+    <a:ext uri="{05A4C25C-085E-4340-85A3-A5531E510DB2}">
+      <thm15:themeFamily xmlns:thm15="http://schemas.microsoft.com/office/thememl/2012/main" name="Office Theme" id="{2E142A2C-CD16-42D6-873A-C26D2A0506FA}" vid="{1BDDFF52-6CD6-40A5-AB3C-68EB2F1E4D0A}"/>
+    </a:ext>
+  </a:extLst>
+</a:theme>
 </file>
--- a/presentation-LPMDE.pptx
+++ b/presentation-LPMDE.pptx
@@ -2703,6 +2703,53 @@
           </a:p>
         </p:txBody>
       </p:sp>
+      <p:pic>
+        <p:nvPicPr>
+          <p:cNvPr id="1026" name="Picture 2" descr="École d'ingénieurs, bachelor et Mastère Spécialisé® - CESI">
+            <a:extLst>
+              <a:ext uri="{FF2B5EF4-FFF2-40B4-BE49-F238E27FC236}">
+                <a16:creationId xmlns:a16="http://schemas.microsoft.com/office/drawing/2014/main" id="{1406EA59-F64E-B226-0856-075F6440A4AD}"/>
+              </a:ext>
+            </a:extLst>
+          </p:cNvPr>
+          <p:cNvPicPr>
+            <a:picLocks noChangeAspect="1" noChangeArrowheads="1"/>
+          </p:cNvPicPr>
+          <p:nvPr/>
+        </p:nvPicPr>
+        <p:blipFill>
+          <a:blip r:embed="rId3">
+            <a:extLst>
+              <a:ext uri="{28A0092B-C50C-407E-A947-70E740481C1C}">
+                <a14:useLocalDpi xmlns:a14="http://schemas.microsoft.com/office/drawing/2010/main" val="0"/>
+              </a:ext>
+            </a:extLst>
+          </a:blip>
+          <a:srcRect/>
+          <a:stretch>
+            <a:fillRect/>
+          </a:stretch>
+        </p:blipFill>
+        <p:spPr bwMode="auto">
+          <a:xfrm>
+            <a:off x="10789920" y="199292"/>
+            <a:ext cx="1160585" cy="1160585"/>
+          </a:xfrm>
+          <a:prstGeom prst="rect">
+            <a:avLst/>
+          </a:prstGeom>
+          <a:noFill/>
+          <a:extLst>
+            <a:ext uri="{909E8E84-426E-40DD-AFC4-6F175D3DCCD1}">
+              <a14:hiddenFill xmlns:a14="http://schemas.microsoft.com/office/drawing/2010/main">
+                <a:solidFill>
+                  <a:srgbClr val="FFFFFF"/>
+                </a:solidFill>
+              </a14:hiddenFill>
+            </a:ext>
+          </a:extLst>
+        </p:spPr>
+      </p:pic>
     </p:spTree>
   </p:cSld>
   <p:clrMapOvr>
